--- a/week-04/Pham_liquor_sales_presentation.pptx
+++ b/week-04/Pham_liquor_sales_presentation.pptx
@@ -2,10 +2,21 @@
 <file path=ppt/presentation.xml><?xml version="1.0" encoding="utf-8"?>
 <p:presentation xmlns:a="http://schemas.openxmlformats.org/drawingml/2006/main" xmlns:r="http://schemas.openxmlformats.org/officeDocument/2006/relationships" xmlns:p="http://schemas.openxmlformats.org/presentationml/2006/main" saveSubsetFonts="1">
   <p:sldMasterIdLst>
-    <p:sldMasterId id="2147483648" r:id="rId1"/>
+    <p:sldMasterId id="2147483672" r:id="rId1"/>
   </p:sldMasterIdLst>
   <p:sldIdLst>
     <p:sldId id="256" r:id="rId2"/>
+    <p:sldId id="257" r:id="rId3"/>
+    <p:sldId id="258" r:id="rId4"/>
+    <p:sldId id="259" r:id="rId5"/>
+    <p:sldId id="260" r:id="rId6"/>
+    <p:sldId id="261" r:id="rId7"/>
+    <p:sldId id="262" r:id="rId8"/>
+    <p:sldId id="263" r:id="rId9"/>
+    <p:sldId id="264" r:id="rId10"/>
+    <p:sldId id="265" r:id="rId11"/>
+    <p:sldId id="266" r:id="rId12"/>
+    <p:sldId id="267" r:id="rId13"/>
   </p:sldIdLst>
   <p:sldSz cx="12192000" cy="6858000"/>
   <p:notesSz cx="6858000" cy="9144000"/>
@@ -129,7 +140,7 @@
           <p:cNvPr id="2" name="Title 1">
             <a:extLst>
               <a:ext uri="{FF2B5EF4-FFF2-40B4-BE49-F238E27FC236}">
-                <a16:creationId xmlns:a16="http://schemas.microsoft.com/office/drawing/2014/main" id="{D5857383-524B-EFBF-26DB-3541FD105E24}"/>
+                <a16:creationId xmlns:a16="http://schemas.microsoft.com/office/drawing/2014/main" id="{E120C216-ABBE-8D37-C37F-25FA8887FFC6}"/>
               </a:ext>
             </a:extLst>
           </p:cNvPr>
@@ -166,7 +177,7 @@
           <p:cNvPr id="3" name="Subtitle 2">
             <a:extLst>
               <a:ext uri="{FF2B5EF4-FFF2-40B4-BE49-F238E27FC236}">
-                <a16:creationId xmlns:a16="http://schemas.microsoft.com/office/drawing/2014/main" id="{0654402B-28A4-85CA-7998-B54165D5A8C1}"/>
+                <a16:creationId xmlns:a16="http://schemas.microsoft.com/office/drawing/2014/main" id="{B852CE6F-A9AB-95E3-80B4-8B39C823C1D3}"/>
               </a:ext>
             </a:extLst>
           </p:cNvPr>
@@ -236,7 +247,7 @@
           <p:cNvPr id="4" name="Date Placeholder 3">
             <a:extLst>
               <a:ext uri="{FF2B5EF4-FFF2-40B4-BE49-F238E27FC236}">
-                <a16:creationId xmlns:a16="http://schemas.microsoft.com/office/drawing/2014/main" id="{630C35C9-E709-E3DF-5237-B6A4F1D9DC18}"/>
+                <a16:creationId xmlns:a16="http://schemas.microsoft.com/office/drawing/2014/main" id="{564872CC-F1D2-7C0B-7A91-5A7EA4E72DBD}"/>
               </a:ext>
             </a:extLst>
           </p:cNvPr>
@@ -252,7 +263,7 @@
           <a:bodyPr/>
           <a:lstStyle/>
           <a:p>
-            <a:fld id="{DD155DE5-1128-4433-BB8B-FE488082D154}" type="datetimeFigureOut">
+            <a:fld id="{1C7CE9BF-C1FF-4E9B-97E6-64DC9D713536}" type="datetimeFigureOut">
               <a:rPr lang="en-US" smtClean="0"/>
               <a:t>4/29/2026</a:t>
             </a:fld>
@@ -265,7 +276,7 @@
           <p:cNvPr id="5" name="Footer Placeholder 4">
             <a:extLst>
               <a:ext uri="{FF2B5EF4-FFF2-40B4-BE49-F238E27FC236}">
-                <a16:creationId xmlns:a16="http://schemas.microsoft.com/office/drawing/2014/main" id="{61BA6AC1-228D-D839-E851-5F8A9DFC3629}"/>
+                <a16:creationId xmlns:a16="http://schemas.microsoft.com/office/drawing/2014/main" id="{925D5788-5883-2A0C-8360-5479C99E0F6A}"/>
               </a:ext>
             </a:extLst>
           </p:cNvPr>
@@ -290,7 +301,7 @@
           <p:cNvPr id="6" name="Slide Number Placeholder 5">
             <a:extLst>
               <a:ext uri="{FF2B5EF4-FFF2-40B4-BE49-F238E27FC236}">
-                <a16:creationId xmlns:a16="http://schemas.microsoft.com/office/drawing/2014/main" id="{E7D088D3-F8F5-61B5-47FF-00F985BA0B23}"/>
+                <a16:creationId xmlns:a16="http://schemas.microsoft.com/office/drawing/2014/main" id="{3D691AB2-C3DE-1CF3-CB19-650B7D48BDF2}"/>
               </a:ext>
             </a:extLst>
           </p:cNvPr>
@@ -306,7 +317,7 @@
           <a:bodyPr/>
           <a:lstStyle/>
           <a:p>
-            <a:fld id="{62D248AD-C906-495E-A757-04A014DE76C3}" type="slidenum">
+            <a:fld id="{2FD438EA-64AA-4ADE-A3AB-D3AB0A7C0E5A}" type="slidenum">
               <a:rPr lang="en-US" smtClean="0"/>
               <a:t>‹#›</a:t>
             </a:fld>
@@ -317,7 +328,7 @@
     </p:spTree>
     <p:extLst>
       <p:ext uri="{BB962C8B-B14F-4D97-AF65-F5344CB8AC3E}">
-        <p14:creationId xmlns:p14="http://schemas.microsoft.com/office/powerpoint/2010/main" val="1796050851"/>
+        <p14:creationId xmlns:p14="http://schemas.microsoft.com/office/powerpoint/2010/main" val="4268001274"/>
       </p:ext>
     </p:extLst>
   </p:cSld>
@@ -349,7 +360,7 @@
           <p:cNvPr id="2" name="Title 1">
             <a:extLst>
               <a:ext uri="{FF2B5EF4-FFF2-40B4-BE49-F238E27FC236}">
-                <a16:creationId xmlns:a16="http://schemas.microsoft.com/office/drawing/2014/main" id="{67D9F395-1ADE-FBE5-F7EE-4C1DA1EDADEA}"/>
+                <a16:creationId xmlns:a16="http://schemas.microsoft.com/office/drawing/2014/main" id="{08834D41-2500-2E5C-2288-6BE886B288E2}"/>
               </a:ext>
             </a:extLst>
           </p:cNvPr>
@@ -377,7 +388,7 @@
           <p:cNvPr id="3" name="Vertical Text Placeholder 2">
             <a:extLst>
               <a:ext uri="{FF2B5EF4-FFF2-40B4-BE49-F238E27FC236}">
-                <a16:creationId xmlns:a16="http://schemas.microsoft.com/office/drawing/2014/main" id="{94FED804-1C4E-EEFE-E038-857C19C239C7}"/>
+                <a16:creationId xmlns:a16="http://schemas.microsoft.com/office/drawing/2014/main" id="{1EA5B3BC-1C37-C67D-C808-67CE5C7B8AE6}"/>
               </a:ext>
             </a:extLst>
           </p:cNvPr>
@@ -434,7 +445,7 @@
           <p:cNvPr id="4" name="Date Placeholder 3">
             <a:extLst>
               <a:ext uri="{FF2B5EF4-FFF2-40B4-BE49-F238E27FC236}">
-                <a16:creationId xmlns:a16="http://schemas.microsoft.com/office/drawing/2014/main" id="{F34837BB-8A0B-A0E2-4668-A134B9E2EFB8}"/>
+                <a16:creationId xmlns:a16="http://schemas.microsoft.com/office/drawing/2014/main" id="{B17D8EA1-8566-FB00-47E1-FC311D938F2F}"/>
               </a:ext>
             </a:extLst>
           </p:cNvPr>
@@ -450,7 +461,7 @@
           <a:bodyPr/>
           <a:lstStyle/>
           <a:p>
-            <a:fld id="{DD155DE5-1128-4433-BB8B-FE488082D154}" type="datetimeFigureOut">
+            <a:fld id="{1C7CE9BF-C1FF-4E9B-97E6-64DC9D713536}" type="datetimeFigureOut">
               <a:rPr lang="en-US" smtClean="0"/>
               <a:t>4/29/2026</a:t>
             </a:fld>
@@ -463,7 +474,7 @@
           <p:cNvPr id="5" name="Footer Placeholder 4">
             <a:extLst>
               <a:ext uri="{FF2B5EF4-FFF2-40B4-BE49-F238E27FC236}">
-                <a16:creationId xmlns:a16="http://schemas.microsoft.com/office/drawing/2014/main" id="{E84ED1A6-CE65-A0F3-1DB2-957F83B3C2EF}"/>
+                <a16:creationId xmlns:a16="http://schemas.microsoft.com/office/drawing/2014/main" id="{33EAE053-908E-06A1-A181-6EA9BA9968A8}"/>
               </a:ext>
             </a:extLst>
           </p:cNvPr>
@@ -488,7 +499,7 @@
           <p:cNvPr id="6" name="Slide Number Placeholder 5">
             <a:extLst>
               <a:ext uri="{FF2B5EF4-FFF2-40B4-BE49-F238E27FC236}">
-                <a16:creationId xmlns:a16="http://schemas.microsoft.com/office/drawing/2014/main" id="{A31F44D0-BD03-8733-69B0-147B6A025082}"/>
+                <a16:creationId xmlns:a16="http://schemas.microsoft.com/office/drawing/2014/main" id="{683F75B1-6C5A-3B29-B885-72B055FABE37}"/>
               </a:ext>
             </a:extLst>
           </p:cNvPr>
@@ -504,7 +515,7 @@
           <a:bodyPr/>
           <a:lstStyle/>
           <a:p>
-            <a:fld id="{62D248AD-C906-495E-A757-04A014DE76C3}" type="slidenum">
+            <a:fld id="{2FD438EA-64AA-4ADE-A3AB-D3AB0A7C0E5A}" type="slidenum">
               <a:rPr lang="en-US" smtClean="0"/>
               <a:t>‹#›</a:t>
             </a:fld>
@@ -515,7 +526,7 @@
     </p:spTree>
     <p:extLst>
       <p:ext uri="{BB962C8B-B14F-4D97-AF65-F5344CB8AC3E}">
-        <p14:creationId xmlns:p14="http://schemas.microsoft.com/office/powerpoint/2010/main" val="2939782435"/>
+        <p14:creationId xmlns:p14="http://schemas.microsoft.com/office/powerpoint/2010/main" val="2642478516"/>
       </p:ext>
     </p:extLst>
   </p:cSld>
@@ -547,7 +558,7 @@
           <p:cNvPr id="2" name="Vertical Title 1">
             <a:extLst>
               <a:ext uri="{FF2B5EF4-FFF2-40B4-BE49-F238E27FC236}">
-                <a16:creationId xmlns:a16="http://schemas.microsoft.com/office/drawing/2014/main" id="{FE6562C7-C18B-54B3-AE7F-940E5C1F65F8}"/>
+                <a16:creationId xmlns:a16="http://schemas.microsoft.com/office/drawing/2014/main" id="{63C91304-5035-8EA7-2E90-EC77AC38EBDE}"/>
               </a:ext>
             </a:extLst>
           </p:cNvPr>
@@ -580,7 +591,7 @@
           <p:cNvPr id="3" name="Vertical Text Placeholder 2">
             <a:extLst>
               <a:ext uri="{FF2B5EF4-FFF2-40B4-BE49-F238E27FC236}">
-                <a16:creationId xmlns:a16="http://schemas.microsoft.com/office/drawing/2014/main" id="{D8F3A2FD-12FA-CCE0-4802-229472ADF821}"/>
+                <a16:creationId xmlns:a16="http://schemas.microsoft.com/office/drawing/2014/main" id="{DB66595E-7A79-B24B-65DC-8B95D1A8DC00}"/>
               </a:ext>
             </a:extLst>
           </p:cNvPr>
@@ -642,7 +653,7 @@
           <p:cNvPr id="4" name="Date Placeholder 3">
             <a:extLst>
               <a:ext uri="{FF2B5EF4-FFF2-40B4-BE49-F238E27FC236}">
-                <a16:creationId xmlns:a16="http://schemas.microsoft.com/office/drawing/2014/main" id="{E7EC7BA9-D05C-E6E1-B285-99F05B6FDACD}"/>
+                <a16:creationId xmlns:a16="http://schemas.microsoft.com/office/drawing/2014/main" id="{5C358C42-47AC-6903-F607-2C03B414540C}"/>
               </a:ext>
             </a:extLst>
           </p:cNvPr>
@@ -658,7 +669,7 @@
           <a:bodyPr/>
           <a:lstStyle/>
           <a:p>
-            <a:fld id="{DD155DE5-1128-4433-BB8B-FE488082D154}" type="datetimeFigureOut">
+            <a:fld id="{1C7CE9BF-C1FF-4E9B-97E6-64DC9D713536}" type="datetimeFigureOut">
               <a:rPr lang="en-US" smtClean="0"/>
               <a:t>4/29/2026</a:t>
             </a:fld>
@@ -671,7 +682,7 @@
           <p:cNvPr id="5" name="Footer Placeholder 4">
             <a:extLst>
               <a:ext uri="{FF2B5EF4-FFF2-40B4-BE49-F238E27FC236}">
-                <a16:creationId xmlns:a16="http://schemas.microsoft.com/office/drawing/2014/main" id="{E530E871-6527-96FB-F308-90A4FF76CC7A}"/>
+                <a16:creationId xmlns:a16="http://schemas.microsoft.com/office/drawing/2014/main" id="{B0EB6995-43EC-238A-BBEB-C6B07C43C528}"/>
               </a:ext>
             </a:extLst>
           </p:cNvPr>
@@ -696,7 +707,7 @@
           <p:cNvPr id="6" name="Slide Number Placeholder 5">
             <a:extLst>
               <a:ext uri="{FF2B5EF4-FFF2-40B4-BE49-F238E27FC236}">
-                <a16:creationId xmlns:a16="http://schemas.microsoft.com/office/drawing/2014/main" id="{DCABE3DE-D9AF-68D8-152D-88D8F6BDCDCF}"/>
+                <a16:creationId xmlns:a16="http://schemas.microsoft.com/office/drawing/2014/main" id="{85DEB165-A31A-DD4B-D40C-606AECCFC34E}"/>
               </a:ext>
             </a:extLst>
           </p:cNvPr>
@@ -712,7 +723,7 @@
           <a:bodyPr/>
           <a:lstStyle/>
           <a:p>
-            <a:fld id="{62D248AD-C906-495E-A757-04A014DE76C3}" type="slidenum">
+            <a:fld id="{2FD438EA-64AA-4ADE-A3AB-D3AB0A7C0E5A}" type="slidenum">
               <a:rPr lang="en-US" smtClean="0"/>
               <a:t>‹#›</a:t>
             </a:fld>
@@ -723,7 +734,7 @@
     </p:spTree>
     <p:extLst>
       <p:ext uri="{BB962C8B-B14F-4D97-AF65-F5344CB8AC3E}">
-        <p14:creationId xmlns:p14="http://schemas.microsoft.com/office/powerpoint/2010/main" val="746021646"/>
+        <p14:creationId xmlns:p14="http://schemas.microsoft.com/office/powerpoint/2010/main" val="169321910"/>
       </p:ext>
     </p:extLst>
   </p:cSld>
@@ -755,7 +766,7 @@
           <p:cNvPr id="2" name="Title 1">
             <a:extLst>
               <a:ext uri="{FF2B5EF4-FFF2-40B4-BE49-F238E27FC236}">
-                <a16:creationId xmlns:a16="http://schemas.microsoft.com/office/drawing/2014/main" id="{ED299EA0-5DCB-1823-0403-F22BE5456664}"/>
+                <a16:creationId xmlns:a16="http://schemas.microsoft.com/office/drawing/2014/main" id="{7E44E2C8-0B2E-AE1A-1B12-F1A032C6ACD0}"/>
               </a:ext>
             </a:extLst>
           </p:cNvPr>
@@ -783,7 +794,7 @@
           <p:cNvPr id="3" name="Content Placeholder 2">
             <a:extLst>
               <a:ext uri="{FF2B5EF4-FFF2-40B4-BE49-F238E27FC236}">
-                <a16:creationId xmlns:a16="http://schemas.microsoft.com/office/drawing/2014/main" id="{C69554CC-732B-6437-0F38-563113D53CED}"/>
+                <a16:creationId xmlns:a16="http://schemas.microsoft.com/office/drawing/2014/main" id="{07ACFF8B-A2F6-B385-2F04-9B0B9B95D4BD}"/>
               </a:ext>
             </a:extLst>
           </p:cNvPr>
@@ -840,7 +851,7 @@
           <p:cNvPr id="4" name="Date Placeholder 3">
             <a:extLst>
               <a:ext uri="{FF2B5EF4-FFF2-40B4-BE49-F238E27FC236}">
-                <a16:creationId xmlns:a16="http://schemas.microsoft.com/office/drawing/2014/main" id="{024AC90E-B864-9439-326E-5DB71EB73BB9}"/>
+                <a16:creationId xmlns:a16="http://schemas.microsoft.com/office/drawing/2014/main" id="{1854AA8E-0B26-049B-58E0-F05C6AE4EF20}"/>
               </a:ext>
             </a:extLst>
           </p:cNvPr>
@@ -856,7 +867,7 @@
           <a:bodyPr/>
           <a:lstStyle/>
           <a:p>
-            <a:fld id="{DD155DE5-1128-4433-BB8B-FE488082D154}" type="datetimeFigureOut">
+            <a:fld id="{1C7CE9BF-C1FF-4E9B-97E6-64DC9D713536}" type="datetimeFigureOut">
               <a:rPr lang="en-US" smtClean="0"/>
               <a:t>4/29/2026</a:t>
             </a:fld>
@@ -869,7 +880,7 @@
           <p:cNvPr id="5" name="Footer Placeholder 4">
             <a:extLst>
               <a:ext uri="{FF2B5EF4-FFF2-40B4-BE49-F238E27FC236}">
-                <a16:creationId xmlns:a16="http://schemas.microsoft.com/office/drawing/2014/main" id="{A5D8868B-31A1-B839-9457-867B08A2C8F6}"/>
+                <a16:creationId xmlns:a16="http://schemas.microsoft.com/office/drawing/2014/main" id="{41360ED6-4D01-07D7-D5CA-A9E77491AD1A}"/>
               </a:ext>
             </a:extLst>
           </p:cNvPr>
@@ -894,7 +905,7 @@
           <p:cNvPr id="6" name="Slide Number Placeholder 5">
             <a:extLst>
               <a:ext uri="{FF2B5EF4-FFF2-40B4-BE49-F238E27FC236}">
-                <a16:creationId xmlns:a16="http://schemas.microsoft.com/office/drawing/2014/main" id="{C31C5429-F651-5957-0836-74CC7A26BBC6}"/>
+                <a16:creationId xmlns:a16="http://schemas.microsoft.com/office/drawing/2014/main" id="{B4D3BF3C-1B50-9F23-AA1F-FEFB196AB263}"/>
               </a:ext>
             </a:extLst>
           </p:cNvPr>
@@ -910,7 +921,7 @@
           <a:bodyPr/>
           <a:lstStyle/>
           <a:p>
-            <a:fld id="{62D248AD-C906-495E-A757-04A014DE76C3}" type="slidenum">
+            <a:fld id="{2FD438EA-64AA-4ADE-A3AB-D3AB0A7C0E5A}" type="slidenum">
               <a:rPr lang="en-US" smtClean="0"/>
               <a:t>‹#›</a:t>
             </a:fld>
@@ -921,7 +932,7 @@
     </p:spTree>
     <p:extLst>
       <p:ext uri="{BB962C8B-B14F-4D97-AF65-F5344CB8AC3E}">
-        <p14:creationId xmlns:p14="http://schemas.microsoft.com/office/powerpoint/2010/main" val="1460569819"/>
+        <p14:creationId xmlns:p14="http://schemas.microsoft.com/office/powerpoint/2010/main" val="2645571136"/>
       </p:ext>
     </p:extLst>
   </p:cSld>
@@ -953,7 +964,7 @@
           <p:cNvPr id="2" name="Title 1">
             <a:extLst>
               <a:ext uri="{FF2B5EF4-FFF2-40B4-BE49-F238E27FC236}">
-                <a16:creationId xmlns:a16="http://schemas.microsoft.com/office/drawing/2014/main" id="{19E673E2-E25A-3EB1-FB26-5FCB05F964CB}"/>
+                <a16:creationId xmlns:a16="http://schemas.microsoft.com/office/drawing/2014/main" id="{CD0299B5-76AD-49B9-D94A-D4D854A225DA}"/>
               </a:ext>
             </a:extLst>
           </p:cNvPr>
@@ -990,7 +1001,7 @@
           <p:cNvPr id="3" name="Text Placeholder 2">
             <a:extLst>
               <a:ext uri="{FF2B5EF4-FFF2-40B4-BE49-F238E27FC236}">
-                <a16:creationId xmlns:a16="http://schemas.microsoft.com/office/drawing/2014/main" id="{6FD53377-FFDD-08A9-815A-5016BE3311D2}"/>
+                <a16:creationId xmlns:a16="http://schemas.microsoft.com/office/drawing/2014/main" id="{08A59465-592E-3469-09C7-83341AD711B4}"/>
               </a:ext>
             </a:extLst>
           </p:cNvPr>
@@ -1115,7 +1126,7 @@
           <p:cNvPr id="4" name="Date Placeholder 3">
             <a:extLst>
               <a:ext uri="{FF2B5EF4-FFF2-40B4-BE49-F238E27FC236}">
-                <a16:creationId xmlns:a16="http://schemas.microsoft.com/office/drawing/2014/main" id="{DC3EA81D-BAB6-D5C1-E788-765F00E1D232}"/>
+                <a16:creationId xmlns:a16="http://schemas.microsoft.com/office/drawing/2014/main" id="{617F5368-ED94-0E04-D4CB-59AC54E871D5}"/>
               </a:ext>
             </a:extLst>
           </p:cNvPr>
@@ -1131,7 +1142,7 @@
           <a:bodyPr/>
           <a:lstStyle/>
           <a:p>
-            <a:fld id="{DD155DE5-1128-4433-BB8B-FE488082D154}" type="datetimeFigureOut">
+            <a:fld id="{1C7CE9BF-C1FF-4E9B-97E6-64DC9D713536}" type="datetimeFigureOut">
               <a:rPr lang="en-US" smtClean="0"/>
               <a:t>4/29/2026</a:t>
             </a:fld>
@@ -1144,7 +1155,7 @@
           <p:cNvPr id="5" name="Footer Placeholder 4">
             <a:extLst>
               <a:ext uri="{FF2B5EF4-FFF2-40B4-BE49-F238E27FC236}">
-                <a16:creationId xmlns:a16="http://schemas.microsoft.com/office/drawing/2014/main" id="{B120C6FB-F9E6-27A9-7391-5643F16A6361}"/>
+                <a16:creationId xmlns:a16="http://schemas.microsoft.com/office/drawing/2014/main" id="{2CC9EBC7-813C-56AB-1B4F-D101685B575F}"/>
               </a:ext>
             </a:extLst>
           </p:cNvPr>
@@ -1169,7 +1180,7 @@
           <p:cNvPr id="6" name="Slide Number Placeholder 5">
             <a:extLst>
               <a:ext uri="{FF2B5EF4-FFF2-40B4-BE49-F238E27FC236}">
-                <a16:creationId xmlns:a16="http://schemas.microsoft.com/office/drawing/2014/main" id="{61B0A46B-DEFC-90E3-3A51-CCCBCD48A3C5}"/>
+                <a16:creationId xmlns:a16="http://schemas.microsoft.com/office/drawing/2014/main" id="{9C629E65-F8A8-465B-2C96-C88FF5CF4F88}"/>
               </a:ext>
             </a:extLst>
           </p:cNvPr>
@@ -1185,7 +1196,7 @@
           <a:bodyPr/>
           <a:lstStyle/>
           <a:p>
-            <a:fld id="{62D248AD-C906-495E-A757-04A014DE76C3}" type="slidenum">
+            <a:fld id="{2FD438EA-64AA-4ADE-A3AB-D3AB0A7C0E5A}" type="slidenum">
               <a:rPr lang="en-US" smtClean="0"/>
               <a:t>‹#›</a:t>
             </a:fld>
@@ -1196,7 +1207,7 @@
     </p:spTree>
     <p:extLst>
       <p:ext uri="{BB962C8B-B14F-4D97-AF65-F5344CB8AC3E}">
-        <p14:creationId xmlns:p14="http://schemas.microsoft.com/office/powerpoint/2010/main" val="2334899406"/>
+        <p14:creationId xmlns:p14="http://schemas.microsoft.com/office/powerpoint/2010/main" val="1926873284"/>
       </p:ext>
     </p:extLst>
   </p:cSld>
@@ -1228,7 +1239,7 @@
           <p:cNvPr id="2" name="Title 1">
             <a:extLst>
               <a:ext uri="{FF2B5EF4-FFF2-40B4-BE49-F238E27FC236}">
-                <a16:creationId xmlns:a16="http://schemas.microsoft.com/office/drawing/2014/main" id="{702748A1-B66F-CF11-68A9-55B37DB48C99}"/>
+                <a16:creationId xmlns:a16="http://schemas.microsoft.com/office/drawing/2014/main" id="{A1698CB1-620A-7F66-25FF-6BA9B119141D}"/>
               </a:ext>
             </a:extLst>
           </p:cNvPr>
@@ -1256,7 +1267,7 @@
           <p:cNvPr id="3" name="Content Placeholder 2">
             <a:extLst>
               <a:ext uri="{FF2B5EF4-FFF2-40B4-BE49-F238E27FC236}">
-                <a16:creationId xmlns:a16="http://schemas.microsoft.com/office/drawing/2014/main" id="{E15D1766-F3A2-7B4B-6521-F9116B703E4B}"/>
+                <a16:creationId xmlns:a16="http://schemas.microsoft.com/office/drawing/2014/main" id="{6BDEA27E-458A-DA83-D4A2-AC9308BCB7A8}"/>
               </a:ext>
             </a:extLst>
           </p:cNvPr>
@@ -1318,7 +1329,7 @@
           <p:cNvPr id="4" name="Content Placeholder 3">
             <a:extLst>
               <a:ext uri="{FF2B5EF4-FFF2-40B4-BE49-F238E27FC236}">
-                <a16:creationId xmlns:a16="http://schemas.microsoft.com/office/drawing/2014/main" id="{9B426A02-30C4-F4F1-03D2-385726980DCB}"/>
+                <a16:creationId xmlns:a16="http://schemas.microsoft.com/office/drawing/2014/main" id="{B7A64CEB-A3B5-3DF1-A6A3-6B608B78E52D}"/>
               </a:ext>
             </a:extLst>
           </p:cNvPr>
@@ -1380,7 +1391,7 @@
           <p:cNvPr id="5" name="Date Placeholder 4">
             <a:extLst>
               <a:ext uri="{FF2B5EF4-FFF2-40B4-BE49-F238E27FC236}">
-                <a16:creationId xmlns:a16="http://schemas.microsoft.com/office/drawing/2014/main" id="{4E7BCF31-B5F3-DA79-17C6-87B5D1058CAA}"/>
+                <a16:creationId xmlns:a16="http://schemas.microsoft.com/office/drawing/2014/main" id="{0332356E-0F11-8BA0-1CE9-8FF5A705AC1D}"/>
               </a:ext>
             </a:extLst>
           </p:cNvPr>
@@ -1396,7 +1407,7 @@
           <a:bodyPr/>
           <a:lstStyle/>
           <a:p>
-            <a:fld id="{DD155DE5-1128-4433-BB8B-FE488082D154}" type="datetimeFigureOut">
+            <a:fld id="{1C7CE9BF-C1FF-4E9B-97E6-64DC9D713536}" type="datetimeFigureOut">
               <a:rPr lang="en-US" smtClean="0"/>
               <a:t>4/29/2026</a:t>
             </a:fld>
@@ -1409,7 +1420,7 @@
           <p:cNvPr id="6" name="Footer Placeholder 5">
             <a:extLst>
               <a:ext uri="{FF2B5EF4-FFF2-40B4-BE49-F238E27FC236}">
-                <a16:creationId xmlns:a16="http://schemas.microsoft.com/office/drawing/2014/main" id="{BEEBF692-A9EE-6A5A-7A13-3CDFFE280607}"/>
+                <a16:creationId xmlns:a16="http://schemas.microsoft.com/office/drawing/2014/main" id="{EF0BFB7C-7BF8-D014-9A28-B06A37534E32}"/>
               </a:ext>
             </a:extLst>
           </p:cNvPr>
@@ -1434,7 +1445,7 @@
           <p:cNvPr id="7" name="Slide Number Placeholder 6">
             <a:extLst>
               <a:ext uri="{FF2B5EF4-FFF2-40B4-BE49-F238E27FC236}">
-                <a16:creationId xmlns:a16="http://schemas.microsoft.com/office/drawing/2014/main" id="{3E535CE3-256D-7D5E-7323-B8EAAB7D4AE5}"/>
+                <a16:creationId xmlns:a16="http://schemas.microsoft.com/office/drawing/2014/main" id="{C7703084-C9BE-8D52-0281-D045BB44AE87}"/>
               </a:ext>
             </a:extLst>
           </p:cNvPr>
@@ -1450,7 +1461,7 @@
           <a:bodyPr/>
           <a:lstStyle/>
           <a:p>
-            <a:fld id="{62D248AD-C906-495E-A757-04A014DE76C3}" type="slidenum">
+            <a:fld id="{2FD438EA-64AA-4ADE-A3AB-D3AB0A7C0E5A}" type="slidenum">
               <a:rPr lang="en-US" smtClean="0"/>
               <a:t>‹#›</a:t>
             </a:fld>
@@ -1461,7 +1472,7 @@
     </p:spTree>
     <p:extLst>
       <p:ext uri="{BB962C8B-B14F-4D97-AF65-F5344CB8AC3E}">
-        <p14:creationId xmlns:p14="http://schemas.microsoft.com/office/powerpoint/2010/main" val="3142814218"/>
+        <p14:creationId xmlns:p14="http://schemas.microsoft.com/office/powerpoint/2010/main" val="1033029867"/>
       </p:ext>
     </p:extLst>
   </p:cSld>
@@ -1493,7 +1504,7 @@
           <p:cNvPr id="2" name="Title 1">
             <a:extLst>
               <a:ext uri="{FF2B5EF4-FFF2-40B4-BE49-F238E27FC236}">
-                <a16:creationId xmlns:a16="http://schemas.microsoft.com/office/drawing/2014/main" id="{83C53866-FDBA-32F9-880E-3E0A4F7A954D}"/>
+                <a16:creationId xmlns:a16="http://schemas.microsoft.com/office/drawing/2014/main" id="{EB78F29A-5FE7-68F6-A4EC-B2B01801A6EB}"/>
               </a:ext>
             </a:extLst>
           </p:cNvPr>
@@ -1526,7 +1537,7 @@
           <p:cNvPr id="3" name="Text Placeholder 2">
             <a:extLst>
               <a:ext uri="{FF2B5EF4-FFF2-40B4-BE49-F238E27FC236}">
-                <a16:creationId xmlns:a16="http://schemas.microsoft.com/office/drawing/2014/main" id="{35F87A98-755B-86C5-66C6-FC2885C5E4AB}"/>
+                <a16:creationId xmlns:a16="http://schemas.microsoft.com/office/drawing/2014/main" id="{347907BD-5C81-BB53-3D87-AAD9E21FEB8F}"/>
               </a:ext>
             </a:extLst>
           </p:cNvPr>
@@ -1597,7 +1608,7 @@
           <p:cNvPr id="4" name="Content Placeholder 3">
             <a:extLst>
               <a:ext uri="{FF2B5EF4-FFF2-40B4-BE49-F238E27FC236}">
-                <a16:creationId xmlns:a16="http://schemas.microsoft.com/office/drawing/2014/main" id="{AE97FCAF-2CA0-1BDA-ED3F-B39978958CFE}"/>
+                <a16:creationId xmlns:a16="http://schemas.microsoft.com/office/drawing/2014/main" id="{2244F218-2DC6-B614-BDAD-9F071E0E2405}"/>
               </a:ext>
             </a:extLst>
           </p:cNvPr>
@@ -1659,7 +1670,7 @@
           <p:cNvPr id="5" name="Text Placeholder 4">
             <a:extLst>
               <a:ext uri="{FF2B5EF4-FFF2-40B4-BE49-F238E27FC236}">
-                <a16:creationId xmlns:a16="http://schemas.microsoft.com/office/drawing/2014/main" id="{387D8393-D1CD-89D8-E97D-55E398A8964B}"/>
+                <a16:creationId xmlns:a16="http://schemas.microsoft.com/office/drawing/2014/main" id="{00C5BD33-97A0-B226-D03D-1CB1BAE7A900}"/>
               </a:ext>
             </a:extLst>
           </p:cNvPr>
@@ -1730,7 +1741,7 @@
           <p:cNvPr id="6" name="Content Placeholder 5">
             <a:extLst>
               <a:ext uri="{FF2B5EF4-FFF2-40B4-BE49-F238E27FC236}">
-                <a16:creationId xmlns:a16="http://schemas.microsoft.com/office/drawing/2014/main" id="{4701EF69-6CF1-218E-55B3-31A8AA10860A}"/>
+                <a16:creationId xmlns:a16="http://schemas.microsoft.com/office/drawing/2014/main" id="{033A3587-ABB7-C036-0918-12B988957C6F}"/>
               </a:ext>
             </a:extLst>
           </p:cNvPr>
@@ -1792,7 +1803,7 @@
           <p:cNvPr id="7" name="Date Placeholder 6">
             <a:extLst>
               <a:ext uri="{FF2B5EF4-FFF2-40B4-BE49-F238E27FC236}">
-                <a16:creationId xmlns:a16="http://schemas.microsoft.com/office/drawing/2014/main" id="{B2671034-5A0A-E495-E9DF-898545E51A46}"/>
+                <a16:creationId xmlns:a16="http://schemas.microsoft.com/office/drawing/2014/main" id="{F034A55B-6364-E750-5F6A-AA174B98D00B}"/>
               </a:ext>
             </a:extLst>
           </p:cNvPr>
@@ -1808,7 +1819,7 @@
           <a:bodyPr/>
           <a:lstStyle/>
           <a:p>
-            <a:fld id="{DD155DE5-1128-4433-BB8B-FE488082D154}" type="datetimeFigureOut">
+            <a:fld id="{1C7CE9BF-C1FF-4E9B-97E6-64DC9D713536}" type="datetimeFigureOut">
               <a:rPr lang="en-US" smtClean="0"/>
               <a:t>4/29/2026</a:t>
             </a:fld>
@@ -1821,7 +1832,7 @@
           <p:cNvPr id="8" name="Footer Placeholder 7">
             <a:extLst>
               <a:ext uri="{FF2B5EF4-FFF2-40B4-BE49-F238E27FC236}">
-                <a16:creationId xmlns:a16="http://schemas.microsoft.com/office/drawing/2014/main" id="{B52802B1-BCB4-74CE-A7F8-A090D80AA7DC}"/>
+                <a16:creationId xmlns:a16="http://schemas.microsoft.com/office/drawing/2014/main" id="{34C4112F-FF48-E8A3-DD75-CA1205894491}"/>
               </a:ext>
             </a:extLst>
           </p:cNvPr>
@@ -1846,7 +1857,7 @@
           <p:cNvPr id="9" name="Slide Number Placeholder 8">
             <a:extLst>
               <a:ext uri="{FF2B5EF4-FFF2-40B4-BE49-F238E27FC236}">
-                <a16:creationId xmlns:a16="http://schemas.microsoft.com/office/drawing/2014/main" id="{9F2A1F0F-2F9C-7863-C357-51CB67488875}"/>
+                <a16:creationId xmlns:a16="http://schemas.microsoft.com/office/drawing/2014/main" id="{A5453181-0B08-D91B-F8A2-0B2F5B3F6039}"/>
               </a:ext>
             </a:extLst>
           </p:cNvPr>
@@ -1862,7 +1873,7 @@
           <a:bodyPr/>
           <a:lstStyle/>
           <a:p>
-            <a:fld id="{62D248AD-C906-495E-A757-04A014DE76C3}" type="slidenum">
+            <a:fld id="{2FD438EA-64AA-4ADE-A3AB-D3AB0A7C0E5A}" type="slidenum">
               <a:rPr lang="en-US" smtClean="0"/>
               <a:t>‹#›</a:t>
             </a:fld>
@@ -1873,7 +1884,7 @@
     </p:spTree>
     <p:extLst>
       <p:ext uri="{BB962C8B-B14F-4D97-AF65-F5344CB8AC3E}">
-        <p14:creationId xmlns:p14="http://schemas.microsoft.com/office/powerpoint/2010/main" val="2601861897"/>
+        <p14:creationId xmlns:p14="http://schemas.microsoft.com/office/powerpoint/2010/main" val="1608343049"/>
       </p:ext>
     </p:extLst>
   </p:cSld>
@@ -1905,7 +1916,7 @@
           <p:cNvPr id="2" name="Title 1">
             <a:extLst>
               <a:ext uri="{FF2B5EF4-FFF2-40B4-BE49-F238E27FC236}">
-                <a16:creationId xmlns:a16="http://schemas.microsoft.com/office/drawing/2014/main" id="{CBB452DC-EA14-0C4F-0451-6EEF43194903}"/>
+                <a16:creationId xmlns:a16="http://schemas.microsoft.com/office/drawing/2014/main" id="{CE4125FC-85B2-C59F-0023-4EAB73518A14}"/>
               </a:ext>
             </a:extLst>
           </p:cNvPr>
@@ -1933,7 +1944,7 @@
           <p:cNvPr id="3" name="Date Placeholder 2">
             <a:extLst>
               <a:ext uri="{FF2B5EF4-FFF2-40B4-BE49-F238E27FC236}">
-                <a16:creationId xmlns:a16="http://schemas.microsoft.com/office/drawing/2014/main" id="{719AED6E-DB47-9E73-D96E-0F73D3BCA2B6}"/>
+                <a16:creationId xmlns:a16="http://schemas.microsoft.com/office/drawing/2014/main" id="{D7D9BB8B-ED93-EFD2-877A-A1E4645F41F6}"/>
               </a:ext>
             </a:extLst>
           </p:cNvPr>
@@ -1949,7 +1960,7 @@
           <a:bodyPr/>
           <a:lstStyle/>
           <a:p>
-            <a:fld id="{DD155DE5-1128-4433-BB8B-FE488082D154}" type="datetimeFigureOut">
+            <a:fld id="{1C7CE9BF-C1FF-4E9B-97E6-64DC9D713536}" type="datetimeFigureOut">
               <a:rPr lang="en-US" smtClean="0"/>
               <a:t>4/29/2026</a:t>
             </a:fld>
@@ -1962,7 +1973,7 @@
           <p:cNvPr id="4" name="Footer Placeholder 3">
             <a:extLst>
               <a:ext uri="{FF2B5EF4-FFF2-40B4-BE49-F238E27FC236}">
-                <a16:creationId xmlns:a16="http://schemas.microsoft.com/office/drawing/2014/main" id="{D71F5E88-52D5-6953-14BF-9397D6F88C0F}"/>
+                <a16:creationId xmlns:a16="http://schemas.microsoft.com/office/drawing/2014/main" id="{9EEEBBEB-3274-F051-24ED-6C279E206A0D}"/>
               </a:ext>
             </a:extLst>
           </p:cNvPr>
@@ -1987,7 +1998,7 @@
           <p:cNvPr id="5" name="Slide Number Placeholder 4">
             <a:extLst>
               <a:ext uri="{FF2B5EF4-FFF2-40B4-BE49-F238E27FC236}">
-                <a16:creationId xmlns:a16="http://schemas.microsoft.com/office/drawing/2014/main" id="{3C86CE18-749F-6535-C4A3-B6D2B6F4356D}"/>
+                <a16:creationId xmlns:a16="http://schemas.microsoft.com/office/drawing/2014/main" id="{7FCB2CC1-FC26-7C29-1EF9-E5DAF118C532}"/>
               </a:ext>
             </a:extLst>
           </p:cNvPr>
@@ -2003,7 +2014,7 @@
           <a:bodyPr/>
           <a:lstStyle/>
           <a:p>
-            <a:fld id="{62D248AD-C906-495E-A757-04A014DE76C3}" type="slidenum">
+            <a:fld id="{2FD438EA-64AA-4ADE-A3AB-D3AB0A7C0E5A}" type="slidenum">
               <a:rPr lang="en-US" smtClean="0"/>
               <a:t>‹#›</a:t>
             </a:fld>
@@ -2014,7 +2025,7 @@
     </p:spTree>
     <p:extLst>
       <p:ext uri="{BB962C8B-B14F-4D97-AF65-F5344CB8AC3E}">
-        <p14:creationId xmlns:p14="http://schemas.microsoft.com/office/powerpoint/2010/main" val="731430728"/>
+        <p14:creationId xmlns:p14="http://schemas.microsoft.com/office/powerpoint/2010/main" val="1899341334"/>
       </p:ext>
     </p:extLst>
   </p:cSld>
@@ -2046,7 +2057,7 @@
           <p:cNvPr id="2" name="Date Placeholder 1">
             <a:extLst>
               <a:ext uri="{FF2B5EF4-FFF2-40B4-BE49-F238E27FC236}">
-                <a16:creationId xmlns:a16="http://schemas.microsoft.com/office/drawing/2014/main" id="{2E820815-17A6-9FEF-53F5-75D83C4AFE02}"/>
+                <a16:creationId xmlns:a16="http://schemas.microsoft.com/office/drawing/2014/main" id="{5CA87221-40DF-B254-014C-6064FC68168F}"/>
               </a:ext>
             </a:extLst>
           </p:cNvPr>
@@ -2062,7 +2073,7 @@
           <a:bodyPr/>
           <a:lstStyle/>
           <a:p>
-            <a:fld id="{DD155DE5-1128-4433-BB8B-FE488082D154}" type="datetimeFigureOut">
+            <a:fld id="{1C7CE9BF-C1FF-4E9B-97E6-64DC9D713536}" type="datetimeFigureOut">
               <a:rPr lang="en-US" smtClean="0"/>
               <a:t>4/29/2026</a:t>
             </a:fld>
@@ -2075,7 +2086,7 @@
           <p:cNvPr id="3" name="Footer Placeholder 2">
             <a:extLst>
               <a:ext uri="{FF2B5EF4-FFF2-40B4-BE49-F238E27FC236}">
-                <a16:creationId xmlns:a16="http://schemas.microsoft.com/office/drawing/2014/main" id="{C5749991-F6FD-CC6F-ECB6-CD016D84292E}"/>
+                <a16:creationId xmlns:a16="http://schemas.microsoft.com/office/drawing/2014/main" id="{E0675CC4-15C9-03A3-C00E-A42D14494810}"/>
               </a:ext>
             </a:extLst>
           </p:cNvPr>
@@ -2100,7 +2111,7 @@
           <p:cNvPr id="4" name="Slide Number Placeholder 3">
             <a:extLst>
               <a:ext uri="{FF2B5EF4-FFF2-40B4-BE49-F238E27FC236}">
-                <a16:creationId xmlns:a16="http://schemas.microsoft.com/office/drawing/2014/main" id="{BEDBD824-FA20-9AAB-B51D-1ACF7D229347}"/>
+                <a16:creationId xmlns:a16="http://schemas.microsoft.com/office/drawing/2014/main" id="{C26C29B1-8BB2-6A6B-EB4C-A9D65BEB09D4}"/>
               </a:ext>
             </a:extLst>
           </p:cNvPr>
@@ -2116,7 +2127,7 @@
           <a:bodyPr/>
           <a:lstStyle/>
           <a:p>
-            <a:fld id="{62D248AD-C906-495E-A757-04A014DE76C3}" type="slidenum">
+            <a:fld id="{2FD438EA-64AA-4ADE-A3AB-D3AB0A7C0E5A}" type="slidenum">
               <a:rPr lang="en-US" smtClean="0"/>
               <a:t>‹#›</a:t>
             </a:fld>
@@ -2127,7 +2138,7 @@
     </p:spTree>
     <p:extLst>
       <p:ext uri="{BB962C8B-B14F-4D97-AF65-F5344CB8AC3E}">
-        <p14:creationId xmlns:p14="http://schemas.microsoft.com/office/powerpoint/2010/main" val="1314088830"/>
+        <p14:creationId xmlns:p14="http://schemas.microsoft.com/office/powerpoint/2010/main" val="1248613251"/>
       </p:ext>
     </p:extLst>
   </p:cSld>
@@ -2159,7 +2170,7 @@
           <p:cNvPr id="2" name="Title 1">
             <a:extLst>
               <a:ext uri="{FF2B5EF4-FFF2-40B4-BE49-F238E27FC236}">
-                <a16:creationId xmlns:a16="http://schemas.microsoft.com/office/drawing/2014/main" id="{9A580347-86F7-E182-D5A7-6C3B0FF421DC}"/>
+                <a16:creationId xmlns:a16="http://schemas.microsoft.com/office/drawing/2014/main" id="{1D4DB467-6A11-F334-427D-E22DCE715B4C}"/>
               </a:ext>
             </a:extLst>
           </p:cNvPr>
@@ -2196,7 +2207,7 @@
           <p:cNvPr id="3" name="Content Placeholder 2">
             <a:extLst>
               <a:ext uri="{FF2B5EF4-FFF2-40B4-BE49-F238E27FC236}">
-                <a16:creationId xmlns:a16="http://schemas.microsoft.com/office/drawing/2014/main" id="{4910E72E-AF8A-2EEF-7B06-939D6B91AE41}"/>
+                <a16:creationId xmlns:a16="http://schemas.microsoft.com/office/drawing/2014/main" id="{414BBCDB-D512-1142-D8EF-3DE5EF5D7006}"/>
               </a:ext>
             </a:extLst>
           </p:cNvPr>
@@ -2286,7 +2297,7 @@
           <p:cNvPr id="4" name="Text Placeholder 3">
             <a:extLst>
               <a:ext uri="{FF2B5EF4-FFF2-40B4-BE49-F238E27FC236}">
-                <a16:creationId xmlns:a16="http://schemas.microsoft.com/office/drawing/2014/main" id="{C3B45837-6709-7B4B-A562-096E75C1387C}"/>
+                <a16:creationId xmlns:a16="http://schemas.microsoft.com/office/drawing/2014/main" id="{3249D87F-59E6-B059-D467-6A311EC78C03}"/>
               </a:ext>
             </a:extLst>
           </p:cNvPr>
@@ -2357,7 +2368,7 @@
           <p:cNvPr id="5" name="Date Placeholder 4">
             <a:extLst>
               <a:ext uri="{FF2B5EF4-FFF2-40B4-BE49-F238E27FC236}">
-                <a16:creationId xmlns:a16="http://schemas.microsoft.com/office/drawing/2014/main" id="{5D470F45-224C-1E03-517E-E5E032A15845}"/>
+                <a16:creationId xmlns:a16="http://schemas.microsoft.com/office/drawing/2014/main" id="{64B726E6-755B-92C4-D6E4-6D1D6EB7B318}"/>
               </a:ext>
             </a:extLst>
           </p:cNvPr>
@@ -2373,7 +2384,7 @@
           <a:bodyPr/>
           <a:lstStyle/>
           <a:p>
-            <a:fld id="{DD155DE5-1128-4433-BB8B-FE488082D154}" type="datetimeFigureOut">
+            <a:fld id="{1C7CE9BF-C1FF-4E9B-97E6-64DC9D713536}" type="datetimeFigureOut">
               <a:rPr lang="en-US" smtClean="0"/>
               <a:t>4/29/2026</a:t>
             </a:fld>
@@ -2386,7 +2397,7 @@
           <p:cNvPr id="6" name="Footer Placeholder 5">
             <a:extLst>
               <a:ext uri="{FF2B5EF4-FFF2-40B4-BE49-F238E27FC236}">
-                <a16:creationId xmlns:a16="http://schemas.microsoft.com/office/drawing/2014/main" id="{DCFCF7FC-53F7-6DAA-F95F-7382B2E3ABE4}"/>
+                <a16:creationId xmlns:a16="http://schemas.microsoft.com/office/drawing/2014/main" id="{F3F18F86-81AE-4CFE-BBBD-0BDC4DE420D9}"/>
               </a:ext>
             </a:extLst>
           </p:cNvPr>
@@ -2411,7 +2422,7 @@
           <p:cNvPr id="7" name="Slide Number Placeholder 6">
             <a:extLst>
               <a:ext uri="{FF2B5EF4-FFF2-40B4-BE49-F238E27FC236}">
-                <a16:creationId xmlns:a16="http://schemas.microsoft.com/office/drawing/2014/main" id="{66430EBA-9C75-A8B8-0089-405B30CE6661}"/>
+                <a16:creationId xmlns:a16="http://schemas.microsoft.com/office/drawing/2014/main" id="{4F730FEF-0EC0-20F4-8EB2-2E3F8F2FC94B}"/>
               </a:ext>
             </a:extLst>
           </p:cNvPr>
@@ -2427,7 +2438,7 @@
           <a:bodyPr/>
           <a:lstStyle/>
           <a:p>
-            <a:fld id="{62D248AD-C906-495E-A757-04A014DE76C3}" type="slidenum">
+            <a:fld id="{2FD438EA-64AA-4ADE-A3AB-D3AB0A7C0E5A}" type="slidenum">
               <a:rPr lang="en-US" smtClean="0"/>
               <a:t>‹#›</a:t>
             </a:fld>
@@ -2438,7 +2449,7 @@
     </p:spTree>
     <p:extLst>
       <p:ext uri="{BB962C8B-B14F-4D97-AF65-F5344CB8AC3E}">
-        <p14:creationId xmlns:p14="http://schemas.microsoft.com/office/powerpoint/2010/main" val="3750588379"/>
+        <p14:creationId xmlns:p14="http://schemas.microsoft.com/office/powerpoint/2010/main" val="995069047"/>
       </p:ext>
     </p:extLst>
   </p:cSld>
@@ -2470,7 +2481,7 @@
           <p:cNvPr id="2" name="Title 1">
             <a:extLst>
               <a:ext uri="{FF2B5EF4-FFF2-40B4-BE49-F238E27FC236}">
-                <a16:creationId xmlns:a16="http://schemas.microsoft.com/office/drawing/2014/main" id="{D10ADC10-075B-D624-CD64-043AECC5974D}"/>
+                <a16:creationId xmlns:a16="http://schemas.microsoft.com/office/drawing/2014/main" id="{AF5C9077-9256-21E1-0B7B-79320CFBDC79}"/>
               </a:ext>
             </a:extLst>
           </p:cNvPr>
@@ -2507,7 +2518,7 @@
           <p:cNvPr id="3" name="Picture Placeholder 2">
             <a:extLst>
               <a:ext uri="{FF2B5EF4-FFF2-40B4-BE49-F238E27FC236}">
-                <a16:creationId xmlns:a16="http://schemas.microsoft.com/office/drawing/2014/main" id="{FC49EE25-B893-34D2-9C86-FB54ACBB6782}"/>
+                <a16:creationId xmlns:a16="http://schemas.microsoft.com/office/drawing/2014/main" id="{F5AA7BB4-190A-25CF-A156-A669049D63FC}"/>
               </a:ext>
             </a:extLst>
           </p:cNvPr>
@@ -2574,7 +2585,7 @@
           <p:cNvPr id="4" name="Text Placeholder 3">
             <a:extLst>
               <a:ext uri="{FF2B5EF4-FFF2-40B4-BE49-F238E27FC236}">
-                <a16:creationId xmlns:a16="http://schemas.microsoft.com/office/drawing/2014/main" id="{E5975AE3-7169-6C26-C22E-8AFDD5CAB637}"/>
+                <a16:creationId xmlns:a16="http://schemas.microsoft.com/office/drawing/2014/main" id="{4C0DE329-E939-D274-978E-170926F76D9B}"/>
               </a:ext>
             </a:extLst>
           </p:cNvPr>
@@ -2645,7 +2656,7 @@
           <p:cNvPr id="5" name="Date Placeholder 4">
             <a:extLst>
               <a:ext uri="{FF2B5EF4-FFF2-40B4-BE49-F238E27FC236}">
-                <a16:creationId xmlns:a16="http://schemas.microsoft.com/office/drawing/2014/main" id="{BCCB15D7-26D1-F660-8F09-E48191921603}"/>
+                <a16:creationId xmlns:a16="http://schemas.microsoft.com/office/drawing/2014/main" id="{4C581775-0D9F-2033-8EE3-EBC78BC23246}"/>
               </a:ext>
             </a:extLst>
           </p:cNvPr>
@@ -2661,7 +2672,7 @@
           <a:bodyPr/>
           <a:lstStyle/>
           <a:p>
-            <a:fld id="{DD155DE5-1128-4433-BB8B-FE488082D154}" type="datetimeFigureOut">
+            <a:fld id="{1C7CE9BF-C1FF-4E9B-97E6-64DC9D713536}" type="datetimeFigureOut">
               <a:rPr lang="en-US" smtClean="0"/>
               <a:t>4/29/2026</a:t>
             </a:fld>
@@ -2674,7 +2685,7 @@
           <p:cNvPr id="6" name="Footer Placeholder 5">
             <a:extLst>
               <a:ext uri="{FF2B5EF4-FFF2-40B4-BE49-F238E27FC236}">
-                <a16:creationId xmlns:a16="http://schemas.microsoft.com/office/drawing/2014/main" id="{CA8034D0-8C4F-9A77-ABF1-93B7661B020C}"/>
+                <a16:creationId xmlns:a16="http://schemas.microsoft.com/office/drawing/2014/main" id="{17207C39-985B-54AE-3769-645FA8D10145}"/>
               </a:ext>
             </a:extLst>
           </p:cNvPr>
@@ -2699,7 +2710,7 @@
           <p:cNvPr id="7" name="Slide Number Placeholder 6">
             <a:extLst>
               <a:ext uri="{FF2B5EF4-FFF2-40B4-BE49-F238E27FC236}">
-                <a16:creationId xmlns:a16="http://schemas.microsoft.com/office/drawing/2014/main" id="{65B109B9-71B1-1BF2-14DD-63FFE2AE06D1}"/>
+                <a16:creationId xmlns:a16="http://schemas.microsoft.com/office/drawing/2014/main" id="{3095FB39-DC81-6B44-7319-01CF1B27D5F0}"/>
               </a:ext>
             </a:extLst>
           </p:cNvPr>
@@ -2715,7 +2726,7 @@
           <a:bodyPr/>
           <a:lstStyle/>
           <a:p>
-            <a:fld id="{62D248AD-C906-495E-A757-04A014DE76C3}" type="slidenum">
+            <a:fld id="{2FD438EA-64AA-4ADE-A3AB-D3AB0A7C0E5A}" type="slidenum">
               <a:rPr lang="en-US" smtClean="0"/>
               <a:t>‹#›</a:t>
             </a:fld>
@@ -2726,7 +2737,7 @@
     </p:spTree>
     <p:extLst>
       <p:ext uri="{BB962C8B-B14F-4D97-AF65-F5344CB8AC3E}">
-        <p14:creationId xmlns:p14="http://schemas.microsoft.com/office/powerpoint/2010/main" val="3712343925"/>
+        <p14:creationId xmlns:p14="http://schemas.microsoft.com/office/powerpoint/2010/main" val="2063612019"/>
       </p:ext>
     </p:extLst>
   </p:cSld>
@@ -2763,7 +2774,7 @@
           <p:cNvPr id="2" name="Title Placeholder 1">
             <a:extLst>
               <a:ext uri="{FF2B5EF4-FFF2-40B4-BE49-F238E27FC236}">
-                <a16:creationId xmlns:a16="http://schemas.microsoft.com/office/drawing/2014/main" id="{5E8A706A-8E67-893F-9151-742AD4325EE3}"/>
+                <a16:creationId xmlns:a16="http://schemas.microsoft.com/office/drawing/2014/main" id="{4D70ADA6-0734-B067-AF29-E08B42765F07}"/>
               </a:ext>
             </a:extLst>
           </p:cNvPr>
@@ -2801,7 +2812,7 @@
           <p:cNvPr id="3" name="Text Placeholder 2">
             <a:extLst>
               <a:ext uri="{FF2B5EF4-FFF2-40B4-BE49-F238E27FC236}">
-                <a16:creationId xmlns:a16="http://schemas.microsoft.com/office/drawing/2014/main" id="{C30C7D1D-7780-0675-EFF0-FE99900FA247}"/>
+                <a16:creationId xmlns:a16="http://schemas.microsoft.com/office/drawing/2014/main" id="{8F9BAA16-CA26-B566-E2A9-117A51F5E56D}"/>
               </a:ext>
             </a:extLst>
           </p:cNvPr>
@@ -2868,7 +2879,7 @@
           <p:cNvPr id="4" name="Date Placeholder 3">
             <a:extLst>
               <a:ext uri="{FF2B5EF4-FFF2-40B4-BE49-F238E27FC236}">
-                <a16:creationId xmlns:a16="http://schemas.microsoft.com/office/drawing/2014/main" id="{68834A81-A913-167E-2EAD-090C0A6B296D}"/>
+                <a16:creationId xmlns:a16="http://schemas.microsoft.com/office/drawing/2014/main" id="{187A82CD-C538-C082-32C7-5E105A33025B}"/>
               </a:ext>
             </a:extLst>
           </p:cNvPr>
@@ -2902,7 +2913,7 @@
             </a:lvl1pPr>
           </a:lstStyle>
           <a:p>
-            <a:fld id="{DD155DE5-1128-4433-BB8B-FE488082D154}" type="datetimeFigureOut">
+            <a:fld id="{1C7CE9BF-C1FF-4E9B-97E6-64DC9D713536}" type="datetimeFigureOut">
               <a:rPr lang="en-US" smtClean="0"/>
               <a:t>4/29/2026</a:t>
             </a:fld>
@@ -2915,7 +2926,7 @@
           <p:cNvPr id="5" name="Footer Placeholder 4">
             <a:extLst>
               <a:ext uri="{FF2B5EF4-FFF2-40B4-BE49-F238E27FC236}">
-                <a16:creationId xmlns:a16="http://schemas.microsoft.com/office/drawing/2014/main" id="{BFB9E61C-35E8-7D82-A3D3-84263DF8B284}"/>
+                <a16:creationId xmlns:a16="http://schemas.microsoft.com/office/drawing/2014/main" id="{7CE6291B-6194-83AE-28FF-5C4A87F14A26}"/>
               </a:ext>
             </a:extLst>
           </p:cNvPr>
@@ -2958,7 +2969,7 @@
           <p:cNvPr id="6" name="Slide Number Placeholder 5">
             <a:extLst>
               <a:ext uri="{FF2B5EF4-FFF2-40B4-BE49-F238E27FC236}">
-                <a16:creationId xmlns:a16="http://schemas.microsoft.com/office/drawing/2014/main" id="{9F7E66C4-663F-92C3-285E-AC89D3E38C7C}"/>
+                <a16:creationId xmlns:a16="http://schemas.microsoft.com/office/drawing/2014/main" id="{C3F6377A-8865-AD24-0532-0C1965221073}"/>
               </a:ext>
             </a:extLst>
           </p:cNvPr>
@@ -2992,7 +3003,7 @@
             </a:lvl1pPr>
           </a:lstStyle>
           <a:p>
-            <a:fld id="{62D248AD-C906-495E-A757-04A014DE76C3}" type="slidenum">
+            <a:fld id="{2FD438EA-64AA-4ADE-A3AB-D3AB0A7C0E5A}" type="slidenum">
               <a:rPr lang="en-US" smtClean="0"/>
               <a:t>‹#›</a:t>
             </a:fld>
@@ -3003,23 +3014,23 @@
     </p:spTree>
     <p:extLst>
       <p:ext uri="{BB962C8B-B14F-4D97-AF65-F5344CB8AC3E}">
-        <p14:creationId xmlns:p14="http://schemas.microsoft.com/office/powerpoint/2010/main" val="4017071652"/>
+        <p14:creationId xmlns:p14="http://schemas.microsoft.com/office/powerpoint/2010/main" val="1712895154"/>
       </p:ext>
     </p:extLst>
   </p:cSld>
   <p:clrMap bg1="lt1" tx1="dk1" bg2="lt2" tx2="dk2" accent1="accent1" accent2="accent2" accent3="accent3" accent4="accent4" accent5="accent5" accent6="accent6" hlink="hlink" folHlink="folHlink"/>
   <p:sldLayoutIdLst>
-    <p:sldLayoutId id="2147483649" r:id="rId1"/>
-    <p:sldLayoutId id="2147483650" r:id="rId2"/>
-    <p:sldLayoutId id="2147483651" r:id="rId3"/>
-    <p:sldLayoutId id="2147483652" r:id="rId4"/>
-    <p:sldLayoutId id="2147483653" r:id="rId5"/>
-    <p:sldLayoutId id="2147483654" r:id="rId6"/>
-    <p:sldLayoutId id="2147483655" r:id="rId7"/>
-    <p:sldLayoutId id="2147483656" r:id="rId8"/>
-    <p:sldLayoutId id="2147483657" r:id="rId9"/>
-    <p:sldLayoutId id="2147483658" r:id="rId10"/>
-    <p:sldLayoutId id="2147483659" r:id="rId11"/>
+    <p:sldLayoutId id="2147483673" r:id="rId1"/>
+    <p:sldLayoutId id="2147483674" r:id="rId2"/>
+    <p:sldLayoutId id="2147483675" r:id="rId3"/>
+    <p:sldLayoutId id="2147483676" r:id="rId4"/>
+    <p:sldLayoutId id="2147483677" r:id="rId5"/>
+    <p:sldLayoutId id="2147483678" r:id="rId6"/>
+    <p:sldLayoutId id="2147483679" r:id="rId7"/>
+    <p:sldLayoutId id="2147483680" r:id="rId8"/>
+    <p:sldLayoutId id="2147483681" r:id="rId9"/>
+    <p:sldLayoutId id="2147483682" r:id="rId10"/>
+    <p:sldLayoutId id="2147483683" r:id="rId11"/>
   </p:sldLayoutIdLst>
   <p:txStyles>
     <p:titleStyle>
@@ -3326,7 +3337,7 @@
           <p:cNvPr id="2" name="Title 1">
             <a:extLst>
               <a:ext uri="{FF2B5EF4-FFF2-40B4-BE49-F238E27FC236}">
-                <a16:creationId xmlns:a16="http://schemas.microsoft.com/office/drawing/2014/main" id="{2903643D-7647-0585-1256-0492DCEA123F}"/>
+                <a16:creationId xmlns:a16="http://schemas.microsoft.com/office/drawing/2014/main" id="{466255CA-1320-E4CB-5684-B5DC954D7862}"/>
               </a:ext>
             </a:extLst>
           </p:cNvPr>
@@ -3342,7 +3353,10 @@
           <a:bodyPr/>
           <a:lstStyle/>
           <a:p>
-            <a:endParaRPr lang="en-US"/>
+            <a:r>
+              <a:rPr lang="en-US" dirty="0"/>
+              <a:t>Constellation Brands</a:t>
+            </a:r>
           </a:p>
         </p:txBody>
       </p:sp>
@@ -3351,7 +3365,7 @@
           <p:cNvPr id="3" name="Subtitle 2">
             <a:extLst>
               <a:ext uri="{FF2B5EF4-FFF2-40B4-BE49-F238E27FC236}">
-                <a16:creationId xmlns:a16="http://schemas.microsoft.com/office/drawing/2014/main" id="{61EF6DB1-C5AF-16DE-BE07-2B50600665D0}"/>
+                <a16:creationId xmlns:a16="http://schemas.microsoft.com/office/drawing/2014/main" id="{C44DC2AA-2A7F-FEC9-1B2C-1D3647D40038}"/>
               </a:ext>
             </a:extLst>
           </p:cNvPr>
@@ -3367,14 +3381,990 @@
           <a:bodyPr/>
           <a:lstStyle/>
           <a:p>
-            <a:endParaRPr lang="en-US"/>
+            <a:r>
+              <a:rPr lang="en-US" dirty="0"/>
+              <a:t>Longley Pham</a:t>
+            </a:r>
+          </a:p>
+          <a:p>
+            <a:r>
+              <a:rPr lang="en-US" dirty="0"/>
+              <a:t>Iowa Liquor Sales Analysis</a:t>
+            </a:r>
+          </a:p>
+          <a:p>
+            <a:r>
+              <a:rPr lang="en-US" dirty="0"/>
+              <a:t>YUU – Capstone 1</a:t>
+            </a:r>
           </a:p>
         </p:txBody>
       </p:sp>
     </p:spTree>
     <p:extLst>
       <p:ext uri="{BB962C8B-B14F-4D97-AF65-F5344CB8AC3E}">
-        <p14:creationId xmlns:p14="http://schemas.microsoft.com/office/powerpoint/2010/main" val="2339348097"/>
+        <p14:creationId xmlns:p14="http://schemas.microsoft.com/office/powerpoint/2010/main" val="2720321517"/>
+      </p:ext>
+    </p:extLst>
+  </p:cSld>
+  <p:clrMapOvr>
+    <a:masterClrMapping/>
+  </p:clrMapOvr>
+</p:sld>
+</file>
+
+<file path=ppt/slides/slide10.xml><?xml version="1.0" encoding="utf-8"?>
+<p:sld xmlns:a="http://schemas.openxmlformats.org/drawingml/2006/main" xmlns:r="http://schemas.openxmlformats.org/officeDocument/2006/relationships" xmlns:p="http://schemas.openxmlformats.org/presentationml/2006/main">
+  <p:cSld>
+    <p:spTree>
+      <p:nvGrpSpPr>
+        <p:cNvPr id="1" name="">
+          <a:extLst>
+            <a:ext uri="{FF2B5EF4-FFF2-40B4-BE49-F238E27FC236}">
+              <a16:creationId xmlns:a16="http://schemas.microsoft.com/office/drawing/2014/main" id="{69F39791-A5E4-7EBE-160C-71955643138F}"/>
+            </a:ext>
+          </a:extLst>
+        </p:cNvPr>
+        <p:cNvGrpSpPr/>
+        <p:nvPr/>
+      </p:nvGrpSpPr>
+      <p:grpSpPr>
+        <a:xfrm>
+          <a:off x="0" y="0"/>
+          <a:ext cx="0" cy="0"/>
+          <a:chOff x="0" y="0"/>
+          <a:chExt cx="0" cy="0"/>
+        </a:xfrm>
+      </p:grpSpPr>
+      <p:sp>
+        <p:nvSpPr>
+          <p:cNvPr id="2" name="Title 1">
+            <a:extLst>
+              <a:ext uri="{FF2B5EF4-FFF2-40B4-BE49-F238E27FC236}">
+                <a16:creationId xmlns:a16="http://schemas.microsoft.com/office/drawing/2014/main" id="{38D9A12F-D812-A8BC-4584-8F8DA3CC2C85}"/>
+              </a:ext>
+            </a:extLst>
+          </p:cNvPr>
+          <p:cNvSpPr>
+            <a:spLocks noGrp="1"/>
+          </p:cNvSpPr>
+          <p:nvPr>
+            <p:ph type="title"/>
+          </p:nvPr>
+        </p:nvSpPr>
+        <p:spPr/>
+        <p:txBody>
+          <a:bodyPr/>
+          <a:lstStyle/>
+          <a:p>
+            <a:r>
+              <a:rPr lang="en-US" dirty="0"/>
+              <a:t>Analysis 4 Threats 1</a:t>
+            </a:r>
+          </a:p>
+        </p:txBody>
+      </p:sp>
+      <p:sp>
+        <p:nvSpPr>
+          <p:cNvPr id="3" name="Content Placeholder 2">
+            <a:extLst>
+              <a:ext uri="{FF2B5EF4-FFF2-40B4-BE49-F238E27FC236}">
+                <a16:creationId xmlns:a16="http://schemas.microsoft.com/office/drawing/2014/main" id="{E964830F-DE1D-3F7F-3D6E-BC23A581A347}"/>
+              </a:ext>
+            </a:extLst>
+          </p:cNvPr>
+          <p:cNvSpPr>
+            <a:spLocks noGrp="1"/>
+          </p:cNvSpPr>
+          <p:nvPr>
+            <p:ph idx="1"/>
+          </p:nvPr>
+        </p:nvSpPr>
+        <p:spPr/>
+        <p:txBody>
+          <a:bodyPr/>
+          <a:lstStyle/>
+          <a:p>
+            <a:endParaRPr lang="en-US"/>
+          </a:p>
+        </p:txBody>
+      </p:sp>
+    </p:spTree>
+    <p:extLst>
+      <p:ext uri="{BB962C8B-B14F-4D97-AF65-F5344CB8AC3E}">
+        <p14:creationId xmlns:p14="http://schemas.microsoft.com/office/powerpoint/2010/main" val="1868810422"/>
+      </p:ext>
+    </p:extLst>
+  </p:cSld>
+  <p:clrMapOvr>
+    <a:masterClrMapping/>
+  </p:clrMapOvr>
+</p:sld>
+</file>
+
+<file path=ppt/slides/slide11.xml><?xml version="1.0" encoding="utf-8"?>
+<p:sld xmlns:a="http://schemas.openxmlformats.org/drawingml/2006/main" xmlns:r="http://schemas.openxmlformats.org/officeDocument/2006/relationships" xmlns:p="http://schemas.openxmlformats.org/presentationml/2006/main">
+  <p:cSld>
+    <p:spTree>
+      <p:nvGrpSpPr>
+        <p:cNvPr id="1" name="">
+          <a:extLst>
+            <a:ext uri="{FF2B5EF4-FFF2-40B4-BE49-F238E27FC236}">
+              <a16:creationId xmlns:a16="http://schemas.microsoft.com/office/drawing/2014/main" id="{C0240A37-73AC-28A6-0D0D-798D3F431461}"/>
+            </a:ext>
+          </a:extLst>
+        </p:cNvPr>
+        <p:cNvGrpSpPr/>
+        <p:nvPr/>
+      </p:nvGrpSpPr>
+      <p:grpSpPr>
+        <a:xfrm>
+          <a:off x="0" y="0"/>
+          <a:ext cx="0" cy="0"/>
+          <a:chOff x="0" y="0"/>
+          <a:chExt cx="0" cy="0"/>
+        </a:xfrm>
+      </p:grpSpPr>
+      <p:sp>
+        <p:nvSpPr>
+          <p:cNvPr id="2" name="Title 1">
+            <a:extLst>
+              <a:ext uri="{FF2B5EF4-FFF2-40B4-BE49-F238E27FC236}">
+                <a16:creationId xmlns:a16="http://schemas.microsoft.com/office/drawing/2014/main" id="{08FA52B7-8995-E2CD-63AA-0A9EF5A582A5}"/>
+              </a:ext>
+            </a:extLst>
+          </p:cNvPr>
+          <p:cNvSpPr>
+            <a:spLocks noGrp="1"/>
+          </p:cNvSpPr>
+          <p:nvPr>
+            <p:ph type="title"/>
+          </p:nvPr>
+        </p:nvSpPr>
+        <p:spPr/>
+        <p:txBody>
+          <a:bodyPr/>
+          <a:lstStyle/>
+          <a:p>
+            <a:r>
+              <a:rPr lang="en-US" dirty="0"/>
+              <a:t>Analysis 4 Threats 2</a:t>
+            </a:r>
+          </a:p>
+        </p:txBody>
+      </p:sp>
+      <p:sp>
+        <p:nvSpPr>
+          <p:cNvPr id="3" name="Content Placeholder 2">
+            <a:extLst>
+              <a:ext uri="{FF2B5EF4-FFF2-40B4-BE49-F238E27FC236}">
+                <a16:creationId xmlns:a16="http://schemas.microsoft.com/office/drawing/2014/main" id="{53CAD553-A6A6-FDE2-71F7-2CC293263516}"/>
+              </a:ext>
+            </a:extLst>
+          </p:cNvPr>
+          <p:cNvSpPr>
+            <a:spLocks noGrp="1"/>
+          </p:cNvSpPr>
+          <p:nvPr>
+            <p:ph idx="1"/>
+          </p:nvPr>
+        </p:nvSpPr>
+        <p:spPr/>
+        <p:txBody>
+          <a:bodyPr/>
+          <a:lstStyle/>
+          <a:p>
+            <a:endParaRPr lang="en-US"/>
+          </a:p>
+        </p:txBody>
+      </p:sp>
+    </p:spTree>
+    <p:extLst>
+      <p:ext uri="{BB962C8B-B14F-4D97-AF65-F5344CB8AC3E}">
+        <p14:creationId xmlns:p14="http://schemas.microsoft.com/office/powerpoint/2010/main" val="996944508"/>
+      </p:ext>
+    </p:extLst>
+  </p:cSld>
+  <p:clrMapOvr>
+    <a:masterClrMapping/>
+  </p:clrMapOvr>
+</p:sld>
+</file>
+
+<file path=ppt/slides/slide12.xml><?xml version="1.0" encoding="utf-8"?>
+<p:sld xmlns:a="http://schemas.openxmlformats.org/drawingml/2006/main" xmlns:r="http://schemas.openxmlformats.org/officeDocument/2006/relationships" xmlns:p="http://schemas.openxmlformats.org/presentationml/2006/main">
+  <p:cSld>
+    <p:spTree>
+      <p:nvGrpSpPr>
+        <p:cNvPr id="1" name="">
+          <a:extLst>
+            <a:ext uri="{FF2B5EF4-FFF2-40B4-BE49-F238E27FC236}">
+              <a16:creationId xmlns:a16="http://schemas.microsoft.com/office/drawing/2014/main" id="{8CFFE8C0-4E48-07AC-C632-058FD54CF8E8}"/>
+            </a:ext>
+          </a:extLst>
+        </p:cNvPr>
+        <p:cNvGrpSpPr/>
+        <p:nvPr/>
+      </p:nvGrpSpPr>
+      <p:grpSpPr>
+        <a:xfrm>
+          <a:off x="0" y="0"/>
+          <a:ext cx="0" cy="0"/>
+          <a:chOff x="0" y="0"/>
+          <a:chExt cx="0" cy="0"/>
+        </a:xfrm>
+      </p:grpSpPr>
+      <p:sp>
+        <p:nvSpPr>
+          <p:cNvPr id="2" name="Title 1">
+            <a:extLst>
+              <a:ext uri="{FF2B5EF4-FFF2-40B4-BE49-F238E27FC236}">
+                <a16:creationId xmlns:a16="http://schemas.microsoft.com/office/drawing/2014/main" id="{DA1358D2-DFEF-F660-BFF2-8A83811A93F2}"/>
+              </a:ext>
+            </a:extLst>
+          </p:cNvPr>
+          <p:cNvSpPr>
+            <a:spLocks noGrp="1"/>
+          </p:cNvSpPr>
+          <p:nvPr>
+            <p:ph type="title"/>
+          </p:nvPr>
+        </p:nvSpPr>
+        <p:spPr/>
+        <p:txBody>
+          <a:bodyPr/>
+          <a:lstStyle/>
+          <a:p>
+            <a:r>
+              <a:rPr lang="en-US" dirty="0"/>
+              <a:t>Summary / Recommendation</a:t>
+            </a:r>
+          </a:p>
+        </p:txBody>
+      </p:sp>
+      <p:sp>
+        <p:nvSpPr>
+          <p:cNvPr id="3" name="Content Placeholder 2">
+            <a:extLst>
+              <a:ext uri="{FF2B5EF4-FFF2-40B4-BE49-F238E27FC236}">
+                <a16:creationId xmlns:a16="http://schemas.microsoft.com/office/drawing/2014/main" id="{2A64875F-9FA5-82E6-07AA-7126FF3F5A55}"/>
+              </a:ext>
+            </a:extLst>
+          </p:cNvPr>
+          <p:cNvSpPr>
+            <a:spLocks noGrp="1"/>
+          </p:cNvSpPr>
+          <p:nvPr>
+            <p:ph idx="1"/>
+          </p:nvPr>
+        </p:nvSpPr>
+        <p:spPr/>
+        <p:txBody>
+          <a:bodyPr/>
+          <a:lstStyle/>
+          <a:p>
+            <a:endParaRPr lang="en-US"/>
+          </a:p>
+        </p:txBody>
+      </p:sp>
+    </p:spTree>
+    <p:extLst>
+      <p:ext uri="{BB962C8B-B14F-4D97-AF65-F5344CB8AC3E}">
+        <p14:creationId xmlns:p14="http://schemas.microsoft.com/office/powerpoint/2010/main" val="3831926513"/>
+      </p:ext>
+    </p:extLst>
+  </p:cSld>
+  <p:clrMapOvr>
+    <a:masterClrMapping/>
+  </p:clrMapOvr>
+</p:sld>
+</file>
+
+<file path=ppt/slides/slide2.xml><?xml version="1.0" encoding="utf-8"?>
+<p:sld xmlns:a="http://schemas.openxmlformats.org/drawingml/2006/main" xmlns:r="http://schemas.openxmlformats.org/officeDocument/2006/relationships" xmlns:p="http://schemas.openxmlformats.org/presentationml/2006/main">
+  <p:cSld>
+    <p:spTree>
+      <p:nvGrpSpPr>
+        <p:cNvPr id="1" name=""/>
+        <p:cNvGrpSpPr/>
+        <p:nvPr/>
+      </p:nvGrpSpPr>
+      <p:grpSpPr>
+        <a:xfrm>
+          <a:off x="0" y="0"/>
+          <a:ext cx="0" cy="0"/>
+          <a:chOff x="0" y="0"/>
+          <a:chExt cx="0" cy="0"/>
+        </a:xfrm>
+      </p:grpSpPr>
+      <p:sp>
+        <p:nvSpPr>
+          <p:cNvPr id="2" name="Title 1">
+            <a:extLst>
+              <a:ext uri="{FF2B5EF4-FFF2-40B4-BE49-F238E27FC236}">
+                <a16:creationId xmlns:a16="http://schemas.microsoft.com/office/drawing/2014/main" id="{3BF32740-F662-BCD9-5E98-135BDC2BBE9F}"/>
+              </a:ext>
+            </a:extLst>
+          </p:cNvPr>
+          <p:cNvSpPr>
+            <a:spLocks noGrp="1"/>
+          </p:cNvSpPr>
+          <p:nvPr>
+            <p:ph type="title"/>
+          </p:nvPr>
+        </p:nvSpPr>
+        <p:spPr/>
+        <p:txBody>
+          <a:bodyPr/>
+          <a:lstStyle/>
+          <a:p>
+            <a:r>
+              <a:rPr lang="en-US" dirty="0"/>
+              <a:t>Scenario</a:t>
+            </a:r>
+          </a:p>
+        </p:txBody>
+      </p:sp>
+      <p:sp>
+        <p:nvSpPr>
+          <p:cNvPr id="3" name="Content Placeholder 2">
+            <a:extLst>
+              <a:ext uri="{FF2B5EF4-FFF2-40B4-BE49-F238E27FC236}">
+                <a16:creationId xmlns:a16="http://schemas.microsoft.com/office/drawing/2014/main" id="{DEC6ED37-AF01-E906-5F3A-EEB9B5127614}"/>
+              </a:ext>
+            </a:extLst>
+          </p:cNvPr>
+          <p:cNvSpPr>
+            <a:spLocks noGrp="1"/>
+          </p:cNvSpPr>
+          <p:nvPr>
+            <p:ph idx="1"/>
+          </p:nvPr>
+        </p:nvSpPr>
+        <p:spPr/>
+        <p:txBody>
+          <a:bodyPr/>
+          <a:lstStyle/>
+          <a:p>
+            <a:endParaRPr lang="en-US"/>
+          </a:p>
+        </p:txBody>
+      </p:sp>
+    </p:spTree>
+    <p:extLst>
+      <p:ext uri="{BB962C8B-B14F-4D97-AF65-F5344CB8AC3E}">
+        <p14:creationId xmlns:p14="http://schemas.microsoft.com/office/powerpoint/2010/main" val="2707976681"/>
+      </p:ext>
+    </p:extLst>
+  </p:cSld>
+  <p:clrMapOvr>
+    <a:masterClrMapping/>
+  </p:clrMapOvr>
+</p:sld>
+</file>
+
+<file path=ppt/slides/slide3.xml><?xml version="1.0" encoding="utf-8"?>
+<p:sld xmlns:a="http://schemas.openxmlformats.org/drawingml/2006/main" xmlns:r="http://schemas.openxmlformats.org/officeDocument/2006/relationships" xmlns:p="http://schemas.openxmlformats.org/presentationml/2006/main">
+  <p:cSld>
+    <p:spTree>
+      <p:nvGrpSpPr>
+        <p:cNvPr id="1" name=""/>
+        <p:cNvGrpSpPr/>
+        <p:nvPr/>
+      </p:nvGrpSpPr>
+      <p:grpSpPr>
+        <a:xfrm>
+          <a:off x="0" y="0"/>
+          <a:ext cx="0" cy="0"/>
+          <a:chOff x="0" y="0"/>
+          <a:chExt cx="0" cy="0"/>
+        </a:xfrm>
+      </p:grpSpPr>
+      <p:sp>
+        <p:nvSpPr>
+          <p:cNvPr id="2" name="Title 1">
+            <a:extLst>
+              <a:ext uri="{FF2B5EF4-FFF2-40B4-BE49-F238E27FC236}">
+                <a16:creationId xmlns:a16="http://schemas.microsoft.com/office/drawing/2014/main" id="{9E218537-E472-8EB1-74F4-698C93711D74}"/>
+              </a:ext>
+            </a:extLst>
+          </p:cNvPr>
+          <p:cNvSpPr>
+            <a:spLocks noGrp="1"/>
+          </p:cNvSpPr>
+          <p:nvPr>
+            <p:ph type="title"/>
+          </p:nvPr>
+        </p:nvSpPr>
+        <p:spPr/>
+        <p:txBody>
+          <a:bodyPr/>
+          <a:lstStyle/>
+          <a:p>
+            <a:r>
+              <a:rPr lang="en-US" dirty="0"/>
+              <a:t>Summary Stats for DB</a:t>
+            </a:r>
+          </a:p>
+        </p:txBody>
+      </p:sp>
+      <p:sp>
+        <p:nvSpPr>
+          <p:cNvPr id="3" name="Content Placeholder 2">
+            <a:extLst>
+              <a:ext uri="{FF2B5EF4-FFF2-40B4-BE49-F238E27FC236}">
+                <a16:creationId xmlns:a16="http://schemas.microsoft.com/office/drawing/2014/main" id="{D4CDF3C9-C4DB-FA1A-52F3-3D152FAAFF19}"/>
+              </a:ext>
+            </a:extLst>
+          </p:cNvPr>
+          <p:cNvSpPr>
+            <a:spLocks noGrp="1"/>
+          </p:cNvSpPr>
+          <p:nvPr>
+            <p:ph idx="1"/>
+          </p:nvPr>
+        </p:nvSpPr>
+        <p:spPr/>
+        <p:txBody>
+          <a:bodyPr/>
+          <a:lstStyle/>
+          <a:p>
+            <a:endParaRPr lang="en-US"/>
+          </a:p>
+        </p:txBody>
+      </p:sp>
+    </p:spTree>
+    <p:extLst>
+      <p:ext uri="{BB962C8B-B14F-4D97-AF65-F5344CB8AC3E}">
+        <p14:creationId xmlns:p14="http://schemas.microsoft.com/office/powerpoint/2010/main" val="3484004501"/>
+      </p:ext>
+    </p:extLst>
+  </p:cSld>
+  <p:clrMapOvr>
+    <a:masterClrMapping/>
+  </p:clrMapOvr>
+</p:sld>
+</file>
+
+<file path=ppt/slides/slide4.xml><?xml version="1.0" encoding="utf-8"?>
+<p:sld xmlns:a="http://schemas.openxmlformats.org/drawingml/2006/main" xmlns:r="http://schemas.openxmlformats.org/officeDocument/2006/relationships" xmlns:p="http://schemas.openxmlformats.org/presentationml/2006/main">
+  <p:cSld>
+    <p:spTree>
+      <p:nvGrpSpPr>
+        <p:cNvPr id="1" name="">
+          <a:extLst>
+            <a:ext uri="{FF2B5EF4-FFF2-40B4-BE49-F238E27FC236}">
+              <a16:creationId xmlns:a16="http://schemas.microsoft.com/office/drawing/2014/main" id="{F2A57144-9F3D-F9FD-E111-0A4FC216E8AE}"/>
+            </a:ext>
+          </a:extLst>
+        </p:cNvPr>
+        <p:cNvGrpSpPr/>
+        <p:nvPr/>
+      </p:nvGrpSpPr>
+      <p:grpSpPr>
+        <a:xfrm>
+          <a:off x="0" y="0"/>
+          <a:ext cx="0" cy="0"/>
+          <a:chOff x="0" y="0"/>
+          <a:chExt cx="0" cy="0"/>
+        </a:xfrm>
+      </p:grpSpPr>
+      <p:sp>
+        <p:nvSpPr>
+          <p:cNvPr id="2" name="Title 1">
+            <a:extLst>
+              <a:ext uri="{FF2B5EF4-FFF2-40B4-BE49-F238E27FC236}">
+                <a16:creationId xmlns:a16="http://schemas.microsoft.com/office/drawing/2014/main" id="{032CCD00-30CA-51E6-61C2-694CF19FD787}"/>
+              </a:ext>
+            </a:extLst>
+          </p:cNvPr>
+          <p:cNvSpPr>
+            <a:spLocks noGrp="1"/>
+          </p:cNvSpPr>
+          <p:nvPr>
+            <p:ph type="title"/>
+          </p:nvPr>
+        </p:nvSpPr>
+        <p:spPr/>
+        <p:txBody>
+          <a:bodyPr/>
+          <a:lstStyle/>
+          <a:p>
+            <a:r>
+              <a:rPr lang="en-US" dirty="0"/>
+              <a:t>Analysis 1 Strength 1</a:t>
+            </a:r>
+          </a:p>
+        </p:txBody>
+      </p:sp>
+      <p:sp>
+        <p:nvSpPr>
+          <p:cNvPr id="3" name="Content Placeholder 2">
+            <a:extLst>
+              <a:ext uri="{FF2B5EF4-FFF2-40B4-BE49-F238E27FC236}">
+                <a16:creationId xmlns:a16="http://schemas.microsoft.com/office/drawing/2014/main" id="{AD823C4C-116C-6C03-68F8-01B397D9709B}"/>
+              </a:ext>
+            </a:extLst>
+          </p:cNvPr>
+          <p:cNvSpPr>
+            <a:spLocks noGrp="1"/>
+          </p:cNvSpPr>
+          <p:nvPr>
+            <p:ph idx="1"/>
+          </p:nvPr>
+        </p:nvSpPr>
+        <p:spPr/>
+        <p:txBody>
+          <a:bodyPr/>
+          <a:lstStyle/>
+          <a:p>
+            <a:endParaRPr lang="en-US"/>
+          </a:p>
+        </p:txBody>
+      </p:sp>
+    </p:spTree>
+    <p:extLst>
+      <p:ext uri="{BB962C8B-B14F-4D97-AF65-F5344CB8AC3E}">
+        <p14:creationId xmlns:p14="http://schemas.microsoft.com/office/powerpoint/2010/main" val="356150293"/>
+      </p:ext>
+    </p:extLst>
+  </p:cSld>
+  <p:clrMapOvr>
+    <a:masterClrMapping/>
+  </p:clrMapOvr>
+</p:sld>
+</file>
+
+<file path=ppt/slides/slide5.xml><?xml version="1.0" encoding="utf-8"?>
+<p:sld xmlns:a="http://schemas.openxmlformats.org/drawingml/2006/main" xmlns:r="http://schemas.openxmlformats.org/officeDocument/2006/relationships" xmlns:p="http://schemas.openxmlformats.org/presentationml/2006/main">
+  <p:cSld>
+    <p:spTree>
+      <p:nvGrpSpPr>
+        <p:cNvPr id="1" name="">
+          <a:extLst>
+            <a:ext uri="{FF2B5EF4-FFF2-40B4-BE49-F238E27FC236}">
+              <a16:creationId xmlns:a16="http://schemas.microsoft.com/office/drawing/2014/main" id="{4E97C058-1739-8C25-78CF-CAA18FD6B3E8}"/>
+            </a:ext>
+          </a:extLst>
+        </p:cNvPr>
+        <p:cNvGrpSpPr/>
+        <p:nvPr/>
+      </p:nvGrpSpPr>
+      <p:grpSpPr>
+        <a:xfrm>
+          <a:off x="0" y="0"/>
+          <a:ext cx="0" cy="0"/>
+          <a:chOff x="0" y="0"/>
+          <a:chExt cx="0" cy="0"/>
+        </a:xfrm>
+      </p:grpSpPr>
+      <p:sp>
+        <p:nvSpPr>
+          <p:cNvPr id="2" name="Title 1">
+            <a:extLst>
+              <a:ext uri="{FF2B5EF4-FFF2-40B4-BE49-F238E27FC236}">
+                <a16:creationId xmlns:a16="http://schemas.microsoft.com/office/drawing/2014/main" id="{B73B0228-75D9-D38D-AB31-304ED08031F5}"/>
+              </a:ext>
+            </a:extLst>
+          </p:cNvPr>
+          <p:cNvSpPr>
+            <a:spLocks noGrp="1"/>
+          </p:cNvSpPr>
+          <p:nvPr>
+            <p:ph type="title"/>
+          </p:nvPr>
+        </p:nvSpPr>
+        <p:spPr/>
+        <p:txBody>
+          <a:bodyPr/>
+          <a:lstStyle/>
+          <a:p>
+            <a:r>
+              <a:rPr lang="en-US" dirty="0"/>
+              <a:t>Analysis 1 Strengths 2</a:t>
+            </a:r>
+          </a:p>
+        </p:txBody>
+      </p:sp>
+      <p:sp>
+        <p:nvSpPr>
+          <p:cNvPr id="3" name="Content Placeholder 2">
+            <a:extLst>
+              <a:ext uri="{FF2B5EF4-FFF2-40B4-BE49-F238E27FC236}">
+                <a16:creationId xmlns:a16="http://schemas.microsoft.com/office/drawing/2014/main" id="{19D3E9C4-35D5-66B4-CB4B-4384A3D28900}"/>
+              </a:ext>
+            </a:extLst>
+          </p:cNvPr>
+          <p:cNvSpPr>
+            <a:spLocks noGrp="1"/>
+          </p:cNvSpPr>
+          <p:nvPr>
+            <p:ph idx="1"/>
+          </p:nvPr>
+        </p:nvSpPr>
+        <p:spPr/>
+        <p:txBody>
+          <a:bodyPr/>
+          <a:lstStyle/>
+          <a:p>
+            <a:endParaRPr lang="en-US"/>
+          </a:p>
+        </p:txBody>
+      </p:sp>
+    </p:spTree>
+    <p:extLst>
+      <p:ext uri="{BB962C8B-B14F-4D97-AF65-F5344CB8AC3E}">
+        <p14:creationId xmlns:p14="http://schemas.microsoft.com/office/powerpoint/2010/main" val="2996620938"/>
+      </p:ext>
+    </p:extLst>
+  </p:cSld>
+  <p:clrMapOvr>
+    <a:masterClrMapping/>
+  </p:clrMapOvr>
+</p:sld>
+</file>
+
+<file path=ppt/slides/slide6.xml><?xml version="1.0" encoding="utf-8"?>
+<p:sld xmlns:a="http://schemas.openxmlformats.org/drawingml/2006/main" xmlns:r="http://schemas.openxmlformats.org/officeDocument/2006/relationships" xmlns:p="http://schemas.openxmlformats.org/presentationml/2006/main">
+  <p:cSld>
+    <p:spTree>
+      <p:nvGrpSpPr>
+        <p:cNvPr id="1" name="">
+          <a:extLst>
+            <a:ext uri="{FF2B5EF4-FFF2-40B4-BE49-F238E27FC236}">
+              <a16:creationId xmlns:a16="http://schemas.microsoft.com/office/drawing/2014/main" id="{FF36F8D8-9E85-FEE4-7A37-E3799247A7B5}"/>
+            </a:ext>
+          </a:extLst>
+        </p:cNvPr>
+        <p:cNvGrpSpPr/>
+        <p:nvPr/>
+      </p:nvGrpSpPr>
+      <p:grpSpPr>
+        <a:xfrm>
+          <a:off x="0" y="0"/>
+          <a:ext cx="0" cy="0"/>
+          <a:chOff x="0" y="0"/>
+          <a:chExt cx="0" cy="0"/>
+        </a:xfrm>
+      </p:grpSpPr>
+      <p:sp>
+        <p:nvSpPr>
+          <p:cNvPr id="2" name="Title 1">
+            <a:extLst>
+              <a:ext uri="{FF2B5EF4-FFF2-40B4-BE49-F238E27FC236}">
+                <a16:creationId xmlns:a16="http://schemas.microsoft.com/office/drawing/2014/main" id="{DE1C1A9D-2042-8FBB-DEDE-D181A6DE87DC}"/>
+              </a:ext>
+            </a:extLst>
+          </p:cNvPr>
+          <p:cNvSpPr>
+            <a:spLocks noGrp="1"/>
+          </p:cNvSpPr>
+          <p:nvPr>
+            <p:ph type="title"/>
+          </p:nvPr>
+        </p:nvSpPr>
+        <p:spPr/>
+        <p:txBody>
+          <a:bodyPr/>
+          <a:lstStyle/>
+          <a:p>
+            <a:r>
+              <a:rPr lang="en-US" dirty="0"/>
+              <a:t>Analysis 2 Weaknesses 1</a:t>
+            </a:r>
+          </a:p>
+        </p:txBody>
+      </p:sp>
+      <p:sp>
+        <p:nvSpPr>
+          <p:cNvPr id="3" name="Content Placeholder 2">
+            <a:extLst>
+              <a:ext uri="{FF2B5EF4-FFF2-40B4-BE49-F238E27FC236}">
+                <a16:creationId xmlns:a16="http://schemas.microsoft.com/office/drawing/2014/main" id="{0395F842-E000-BE3D-C22F-45DD9C956619}"/>
+              </a:ext>
+            </a:extLst>
+          </p:cNvPr>
+          <p:cNvSpPr>
+            <a:spLocks noGrp="1"/>
+          </p:cNvSpPr>
+          <p:nvPr>
+            <p:ph idx="1"/>
+          </p:nvPr>
+        </p:nvSpPr>
+        <p:spPr/>
+        <p:txBody>
+          <a:bodyPr/>
+          <a:lstStyle/>
+          <a:p>
+            <a:endParaRPr lang="en-US"/>
+          </a:p>
+        </p:txBody>
+      </p:sp>
+    </p:spTree>
+    <p:extLst>
+      <p:ext uri="{BB962C8B-B14F-4D97-AF65-F5344CB8AC3E}">
+        <p14:creationId xmlns:p14="http://schemas.microsoft.com/office/powerpoint/2010/main" val="3150154730"/>
+      </p:ext>
+    </p:extLst>
+  </p:cSld>
+  <p:clrMapOvr>
+    <a:masterClrMapping/>
+  </p:clrMapOvr>
+</p:sld>
+</file>
+
+<file path=ppt/slides/slide7.xml><?xml version="1.0" encoding="utf-8"?>
+<p:sld xmlns:a="http://schemas.openxmlformats.org/drawingml/2006/main" xmlns:r="http://schemas.openxmlformats.org/officeDocument/2006/relationships" xmlns:p="http://schemas.openxmlformats.org/presentationml/2006/main">
+  <p:cSld>
+    <p:spTree>
+      <p:nvGrpSpPr>
+        <p:cNvPr id="1" name="">
+          <a:extLst>
+            <a:ext uri="{FF2B5EF4-FFF2-40B4-BE49-F238E27FC236}">
+              <a16:creationId xmlns:a16="http://schemas.microsoft.com/office/drawing/2014/main" id="{0BAA6A4C-7A5C-7A0B-F7C6-0CCF312147E1}"/>
+            </a:ext>
+          </a:extLst>
+        </p:cNvPr>
+        <p:cNvGrpSpPr/>
+        <p:nvPr/>
+      </p:nvGrpSpPr>
+      <p:grpSpPr>
+        <a:xfrm>
+          <a:off x="0" y="0"/>
+          <a:ext cx="0" cy="0"/>
+          <a:chOff x="0" y="0"/>
+          <a:chExt cx="0" cy="0"/>
+        </a:xfrm>
+      </p:grpSpPr>
+      <p:sp>
+        <p:nvSpPr>
+          <p:cNvPr id="2" name="Title 1">
+            <a:extLst>
+              <a:ext uri="{FF2B5EF4-FFF2-40B4-BE49-F238E27FC236}">
+                <a16:creationId xmlns:a16="http://schemas.microsoft.com/office/drawing/2014/main" id="{8BC28EA6-2CCD-7FC7-6EB6-4F0EB72E511F}"/>
+              </a:ext>
+            </a:extLst>
+          </p:cNvPr>
+          <p:cNvSpPr>
+            <a:spLocks noGrp="1"/>
+          </p:cNvSpPr>
+          <p:nvPr>
+            <p:ph type="title"/>
+          </p:nvPr>
+        </p:nvSpPr>
+        <p:spPr/>
+        <p:txBody>
+          <a:bodyPr/>
+          <a:lstStyle/>
+          <a:p>
+            <a:r>
+              <a:rPr lang="en-US" dirty="0"/>
+              <a:t>Analysis 2 Weaknesses 2</a:t>
+            </a:r>
+          </a:p>
+        </p:txBody>
+      </p:sp>
+      <p:sp>
+        <p:nvSpPr>
+          <p:cNvPr id="3" name="Content Placeholder 2">
+            <a:extLst>
+              <a:ext uri="{FF2B5EF4-FFF2-40B4-BE49-F238E27FC236}">
+                <a16:creationId xmlns:a16="http://schemas.microsoft.com/office/drawing/2014/main" id="{8134932C-0E57-C49F-2D12-9BB65C82AE82}"/>
+              </a:ext>
+            </a:extLst>
+          </p:cNvPr>
+          <p:cNvSpPr>
+            <a:spLocks noGrp="1"/>
+          </p:cNvSpPr>
+          <p:nvPr>
+            <p:ph idx="1"/>
+          </p:nvPr>
+        </p:nvSpPr>
+        <p:spPr/>
+        <p:txBody>
+          <a:bodyPr/>
+          <a:lstStyle/>
+          <a:p>
+            <a:endParaRPr lang="en-US"/>
+          </a:p>
+        </p:txBody>
+      </p:sp>
+    </p:spTree>
+    <p:extLst>
+      <p:ext uri="{BB962C8B-B14F-4D97-AF65-F5344CB8AC3E}">
+        <p14:creationId xmlns:p14="http://schemas.microsoft.com/office/powerpoint/2010/main" val="343516046"/>
+      </p:ext>
+    </p:extLst>
+  </p:cSld>
+  <p:clrMapOvr>
+    <a:masterClrMapping/>
+  </p:clrMapOvr>
+</p:sld>
+</file>
+
+<file path=ppt/slides/slide8.xml><?xml version="1.0" encoding="utf-8"?>
+<p:sld xmlns:a="http://schemas.openxmlformats.org/drawingml/2006/main" xmlns:r="http://schemas.openxmlformats.org/officeDocument/2006/relationships" xmlns:p="http://schemas.openxmlformats.org/presentationml/2006/main">
+  <p:cSld>
+    <p:spTree>
+      <p:nvGrpSpPr>
+        <p:cNvPr id="1" name="">
+          <a:extLst>
+            <a:ext uri="{FF2B5EF4-FFF2-40B4-BE49-F238E27FC236}">
+              <a16:creationId xmlns:a16="http://schemas.microsoft.com/office/drawing/2014/main" id="{06B155D0-0685-0B6D-0C83-2F643820DA84}"/>
+            </a:ext>
+          </a:extLst>
+        </p:cNvPr>
+        <p:cNvGrpSpPr/>
+        <p:nvPr/>
+      </p:nvGrpSpPr>
+      <p:grpSpPr>
+        <a:xfrm>
+          <a:off x="0" y="0"/>
+          <a:ext cx="0" cy="0"/>
+          <a:chOff x="0" y="0"/>
+          <a:chExt cx="0" cy="0"/>
+        </a:xfrm>
+      </p:grpSpPr>
+      <p:sp>
+        <p:nvSpPr>
+          <p:cNvPr id="2" name="Title 1">
+            <a:extLst>
+              <a:ext uri="{FF2B5EF4-FFF2-40B4-BE49-F238E27FC236}">
+                <a16:creationId xmlns:a16="http://schemas.microsoft.com/office/drawing/2014/main" id="{94F3DFCE-0E39-2858-5029-E0852243D3E6}"/>
+              </a:ext>
+            </a:extLst>
+          </p:cNvPr>
+          <p:cNvSpPr>
+            <a:spLocks noGrp="1"/>
+          </p:cNvSpPr>
+          <p:nvPr>
+            <p:ph type="title"/>
+          </p:nvPr>
+        </p:nvSpPr>
+        <p:spPr/>
+        <p:txBody>
+          <a:bodyPr/>
+          <a:lstStyle/>
+          <a:p>
+            <a:r>
+              <a:rPr lang="en-US" dirty="0"/>
+              <a:t>Analysis 3 Opportunities 1</a:t>
+            </a:r>
+          </a:p>
+        </p:txBody>
+      </p:sp>
+      <p:sp>
+        <p:nvSpPr>
+          <p:cNvPr id="3" name="Content Placeholder 2">
+            <a:extLst>
+              <a:ext uri="{FF2B5EF4-FFF2-40B4-BE49-F238E27FC236}">
+                <a16:creationId xmlns:a16="http://schemas.microsoft.com/office/drawing/2014/main" id="{6D5416EB-D749-4744-3FBF-1CB6BF91BA3A}"/>
+              </a:ext>
+            </a:extLst>
+          </p:cNvPr>
+          <p:cNvSpPr>
+            <a:spLocks noGrp="1"/>
+          </p:cNvSpPr>
+          <p:nvPr>
+            <p:ph idx="1"/>
+          </p:nvPr>
+        </p:nvSpPr>
+        <p:spPr/>
+        <p:txBody>
+          <a:bodyPr/>
+          <a:lstStyle/>
+          <a:p>
+            <a:endParaRPr lang="en-US"/>
+          </a:p>
+        </p:txBody>
+      </p:sp>
+    </p:spTree>
+    <p:extLst>
+      <p:ext uri="{BB962C8B-B14F-4D97-AF65-F5344CB8AC3E}">
+        <p14:creationId xmlns:p14="http://schemas.microsoft.com/office/powerpoint/2010/main" val="3435706688"/>
+      </p:ext>
+    </p:extLst>
+  </p:cSld>
+  <p:clrMapOvr>
+    <a:masterClrMapping/>
+  </p:clrMapOvr>
+</p:sld>
+</file>
+
+<file path=ppt/slides/slide9.xml><?xml version="1.0" encoding="utf-8"?>
+<p:sld xmlns:a="http://schemas.openxmlformats.org/drawingml/2006/main" xmlns:r="http://schemas.openxmlformats.org/officeDocument/2006/relationships" xmlns:p="http://schemas.openxmlformats.org/presentationml/2006/main">
+  <p:cSld>
+    <p:spTree>
+      <p:nvGrpSpPr>
+        <p:cNvPr id="1" name=""/>
+        <p:cNvGrpSpPr/>
+        <p:nvPr/>
+      </p:nvGrpSpPr>
+      <p:grpSpPr>
+        <a:xfrm>
+          <a:off x="0" y="0"/>
+          <a:ext cx="0" cy="0"/>
+          <a:chOff x="0" y="0"/>
+          <a:chExt cx="0" cy="0"/>
+        </a:xfrm>
+      </p:grpSpPr>
+      <p:sp>
+        <p:nvSpPr>
+          <p:cNvPr id="2" name="Title 1">
+            <a:extLst>
+              <a:ext uri="{FF2B5EF4-FFF2-40B4-BE49-F238E27FC236}">
+                <a16:creationId xmlns:a16="http://schemas.microsoft.com/office/drawing/2014/main" id="{5A019B50-658E-240A-5EF5-18DFB48C4DB3}"/>
+              </a:ext>
+            </a:extLst>
+          </p:cNvPr>
+          <p:cNvSpPr>
+            <a:spLocks noGrp="1"/>
+          </p:cNvSpPr>
+          <p:nvPr>
+            <p:ph type="title"/>
+          </p:nvPr>
+        </p:nvSpPr>
+        <p:spPr/>
+        <p:txBody>
+          <a:bodyPr/>
+          <a:lstStyle/>
+          <a:p>
+            <a:r>
+              <a:rPr lang="en-US" dirty="0"/>
+              <a:t>Analysis 3 Opportunities 2</a:t>
+            </a:r>
+          </a:p>
+        </p:txBody>
+      </p:sp>
+      <p:sp>
+        <p:nvSpPr>
+          <p:cNvPr id="3" name="Content Placeholder 2">
+            <a:extLst>
+              <a:ext uri="{FF2B5EF4-FFF2-40B4-BE49-F238E27FC236}">
+                <a16:creationId xmlns:a16="http://schemas.microsoft.com/office/drawing/2014/main" id="{029FA1F5-5121-5C37-06A1-25AEB2125E7B}"/>
+              </a:ext>
+            </a:extLst>
+          </p:cNvPr>
+          <p:cNvSpPr>
+            <a:spLocks noGrp="1"/>
+          </p:cNvSpPr>
+          <p:nvPr>
+            <p:ph idx="1"/>
+          </p:nvPr>
+        </p:nvSpPr>
+        <p:spPr/>
+        <p:txBody>
+          <a:bodyPr/>
+          <a:lstStyle/>
+          <a:p>
+            <a:endParaRPr lang="en-US"/>
+          </a:p>
+        </p:txBody>
+      </p:sp>
+    </p:spTree>
+    <p:extLst>
+      <p:ext uri="{BB962C8B-B14F-4D97-AF65-F5344CB8AC3E}">
+        <p14:creationId xmlns:p14="http://schemas.microsoft.com/office/powerpoint/2010/main" val="1640769834"/>
       </p:ext>
     </p:extLst>
   </p:cSld>

--- a/week-04/Pham_liquor_sales_presentation.pptx
+++ b/week-04/Pham_liquor_sales_presentation.pptx
@@ -6,17 +6,18 @@
   </p:sldMasterIdLst>
   <p:sldIdLst>
     <p:sldId id="256" r:id="rId2"/>
-    <p:sldId id="257" r:id="rId3"/>
-    <p:sldId id="258" r:id="rId4"/>
-    <p:sldId id="259" r:id="rId5"/>
-    <p:sldId id="260" r:id="rId6"/>
-    <p:sldId id="261" r:id="rId7"/>
-    <p:sldId id="262" r:id="rId8"/>
-    <p:sldId id="263" r:id="rId9"/>
-    <p:sldId id="264" r:id="rId10"/>
-    <p:sldId id="265" r:id="rId11"/>
-    <p:sldId id="266" r:id="rId12"/>
-    <p:sldId id="267" r:id="rId13"/>
+    <p:sldId id="268" r:id="rId3"/>
+    <p:sldId id="257" r:id="rId4"/>
+    <p:sldId id="258" r:id="rId5"/>
+    <p:sldId id="259" r:id="rId6"/>
+    <p:sldId id="260" r:id="rId7"/>
+    <p:sldId id="261" r:id="rId8"/>
+    <p:sldId id="262" r:id="rId9"/>
+    <p:sldId id="263" r:id="rId10"/>
+    <p:sldId id="264" r:id="rId11"/>
+    <p:sldId id="265" r:id="rId12"/>
+    <p:sldId id="266" r:id="rId13"/>
+    <p:sldId id="267" r:id="rId14"/>
   </p:sldIdLst>
   <p:sldSz cx="12192000" cy="6858000"/>
   <p:notesSz cx="6858000" cy="9144000"/>
@@ -3418,6 +3419,89 @@
   <p:cSld>
     <p:spTree>
       <p:nvGrpSpPr>
+        <p:cNvPr id="1" name=""/>
+        <p:cNvGrpSpPr/>
+        <p:nvPr/>
+      </p:nvGrpSpPr>
+      <p:grpSpPr>
+        <a:xfrm>
+          <a:off x="0" y="0"/>
+          <a:ext cx="0" cy="0"/>
+          <a:chOff x="0" y="0"/>
+          <a:chExt cx="0" cy="0"/>
+        </a:xfrm>
+      </p:grpSpPr>
+      <p:sp>
+        <p:nvSpPr>
+          <p:cNvPr id="2" name="Title 1">
+            <a:extLst>
+              <a:ext uri="{FF2B5EF4-FFF2-40B4-BE49-F238E27FC236}">
+                <a16:creationId xmlns:a16="http://schemas.microsoft.com/office/drawing/2014/main" id="{5A019B50-658E-240A-5EF5-18DFB48C4DB3}"/>
+              </a:ext>
+            </a:extLst>
+          </p:cNvPr>
+          <p:cNvSpPr>
+            <a:spLocks noGrp="1"/>
+          </p:cNvSpPr>
+          <p:nvPr>
+            <p:ph type="title"/>
+          </p:nvPr>
+        </p:nvSpPr>
+        <p:spPr/>
+        <p:txBody>
+          <a:bodyPr/>
+          <a:lstStyle/>
+          <a:p>
+            <a:r>
+              <a:rPr lang="en-US" dirty="0"/>
+              <a:t>Analysis 3 Opportunities 2</a:t>
+            </a:r>
+          </a:p>
+        </p:txBody>
+      </p:sp>
+      <p:sp>
+        <p:nvSpPr>
+          <p:cNvPr id="3" name="Content Placeholder 2">
+            <a:extLst>
+              <a:ext uri="{FF2B5EF4-FFF2-40B4-BE49-F238E27FC236}">
+                <a16:creationId xmlns:a16="http://schemas.microsoft.com/office/drawing/2014/main" id="{029FA1F5-5121-5C37-06A1-25AEB2125E7B}"/>
+              </a:ext>
+            </a:extLst>
+          </p:cNvPr>
+          <p:cNvSpPr>
+            <a:spLocks noGrp="1"/>
+          </p:cNvSpPr>
+          <p:nvPr>
+            <p:ph idx="1"/>
+          </p:nvPr>
+        </p:nvSpPr>
+        <p:spPr/>
+        <p:txBody>
+          <a:bodyPr/>
+          <a:lstStyle/>
+          <a:p>
+            <a:endParaRPr lang="en-US"/>
+          </a:p>
+        </p:txBody>
+      </p:sp>
+    </p:spTree>
+    <p:extLst>
+      <p:ext uri="{BB962C8B-B14F-4D97-AF65-F5344CB8AC3E}">
+        <p14:creationId xmlns:p14="http://schemas.microsoft.com/office/powerpoint/2010/main" val="1640769834"/>
+      </p:ext>
+    </p:extLst>
+  </p:cSld>
+  <p:clrMapOvr>
+    <a:masterClrMapping/>
+  </p:clrMapOvr>
+</p:sld>
+</file>
+
+<file path=ppt/slides/slide11.xml><?xml version="1.0" encoding="utf-8"?>
+<p:sld xmlns:a="http://schemas.openxmlformats.org/drawingml/2006/main" xmlns:r="http://schemas.openxmlformats.org/officeDocument/2006/relationships" xmlns:p="http://schemas.openxmlformats.org/presentationml/2006/main">
+  <p:cSld>
+    <p:spTree>
+      <p:nvGrpSpPr>
         <p:cNvPr id="1" name="">
           <a:extLst>
             <a:ext uri="{FF2B5EF4-FFF2-40B4-BE49-F238E27FC236}">
@@ -3502,7 +3586,7 @@
 </p:sld>
 </file>
 
-<file path=ppt/slides/slide11.xml><?xml version="1.0" encoding="utf-8"?>
+<file path=ppt/slides/slide12.xml><?xml version="1.0" encoding="utf-8"?>
 <p:sld xmlns:a="http://schemas.openxmlformats.org/drawingml/2006/main" xmlns:r="http://schemas.openxmlformats.org/officeDocument/2006/relationships" xmlns:p="http://schemas.openxmlformats.org/presentationml/2006/main">
   <p:cSld>
     <p:spTree>
@@ -3591,7 +3675,7 @@
 </p:sld>
 </file>
 
-<file path=ppt/slides/slide12.xml><?xml version="1.0" encoding="utf-8"?>
+<file path=ppt/slides/slide13.xml><?xml version="1.0" encoding="utf-8"?>
 <p:sld xmlns:a="http://schemas.openxmlformats.org/drawingml/2006/main" xmlns:r="http://schemas.openxmlformats.org/officeDocument/2006/relationships" xmlns:p="http://schemas.openxmlformats.org/presentationml/2006/main">
   <p:cSld>
     <p:spTree>
@@ -3702,7 +3786,7 @@
           <p:cNvPr id="2" name="Title 1">
             <a:extLst>
               <a:ext uri="{FF2B5EF4-FFF2-40B4-BE49-F238E27FC236}">
-                <a16:creationId xmlns:a16="http://schemas.microsoft.com/office/drawing/2014/main" id="{3BF32740-F662-BCD9-5E98-135BDC2BBE9F}"/>
+                <a16:creationId xmlns:a16="http://schemas.microsoft.com/office/drawing/2014/main" id="{98C590B0-CD87-8061-6E30-BFE5DF5D1947}"/>
               </a:ext>
             </a:extLst>
           </p:cNvPr>
@@ -3720,7 +3804,7 @@
           <a:p>
             <a:r>
               <a:rPr lang="en-US" dirty="0"/>
-              <a:t>Scenario</a:t>
+              <a:t>About Us</a:t>
             </a:r>
           </a:p>
         </p:txBody>
@@ -3730,7 +3814,7 @@
           <p:cNvPr id="3" name="Content Placeholder 2">
             <a:extLst>
               <a:ext uri="{FF2B5EF4-FFF2-40B4-BE49-F238E27FC236}">
-                <a16:creationId xmlns:a16="http://schemas.microsoft.com/office/drawing/2014/main" id="{DEC6ED37-AF01-E906-5F3A-EEB9B5127614}"/>
+                <a16:creationId xmlns:a16="http://schemas.microsoft.com/office/drawing/2014/main" id="{FEE45D3A-A9EC-FB84-F3F2-F395D25570D9}"/>
               </a:ext>
             </a:extLst>
           </p:cNvPr>
@@ -3753,7 +3837,7 @@
     </p:spTree>
     <p:extLst>
       <p:ext uri="{BB962C8B-B14F-4D97-AF65-F5344CB8AC3E}">
-        <p14:creationId xmlns:p14="http://schemas.microsoft.com/office/powerpoint/2010/main" val="2707976681"/>
+        <p14:creationId xmlns:p14="http://schemas.microsoft.com/office/powerpoint/2010/main" val="2354719096"/>
       </p:ext>
     </p:extLst>
   </p:cSld>
@@ -3785,6 +3869,89 @@
           <p:cNvPr id="2" name="Title 1">
             <a:extLst>
               <a:ext uri="{FF2B5EF4-FFF2-40B4-BE49-F238E27FC236}">
+                <a16:creationId xmlns:a16="http://schemas.microsoft.com/office/drawing/2014/main" id="{3BF32740-F662-BCD9-5E98-135BDC2BBE9F}"/>
+              </a:ext>
+            </a:extLst>
+          </p:cNvPr>
+          <p:cNvSpPr>
+            <a:spLocks noGrp="1"/>
+          </p:cNvSpPr>
+          <p:nvPr>
+            <p:ph type="title"/>
+          </p:nvPr>
+        </p:nvSpPr>
+        <p:spPr/>
+        <p:txBody>
+          <a:bodyPr/>
+          <a:lstStyle/>
+          <a:p>
+            <a:r>
+              <a:rPr lang="en-US" dirty="0"/>
+              <a:t>Scenario</a:t>
+            </a:r>
+          </a:p>
+        </p:txBody>
+      </p:sp>
+      <p:sp>
+        <p:nvSpPr>
+          <p:cNvPr id="3" name="Content Placeholder 2">
+            <a:extLst>
+              <a:ext uri="{FF2B5EF4-FFF2-40B4-BE49-F238E27FC236}">
+                <a16:creationId xmlns:a16="http://schemas.microsoft.com/office/drawing/2014/main" id="{DEC6ED37-AF01-E906-5F3A-EEB9B5127614}"/>
+              </a:ext>
+            </a:extLst>
+          </p:cNvPr>
+          <p:cNvSpPr>
+            <a:spLocks noGrp="1"/>
+          </p:cNvSpPr>
+          <p:nvPr>
+            <p:ph idx="1"/>
+          </p:nvPr>
+        </p:nvSpPr>
+        <p:spPr/>
+        <p:txBody>
+          <a:bodyPr/>
+          <a:lstStyle/>
+          <a:p>
+            <a:endParaRPr lang="en-US"/>
+          </a:p>
+        </p:txBody>
+      </p:sp>
+    </p:spTree>
+    <p:extLst>
+      <p:ext uri="{BB962C8B-B14F-4D97-AF65-F5344CB8AC3E}">
+        <p14:creationId xmlns:p14="http://schemas.microsoft.com/office/powerpoint/2010/main" val="2707976681"/>
+      </p:ext>
+    </p:extLst>
+  </p:cSld>
+  <p:clrMapOvr>
+    <a:masterClrMapping/>
+  </p:clrMapOvr>
+</p:sld>
+</file>
+
+<file path=ppt/slides/slide4.xml><?xml version="1.0" encoding="utf-8"?>
+<p:sld xmlns:a="http://schemas.openxmlformats.org/drawingml/2006/main" xmlns:r="http://schemas.openxmlformats.org/officeDocument/2006/relationships" xmlns:p="http://schemas.openxmlformats.org/presentationml/2006/main">
+  <p:cSld>
+    <p:spTree>
+      <p:nvGrpSpPr>
+        <p:cNvPr id="1" name=""/>
+        <p:cNvGrpSpPr/>
+        <p:nvPr/>
+      </p:nvGrpSpPr>
+      <p:grpSpPr>
+        <a:xfrm>
+          <a:off x="0" y="0"/>
+          <a:ext cx="0" cy="0"/>
+          <a:chOff x="0" y="0"/>
+          <a:chExt cx="0" cy="0"/>
+        </a:xfrm>
+      </p:grpSpPr>
+      <p:sp>
+        <p:nvSpPr>
+          <p:cNvPr id="2" name="Title 1">
+            <a:extLst>
+              <a:ext uri="{FF2B5EF4-FFF2-40B4-BE49-F238E27FC236}">
                 <a16:creationId xmlns:a16="http://schemas.microsoft.com/office/drawing/2014/main" id="{9E218537-E472-8EB1-74F4-698C93711D74}"/>
               </a:ext>
             </a:extLst>
@@ -3846,7 +4013,7 @@
 </p:sld>
 </file>
 
-<file path=ppt/slides/slide4.xml><?xml version="1.0" encoding="utf-8"?>
+<file path=ppt/slides/slide5.xml><?xml version="1.0" encoding="utf-8"?>
 <p:sld xmlns:a="http://schemas.openxmlformats.org/drawingml/2006/main" xmlns:r="http://schemas.openxmlformats.org/officeDocument/2006/relationships" xmlns:p="http://schemas.openxmlformats.org/presentationml/2006/main">
   <p:cSld>
     <p:spTree>
@@ -3935,7 +4102,7 @@
 </p:sld>
 </file>
 
-<file path=ppt/slides/slide5.xml><?xml version="1.0" encoding="utf-8"?>
+<file path=ppt/slides/slide6.xml><?xml version="1.0" encoding="utf-8"?>
 <p:sld xmlns:a="http://schemas.openxmlformats.org/drawingml/2006/main" xmlns:r="http://schemas.openxmlformats.org/officeDocument/2006/relationships" xmlns:p="http://schemas.openxmlformats.org/presentationml/2006/main">
   <p:cSld>
     <p:spTree>
@@ -4024,7 +4191,7 @@
 </p:sld>
 </file>
 
-<file path=ppt/slides/slide6.xml><?xml version="1.0" encoding="utf-8"?>
+<file path=ppt/slides/slide7.xml><?xml version="1.0" encoding="utf-8"?>
 <p:sld xmlns:a="http://schemas.openxmlformats.org/drawingml/2006/main" xmlns:r="http://schemas.openxmlformats.org/officeDocument/2006/relationships" xmlns:p="http://schemas.openxmlformats.org/presentationml/2006/main">
   <p:cSld>
     <p:spTree>
@@ -4113,7 +4280,7 @@
 </p:sld>
 </file>
 
-<file path=ppt/slides/slide7.xml><?xml version="1.0" encoding="utf-8"?>
+<file path=ppt/slides/slide8.xml><?xml version="1.0" encoding="utf-8"?>
 <p:sld xmlns:a="http://schemas.openxmlformats.org/drawingml/2006/main" xmlns:r="http://schemas.openxmlformats.org/officeDocument/2006/relationships" xmlns:p="http://schemas.openxmlformats.org/presentationml/2006/main">
   <p:cSld>
     <p:spTree>
@@ -4202,7 +4369,7 @@
 </p:sld>
 </file>
 
-<file path=ppt/slides/slide8.xml><?xml version="1.0" encoding="utf-8"?>
+<file path=ppt/slides/slide9.xml><?xml version="1.0" encoding="utf-8"?>
 <p:sld xmlns:a="http://schemas.openxmlformats.org/drawingml/2006/main" xmlns:r="http://schemas.openxmlformats.org/officeDocument/2006/relationships" xmlns:p="http://schemas.openxmlformats.org/presentationml/2006/main">
   <p:cSld>
     <p:spTree>
@@ -4282,89 +4449,6 @@
     <p:extLst>
       <p:ext uri="{BB962C8B-B14F-4D97-AF65-F5344CB8AC3E}">
         <p14:creationId xmlns:p14="http://schemas.microsoft.com/office/powerpoint/2010/main" val="3435706688"/>
-      </p:ext>
-    </p:extLst>
-  </p:cSld>
-  <p:clrMapOvr>
-    <a:masterClrMapping/>
-  </p:clrMapOvr>
-</p:sld>
-</file>
-
-<file path=ppt/slides/slide9.xml><?xml version="1.0" encoding="utf-8"?>
-<p:sld xmlns:a="http://schemas.openxmlformats.org/drawingml/2006/main" xmlns:r="http://schemas.openxmlformats.org/officeDocument/2006/relationships" xmlns:p="http://schemas.openxmlformats.org/presentationml/2006/main">
-  <p:cSld>
-    <p:spTree>
-      <p:nvGrpSpPr>
-        <p:cNvPr id="1" name=""/>
-        <p:cNvGrpSpPr/>
-        <p:nvPr/>
-      </p:nvGrpSpPr>
-      <p:grpSpPr>
-        <a:xfrm>
-          <a:off x="0" y="0"/>
-          <a:ext cx="0" cy="0"/>
-          <a:chOff x="0" y="0"/>
-          <a:chExt cx="0" cy="0"/>
-        </a:xfrm>
-      </p:grpSpPr>
-      <p:sp>
-        <p:nvSpPr>
-          <p:cNvPr id="2" name="Title 1">
-            <a:extLst>
-              <a:ext uri="{FF2B5EF4-FFF2-40B4-BE49-F238E27FC236}">
-                <a16:creationId xmlns:a16="http://schemas.microsoft.com/office/drawing/2014/main" id="{5A019B50-658E-240A-5EF5-18DFB48C4DB3}"/>
-              </a:ext>
-            </a:extLst>
-          </p:cNvPr>
-          <p:cNvSpPr>
-            <a:spLocks noGrp="1"/>
-          </p:cNvSpPr>
-          <p:nvPr>
-            <p:ph type="title"/>
-          </p:nvPr>
-        </p:nvSpPr>
-        <p:spPr/>
-        <p:txBody>
-          <a:bodyPr/>
-          <a:lstStyle/>
-          <a:p>
-            <a:r>
-              <a:rPr lang="en-US" dirty="0"/>
-              <a:t>Analysis 3 Opportunities 2</a:t>
-            </a:r>
-          </a:p>
-        </p:txBody>
-      </p:sp>
-      <p:sp>
-        <p:nvSpPr>
-          <p:cNvPr id="3" name="Content Placeholder 2">
-            <a:extLst>
-              <a:ext uri="{FF2B5EF4-FFF2-40B4-BE49-F238E27FC236}">
-                <a16:creationId xmlns:a16="http://schemas.microsoft.com/office/drawing/2014/main" id="{029FA1F5-5121-5C37-06A1-25AEB2125E7B}"/>
-              </a:ext>
-            </a:extLst>
-          </p:cNvPr>
-          <p:cNvSpPr>
-            <a:spLocks noGrp="1"/>
-          </p:cNvSpPr>
-          <p:nvPr>
-            <p:ph idx="1"/>
-          </p:nvPr>
-        </p:nvSpPr>
-        <p:spPr/>
-        <p:txBody>
-          <a:bodyPr/>
-          <a:lstStyle/>
-          <a:p>
-            <a:endParaRPr lang="en-US"/>
-          </a:p>
-        </p:txBody>
-      </p:sp>
-    </p:spTree>
-    <p:extLst>
-      <p:ext uri="{BB962C8B-B14F-4D97-AF65-F5344CB8AC3E}">
-        <p14:creationId xmlns:p14="http://schemas.microsoft.com/office/powerpoint/2010/main" val="1640769834"/>
       </p:ext>
     </p:extLst>
   </p:cSld>

--- a/week-04/Pham_liquor_sales_presentation.pptx
+++ b/week-04/Pham_liquor_sales_presentation.pptx
@@ -4,6 +4,9 @@
   <p:sldMasterIdLst>
     <p:sldMasterId id="2147483672" r:id="rId1"/>
   </p:sldMasterIdLst>
+  <p:notesMasterIdLst>
+    <p:notesMasterId r:id="rId15"/>
+  </p:notesMasterIdLst>
   <p:sldIdLst>
     <p:sldId id="256" r:id="rId2"/>
     <p:sldId id="268" r:id="rId3"/>
@@ -116,7 +119,466 @@
       </a:defRPr>
     </a:lvl9pPr>
   </p:defaultTextStyle>
+  <p:extLst>
+    <p:ext uri="{EFAFB233-063F-42B5-8137-9DF3F51BA10A}">
+      <p15:sldGuideLst xmlns:p15="http://schemas.microsoft.com/office/powerpoint/2012/main"/>
+    </p:ext>
+  </p:extLst>
 </p:presentation>
+</file>
+
+<file path=ppt/notesMasters/notesMaster1.xml><?xml version="1.0" encoding="utf-8"?>
+<p:notesMaster xmlns:a="http://schemas.openxmlformats.org/drawingml/2006/main" xmlns:r="http://schemas.openxmlformats.org/officeDocument/2006/relationships" xmlns:p="http://schemas.openxmlformats.org/presentationml/2006/main">
+  <p:cSld>
+    <p:bg>
+      <p:bgRef idx="1001">
+        <a:schemeClr val="bg1"/>
+      </p:bgRef>
+    </p:bg>
+    <p:spTree>
+      <p:nvGrpSpPr>
+        <p:cNvPr id="1" name=""/>
+        <p:cNvGrpSpPr/>
+        <p:nvPr/>
+      </p:nvGrpSpPr>
+      <p:grpSpPr>
+        <a:xfrm>
+          <a:off x="0" y="0"/>
+          <a:ext cx="0" cy="0"/>
+          <a:chOff x="0" y="0"/>
+          <a:chExt cx="0" cy="0"/>
+        </a:xfrm>
+      </p:grpSpPr>
+      <p:sp>
+        <p:nvSpPr>
+          <p:cNvPr id="2" name="Header Placeholder 1"/>
+          <p:cNvSpPr>
+            <a:spLocks noGrp="1"/>
+          </p:cNvSpPr>
+          <p:nvPr>
+            <p:ph type="hdr" sz="quarter"/>
+          </p:nvPr>
+        </p:nvSpPr>
+        <p:spPr>
+          <a:xfrm>
+            <a:off x="0" y="0"/>
+            <a:ext cx="2971800" cy="458788"/>
+          </a:xfrm>
+          <a:prstGeom prst="rect">
+            <a:avLst/>
+          </a:prstGeom>
+        </p:spPr>
+        <p:txBody>
+          <a:bodyPr vert="horz" lIns="91440" tIns="45720" rIns="91440" bIns="45720" rtlCol="0"/>
+          <a:lstStyle>
+            <a:lvl1pPr algn="l">
+              <a:defRPr sz="1200"/>
+            </a:lvl1pPr>
+          </a:lstStyle>
+          <a:p>
+            <a:endParaRPr lang="en-US"/>
+          </a:p>
+        </p:txBody>
+      </p:sp>
+      <p:sp>
+        <p:nvSpPr>
+          <p:cNvPr id="3" name="Date Placeholder 2"/>
+          <p:cNvSpPr>
+            <a:spLocks noGrp="1"/>
+          </p:cNvSpPr>
+          <p:nvPr>
+            <p:ph type="dt" idx="1"/>
+          </p:nvPr>
+        </p:nvSpPr>
+        <p:spPr>
+          <a:xfrm>
+            <a:off x="3884613" y="0"/>
+            <a:ext cx="2971800" cy="458788"/>
+          </a:xfrm>
+          <a:prstGeom prst="rect">
+            <a:avLst/>
+          </a:prstGeom>
+        </p:spPr>
+        <p:txBody>
+          <a:bodyPr vert="horz" lIns="91440" tIns="45720" rIns="91440" bIns="45720" rtlCol="0"/>
+          <a:lstStyle>
+            <a:lvl1pPr algn="r">
+              <a:defRPr sz="1200"/>
+            </a:lvl1pPr>
+          </a:lstStyle>
+          <a:p>
+            <a:fld id="{5B0FB398-5626-4DAA-BD19-B2F8F3D1EB3C}" type="datetimeFigureOut">
+              <a:rPr lang="en-US" smtClean="0"/>
+              <a:t>4/29/2026</a:t>
+            </a:fld>
+            <a:endParaRPr lang="en-US"/>
+          </a:p>
+        </p:txBody>
+      </p:sp>
+      <p:sp>
+        <p:nvSpPr>
+          <p:cNvPr id="4" name="Slide Image Placeholder 3"/>
+          <p:cNvSpPr>
+            <a:spLocks noGrp="1" noRot="1" noChangeAspect="1"/>
+          </p:cNvSpPr>
+          <p:nvPr>
+            <p:ph type="sldImg" idx="2"/>
+          </p:nvPr>
+        </p:nvSpPr>
+        <p:spPr>
+          <a:xfrm>
+            <a:off x="685800" y="1143000"/>
+            <a:ext cx="5486400" cy="3086100"/>
+          </a:xfrm>
+          <a:prstGeom prst="rect">
+            <a:avLst/>
+          </a:prstGeom>
+          <a:noFill/>
+          <a:ln w="12700">
+            <a:solidFill>
+              <a:prstClr val="black"/>
+            </a:solidFill>
+          </a:ln>
+        </p:spPr>
+        <p:txBody>
+          <a:bodyPr vert="horz" lIns="91440" tIns="45720" rIns="91440" bIns="45720" rtlCol="0" anchor="ctr"/>
+          <a:lstStyle/>
+          <a:p>
+            <a:endParaRPr lang="en-US"/>
+          </a:p>
+        </p:txBody>
+      </p:sp>
+      <p:sp>
+        <p:nvSpPr>
+          <p:cNvPr id="5" name="Notes Placeholder 4"/>
+          <p:cNvSpPr>
+            <a:spLocks noGrp="1"/>
+          </p:cNvSpPr>
+          <p:nvPr>
+            <p:ph type="body" sz="quarter" idx="3"/>
+          </p:nvPr>
+        </p:nvSpPr>
+        <p:spPr>
+          <a:xfrm>
+            <a:off x="685800" y="4400550"/>
+            <a:ext cx="5486400" cy="3600450"/>
+          </a:xfrm>
+          <a:prstGeom prst="rect">
+            <a:avLst/>
+          </a:prstGeom>
+        </p:spPr>
+        <p:txBody>
+          <a:bodyPr vert="horz" lIns="91440" tIns="45720" rIns="91440" bIns="45720" rtlCol="0"/>
+          <a:lstStyle/>
+          <a:p>
+            <a:pPr lvl="0"/>
+            <a:r>
+              <a:rPr lang="en-US"/>
+              <a:t>Click to edit Master text styles</a:t>
+            </a:r>
+          </a:p>
+          <a:p>
+            <a:pPr lvl="1"/>
+            <a:r>
+              <a:rPr lang="en-US"/>
+              <a:t>Second level</a:t>
+            </a:r>
+          </a:p>
+          <a:p>
+            <a:pPr lvl="2"/>
+            <a:r>
+              <a:rPr lang="en-US"/>
+              <a:t>Third level</a:t>
+            </a:r>
+          </a:p>
+          <a:p>
+            <a:pPr lvl="3"/>
+            <a:r>
+              <a:rPr lang="en-US"/>
+              <a:t>Fourth level</a:t>
+            </a:r>
+          </a:p>
+          <a:p>
+            <a:pPr lvl="4"/>
+            <a:r>
+              <a:rPr lang="en-US"/>
+              <a:t>Fifth level</a:t>
+            </a:r>
+          </a:p>
+        </p:txBody>
+      </p:sp>
+      <p:sp>
+        <p:nvSpPr>
+          <p:cNvPr id="6" name="Footer Placeholder 5"/>
+          <p:cNvSpPr>
+            <a:spLocks noGrp="1"/>
+          </p:cNvSpPr>
+          <p:nvPr>
+            <p:ph type="ftr" sz="quarter" idx="4"/>
+          </p:nvPr>
+        </p:nvSpPr>
+        <p:spPr>
+          <a:xfrm>
+            <a:off x="0" y="8685213"/>
+            <a:ext cx="2971800" cy="458787"/>
+          </a:xfrm>
+          <a:prstGeom prst="rect">
+            <a:avLst/>
+          </a:prstGeom>
+        </p:spPr>
+        <p:txBody>
+          <a:bodyPr vert="horz" lIns="91440" tIns="45720" rIns="91440" bIns="45720" rtlCol="0" anchor="b"/>
+          <a:lstStyle>
+            <a:lvl1pPr algn="l">
+              <a:defRPr sz="1200"/>
+            </a:lvl1pPr>
+          </a:lstStyle>
+          <a:p>
+            <a:endParaRPr lang="en-US"/>
+          </a:p>
+        </p:txBody>
+      </p:sp>
+      <p:sp>
+        <p:nvSpPr>
+          <p:cNvPr id="7" name="Slide Number Placeholder 6"/>
+          <p:cNvSpPr>
+            <a:spLocks noGrp="1"/>
+          </p:cNvSpPr>
+          <p:nvPr>
+            <p:ph type="sldNum" sz="quarter" idx="5"/>
+          </p:nvPr>
+        </p:nvSpPr>
+        <p:spPr>
+          <a:xfrm>
+            <a:off x="3884613" y="8685213"/>
+            <a:ext cx="2971800" cy="458787"/>
+          </a:xfrm>
+          <a:prstGeom prst="rect">
+            <a:avLst/>
+          </a:prstGeom>
+        </p:spPr>
+        <p:txBody>
+          <a:bodyPr vert="horz" lIns="91440" tIns="45720" rIns="91440" bIns="45720" rtlCol="0" anchor="b"/>
+          <a:lstStyle>
+            <a:lvl1pPr algn="r">
+              <a:defRPr sz="1200"/>
+            </a:lvl1pPr>
+          </a:lstStyle>
+          <a:p>
+            <a:fld id="{9A18230D-6974-4A26-8365-62E356C4785F}" type="slidenum">
+              <a:rPr lang="en-US" smtClean="0"/>
+              <a:t>‹#›</a:t>
+            </a:fld>
+            <a:endParaRPr lang="en-US"/>
+          </a:p>
+        </p:txBody>
+      </p:sp>
+    </p:spTree>
+    <p:extLst>
+      <p:ext uri="{BB962C8B-B14F-4D97-AF65-F5344CB8AC3E}">
+        <p14:creationId xmlns:p14="http://schemas.microsoft.com/office/powerpoint/2010/main" val="1036821984"/>
+      </p:ext>
+    </p:extLst>
+  </p:cSld>
+  <p:clrMap bg1="lt1" tx1="dk1" bg2="lt2" tx2="dk2" accent1="accent1" accent2="accent2" accent3="accent3" accent4="accent4" accent5="accent5" accent6="accent6" hlink="hlink" folHlink="folHlink"/>
+  <p:notesStyle>
+    <a:lvl1pPr marL="0" algn="l" defTabSz="914400" rtl="0" eaLnBrk="1" latinLnBrk="0" hangingPunct="1">
+      <a:defRPr sz="1200" kern="1200">
+        <a:solidFill>
+          <a:schemeClr val="tx1"/>
+        </a:solidFill>
+        <a:latin typeface="+mn-lt"/>
+        <a:ea typeface="+mn-ea"/>
+        <a:cs typeface="+mn-cs"/>
+      </a:defRPr>
+    </a:lvl1pPr>
+    <a:lvl2pPr marL="457200" algn="l" defTabSz="914400" rtl="0" eaLnBrk="1" latinLnBrk="0" hangingPunct="1">
+      <a:defRPr sz="1200" kern="1200">
+        <a:solidFill>
+          <a:schemeClr val="tx1"/>
+        </a:solidFill>
+        <a:latin typeface="+mn-lt"/>
+        <a:ea typeface="+mn-ea"/>
+        <a:cs typeface="+mn-cs"/>
+      </a:defRPr>
+    </a:lvl2pPr>
+    <a:lvl3pPr marL="914400" algn="l" defTabSz="914400" rtl="0" eaLnBrk="1" latinLnBrk="0" hangingPunct="1">
+      <a:defRPr sz="1200" kern="1200">
+        <a:solidFill>
+          <a:schemeClr val="tx1"/>
+        </a:solidFill>
+        <a:latin typeface="+mn-lt"/>
+        <a:ea typeface="+mn-ea"/>
+        <a:cs typeface="+mn-cs"/>
+      </a:defRPr>
+    </a:lvl3pPr>
+    <a:lvl4pPr marL="1371600" algn="l" defTabSz="914400" rtl="0" eaLnBrk="1" latinLnBrk="0" hangingPunct="1">
+      <a:defRPr sz="1200" kern="1200">
+        <a:solidFill>
+          <a:schemeClr val="tx1"/>
+        </a:solidFill>
+        <a:latin typeface="+mn-lt"/>
+        <a:ea typeface="+mn-ea"/>
+        <a:cs typeface="+mn-cs"/>
+      </a:defRPr>
+    </a:lvl4pPr>
+    <a:lvl5pPr marL="1828800" algn="l" defTabSz="914400" rtl="0" eaLnBrk="1" latinLnBrk="0" hangingPunct="1">
+      <a:defRPr sz="1200" kern="1200">
+        <a:solidFill>
+          <a:schemeClr val="tx1"/>
+        </a:solidFill>
+        <a:latin typeface="+mn-lt"/>
+        <a:ea typeface="+mn-ea"/>
+        <a:cs typeface="+mn-cs"/>
+      </a:defRPr>
+    </a:lvl5pPr>
+    <a:lvl6pPr marL="2286000" algn="l" defTabSz="914400" rtl="0" eaLnBrk="1" latinLnBrk="0" hangingPunct="1">
+      <a:defRPr sz="1200" kern="1200">
+        <a:solidFill>
+          <a:schemeClr val="tx1"/>
+        </a:solidFill>
+        <a:latin typeface="+mn-lt"/>
+        <a:ea typeface="+mn-ea"/>
+        <a:cs typeface="+mn-cs"/>
+      </a:defRPr>
+    </a:lvl6pPr>
+    <a:lvl7pPr marL="2743200" algn="l" defTabSz="914400" rtl="0" eaLnBrk="1" latinLnBrk="0" hangingPunct="1">
+      <a:defRPr sz="1200" kern="1200">
+        <a:solidFill>
+          <a:schemeClr val="tx1"/>
+        </a:solidFill>
+        <a:latin typeface="+mn-lt"/>
+        <a:ea typeface="+mn-ea"/>
+        <a:cs typeface="+mn-cs"/>
+      </a:defRPr>
+    </a:lvl7pPr>
+    <a:lvl8pPr marL="3200400" algn="l" defTabSz="914400" rtl="0" eaLnBrk="1" latinLnBrk="0" hangingPunct="1">
+      <a:defRPr sz="1200" kern="1200">
+        <a:solidFill>
+          <a:schemeClr val="tx1"/>
+        </a:solidFill>
+        <a:latin typeface="+mn-lt"/>
+        <a:ea typeface="+mn-ea"/>
+        <a:cs typeface="+mn-cs"/>
+      </a:defRPr>
+    </a:lvl8pPr>
+    <a:lvl9pPr marL="3657600" algn="l" defTabSz="914400" rtl="0" eaLnBrk="1" latinLnBrk="0" hangingPunct="1">
+      <a:defRPr sz="1200" kern="1200">
+        <a:solidFill>
+          <a:schemeClr val="tx1"/>
+        </a:solidFill>
+        <a:latin typeface="+mn-lt"/>
+        <a:ea typeface="+mn-ea"/>
+        <a:cs typeface="+mn-cs"/>
+      </a:defRPr>
+    </a:lvl9pPr>
+  </p:notesStyle>
+</p:notesMaster>
+</file>
+
+<file path=ppt/notesSlides/notesSlide1.xml><?xml version="1.0" encoding="utf-8"?>
+<p:notes xmlns:a="http://schemas.openxmlformats.org/drawingml/2006/main" xmlns:r="http://schemas.openxmlformats.org/officeDocument/2006/relationships" xmlns:p="http://schemas.openxmlformats.org/presentationml/2006/main">
+  <p:cSld>
+    <p:spTree>
+      <p:nvGrpSpPr>
+        <p:cNvPr id="1" name=""/>
+        <p:cNvGrpSpPr/>
+        <p:nvPr/>
+      </p:nvGrpSpPr>
+      <p:grpSpPr>
+        <a:xfrm>
+          <a:off x="0" y="0"/>
+          <a:ext cx="0" cy="0"/>
+          <a:chOff x="0" y="0"/>
+          <a:chExt cx="0" cy="0"/>
+        </a:xfrm>
+      </p:grpSpPr>
+      <p:sp>
+        <p:nvSpPr>
+          <p:cNvPr id="2" name="Slide Image Placeholder 1"/>
+          <p:cNvSpPr>
+            <a:spLocks noGrp="1" noRot="1" noChangeAspect="1"/>
+          </p:cNvSpPr>
+          <p:nvPr>
+            <p:ph type="sldImg"/>
+          </p:nvPr>
+        </p:nvSpPr>
+        <p:spPr/>
+      </p:sp>
+      <p:sp>
+        <p:nvSpPr>
+          <p:cNvPr id="3" name="Notes Placeholder 2"/>
+          <p:cNvSpPr>
+            <a:spLocks noGrp="1"/>
+          </p:cNvSpPr>
+          <p:nvPr>
+            <p:ph type="body" idx="1"/>
+          </p:nvPr>
+        </p:nvSpPr>
+        <p:spPr/>
+        <p:txBody>
+          <a:bodyPr/>
+          <a:lstStyle/>
+          <a:p>
+            <a:r>
+              <a:rPr lang="en-US" dirty="0"/>
+              <a:t>You have been brought on as a data consultant by Constellation Brands to analyze sales performance using the Iowa Liquor Sales database, with a specific focus on transactions from 2014. The company wants to better understand how one of its product categories or brands performed during that year across different markets to inform future strategy.</a:t>
+            </a:r>
+          </a:p>
+          <a:p>
+            <a:r>
+              <a:rPr lang="en-US" dirty="0"/>
+              <a:t>Your role is to conduct a SWOT-style analysis by writing SQL queries that explore transaction data, product performance, store activity, and regional trends. You will focus on a specific category or vendor within the dataset to identify strengths, weaknesses, opportunities, and threats based on 2014 sales data.</a:t>
+            </a:r>
+          </a:p>
+          <a:p>
+            <a:r>
+              <a:rPr lang="en-US" dirty="0"/>
+              <a:t>As part of your analysis, you will generate insights from the data and export selected results to create visualizations that support your findings. These insights will be used to present actionable recommendations to Constellation Brands’ leadership team.</a:t>
+            </a:r>
+          </a:p>
+          <a:p>
+            <a:r>
+              <a:rPr lang="en-US" dirty="0"/>
+              <a:t>(OpenAI 2026)</a:t>
+            </a:r>
+          </a:p>
+        </p:txBody>
+      </p:sp>
+      <p:sp>
+        <p:nvSpPr>
+          <p:cNvPr id="4" name="Slide Number Placeholder 3"/>
+          <p:cNvSpPr>
+            <a:spLocks noGrp="1"/>
+          </p:cNvSpPr>
+          <p:nvPr>
+            <p:ph type="sldNum" sz="quarter" idx="5"/>
+          </p:nvPr>
+        </p:nvSpPr>
+        <p:spPr/>
+        <p:txBody>
+          <a:bodyPr/>
+          <a:lstStyle/>
+          <a:p>
+            <a:fld id="{9A18230D-6974-4A26-8365-62E356C4785F}" type="slidenum">
+              <a:rPr lang="en-US" smtClean="0"/>
+              <a:t>3</a:t>
+            </a:fld>
+            <a:endParaRPr lang="en-US"/>
+          </a:p>
+        </p:txBody>
+      </p:sp>
+    </p:spTree>
+    <p:extLst>
+      <p:ext uri="{BB962C8B-B14F-4D97-AF65-F5344CB8AC3E}">
+        <p14:creationId xmlns:p14="http://schemas.microsoft.com/office/powerpoint/2010/main" val="3156598360"/>
+      </p:ext>
+    </p:extLst>
+  </p:cSld>
+  <p:clrMapOvr>
+    <a:masterClrMapping/>
+  </p:clrMapOvr>
+</p:notes>
 </file>
 
 <file path=ppt/slideLayouts/slideLayout1.xml><?xml version="1.0" encoding="utf-8"?>
@@ -3830,7 +4292,29 @@
           <a:bodyPr/>
           <a:lstStyle/>
           <a:p>
-            <a:endParaRPr lang="en-US"/>
+            <a:r>
+              <a:rPr lang="en-US" dirty="0"/>
+              <a:t>Leading international producer and marketer of beer, wine, and spirits</a:t>
+            </a:r>
+          </a:p>
+          <a:p>
+            <a:pPr lvl="1"/>
+            <a:r>
+              <a:rPr lang="en-US" dirty="0"/>
+              <a:t>Markets in U.S, Mexico, Nea Zealand, and Italy</a:t>
+            </a:r>
+          </a:p>
+          <a:p>
+            <a:r>
+              <a:rPr lang="en-US" u="sng" dirty="0"/>
+              <a:t>Worth Reaching For</a:t>
+            </a:r>
+          </a:p>
+          <a:p>
+            <a:r>
+              <a:rPr lang="en-US" dirty="0"/>
+              <a:t>s</a:t>
+            </a:r>
           </a:p>
         </p:txBody>
       </p:sp>
@@ -3913,7 +4397,13 @@
           <a:bodyPr/>
           <a:lstStyle/>
           <a:p>
-            <a:endParaRPr lang="en-US"/>
+            <a:pPr marL="0" indent="0">
+              <a:buNone/>
+            </a:pPr>
+            <a:r>
+              <a:rPr lang="en-US" dirty="0"/>
+              <a:t>You have been brought on as a data consultant by Constellation Brands to analyze sales performance using the Iowa Liquor Sales database The company wants to better understand how it performed during that year across different markets to inform future strategy.</a:t>
+            </a:r>
           </a:p>
         </p:txBody>
       </p:sp>
@@ -3996,7 +4486,13 @@
           <a:bodyPr/>
           <a:lstStyle/>
           <a:p>
-            <a:endParaRPr lang="en-US"/>
+            <a:r>
+              <a:rPr lang="en-US"/>
+              <a:t>Time Period (2014-01-01 to 2014-12-31)</a:t>
+            </a:r>
+          </a:p>
+          <a:p>
+            <a:endParaRPr lang="en-US" dirty="0"/>
           </a:p>
         </p:txBody>
       </p:sp>
@@ -4771,4 +5267,319 @@
     </a:ext>
   </a:extLst>
 </a:theme>
+</file>
+
+<file path=ppt/theme/theme2.xml><?xml version="1.0" encoding="utf-8"?>
+<a:theme xmlns:a="http://schemas.openxmlformats.org/drawingml/2006/main" name="Office Theme">
+  <a:themeElements>
+    <a:clrScheme name="Office">
+      <a:dk1>
+        <a:sysClr val="windowText" lastClr="000000"/>
+      </a:dk1>
+      <a:lt1>
+        <a:sysClr val="window" lastClr="FFFFFF"/>
+      </a:lt1>
+      <a:dk2>
+        <a:srgbClr val="0E2841"/>
+      </a:dk2>
+      <a:lt2>
+        <a:srgbClr val="E8E8E8"/>
+      </a:lt2>
+      <a:accent1>
+        <a:srgbClr val="156082"/>
+      </a:accent1>
+      <a:accent2>
+        <a:srgbClr val="E97132"/>
+      </a:accent2>
+      <a:accent3>
+        <a:srgbClr val="196B24"/>
+      </a:accent3>
+      <a:accent4>
+        <a:srgbClr val="0F9ED5"/>
+      </a:accent4>
+      <a:accent5>
+        <a:srgbClr val="A02B93"/>
+      </a:accent5>
+      <a:accent6>
+        <a:srgbClr val="4EA72E"/>
+      </a:accent6>
+      <a:hlink>
+        <a:srgbClr val="467886"/>
+      </a:hlink>
+      <a:folHlink>
+        <a:srgbClr val="96607D"/>
+      </a:folHlink>
+    </a:clrScheme>
+    <a:fontScheme name="Office">
+      <a:majorFont>
+        <a:latin typeface="Aptos Display" panose="02110004020202020204"/>
+        <a:ea typeface=""/>
+        <a:cs typeface=""/>
+        <a:font script="Jpan" typeface="游ゴシック Light"/>
+        <a:font script="Hang" typeface="맑은 고딕"/>
+        <a:font script="Hans" typeface="等线 Light"/>
+        <a:font script="Hant" typeface="新細明體"/>
+        <a:font script="Arab" typeface="Times New Roman"/>
+        <a:font script="Hebr" typeface="Times New Roman"/>
+        <a:font script="Thai" typeface="Angsana New"/>
+        <a:font script="Ethi" typeface="Nyala"/>
+        <a:font script="Beng" typeface="Vrinda"/>
+        <a:font script="Gujr" typeface="Shruti"/>
+        <a:font script="Khmr" typeface="MoolBoran"/>
+        <a:font script="Knda" typeface="Tunga"/>
+        <a:font script="Guru" typeface="Raavi"/>
+        <a:font script="Cans" typeface="Euphemia"/>
+        <a:font script="Cher" typeface="Plantagenet Cherokee"/>
+        <a:font script="Yiii" typeface="Microsoft Yi Baiti"/>
+        <a:font script="Tibt" typeface="Microsoft Himalaya"/>
+        <a:font script="Thaa" typeface="MV Boli"/>
+        <a:font script="Deva" typeface="Mangal"/>
+        <a:font script="Telu" typeface="Gautami"/>
+        <a:font script="Taml" typeface="Latha"/>
+        <a:font script="Syrc" typeface="Estrangelo Edessa"/>
+        <a:font script="Orya" typeface="Kalinga"/>
+        <a:font script="Mlym" typeface="Kartika"/>
+        <a:font script="Laoo" typeface="DokChampa"/>
+        <a:font script="Sinh" typeface="Iskoola Pota"/>
+        <a:font script="Mong" typeface="Mongolian Baiti"/>
+        <a:font script="Viet" typeface="Times New Roman"/>
+        <a:font script="Uigh" typeface="Microsoft Uighur"/>
+        <a:font script="Geor" typeface="Sylfaen"/>
+        <a:font script="Armn" typeface="Arial"/>
+        <a:font script="Bugi" typeface="Leelawadee UI"/>
+        <a:font script="Bopo" typeface="Microsoft JhengHei"/>
+        <a:font script="Java" typeface="Javanese Text"/>
+        <a:font script="Lisu" typeface="Segoe UI"/>
+        <a:font script="Mymr" typeface="Myanmar Text"/>
+        <a:font script="Nkoo" typeface="Ebrima"/>
+        <a:font script="Olck" typeface="Nirmala UI"/>
+        <a:font script="Osma" typeface="Ebrima"/>
+        <a:font script="Phag" typeface="Phagspa"/>
+        <a:font script="Syrn" typeface="Estrangelo Edessa"/>
+        <a:font script="Syrj" typeface="Estrangelo Edessa"/>
+        <a:font script="Syre" typeface="Estrangelo Edessa"/>
+        <a:font script="Sora" typeface="Nirmala UI"/>
+        <a:font script="Tale" typeface="Microsoft Tai Le"/>
+        <a:font script="Talu" typeface="Microsoft New Tai Lue"/>
+        <a:font script="Tfng" typeface="Ebrima"/>
+      </a:majorFont>
+      <a:minorFont>
+        <a:latin typeface="Aptos" panose="02110004020202020204"/>
+        <a:ea typeface=""/>
+        <a:cs typeface=""/>
+        <a:font script="Jpan" typeface="游ゴシック"/>
+        <a:font script="Hang" typeface="맑은 고딕"/>
+        <a:font script="Hans" typeface="等线"/>
+        <a:font script="Hant" typeface="新細明體"/>
+        <a:font script="Arab" typeface="Arial"/>
+        <a:font script="Hebr" typeface="Arial"/>
+        <a:font script="Thai" typeface="Cordia New"/>
+        <a:font script="Ethi" typeface="Nyala"/>
+        <a:font script="Beng" typeface="Vrinda"/>
+        <a:font script="Gujr" typeface="Shruti"/>
+        <a:font script="Khmr" typeface="DaunPenh"/>
+        <a:font script="Knda" typeface="Tunga"/>
+        <a:font script="Guru" typeface="Raavi"/>
+        <a:font script="Cans" typeface="Euphemia"/>
+        <a:font script="Cher" typeface="Plantagenet Cherokee"/>
+        <a:font script="Yiii" typeface="Microsoft Yi Baiti"/>
+        <a:font script="Tibt" typeface="Microsoft Himalaya"/>
+        <a:font script="Thaa" typeface="MV Boli"/>
+        <a:font script="Deva" typeface="Mangal"/>
+        <a:font script="Telu" typeface="Gautami"/>
+        <a:font script="Taml" typeface="Latha"/>
+        <a:font script="Syrc" typeface="Estrangelo Edessa"/>
+        <a:font script="Orya" typeface="Kalinga"/>
+        <a:font script="Mlym" typeface="Kartika"/>
+        <a:font script="Laoo" typeface="DokChampa"/>
+        <a:font script="Sinh" typeface="Iskoola Pota"/>
+        <a:font script="Mong" typeface="Mongolian Baiti"/>
+        <a:font script="Viet" typeface="Arial"/>
+        <a:font script="Uigh" typeface="Microsoft Uighur"/>
+        <a:font script="Geor" typeface="Sylfaen"/>
+        <a:font script="Armn" typeface="Arial"/>
+        <a:font script="Bugi" typeface="Leelawadee UI"/>
+        <a:font script="Bopo" typeface="Microsoft JhengHei"/>
+        <a:font script="Java" typeface="Javanese Text"/>
+        <a:font script="Lisu" typeface="Segoe UI"/>
+        <a:font script="Mymr" typeface="Myanmar Text"/>
+        <a:font script="Nkoo" typeface="Ebrima"/>
+        <a:font script="Olck" typeface="Nirmala UI"/>
+        <a:font script="Osma" typeface="Ebrima"/>
+        <a:font script="Phag" typeface="Phagspa"/>
+        <a:font script="Syrn" typeface="Estrangelo Edessa"/>
+        <a:font script="Syrj" typeface="Estrangelo Edessa"/>
+        <a:font script="Syre" typeface="Estrangelo Edessa"/>
+        <a:font script="Sora" typeface="Nirmala UI"/>
+        <a:font script="Tale" typeface="Microsoft Tai Le"/>
+        <a:font script="Talu" typeface="Microsoft New Tai Lue"/>
+        <a:font script="Tfng" typeface="Ebrima"/>
+      </a:minorFont>
+    </a:fontScheme>
+    <a:fmtScheme name="Office">
+      <a:fillStyleLst>
+        <a:solidFill>
+          <a:schemeClr val="phClr"/>
+        </a:solidFill>
+        <a:gradFill rotWithShape="1">
+          <a:gsLst>
+            <a:gs pos="0">
+              <a:schemeClr val="phClr">
+                <a:lumMod val="110000"/>
+                <a:satMod val="105000"/>
+                <a:tint val="67000"/>
+              </a:schemeClr>
+            </a:gs>
+            <a:gs pos="50000">
+              <a:schemeClr val="phClr">
+                <a:lumMod val="105000"/>
+                <a:satMod val="103000"/>
+                <a:tint val="73000"/>
+              </a:schemeClr>
+            </a:gs>
+            <a:gs pos="100000">
+              <a:schemeClr val="phClr">
+                <a:lumMod val="105000"/>
+                <a:satMod val="109000"/>
+                <a:tint val="81000"/>
+              </a:schemeClr>
+            </a:gs>
+          </a:gsLst>
+          <a:lin ang="5400000" scaled="0"/>
+        </a:gradFill>
+        <a:gradFill rotWithShape="1">
+          <a:gsLst>
+            <a:gs pos="0">
+              <a:schemeClr val="phClr">
+                <a:satMod val="103000"/>
+                <a:lumMod val="102000"/>
+                <a:tint val="94000"/>
+              </a:schemeClr>
+            </a:gs>
+            <a:gs pos="50000">
+              <a:schemeClr val="phClr">
+                <a:satMod val="110000"/>
+                <a:lumMod val="100000"/>
+                <a:shade val="100000"/>
+              </a:schemeClr>
+            </a:gs>
+            <a:gs pos="100000">
+              <a:schemeClr val="phClr">
+                <a:lumMod val="99000"/>
+                <a:satMod val="120000"/>
+                <a:shade val="78000"/>
+              </a:schemeClr>
+            </a:gs>
+          </a:gsLst>
+          <a:lin ang="5400000" scaled="0"/>
+        </a:gradFill>
+      </a:fillStyleLst>
+      <a:lnStyleLst>
+        <a:ln w="12700" cap="flat" cmpd="sng" algn="ctr">
+          <a:solidFill>
+            <a:schemeClr val="phClr"/>
+          </a:solidFill>
+          <a:prstDash val="solid"/>
+          <a:miter lim="800000"/>
+        </a:ln>
+        <a:ln w="19050" cap="flat" cmpd="sng" algn="ctr">
+          <a:solidFill>
+            <a:schemeClr val="phClr"/>
+          </a:solidFill>
+          <a:prstDash val="solid"/>
+          <a:miter lim="800000"/>
+        </a:ln>
+        <a:ln w="25400" cap="flat" cmpd="sng" algn="ctr">
+          <a:solidFill>
+            <a:schemeClr val="phClr"/>
+          </a:solidFill>
+          <a:prstDash val="solid"/>
+          <a:miter lim="800000"/>
+        </a:ln>
+      </a:lnStyleLst>
+      <a:effectStyleLst>
+        <a:effectStyle>
+          <a:effectLst/>
+        </a:effectStyle>
+        <a:effectStyle>
+          <a:effectLst/>
+        </a:effectStyle>
+        <a:effectStyle>
+          <a:effectLst>
+            <a:outerShdw blurRad="57150" dist="19050" dir="5400000" algn="ctr" rotWithShape="0">
+              <a:srgbClr val="000000">
+                <a:alpha val="63000"/>
+              </a:srgbClr>
+            </a:outerShdw>
+          </a:effectLst>
+        </a:effectStyle>
+      </a:effectStyleLst>
+      <a:bgFillStyleLst>
+        <a:solidFill>
+          <a:schemeClr val="phClr"/>
+        </a:solidFill>
+        <a:solidFill>
+          <a:schemeClr val="phClr">
+            <a:tint val="95000"/>
+            <a:satMod val="170000"/>
+          </a:schemeClr>
+        </a:solidFill>
+        <a:gradFill rotWithShape="1">
+          <a:gsLst>
+            <a:gs pos="0">
+              <a:schemeClr val="phClr">
+                <a:tint val="93000"/>
+                <a:satMod val="150000"/>
+                <a:shade val="98000"/>
+                <a:lumMod val="102000"/>
+              </a:schemeClr>
+            </a:gs>
+            <a:gs pos="50000">
+              <a:schemeClr val="phClr">
+                <a:tint val="98000"/>
+                <a:satMod val="130000"/>
+                <a:shade val="90000"/>
+                <a:lumMod val="103000"/>
+              </a:schemeClr>
+            </a:gs>
+            <a:gs pos="100000">
+              <a:schemeClr val="phClr">
+                <a:shade val="63000"/>
+                <a:satMod val="120000"/>
+              </a:schemeClr>
+            </a:gs>
+          </a:gsLst>
+          <a:lin ang="5400000" scaled="0"/>
+        </a:gradFill>
+      </a:bgFillStyleLst>
+    </a:fmtScheme>
+  </a:themeElements>
+  <a:objectDefaults>
+    <a:lnDef>
+      <a:spPr/>
+      <a:bodyPr/>
+      <a:lstStyle/>
+      <a:style>
+        <a:lnRef idx="2">
+          <a:schemeClr val="accent1"/>
+        </a:lnRef>
+        <a:fillRef idx="0">
+          <a:schemeClr val="accent1"/>
+        </a:fillRef>
+        <a:effectRef idx="1">
+          <a:schemeClr val="accent1"/>
+        </a:effectRef>
+        <a:fontRef idx="minor">
+          <a:schemeClr val="tx1"/>
+        </a:fontRef>
+      </a:style>
+    </a:lnDef>
+  </a:objectDefaults>
+  <a:extraClrSchemeLst/>
+  <a:extLst>
+    <a:ext uri="{05A4C25C-085E-4340-85A3-A5531E510DB2}">
+      <thm15:themeFamily xmlns:thm15="http://schemas.microsoft.com/office/thememl/2012/main" name="Office Theme" id="{2E142A2C-CD16-42D6-873A-C26D2A0506FA}" vid="{1BDDFF52-6CD6-40A5-AB3C-68EB2F1E4D0A}"/>
+    </a:ext>
+  </a:extLst>
+</a:theme>
 </file>
--- a/week-04/Pham_liquor_sales_presentation.pptx
+++ b/week-04/Pham_liquor_sales_presentation.pptx
@@ -209,7 +209,7 @@
           <a:p>
             <a:fld id="{5B0FB398-5626-4DAA-BD19-B2F8F3D1EB3C}" type="datetimeFigureOut">
               <a:rPr lang="en-US" smtClean="0"/>
-              <a:t>4/29/2026</a:t>
+              <a:t>4/30/2026</a:t>
             </a:fld>
             <a:endParaRPr lang="en-US"/>
           </a:p>
@@ -581,6 +581,300 @@
 </p:notes>
 </file>
 
+<file path=ppt/notesSlides/notesSlide2.xml><?xml version="1.0" encoding="utf-8"?>
+<p:notes xmlns:a="http://schemas.openxmlformats.org/drawingml/2006/main" xmlns:r="http://schemas.openxmlformats.org/officeDocument/2006/relationships" xmlns:p="http://schemas.openxmlformats.org/presentationml/2006/main">
+  <p:cSld>
+    <p:spTree>
+      <p:nvGrpSpPr>
+        <p:cNvPr id="1" name=""/>
+        <p:cNvGrpSpPr/>
+        <p:nvPr/>
+      </p:nvGrpSpPr>
+      <p:grpSpPr>
+        <a:xfrm>
+          <a:off x="0" y="0"/>
+          <a:ext cx="0" cy="0"/>
+          <a:chOff x="0" y="0"/>
+          <a:chExt cx="0" cy="0"/>
+        </a:xfrm>
+      </p:grpSpPr>
+      <p:sp>
+        <p:nvSpPr>
+          <p:cNvPr id="2" name="Slide Image Placeholder 1"/>
+          <p:cNvSpPr>
+            <a:spLocks noGrp="1" noRot="1" noChangeAspect="1"/>
+          </p:cNvSpPr>
+          <p:nvPr>
+            <p:ph type="sldImg"/>
+          </p:nvPr>
+        </p:nvSpPr>
+        <p:spPr/>
+      </p:sp>
+      <p:sp>
+        <p:nvSpPr>
+          <p:cNvPr id="3" name="Notes Placeholder 2"/>
+          <p:cNvSpPr>
+            <a:spLocks noGrp="1"/>
+          </p:cNvSpPr>
+          <p:nvPr>
+            <p:ph type="body" idx="1"/>
+          </p:nvPr>
+        </p:nvSpPr>
+        <p:spPr/>
+        <p:txBody>
+          <a:bodyPr/>
+          <a:lstStyle/>
+          <a:p>
+            <a:r>
+              <a:rPr lang="en-US" dirty="0"/>
+              <a:t>Notes:</a:t>
+            </a:r>
+          </a:p>
+          <a:p>
+            <a:r>
+              <a:rPr lang="en-US" dirty="0"/>
+              <a:t>Year 2014</a:t>
+            </a:r>
+          </a:p>
+          <a:p>
+            <a:endParaRPr lang="en-US" dirty="0"/>
+          </a:p>
+        </p:txBody>
+      </p:sp>
+      <p:sp>
+        <p:nvSpPr>
+          <p:cNvPr id="4" name="Slide Number Placeholder 3"/>
+          <p:cNvSpPr>
+            <a:spLocks noGrp="1"/>
+          </p:cNvSpPr>
+          <p:nvPr>
+            <p:ph type="sldNum" sz="quarter" idx="5"/>
+          </p:nvPr>
+        </p:nvSpPr>
+        <p:spPr/>
+        <p:txBody>
+          <a:bodyPr/>
+          <a:lstStyle/>
+          <a:p>
+            <a:fld id="{9A18230D-6974-4A26-8365-62E356C4785F}" type="slidenum">
+              <a:rPr lang="en-US" smtClean="0"/>
+              <a:t>4</a:t>
+            </a:fld>
+            <a:endParaRPr lang="en-US"/>
+          </a:p>
+        </p:txBody>
+      </p:sp>
+    </p:spTree>
+    <p:extLst>
+      <p:ext uri="{BB962C8B-B14F-4D97-AF65-F5344CB8AC3E}">
+        <p14:creationId xmlns:p14="http://schemas.microsoft.com/office/powerpoint/2010/main" val="1028827278"/>
+      </p:ext>
+    </p:extLst>
+  </p:cSld>
+  <p:clrMapOvr>
+    <a:masterClrMapping/>
+  </p:clrMapOvr>
+</p:notes>
+</file>
+
+<file path=ppt/notesSlides/notesSlide3.xml><?xml version="1.0" encoding="utf-8"?>
+<p:notes xmlns:a="http://schemas.openxmlformats.org/drawingml/2006/main" xmlns:r="http://schemas.openxmlformats.org/officeDocument/2006/relationships" xmlns:p="http://schemas.openxmlformats.org/presentationml/2006/main">
+  <p:cSld>
+    <p:spTree>
+      <p:nvGrpSpPr>
+        <p:cNvPr id="1" name=""/>
+        <p:cNvGrpSpPr/>
+        <p:nvPr/>
+      </p:nvGrpSpPr>
+      <p:grpSpPr>
+        <a:xfrm>
+          <a:off x="0" y="0"/>
+          <a:ext cx="0" cy="0"/>
+          <a:chOff x="0" y="0"/>
+          <a:chExt cx="0" cy="0"/>
+        </a:xfrm>
+      </p:grpSpPr>
+      <p:sp>
+        <p:nvSpPr>
+          <p:cNvPr id="2" name="Slide Image Placeholder 1"/>
+          <p:cNvSpPr>
+            <a:spLocks noGrp="1" noRot="1" noChangeAspect="1"/>
+          </p:cNvSpPr>
+          <p:nvPr>
+            <p:ph type="sldImg"/>
+          </p:nvPr>
+        </p:nvSpPr>
+        <p:spPr/>
+      </p:sp>
+      <p:sp>
+        <p:nvSpPr>
+          <p:cNvPr id="3" name="Notes Placeholder 2"/>
+          <p:cNvSpPr>
+            <a:spLocks noGrp="1"/>
+          </p:cNvSpPr>
+          <p:nvPr>
+            <p:ph type="body" idx="1"/>
+          </p:nvPr>
+        </p:nvSpPr>
+        <p:spPr/>
+        <p:txBody>
+          <a:bodyPr/>
+          <a:lstStyle/>
+          <a:p>
+            <a:r>
+              <a:rPr lang="en-US" dirty="0"/>
+              <a:t>How many products</a:t>
+            </a:r>
+          </a:p>
+          <a:p>
+            <a:r>
+              <a:rPr lang="en-US" dirty="0"/>
+              <a:t>Strongest Product</a:t>
+            </a:r>
+          </a:p>
+          <a:p>
+            <a:r>
+              <a:rPr lang="en-US" dirty="0"/>
+              <a:t>How does the strongest product do in its own category</a:t>
+            </a:r>
+          </a:p>
+          <a:p>
+            <a:r>
+              <a:rPr lang="en-US" dirty="0"/>
+              <a:t>	Market share</a:t>
+            </a:r>
+          </a:p>
+        </p:txBody>
+      </p:sp>
+      <p:sp>
+        <p:nvSpPr>
+          <p:cNvPr id="4" name="Slide Number Placeholder 3"/>
+          <p:cNvSpPr>
+            <a:spLocks noGrp="1"/>
+          </p:cNvSpPr>
+          <p:nvPr>
+            <p:ph type="sldNum" sz="quarter" idx="5"/>
+          </p:nvPr>
+        </p:nvSpPr>
+        <p:spPr/>
+        <p:txBody>
+          <a:bodyPr/>
+          <a:lstStyle/>
+          <a:p>
+            <a:fld id="{9A18230D-6974-4A26-8365-62E356C4785F}" type="slidenum">
+              <a:rPr lang="en-US" smtClean="0"/>
+              <a:t>5</a:t>
+            </a:fld>
+            <a:endParaRPr lang="en-US"/>
+          </a:p>
+        </p:txBody>
+      </p:sp>
+    </p:spTree>
+    <p:extLst>
+      <p:ext uri="{BB962C8B-B14F-4D97-AF65-F5344CB8AC3E}">
+        <p14:creationId xmlns:p14="http://schemas.microsoft.com/office/powerpoint/2010/main" val="2007414624"/>
+      </p:ext>
+    </p:extLst>
+  </p:cSld>
+  <p:clrMapOvr>
+    <a:masterClrMapping/>
+  </p:clrMapOvr>
+</p:notes>
+</file>
+
+<file path=ppt/notesSlides/notesSlide4.xml><?xml version="1.0" encoding="utf-8"?>
+<p:notes xmlns:a="http://schemas.openxmlformats.org/drawingml/2006/main" xmlns:r="http://schemas.openxmlformats.org/officeDocument/2006/relationships" xmlns:p="http://schemas.openxmlformats.org/presentationml/2006/main">
+  <p:cSld>
+    <p:spTree>
+      <p:nvGrpSpPr>
+        <p:cNvPr id="1" name=""/>
+        <p:cNvGrpSpPr/>
+        <p:nvPr/>
+      </p:nvGrpSpPr>
+      <p:grpSpPr>
+        <a:xfrm>
+          <a:off x="0" y="0"/>
+          <a:ext cx="0" cy="0"/>
+          <a:chOff x="0" y="0"/>
+          <a:chExt cx="0" cy="0"/>
+        </a:xfrm>
+      </p:grpSpPr>
+      <p:sp>
+        <p:nvSpPr>
+          <p:cNvPr id="2" name="Slide Image Placeholder 1"/>
+          <p:cNvSpPr>
+            <a:spLocks noGrp="1" noRot="1" noChangeAspect="1"/>
+          </p:cNvSpPr>
+          <p:nvPr>
+            <p:ph type="sldImg"/>
+          </p:nvPr>
+        </p:nvSpPr>
+        <p:spPr/>
+      </p:sp>
+      <p:sp>
+        <p:nvSpPr>
+          <p:cNvPr id="3" name="Notes Placeholder 2"/>
+          <p:cNvSpPr>
+            <a:spLocks noGrp="1"/>
+          </p:cNvSpPr>
+          <p:nvPr>
+            <p:ph type="body" idx="1"/>
+          </p:nvPr>
+        </p:nvSpPr>
+        <p:spPr/>
+        <p:txBody>
+          <a:bodyPr/>
+          <a:lstStyle/>
+          <a:p>
+            <a:r>
+              <a:rPr lang="en-US" dirty="0"/>
+              <a:t>Explore the Beer market and Wine market to see improvement</a:t>
+            </a:r>
+          </a:p>
+          <a:p>
+            <a:r>
+              <a:rPr lang="en-US" dirty="0"/>
+              <a:t>	Acquisition of Modelo to enter the beer market in 2013</a:t>
+            </a:r>
+          </a:p>
+        </p:txBody>
+      </p:sp>
+      <p:sp>
+        <p:nvSpPr>
+          <p:cNvPr id="4" name="Slide Number Placeholder 3"/>
+          <p:cNvSpPr>
+            <a:spLocks noGrp="1"/>
+          </p:cNvSpPr>
+          <p:nvPr>
+            <p:ph type="sldNum" sz="quarter" idx="5"/>
+          </p:nvPr>
+        </p:nvSpPr>
+        <p:spPr/>
+        <p:txBody>
+          <a:bodyPr/>
+          <a:lstStyle/>
+          <a:p>
+            <a:fld id="{9A18230D-6974-4A26-8365-62E356C4785F}" type="slidenum">
+              <a:rPr lang="en-US" smtClean="0"/>
+              <a:t>13</a:t>
+            </a:fld>
+            <a:endParaRPr lang="en-US"/>
+          </a:p>
+        </p:txBody>
+      </p:sp>
+    </p:spTree>
+    <p:extLst>
+      <p:ext uri="{BB962C8B-B14F-4D97-AF65-F5344CB8AC3E}">
+        <p14:creationId xmlns:p14="http://schemas.microsoft.com/office/powerpoint/2010/main" val="2836736160"/>
+      </p:ext>
+    </p:extLst>
+  </p:cSld>
+  <p:clrMapOvr>
+    <a:masterClrMapping/>
+  </p:clrMapOvr>
+</p:notes>
+</file>
+
 <file path=ppt/slideLayouts/slideLayout1.xml><?xml version="1.0" encoding="utf-8"?>
 <p:sldLayout xmlns:a="http://schemas.openxmlformats.org/drawingml/2006/main" xmlns:r="http://schemas.openxmlformats.org/officeDocument/2006/relationships" xmlns:p="http://schemas.openxmlformats.org/presentationml/2006/main" type="title" preserve="1">
   <p:cSld name="Title Slide">
@@ -728,7 +1022,7 @@
           <a:p>
             <a:fld id="{1C7CE9BF-C1FF-4E9B-97E6-64DC9D713536}" type="datetimeFigureOut">
               <a:rPr lang="en-US" smtClean="0"/>
-              <a:t>4/29/2026</a:t>
+              <a:t>4/30/2026</a:t>
             </a:fld>
             <a:endParaRPr lang="en-US"/>
           </a:p>
@@ -926,7 +1220,7 @@
           <a:p>
             <a:fld id="{1C7CE9BF-C1FF-4E9B-97E6-64DC9D713536}" type="datetimeFigureOut">
               <a:rPr lang="en-US" smtClean="0"/>
-              <a:t>4/29/2026</a:t>
+              <a:t>4/30/2026</a:t>
             </a:fld>
             <a:endParaRPr lang="en-US"/>
           </a:p>
@@ -1134,7 +1428,7 @@
           <a:p>
             <a:fld id="{1C7CE9BF-C1FF-4E9B-97E6-64DC9D713536}" type="datetimeFigureOut">
               <a:rPr lang="en-US" smtClean="0"/>
-              <a:t>4/29/2026</a:t>
+              <a:t>4/30/2026</a:t>
             </a:fld>
             <a:endParaRPr lang="en-US"/>
           </a:p>
@@ -1332,7 +1626,7 @@
           <a:p>
             <a:fld id="{1C7CE9BF-C1FF-4E9B-97E6-64DC9D713536}" type="datetimeFigureOut">
               <a:rPr lang="en-US" smtClean="0"/>
-              <a:t>4/29/2026</a:t>
+              <a:t>4/30/2026</a:t>
             </a:fld>
             <a:endParaRPr lang="en-US"/>
           </a:p>
@@ -1607,7 +1901,7 @@
           <a:p>
             <a:fld id="{1C7CE9BF-C1FF-4E9B-97E6-64DC9D713536}" type="datetimeFigureOut">
               <a:rPr lang="en-US" smtClean="0"/>
-              <a:t>4/29/2026</a:t>
+              <a:t>4/30/2026</a:t>
             </a:fld>
             <a:endParaRPr lang="en-US"/>
           </a:p>
@@ -1872,7 +2166,7 @@
           <a:p>
             <a:fld id="{1C7CE9BF-C1FF-4E9B-97E6-64DC9D713536}" type="datetimeFigureOut">
               <a:rPr lang="en-US" smtClean="0"/>
-              <a:t>4/29/2026</a:t>
+              <a:t>4/30/2026</a:t>
             </a:fld>
             <a:endParaRPr lang="en-US"/>
           </a:p>
@@ -2284,7 +2578,7 @@
           <a:p>
             <a:fld id="{1C7CE9BF-C1FF-4E9B-97E6-64DC9D713536}" type="datetimeFigureOut">
               <a:rPr lang="en-US" smtClean="0"/>
-              <a:t>4/29/2026</a:t>
+              <a:t>4/30/2026</a:t>
             </a:fld>
             <a:endParaRPr lang="en-US"/>
           </a:p>
@@ -2425,7 +2719,7 @@
           <a:p>
             <a:fld id="{1C7CE9BF-C1FF-4E9B-97E6-64DC9D713536}" type="datetimeFigureOut">
               <a:rPr lang="en-US" smtClean="0"/>
-              <a:t>4/29/2026</a:t>
+              <a:t>4/30/2026</a:t>
             </a:fld>
             <a:endParaRPr lang="en-US"/>
           </a:p>
@@ -2538,7 +2832,7 @@
           <a:p>
             <a:fld id="{1C7CE9BF-C1FF-4E9B-97E6-64DC9D713536}" type="datetimeFigureOut">
               <a:rPr lang="en-US" smtClean="0"/>
-              <a:t>4/29/2026</a:t>
+              <a:t>4/30/2026</a:t>
             </a:fld>
             <a:endParaRPr lang="en-US"/>
           </a:p>
@@ -2849,7 +3143,7 @@
           <a:p>
             <a:fld id="{1C7CE9BF-C1FF-4E9B-97E6-64DC9D713536}" type="datetimeFigureOut">
               <a:rPr lang="en-US" smtClean="0"/>
-              <a:t>4/29/2026</a:t>
+              <a:t>4/30/2026</a:t>
             </a:fld>
             <a:endParaRPr lang="en-US"/>
           </a:p>
@@ -3137,7 +3431,7 @@
           <a:p>
             <a:fld id="{1C7CE9BF-C1FF-4E9B-97E6-64DC9D713536}" type="datetimeFigureOut">
               <a:rPr lang="en-US" smtClean="0"/>
-              <a:t>4/29/2026</a:t>
+              <a:t>4/30/2026</a:t>
             </a:fld>
             <a:endParaRPr lang="en-US"/>
           </a:p>
@@ -3378,7 +3672,7 @@
           <a:p>
             <a:fld id="{1C7CE9BF-C1FF-4E9B-97E6-64DC9D713536}" type="datetimeFigureOut">
               <a:rPr lang="en-US" smtClean="0"/>
-              <a:t>4/29/2026</a:t>
+              <a:t>4/30/2026</a:t>
             </a:fld>
             <a:endParaRPr lang="en-US"/>
           </a:p>
@@ -3852,7 +4146,7 @@
           <a:p>
             <a:r>
               <a:rPr lang="en-US" dirty="0"/>
-              <a:t>Iowa Liquor Sales Analysis</a:t>
+              <a:t>2014 Iowa Liquor Sales Analysis</a:t>
             </a:r>
           </a:p>
           <a:p>

--- a/week-04/Pham_liquor_sales_presentation.pptx
+++ b/week-04/Pham_liquor_sales_presentation.pptx
@@ -5,22 +5,26 @@
     <p:sldMasterId id="2147483672" r:id="rId1"/>
   </p:sldMasterIdLst>
   <p:notesMasterIdLst>
-    <p:notesMasterId r:id="rId15"/>
+    <p:notesMasterId r:id="rId19"/>
   </p:notesMasterIdLst>
   <p:sldIdLst>
     <p:sldId id="256" r:id="rId2"/>
-    <p:sldId id="268" r:id="rId3"/>
-    <p:sldId id="257" r:id="rId4"/>
+    <p:sldId id="257" r:id="rId3"/>
+    <p:sldId id="272" r:id="rId4"/>
     <p:sldId id="258" r:id="rId5"/>
-    <p:sldId id="259" r:id="rId6"/>
-    <p:sldId id="260" r:id="rId7"/>
-    <p:sldId id="261" r:id="rId8"/>
-    <p:sldId id="262" r:id="rId9"/>
-    <p:sldId id="263" r:id="rId10"/>
-    <p:sldId id="264" r:id="rId11"/>
-    <p:sldId id="265" r:id="rId12"/>
-    <p:sldId id="266" r:id="rId13"/>
-    <p:sldId id="267" r:id="rId14"/>
+    <p:sldId id="273" r:id="rId6"/>
+    <p:sldId id="270" r:id="rId7"/>
+    <p:sldId id="274" r:id="rId8"/>
+    <p:sldId id="275" r:id="rId9"/>
+    <p:sldId id="260" r:id="rId10"/>
+    <p:sldId id="278" r:id="rId11"/>
+    <p:sldId id="261" r:id="rId12"/>
+    <p:sldId id="262" r:id="rId13"/>
+    <p:sldId id="265" r:id="rId14"/>
+    <p:sldId id="279" r:id="rId15"/>
+    <p:sldId id="267" r:id="rId16"/>
+    <p:sldId id="276" r:id="rId17"/>
+    <p:sldId id="269" r:id="rId18"/>
   </p:sldIdLst>
   <p:sldSz cx="12192000" cy="6858000"/>
   <p:notesSz cx="6858000" cy="9144000"/>
@@ -520,28 +524,7 @@
           <a:bodyPr/>
           <a:lstStyle/>
           <a:p>
-            <a:r>
-              <a:rPr lang="en-US" dirty="0"/>
-              <a:t>You have been brought on as a data consultant by Constellation Brands to analyze sales performance using the Iowa Liquor Sales database, with a specific focus on transactions from 2014. The company wants to better understand how one of its product categories or brands performed during that year across different markets to inform future strategy.</a:t>
-            </a:r>
-          </a:p>
-          <a:p>
-            <a:r>
-              <a:rPr lang="en-US" dirty="0"/>
-              <a:t>Your role is to conduct a SWOT-style analysis by writing SQL queries that explore transaction data, product performance, store activity, and regional trends. You will focus on a specific category or vendor within the dataset to identify strengths, weaknesses, opportunities, and threats based on 2014 sales data.</a:t>
-            </a:r>
-          </a:p>
-          <a:p>
-            <a:r>
-              <a:rPr lang="en-US" dirty="0"/>
-              <a:t>As part of your analysis, you will generate insights from the data and export selected results to create visualizations that support your findings. These insights will be used to present actionable recommendations to Constellation Brands’ leadership team.</a:t>
-            </a:r>
-          </a:p>
-          <a:p>
-            <a:r>
-              <a:rPr lang="en-US" dirty="0"/>
-              <a:t>(OpenAI 2026)</a:t>
-            </a:r>
+            <a:endParaRPr lang="en-US" dirty="0"/>
           </a:p>
         </p:txBody>
       </p:sp>
@@ -562,7 +545,7 @@
           <a:p>
             <a:fld id="{9A18230D-6974-4A26-8365-62E356C4785F}" type="slidenum">
               <a:rPr lang="en-US" smtClean="0"/>
-              <a:t>3</a:t>
+              <a:t>1</a:t>
             </a:fld>
             <a:endParaRPr lang="en-US"/>
           </a:p>
@@ -571,7 +554,7 @@
     </p:spTree>
     <p:extLst>
       <p:ext uri="{BB962C8B-B14F-4D97-AF65-F5344CB8AC3E}">
-        <p14:creationId xmlns:p14="http://schemas.microsoft.com/office/powerpoint/2010/main" val="3156598360"/>
+        <p14:creationId xmlns:p14="http://schemas.microsoft.com/office/powerpoint/2010/main" val="3788611534"/>
       </p:ext>
     </p:extLst>
   </p:cSld>
@@ -627,17 +610,26 @@
           <a:p>
             <a:r>
               <a:rPr lang="en-US" dirty="0"/>
-              <a:t>Notes:</a:t>
-            </a:r>
-          </a:p>
-          <a:p>
-            <a:r>
-              <a:rPr lang="en-US" dirty="0"/>
-              <a:t>Year 2014</a:t>
-            </a:r>
-          </a:p>
-          <a:p>
-            <a:endParaRPr lang="en-US" dirty="0"/>
+              <a:t>You have been brought on as a data consultant by Constellation Brands to analyze sales performance using the Iowa Liquor Sales database, with a specific focus on transactions from 2014. The company wants to better understand how one of its product categories or brands performed during that year across different markets to inform future strategy.</a:t>
+            </a:r>
+          </a:p>
+          <a:p>
+            <a:r>
+              <a:rPr lang="en-US" dirty="0"/>
+              <a:t>Your role is to conduct a SWOT-style analysis by writing SQL queries that explore transaction data, product performance, store activity, and regional trends. You will focus on a specific category or vendor within the dataset to identify strengths, weaknesses, opportunities, and threats based on 2014 sales data.</a:t>
+            </a:r>
+          </a:p>
+          <a:p>
+            <a:r>
+              <a:rPr lang="en-US" dirty="0"/>
+              <a:t>As part of your analysis, you will generate insights from the data and export selected results to create visualizations that support your findings. These insights will be used to present actionable recommendations to Constellation Brands’ leadership team.</a:t>
+            </a:r>
+          </a:p>
+          <a:p>
+            <a:r>
+              <a:rPr lang="en-US" dirty="0"/>
+              <a:t>(OpenAI 2026)</a:t>
+            </a:r>
           </a:p>
         </p:txBody>
       </p:sp>
@@ -658,7 +650,7 @@
           <a:p>
             <a:fld id="{9A18230D-6974-4A26-8365-62E356C4785F}" type="slidenum">
               <a:rPr lang="en-US" smtClean="0"/>
-              <a:t>4</a:t>
+              <a:t>2</a:t>
             </a:fld>
             <a:endParaRPr lang="en-US"/>
           </a:p>
@@ -667,7 +659,7 @@
     </p:spTree>
     <p:extLst>
       <p:ext uri="{BB962C8B-B14F-4D97-AF65-F5344CB8AC3E}">
-        <p14:creationId xmlns:p14="http://schemas.microsoft.com/office/powerpoint/2010/main" val="1028827278"/>
+        <p14:creationId xmlns:p14="http://schemas.microsoft.com/office/powerpoint/2010/main" val="3156598360"/>
       </p:ext>
     </p:extLst>
   </p:cSld>
@@ -723,26 +715,17 @@
           <a:p>
             <a:r>
               <a:rPr lang="en-US" dirty="0"/>
-              <a:t>How many products</a:t>
-            </a:r>
-          </a:p>
-          <a:p>
-            <a:r>
-              <a:rPr lang="en-US" dirty="0"/>
-              <a:t>Strongest Product</a:t>
-            </a:r>
-          </a:p>
-          <a:p>
-            <a:r>
-              <a:rPr lang="en-US" dirty="0"/>
-              <a:t>How does the strongest product do in its own category</a:t>
-            </a:r>
-          </a:p>
-          <a:p>
-            <a:r>
-              <a:rPr lang="en-US" dirty="0"/>
-              <a:t>	Market share</a:t>
-            </a:r>
+              <a:t>Notes:</a:t>
+            </a:r>
+          </a:p>
+          <a:p>
+            <a:r>
+              <a:rPr lang="en-US" dirty="0"/>
+              <a:t>Year 2014</a:t>
+            </a:r>
+          </a:p>
+          <a:p>
+            <a:endParaRPr lang="en-US" dirty="0"/>
           </a:p>
         </p:txBody>
       </p:sp>
@@ -763,7 +746,7 @@
           <a:p>
             <a:fld id="{9A18230D-6974-4A26-8365-62E356C4785F}" type="slidenum">
               <a:rPr lang="en-US" smtClean="0"/>
-              <a:t>5</a:t>
+              <a:t>4</a:t>
             </a:fld>
             <a:endParaRPr lang="en-US"/>
           </a:p>
@@ -772,7 +755,7 @@
     </p:spTree>
     <p:extLst>
       <p:ext uri="{BB962C8B-B14F-4D97-AF65-F5344CB8AC3E}">
-        <p14:creationId xmlns:p14="http://schemas.microsoft.com/office/powerpoint/2010/main" val="2007414624"/>
+        <p14:creationId xmlns:p14="http://schemas.microsoft.com/office/powerpoint/2010/main" val="1028827278"/>
       </p:ext>
     </p:extLst>
   </p:cSld>
@@ -783,6 +766,159 @@
 </file>
 
 <file path=ppt/notesSlides/notesSlide4.xml><?xml version="1.0" encoding="utf-8"?>
+<p:notes xmlns:a="http://schemas.openxmlformats.org/drawingml/2006/main" xmlns:r="http://schemas.openxmlformats.org/officeDocument/2006/relationships" xmlns:p="http://schemas.openxmlformats.org/presentationml/2006/main">
+  <p:cSld>
+    <p:spTree>
+      <p:nvGrpSpPr>
+        <p:cNvPr id="1" name="">
+          <a:extLst>
+            <a:ext uri="{FF2B5EF4-FFF2-40B4-BE49-F238E27FC236}">
+              <a16:creationId xmlns:a16="http://schemas.microsoft.com/office/drawing/2014/main" id="{D26C9233-2773-E890-0A10-67E679A504D4}"/>
+            </a:ext>
+          </a:extLst>
+        </p:cNvPr>
+        <p:cNvGrpSpPr/>
+        <p:nvPr/>
+      </p:nvGrpSpPr>
+      <p:grpSpPr>
+        <a:xfrm>
+          <a:off x="0" y="0"/>
+          <a:ext cx="0" cy="0"/>
+          <a:chOff x="0" y="0"/>
+          <a:chExt cx="0" cy="0"/>
+        </a:xfrm>
+      </p:grpSpPr>
+      <p:sp>
+        <p:nvSpPr>
+          <p:cNvPr id="2" name="Slide Image Placeholder 1">
+            <a:extLst>
+              <a:ext uri="{FF2B5EF4-FFF2-40B4-BE49-F238E27FC236}">
+                <a16:creationId xmlns:a16="http://schemas.microsoft.com/office/drawing/2014/main" id="{E9B7D78E-112E-92C3-B3BC-AE71E617BC7D}"/>
+              </a:ext>
+            </a:extLst>
+          </p:cNvPr>
+          <p:cNvSpPr>
+            <a:spLocks noGrp="1" noRot="1" noChangeAspect="1"/>
+          </p:cNvSpPr>
+          <p:nvPr>
+            <p:ph type="sldImg"/>
+          </p:nvPr>
+        </p:nvSpPr>
+        <p:spPr/>
+      </p:sp>
+      <p:sp>
+        <p:nvSpPr>
+          <p:cNvPr id="3" name="Notes Placeholder 2">
+            <a:extLst>
+              <a:ext uri="{FF2B5EF4-FFF2-40B4-BE49-F238E27FC236}">
+                <a16:creationId xmlns:a16="http://schemas.microsoft.com/office/drawing/2014/main" id="{068D2C95-B549-B3A1-59A3-53C8090F521D}"/>
+              </a:ext>
+            </a:extLst>
+          </p:cNvPr>
+          <p:cNvSpPr>
+            <a:spLocks noGrp="1"/>
+          </p:cNvSpPr>
+          <p:nvPr>
+            <p:ph type="body" idx="1"/>
+          </p:nvPr>
+        </p:nvSpPr>
+        <p:spPr/>
+        <p:txBody>
+          <a:bodyPr/>
+          <a:lstStyle/>
+          <a:p>
+            <a:r>
+              <a:rPr lang="en-US" dirty="0"/>
+              <a:t>Notes:</a:t>
+            </a:r>
+          </a:p>
+          <a:p>
+            <a:r>
+              <a:rPr lang="en-US" dirty="0"/>
+              <a:t>Revenue</a:t>
+            </a:r>
+          </a:p>
+          <a:p>
+            <a:pPr lvl="1"/>
+            <a:r>
+              <a:rPr lang="en-US" dirty="0"/>
+              <a:t>Average revenue generated per county: $235K</a:t>
+            </a:r>
+          </a:p>
+          <a:p>
+            <a:pPr lvl="1"/>
+            <a:r>
+              <a:rPr lang="en-US" dirty="0"/>
+              <a:t>Highest: Polk; lowest: Keokuk</a:t>
+            </a:r>
+          </a:p>
+          <a:p>
+            <a:r>
+              <a:rPr lang="en-US" dirty="0"/>
+              <a:t>Polk, Linn, and Black Hawk were our highest revenue generators</a:t>
+            </a:r>
+          </a:p>
+          <a:p>
+            <a:pPr lvl="1"/>
+            <a:r>
+              <a:rPr lang="en-US" dirty="0"/>
+              <a:t>Over $1M in sales</a:t>
+            </a:r>
+          </a:p>
+          <a:p>
+            <a:r>
+              <a:rPr lang="en-US" dirty="0"/>
+              <a:t>Keokuk, Hancock, Mills were our lowest revenue generator</a:t>
+            </a:r>
+          </a:p>
+          <a:p>
+            <a:endParaRPr lang="en-US" dirty="0"/>
+          </a:p>
+        </p:txBody>
+      </p:sp>
+      <p:sp>
+        <p:nvSpPr>
+          <p:cNvPr id="4" name="Slide Number Placeholder 3">
+            <a:extLst>
+              <a:ext uri="{FF2B5EF4-FFF2-40B4-BE49-F238E27FC236}">
+                <a16:creationId xmlns:a16="http://schemas.microsoft.com/office/drawing/2014/main" id="{0F2CD9AF-3347-30E8-2912-A03B3C20B178}"/>
+              </a:ext>
+            </a:extLst>
+          </p:cNvPr>
+          <p:cNvSpPr>
+            <a:spLocks noGrp="1"/>
+          </p:cNvSpPr>
+          <p:nvPr>
+            <p:ph type="sldNum" sz="quarter" idx="5"/>
+          </p:nvPr>
+        </p:nvSpPr>
+        <p:spPr/>
+        <p:txBody>
+          <a:bodyPr/>
+          <a:lstStyle/>
+          <a:p>
+            <a:fld id="{9A18230D-6974-4A26-8365-62E356C4785F}" type="slidenum">
+              <a:rPr lang="en-US" smtClean="0"/>
+              <a:t>6</a:t>
+            </a:fld>
+            <a:endParaRPr lang="en-US"/>
+          </a:p>
+        </p:txBody>
+      </p:sp>
+    </p:spTree>
+    <p:extLst>
+      <p:ext uri="{BB962C8B-B14F-4D97-AF65-F5344CB8AC3E}">
+        <p14:creationId xmlns:p14="http://schemas.microsoft.com/office/powerpoint/2010/main" val="451402915"/>
+      </p:ext>
+    </p:extLst>
+  </p:cSld>
+  <p:clrMapOvr>
+    <a:masterClrMapping/>
+  </p:clrMapOvr>
+</p:notes>
+</file>
+
+<file path=ppt/notesSlides/notesSlide5.xml><?xml version="1.0" encoding="utf-8"?>
 <p:notes xmlns:a="http://schemas.openxmlformats.org/drawingml/2006/main" xmlns:r="http://schemas.openxmlformats.org/officeDocument/2006/relationships" xmlns:p="http://schemas.openxmlformats.org/presentationml/2006/main">
   <p:cSld>
     <p:spTree>
@@ -828,13 +964,7 @@
           <a:p>
             <a:r>
               <a:rPr lang="en-US" dirty="0"/>
-              <a:t>Explore the Beer market and Wine market to see improvement</a:t>
-            </a:r>
-          </a:p>
-          <a:p>
-            <a:r>
-              <a:rPr lang="en-US" dirty="0"/>
-              <a:t>	Acquisition of Modelo to enter the beer market in 2013</a:t>
+              <a:t>We can set the pace, we can widen the gap, but we will own the finish line</a:t>
             </a:r>
           </a:p>
         </p:txBody>
@@ -856,7 +986,100 @@
           <a:p>
             <a:fld id="{9A18230D-6974-4A26-8365-62E356C4785F}" type="slidenum">
               <a:rPr lang="en-US" smtClean="0"/>
-              <a:t>13</a:t>
+              <a:t>11</a:t>
+            </a:fld>
+            <a:endParaRPr lang="en-US"/>
+          </a:p>
+        </p:txBody>
+      </p:sp>
+    </p:spTree>
+    <p:extLst>
+      <p:ext uri="{BB962C8B-B14F-4D97-AF65-F5344CB8AC3E}">
+        <p14:creationId xmlns:p14="http://schemas.microsoft.com/office/powerpoint/2010/main" val="3511772830"/>
+      </p:ext>
+    </p:extLst>
+  </p:cSld>
+  <p:clrMapOvr>
+    <a:masterClrMapping/>
+  </p:clrMapOvr>
+</p:notes>
+</file>
+
+<file path=ppt/notesSlides/notesSlide6.xml><?xml version="1.0" encoding="utf-8"?>
+<p:notes xmlns:a="http://schemas.openxmlformats.org/drawingml/2006/main" xmlns:r="http://schemas.openxmlformats.org/officeDocument/2006/relationships" xmlns:p="http://schemas.openxmlformats.org/presentationml/2006/main">
+  <p:cSld>
+    <p:spTree>
+      <p:nvGrpSpPr>
+        <p:cNvPr id="1" name=""/>
+        <p:cNvGrpSpPr/>
+        <p:nvPr/>
+      </p:nvGrpSpPr>
+      <p:grpSpPr>
+        <a:xfrm>
+          <a:off x="0" y="0"/>
+          <a:ext cx="0" cy="0"/>
+          <a:chOff x="0" y="0"/>
+          <a:chExt cx="0" cy="0"/>
+        </a:xfrm>
+      </p:grpSpPr>
+      <p:sp>
+        <p:nvSpPr>
+          <p:cNvPr id="2" name="Slide Image Placeholder 1"/>
+          <p:cNvSpPr>
+            <a:spLocks noGrp="1" noRot="1" noChangeAspect="1"/>
+          </p:cNvSpPr>
+          <p:nvPr>
+            <p:ph type="sldImg"/>
+          </p:nvPr>
+        </p:nvSpPr>
+        <p:spPr/>
+      </p:sp>
+      <p:sp>
+        <p:nvSpPr>
+          <p:cNvPr id="3" name="Notes Placeholder 2"/>
+          <p:cNvSpPr>
+            <a:spLocks noGrp="1"/>
+          </p:cNvSpPr>
+          <p:nvPr>
+            <p:ph type="body" idx="1"/>
+          </p:nvPr>
+        </p:nvSpPr>
+        <p:spPr/>
+        <p:txBody>
+          <a:bodyPr/>
+          <a:lstStyle/>
+          <a:p>
+            <a:r>
+              <a:rPr lang="en-US" dirty="0"/>
+              <a:t>Explore the Beer market and Wine market to see improvement</a:t>
+            </a:r>
+          </a:p>
+          <a:p>
+            <a:r>
+              <a:rPr lang="en-US" dirty="0"/>
+              <a:t>	Acquisition of Modelo to enter the beer market in 2013</a:t>
+            </a:r>
+          </a:p>
+        </p:txBody>
+      </p:sp>
+      <p:sp>
+        <p:nvSpPr>
+          <p:cNvPr id="4" name="Slide Number Placeholder 3"/>
+          <p:cNvSpPr>
+            <a:spLocks noGrp="1"/>
+          </p:cNvSpPr>
+          <p:nvPr>
+            <p:ph type="sldNum" sz="quarter" idx="5"/>
+          </p:nvPr>
+        </p:nvSpPr>
+        <p:spPr/>
+        <p:txBody>
+          <a:bodyPr/>
+          <a:lstStyle/>
+          <a:p>
+            <a:fld id="{9A18230D-6974-4A26-8365-62E356C4785F}" type="slidenum">
+              <a:rPr lang="en-US" smtClean="0"/>
+              <a:t>15</a:t>
             </a:fld>
             <a:endParaRPr lang="en-US"/>
           </a:p>
@@ -4140,12 +4363,6 @@
           <a:p>
             <a:r>
               <a:rPr lang="en-US" dirty="0"/>
-              <a:t>Longley Pham</a:t>
-            </a:r>
-          </a:p>
-          <a:p>
-            <a:r>
-              <a:rPr lang="en-US" dirty="0"/>
               <a:t>2014 Iowa Liquor Sales Analysis</a:t>
             </a:r>
           </a:p>
@@ -4189,10 +4406,10 @@
       </p:grpSpPr>
       <p:sp>
         <p:nvSpPr>
-          <p:cNvPr id="2" name="Title 1">
-            <a:extLst>
-              <a:ext uri="{FF2B5EF4-FFF2-40B4-BE49-F238E27FC236}">
-                <a16:creationId xmlns:a16="http://schemas.microsoft.com/office/drawing/2014/main" id="{5A019B50-658E-240A-5EF5-18DFB48C4DB3}"/>
+          <p:cNvPr id="7" name="Title 6">
+            <a:extLst>
+              <a:ext uri="{FF2B5EF4-FFF2-40B4-BE49-F238E27FC236}">
+                <a16:creationId xmlns:a16="http://schemas.microsoft.com/office/drawing/2014/main" id="{2F27DC5E-5F05-C6B5-1CA9-64C6A8CE52DD}"/>
               </a:ext>
             </a:extLst>
           </p:cNvPr>
@@ -4210,40 +4427,167 @@
           <a:p>
             <a:r>
               <a:rPr lang="en-US" dirty="0"/>
-              <a:t>Analysis 3 Opportunities 2</a:t>
-            </a:r>
-          </a:p>
-        </p:txBody>
-      </p:sp>
-      <p:sp>
-        <p:nvSpPr>
-          <p:cNvPr id="3" name="Content Placeholder 2">
-            <a:extLst>
-              <a:ext uri="{FF2B5EF4-FFF2-40B4-BE49-F238E27FC236}">
-                <a16:creationId xmlns:a16="http://schemas.microsoft.com/office/drawing/2014/main" id="{029FA1F5-5121-5C37-06A1-25AEB2125E7B}"/>
-              </a:ext>
-            </a:extLst>
-          </p:cNvPr>
-          <p:cNvSpPr>
-            <a:spLocks noGrp="1"/>
-          </p:cNvSpPr>
-          <p:nvPr>
-            <p:ph idx="1"/>
-          </p:nvPr>
-        </p:nvSpPr>
-        <p:spPr/>
-        <p:txBody>
-          <a:bodyPr/>
-          <a:lstStyle/>
-          <a:p>
-            <a:endParaRPr lang="en-US"/>
+              <a:t>Product Performance (Cont.)</a:t>
+            </a:r>
+          </a:p>
+        </p:txBody>
+      </p:sp>
+      <p:pic>
+        <p:nvPicPr>
+          <p:cNvPr id="11" name="Content Placeholder 10">
+            <a:extLst>
+              <a:ext uri="{FF2B5EF4-FFF2-40B4-BE49-F238E27FC236}">
+                <a16:creationId xmlns:a16="http://schemas.microsoft.com/office/drawing/2014/main" id="{0BC4356D-58C3-BE7F-97CB-C3B6D71A63F8}"/>
+              </a:ext>
+            </a:extLst>
+          </p:cNvPr>
+          <p:cNvPicPr>
+            <a:picLocks noGrp="1" noChangeAspect="1"/>
+          </p:cNvPicPr>
+          <p:nvPr>
+            <p:ph sz="half" idx="1"/>
+          </p:nvPr>
+        </p:nvPicPr>
+        <p:blipFill>
+          <a:blip r:embed="rId2">
+            <a:extLst>
+              <a:ext uri="{28A0092B-C50C-407E-A947-70E740481C1C}">
+                <a14:useLocalDpi xmlns:a14="http://schemas.microsoft.com/office/drawing/2010/main" val="0"/>
+              </a:ext>
+            </a:extLst>
+          </a:blip>
+          <a:stretch>
+            <a:fillRect/>
+          </a:stretch>
+        </p:blipFill>
+        <p:spPr>
+          <a:xfrm>
+            <a:off x="1060273" y="1825625"/>
+            <a:ext cx="4737454" cy="4351338"/>
+          </a:xfrm>
+          <a:prstGeom prst="rect">
+            <a:avLst/>
+          </a:prstGeom>
+        </p:spPr>
+      </p:pic>
+      <p:pic>
+        <p:nvPicPr>
+          <p:cNvPr id="13" name="Content Placeholder 12">
+            <a:extLst>
+              <a:ext uri="{FF2B5EF4-FFF2-40B4-BE49-F238E27FC236}">
+                <a16:creationId xmlns:a16="http://schemas.microsoft.com/office/drawing/2014/main" id="{E0F87FD3-A5FF-2781-59FA-B8656EA66E46}"/>
+              </a:ext>
+            </a:extLst>
+          </p:cNvPr>
+          <p:cNvPicPr>
+            <a:picLocks noGrp="1" noChangeAspect="1"/>
+          </p:cNvPicPr>
+          <p:nvPr>
+            <p:ph sz="half" idx="2"/>
+          </p:nvPr>
+        </p:nvPicPr>
+        <p:blipFill>
+          <a:blip r:embed="rId3">
+            <a:extLst>
+              <a:ext uri="{28A0092B-C50C-407E-A947-70E740481C1C}">
+                <a14:useLocalDpi xmlns:a14="http://schemas.microsoft.com/office/drawing/2010/main" val="0"/>
+              </a:ext>
+            </a:extLst>
+          </a:blip>
+          <a:stretch>
+            <a:fillRect/>
+          </a:stretch>
+        </p:blipFill>
+        <p:spPr>
+          <a:xfrm>
+            <a:off x="6422715" y="1825625"/>
+            <a:ext cx="4680569" cy="4351338"/>
+          </a:xfrm>
+          <a:prstGeom prst="rect">
+            <a:avLst/>
+          </a:prstGeom>
+        </p:spPr>
+      </p:pic>
+      <p:sp>
+        <p:nvSpPr>
+          <p:cNvPr id="14" name="TextBox 13">
+            <a:extLst>
+              <a:ext uri="{FF2B5EF4-FFF2-40B4-BE49-F238E27FC236}">
+                <a16:creationId xmlns:a16="http://schemas.microsoft.com/office/drawing/2014/main" id="{B412C438-7430-8D86-CE15-08A5F68DE490}"/>
+              </a:ext>
+            </a:extLst>
+          </p:cNvPr>
+          <p:cNvSpPr txBox="1">
+            <a:spLocks/>
+          </p:cNvSpPr>
+          <p:nvPr/>
+        </p:nvSpPr>
+        <p:spPr>
+          <a:xfrm>
+            <a:off x="1474750" y="6176963"/>
+            <a:ext cx="3908506" cy="369332"/>
+          </a:xfrm>
+          <a:prstGeom prst="rect">
+            <a:avLst/>
+          </a:prstGeom>
+          <a:noFill/>
+        </p:spPr>
+        <p:txBody>
+          <a:bodyPr wrap="none" rtlCol="0">
+            <a:spAutoFit/>
+          </a:bodyPr>
+          <a:lstStyle/>
+          <a:p>
+            <a:pPr algn="ctr"/>
+            <a:r>
+              <a:rPr lang="en-US" dirty="0"/>
+              <a:t>Figure 4: Annual Revenue by Category</a:t>
+            </a:r>
+          </a:p>
+        </p:txBody>
+      </p:sp>
+      <p:sp>
+        <p:nvSpPr>
+          <p:cNvPr id="15" name="TextBox 14">
+            <a:extLst>
+              <a:ext uri="{FF2B5EF4-FFF2-40B4-BE49-F238E27FC236}">
+                <a16:creationId xmlns:a16="http://schemas.microsoft.com/office/drawing/2014/main" id="{3BE0FE52-208D-26EE-5558-0916DD331DC0}"/>
+              </a:ext>
+            </a:extLst>
+          </p:cNvPr>
+          <p:cNvSpPr txBox="1">
+            <a:spLocks/>
+          </p:cNvSpPr>
+          <p:nvPr/>
+        </p:nvSpPr>
+        <p:spPr>
+          <a:xfrm>
+            <a:off x="6949908" y="6176963"/>
+            <a:ext cx="3626185" cy="369332"/>
+          </a:xfrm>
+          <a:prstGeom prst="rect">
+            <a:avLst/>
+          </a:prstGeom>
+          <a:noFill/>
+        </p:spPr>
+        <p:txBody>
+          <a:bodyPr wrap="none" rtlCol="0">
+            <a:spAutoFit/>
+          </a:bodyPr>
+          <a:lstStyle/>
+          <a:p>
+            <a:pPr algn="ctr"/>
+            <a:r>
+              <a:rPr lang="en-US" dirty="0"/>
+              <a:t>Figure 5: Annual Revenue by Series</a:t>
+            </a:r>
           </a:p>
         </p:txBody>
       </p:sp>
     </p:spTree>
     <p:extLst>
       <p:ext uri="{BB962C8B-B14F-4D97-AF65-F5344CB8AC3E}">
-        <p14:creationId xmlns:p14="http://schemas.microsoft.com/office/powerpoint/2010/main" val="1640769834"/>
+        <p14:creationId xmlns:p14="http://schemas.microsoft.com/office/powerpoint/2010/main" val="920226598"/>
       </p:ext>
     </p:extLst>
   </p:cSld>
@@ -4254,6 +4598,319 @@
 </file>
 
 <file path=ppt/slides/slide11.xml><?xml version="1.0" encoding="utf-8"?>
+<p:sld xmlns:a="http://schemas.openxmlformats.org/drawingml/2006/main" xmlns:r="http://schemas.openxmlformats.org/officeDocument/2006/relationships" xmlns:p="http://schemas.openxmlformats.org/presentationml/2006/main">
+  <p:cSld>
+    <p:spTree>
+      <p:nvGrpSpPr>
+        <p:cNvPr id="1" name="">
+          <a:extLst>
+            <a:ext uri="{FF2B5EF4-FFF2-40B4-BE49-F238E27FC236}">
+              <a16:creationId xmlns:a16="http://schemas.microsoft.com/office/drawing/2014/main" id="{FF36F8D8-9E85-FEE4-7A37-E3799247A7B5}"/>
+            </a:ext>
+          </a:extLst>
+        </p:cNvPr>
+        <p:cNvGrpSpPr/>
+        <p:nvPr/>
+      </p:nvGrpSpPr>
+      <p:grpSpPr>
+        <a:xfrm>
+          <a:off x="0" y="0"/>
+          <a:ext cx="0" cy="0"/>
+          <a:chOff x="0" y="0"/>
+          <a:chExt cx="0" cy="0"/>
+        </a:xfrm>
+      </p:grpSpPr>
+      <p:sp>
+        <p:nvSpPr>
+          <p:cNvPr id="2" name="Title 1">
+            <a:extLst>
+              <a:ext uri="{FF2B5EF4-FFF2-40B4-BE49-F238E27FC236}">
+                <a16:creationId xmlns:a16="http://schemas.microsoft.com/office/drawing/2014/main" id="{DE1C1A9D-2042-8FBB-DEDE-D181A6DE87DC}"/>
+              </a:ext>
+            </a:extLst>
+          </p:cNvPr>
+          <p:cNvSpPr>
+            <a:spLocks noGrp="1"/>
+          </p:cNvSpPr>
+          <p:nvPr>
+            <p:ph type="title"/>
+          </p:nvPr>
+        </p:nvSpPr>
+        <p:spPr/>
+        <p:txBody>
+          <a:bodyPr/>
+          <a:lstStyle/>
+          <a:p>
+            <a:r>
+              <a:rPr lang="en-US" dirty="0"/>
+              <a:t>Black Velvet: The King of the Bottom Shelf</a:t>
+            </a:r>
+          </a:p>
+        </p:txBody>
+      </p:sp>
+      <p:sp>
+        <p:nvSpPr>
+          <p:cNvPr id="3" name="Content Placeholder 2">
+            <a:extLst>
+              <a:ext uri="{FF2B5EF4-FFF2-40B4-BE49-F238E27FC236}">
+                <a16:creationId xmlns:a16="http://schemas.microsoft.com/office/drawing/2014/main" id="{0395F842-E000-BE3D-C22F-45DD9C956619}"/>
+              </a:ext>
+            </a:extLst>
+          </p:cNvPr>
+          <p:cNvSpPr>
+            <a:spLocks noGrp="1"/>
+          </p:cNvSpPr>
+          <p:nvPr>
+            <p:ph sz="half" idx="1"/>
+          </p:nvPr>
+        </p:nvSpPr>
+        <p:spPr/>
+        <p:txBody>
+          <a:bodyPr>
+            <a:normAutofit/>
+          </a:bodyPr>
+          <a:lstStyle/>
+          <a:p>
+            <a:r>
+              <a:rPr lang="en-US" dirty="0"/>
+              <a:t>$19.7M out of $19.77M in Whiskey sales</a:t>
+            </a:r>
+          </a:p>
+          <a:p>
+            <a:pPr lvl="1"/>
+            <a:r>
+              <a:rPr lang="en-US" dirty="0"/>
+              <a:t>Controls 16% of overall market</a:t>
+            </a:r>
+          </a:p>
+          <a:p>
+            <a:pPr lvl="1"/>
+            <a:r>
+              <a:rPr lang="en-US" dirty="0"/>
+              <a:t>#1 among all whiskey brands</a:t>
+            </a:r>
+          </a:p>
+          <a:p>
+            <a:r>
+              <a:rPr lang="en-US" dirty="0"/>
+              <a:t>Why?</a:t>
+            </a:r>
+          </a:p>
+          <a:p>
+            <a:pPr lvl="1"/>
+            <a:r>
+              <a:rPr lang="en-US" dirty="0"/>
+              <a:t>Smooth and easy to drink</a:t>
+            </a:r>
+          </a:p>
+          <a:p>
+            <a:pPr lvl="1"/>
+            <a:r>
+              <a:rPr lang="en-US" dirty="0"/>
+              <a:t>Cheap and widely available</a:t>
+            </a:r>
+          </a:p>
+          <a:p>
+            <a:pPr lvl="1"/>
+            <a:r>
+              <a:rPr lang="en-US" dirty="0"/>
+              <a:t>Designed for casual drinkers</a:t>
+            </a:r>
+          </a:p>
+          <a:p>
+            <a:pPr lvl="1"/>
+            <a:r>
+              <a:rPr lang="en-US" dirty="0"/>
+              <a:t>Sells on brand recognition and loyalty</a:t>
+            </a:r>
+          </a:p>
+        </p:txBody>
+      </p:sp>
+      <p:pic>
+        <p:nvPicPr>
+          <p:cNvPr id="6" name="Content Placeholder 5">
+            <a:extLst>
+              <a:ext uri="{FF2B5EF4-FFF2-40B4-BE49-F238E27FC236}">
+                <a16:creationId xmlns:a16="http://schemas.microsoft.com/office/drawing/2014/main" id="{0C76034A-4EB3-CB9E-6CE5-D3F21AF80CC6}"/>
+              </a:ext>
+            </a:extLst>
+          </p:cNvPr>
+          <p:cNvPicPr>
+            <a:picLocks noGrp="1" noChangeAspect="1"/>
+          </p:cNvPicPr>
+          <p:nvPr>
+            <p:ph sz="half" idx="2"/>
+          </p:nvPr>
+        </p:nvPicPr>
+        <p:blipFill>
+          <a:blip r:embed="rId3">
+            <a:extLst>
+              <a:ext uri="{28A0092B-C50C-407E-A947-70E740481C1C}">
+                <a14:useLocalDpi xmlns:a14="http://schemas.microsoft.com/office/drawing/2010/main" val="0"/>
+              </a:ext>
+            </a:extLst>
+          </a:blip>
+          <a:stretch>
+            <a:fillRect/>
+          </a:stretch>
+        </p:blipFill>
+        <p:spPr>
+          <a:xfrm>
+            <a:off x="7935300" y="1825625"/>
+            <a:ext cx="1655400" cy="4351338"/>
+          </a:xfrm>
+          <a:prstGeom prst="rect">
+            <a:avLst/>
+          </a:prstGeom>
+        </p:spPr>
+      </p:pic>
+    </p:spTree>
+    <p:extLst>
+      <p:ext uri="{BB962C8B-B14F-4D97-AF65-F5344CB8AC3E}">
+        <p14:creationId xmlns:p14="http://schemas.microsoft.com/office/powerpoint/2010/main" val="3150154730"/>
+      </p:ext>
+    </p:extLst>
+  </p:cSld>
+  <p:clrMapOvr>
+    <a:masterClrMapping/>
+  </p:clrMapOvr>
+</p:sld>
+</file>
+
+<file path=ppt/slides/slide12.xml><?xml version="1.0" encoding="utf-8"?>
+<p:sld xmlns:a="http://schemas.openxmlformats.org/drawingml/2006/main" xmlns:r="http://schemas.openxmlformats.org/officeDocument/2006/relationships" xmlns:p="http://schemas.openxmlformats.org/presentationml/2006/main">
+  <p:cSld>
+    <p:bg>
+      <p:bgPr>
+        <a:blipFill dpi="0" rotWithShape="1">
+          <a:blip r:embed="rId2">
+            <a:alphaModFix amt="35000"/>
+            <a:lum/>
+          </a:blip>
+          <a:srcRect/>
+          <a:stretch>
+            <a:fillRect t="-2000" b="-2000"/>
+          </a:stretch>
+        </a:blipFill>
+        <a:effectLst/>
+      </p:bgPr>
+    </p:bg>
+    <p:spTree>
+      <p:nvGrpSpPr>
+        <p:cNvPr id="1" name="">
+          <a:extLst>
+            <a:ext uri="{FF2B5EF4-FFF2-40B4-BE49-F238E27FC236}">
+              <a16:creationId xmlns:a16="http://schemas.microsoft.com/office/drawing/2014/main" id="{0BAA6A4C-7A5C-7A0B-F7C6-0CCF312147E1}"/>
+            </a:ext>
+          </a:extLst>
+        </p:cNvPr>
+        <p:cNvGrpSpPr/>
+        <p:nvPr/>
+      </p:nvGrpSpPr>
+      <p:grpSpPr>
+        <a:xfrm>
+          <a:off x="0" y="0"/>
+          <a:ext cx="0" cy="0"/>
+          <a:chOff x="0" y="0"/>
+          <a:chExt cx="0" cy="0"/>
+        </a:xfrm>
+      </p:grpSpPr>
+      <p:sp>
+        <p:nvSpPr>
+          <p:cNvPr id="2" name="Title 1">
+            <a:extLst>
+              <a:ext uri="{FF2B5EF4-FFF2-40B4-BE49-F238E27FC236}">
+                <a16:creationId xmlns:a16="http://schemas.microsoft.com/office/drawing/2014/main" id="{8BC28EA6-2CCD-7FC7-6EB6-4F0EB72E511F}"/>
+              </a:ext>
+            </a:extLst>
+          </p:cNvPr>
+          <p:cNvSpPr>
+            <a:spLocks noGrp="1"/>
+          </p:cNvSpPr>
+          <p:nvPr>
+            <p:ph type="title"/>
+          </p:nvPr>
+        </p:nvSpPr>
+        <p:spPr/>
+        <p:txBody>
+          <a:bodyPr/>
+          <a:lstStyle/>
+          <a:p>
+            <a:r>
+              <a:rPr lang="en-US" dirty="0"/>
+              <a:t>Tequila Market</a:t>
+            </a:r>
+          </a:p>
+        </p:txBody>
+      </p:sp>
+      <p:sp>
+        <p:nvSpPr>
+          <p:cNvPr id="3" name="Content Placeholder 2">
+            <a:extLst>
+              <a:ext uri="{FF2B5EF4-FFF2-40B4-BE49-F238E27FC236}">
+                <a16:creationId xmlns:a16="http://schemas.microsoft.com/office/drawing/2014/main" id="{8134932C-0E57-C49F-2D12-9BB65C82AE82}"/>
+              </a:ext>
+            </a:extLst>
+          </p:cNvPr>
+          <p:cNvSpPr>
+            <a:spLocks noGrp="1"/>
+          </p:cNvSpPr>
+          <p:nvPr>
+            <p:ph idx="1"/>
+          </p:nvPr>
+        </p:nvSpPr>
+        <p:spPr/>
+        <p:txBody>
+          <a:bodyPr/>
+          <a:lstStyle/>
+          <a:p>
+            <a:r>
+              <a:rPr lang="en-US" dirty="0"/>
+              <a:t>Only one transaction, lowest performing market</a:t>
+            </a:r>
+          </a:p>
+          <a:p>
+            <a:pPr lvl="1"/>
+            <a:r>
+              <a:rPr lang="en-US" dirty="0"/>
+              <a:t>$900 in sales</a:t>
+            </a:r>
+          </a:p>
+          <a:p>
+            <a:r>
+              <a:rPr lang="en-US" dirty="0"/>
+              <a:t>No brand recognition nor loyalty</a:t>
+            </a:r>
+          </a:p>
+          <a:p>
+            <a:pPr lvl="1"/>
+            <a:r>
+              <a:rPr lang="en-US" dirty="0"/>
+              <a:t>Need to tie a “premium” reputation</a:t>
+            </a:r>
+          </a:p>
+          <a:p>
+            <a:r>
+              <a:rPr lang="en-US" dirty="0"/>
+              <a:t>Expensive, or potential </a:t>
+            </a:r>
+          </a:p>
+        </p:txBody>
+      </p:sp>
+    </p:spTree>
+    <p:extLst>
+      <p:ext uri="{BB962C8B-B14F-4D97-AF65-F5344CB8AC3E}">
+        <p14:creationId xmlns:p14="http://schemas.microsoft.com/office/powerpoint/2010/main" val="343516046"/>
+      </p:ext>
+    </p:extLst>
+  </p:cSld>
+  <p:clrMapOvr>
+    <a:masterClrMapping/>
+  </p:clrMapOvr>
+</p:sld>
+</file>
+
+<file path=ppt/slides/slide13.xml><?xml version="1.0" encoding="utf-8"?>
 <p:sld xmlns:a="http://schemas.openxmlformats.org/drawingml/2006/main" xmlns:r="http://schemas.openxmlformats.org/officeDocument/2006/relationships" xmlns:p="http://schemas.openxmlformats.org/presentationml/2006/main">
   <p:cSld>
     <p:spTree>
@@ -4299,36 +4956,49 @@
           <a:p>
             <a:r>
               <a:rPr lang="en-US" dirty="0"/>
-              <a:t>Analysis 4 Threats 1</a:t>
-            </a:r>
-          </a:p>
-        </p:txBody>
-      </p:sp>
-      <p:sp>
-        <p:nvSpPr>
-          <p:cNvPr id="3" name="Content Placeholder 2">
-            <a:extLst>
-              <a:ext uri="{FF2B5EF4-FFF2-40B4-BE49-F238E27FC236}">
-                <a16:creationId xmlns:a16="http://schemas.microsoft.com/office/drawing/2014/main" id="{E964830F-DE1D-3F7F-3D6E-BC23A581A347}"/>
-              </a:ext>
-            </a:extLst>
-          </p:cNvPr>
-          <p:cNvSpPr>
-            <a:spLocks noGrp="1"/>
-          </p:cNvSpPr>
+              <a:t>Other Market Mentions</a:t>
+            </a:r>
+          </a:p>
+        </p:txBody>
+      </p:sp>
+      <p:pic>
+        <p:nvPicPr>
+          <p:cNvPr id="10" name="Content Placeholder 9">
+            <a:extLst>
+              <a:ext uri="{FF2B5EF4-FFF2-40B4-BE49-F238E27FC236}">
+                <a16:creationId xmlns:a16="http://schemas.microsoft.com/office/drawing/2014/main" id="{2F9F0055-26EE-E73D-8645-704D6F56046F}"/>
+              </a:ext>
+            </a:extLst>
+          </p:cNvPr>
+          <p:cNvPicPr>
+            <a:picLocks noGrp="1" noChangeAspect="1"/>
+          </p:cNvPicPr>
           <p:nvPr>
             <p:ph idx="1"/>
           </p:nvPr>
-        </p:nvSpPr>
-        <p:spPr/>
-        <p:txBody>
-          <a:bodyPr/>
-          <a:lstStyle/>
-          <a:p>
-            <a:endParaRPr lang="en-US"/>
-          </a:p>
-        </p:txBody>
-      </p:sp>
+        </p:nvPicPr>
+        <p:blipFill>
+          <a:blip r:embed="rId2">
+            <a:extLst>
+              <a:ext uri="{28A0092B-C50C-407E-A947-70E740481C1C}">
+                <a14:useLocalDpi xmlns:a14="http://schemas.microsoft.com/office/drawing/2010/main" val="0"/>
+              </a:ext>
+            </a:extLst>
+          </a:blip>
+          <a:stretch>
+            <a:fillRect/>
+          </a:stretch>
+        </p:blipFill>
+        <p:spPr>
+          <a:xfrm>
+            <a:off x="1516236" y="1690688"/>
+            <a:ext cx="9159528" cy="4850885"/>
+          </a:xfrm>
+          <a:prstGeom prst="rect">
+            <a:avLst/>
+          </a:prstGeom>
+        </p:spPr>
+      </p:pic>
     </p:spTree>
     <p:extLst>
       <p:ext uri="{BB962C8B-B14F-4D97-AF65-F5344CB8AC3E}">
@@ -4342,7 +5012,7 @@
 </p:sld>
 </file>
 
-<file path=ppt/slides/slide12.xml><?xml version="1.0" encoding="utf-8"?>
+<file path=ppt/slides/slide14.xml><?xml version="1.0" encoding="utf-8"?>
 <p:sld xmlns:a="http://schemas.openxmlformats.org/drawingml/2006/main" xmlns:r="http://schemas.openxmlformats.org/officeDocument/2006/relationships" xmlns:p="http://schemas.openxmlformats.org/presentationml/2006/main">
   <p:cSld>
     <p:spTree>
@@ -4350,7 +5020,7 @@
         <p:cNvPr id="1" name="">
           <a:extLst>
             <a:ext uri="{FF2B5EF4-FFF2-40B4-BE49-F238E27FC236}">
-              <a16:creationId xmlns:a16="http://schemas.microsoft.com/office/drawing/2014/main" id="{C0240A37-73AC-28A6-0D0D-798D3F431461}"/>
+              <a16:creationId xmlns:a16="http://schemas.microsoft.com/office/drawing/2014/main" id="{160D7010-AD3B-60EB-8682-D5B530D91CE8}"/>
             </a:ext>
           </a:extLst>
         </p:cNvPr>
@@ -4370,7 +5040,7 @@
           <p:cNvPr id="2" name="Title 1">
             <a:extLst>
               <a:ext uri="{FF2B5EF4-FFF2-40B4-BE49-F238E27FC236}">
-                <a16:creationId xmlns:a16="http://schemas.microsoft.com/office/drawing/2014/main" id="{08FA52B7-8995-E2CD-63AA-0A9EF5A582A5}"/>
+                <a16:creationId xmlns:a16="http://schemas.microsoft.com/office/drawing/2014/main" id="{88FB63FC-4E4D-1766-C67C-200AAB54364E}"/>
               </a:ext>
             </a:extLst>
           </p:cNvPr>
@@ -4388,40 +5058,52 @@
           <a:p>
             <a:r>
               <a:rPr lang="en-US" dirty="0"/>
-              <a:t>Analysis 4 Threats 2</a:t>
-            </a:r>
-          </a:p>
-        </p:txBody>
-      </p:sp>
-      <p:sp>
-        <p:nvSpPr>
-          <p:cNvPr id="3" name="Content Placeholder 2">
-            <a:extLst>
-              <a:ext uri="{FF2B5EF4-FFF2-40B4-BE49-F238E27FC236}">
-                <a16:creationId xmlns:a16="http://schemas.microsoft.com/office/drawing/2014/main" id="{53CAD553-A6A6-FDE2-71F7-2CC293263516}"/>
-              </a:ext>
-            </a:extLst>
-          </p:cNvPr>
-          <p:cNvSpPr>
-            <a:spLocks noGrp="1"/>
-          </p:cNvSpPr>
+              <a:t>Other Market Mentions</a:t>
+            </a:r>
+          </a:p>
+        </p:txBody>
+      </p:sp>
+      <p:pic>
+        <p:nvPicPr>
+          <p:cNvPr id="10" name="Content Placeholder 9">
+            <a:extLst>
+              <a:ext uri="{FF2B5EF4-FFF2-40B4-BE49-F238E27FC236}">
+                <a16:creationId xmlns:a16="http://schemas.microsoft.com/office/drawing/2014/main" id="{A5E0EEF6-68E5-0973-A610-8482D6697C4A}"/>
+              </a:ext>
+            </a:extLst>
+          </p:cNvPr>
+          <p:cNvPicPr>
+            <a:picLocks noGrp="1" noChangeAspect="1"/>
+          </p:cNvPicPr>
           <p:nvPr>
             <p:ph idx="1"/>
           </p:nvPr>
-        </p:nvSpPr>
-        <p:spPr/>
-        <p:txBody>
-          <a:bodyPr/>
-          <a:lstStyle/>
-          <a:p>
-            <a:endParaRPr lang="en-US"/>
-          </a:p>
-        </p:txBody>
-      </p:sp>
+        </p:nvPicPr>
+        <p:blipFill>
+          <a:blip r:embed="rId2">
+            <a:extLst>
+              <a:ext uri="{28A0092B-C50C-407E-A947-70E740481C1C}">
+                <a14:useLocalDpi xmlns:a14="http://schemas.microsoft.com/office/drawing/2010/main" val="0"/>
+              </a:ext>
+            </a:extLst>
+          </a:blip>
+          <a:srcRect/>
+          <a:stretch/>
+        </p:blipFill>
+        <p:spPr>
+          <a:xfrm>
+            <a:off x="1516236" y="1690688"/>
+            <a:ext cx="9159528" cy="4850885"/>
+          </a:xfrm>
+          <a:prstGeom prst="rect">
+            <a:avLst/>
+          </a:prstGeom>
+        </p:spPr>
+      </p:pic>
     </p:spTree>
     <p:extLst>
       <p:ext uri="{BB962C8B-B14F-4D97-AF65-F5344CB8AC3E}">
-        <p14:creationId xmlns:p14="http://schemas.microsoft.com/office/powerpoint/2010/main" val="996944508"/>
+        <p14:creationId xmlns:p14="http://schemas.microsoft.com/office/powerpoint/2010/main" val="655854538"/>
       </p:ext>
     </p:extLst>
   </p:cSld>
@@ -4431,7 +5113,7 @@
 </p:sld>
 </file>
 
-<file path=ppt/slides/slide13.xml><?xml version="1.0" encoding="utf-8"?>
+<file path=ppt/slides/slide15.xml><?xml version="1.0" encoding="utf-8"?>
 <p:sld xmlns:a="http://schemas.openxmlformats.org/drawingml/2006/main" xmlns:r="http://schemas.openxmlformats.org/officeDocument/2006/relationships" xmlns:p="http://schemas.openxmlformats.org/presentationml/2006/main">
   <p:cSld>
     <p:spTree>
@@ -4477,7 +5159,7 @@
           <a:p>
             <a:r>
               <a:rPr lang="en-US" dirty="0"/>
-              <a:t>Summary / Recommendation</a:t>
+              <a:t>Key Takeaways</a:t>
             </a:r>
           </a:p>
         </p:txBody>
@@ -4500,10 +5182,90 @@
         </p:nvSpPr>
         <p:spPr/>
         <p:txBody>
-          <a:bodyPr/>
-          <a:lstStyle/>
-          <a:p>
-            <a:endParaRPr lang="en-US"/>
+          <a:bodyPr>
+            <a:normAutofit lnSpcReduction="10000"/>
+          </a:bodyPr>
+          <a:lstStyle/>
+          <a:p>
+            <a:r>
+              <a:rPr lang="en-US" dirty="0"/>
+              <a:t>We have influence in </a:t>
+            </a:r>
+            <a:r>
+              <a:rPr lang="en-US" b="1" u="sng" dirty="0">
+                <a:solidFill>
+                  <a:srgbClr val="00B050"/>
+                </a:solidFill>
+              </a:rPr>
+              <a:t>100%</a:t>
+            </a:r>
+            <a:r>
+              <a:rPr lang="en-US" dirty="0"/>
+              <a:t> of Iowa</a:t>
+            </a:r>
+          </a:p>
+          <a:p>
+            <a:r>
+              <a:rPr lang="en-US" dirty="0"/>
+              <a:t>Scale spender efficiency to larger markets through marketing recreational activities/promotions</a:t>
+            </a:r>
+          </a:p>
+          <a:p>
+            <a:pPr lvl="1"/>
+            <a:r>
+              <a:rPr lang="en-US" dirty="0"/>
+              <a:t>Potential global revenue growth </a:t>
+            </a:r>
+            <a:r>
+              <a:rPr lang="en-US" b="1" u="sng" dirty="0">
+                <a:solidFill>
+                  <a:srgbClr val="00B050"/>
+                </a:solidFill>
+              </a:rPr>
+              <a:t>over 100%</a:t>
+            </a:r>
+          </a:p>
+          <a:p>
+            <a:r>
+              <a:rPr lang="en-US" dirty="0"/>
+              <a:t>More budget towards researching and marketing Black Velvet and its variants; whisky industry</a:t>
+            </a:r>
+          </a:p>
+          <a:p>
+            <a:pPr lvl="1"/>
+            <a:r>
+              <a:rPr lang="en-US" dirty="0"/>
+              <a:t>Replicate its success among </a:t>
+            </a:r>
+            <a:r>
+              <a:rPr lang="en-US" dirty="0" err="1"/>
+              <a:t>Svedka</a:t>
+            </a:r>
+            <a:endParaRPr lang="en-US" dirty="0"/>
+          </a:p>
+          <a:p>
+            <a:pPr lvl="1"/>
+            <a:r>
+              <a:rPr lang="en-US" dirty="0"/>
+              <a:t>May be expensive</a:t>
+            </a:r>
+          </a:p>
+          <a:p>
+            <a:r>
+              <a:rPr lang="en-US" dirty="0"/>
+              <a:t>Reconsider Tequila pilot marketing or drop completely</a:t>
+            </a:r>
+          </a:p>
+          <a:p>
+            <a:r>
+              <a:rPr lang="en-US" dirty="0"/>
+              <a:t>As with customer loyalty, make our brands </a:t>
+            </a:r>
+            <a:r>
+              <a:rPr lang="en-US" b="1" u="sng" dirty="0"/>
+              <a:t>worth reaching for</a:t>
+            </a:r>
+            <a:endParaRPr lang="en-US" dirty="0"/>
           </a:p>
         </p:txBody>
       </p:sp>
@@ -4511,6 +5273,303 @@
     <p:extLst>
       <p:ext uri="{BB962C8B-B14F-4D97-AF65-F5344CB8AC3E}">
         <p14:creationId xmlns:p14="http://schemas.microsoft.com/office/powerpoint/2010/main" val="3831926513"/>
+      </p:ext>
+    </p:extLst>
+  </p:cSld>
+  <p:clrMapOvr>
+    <a:masterClrMapping/>
+  </p:clrMapOvr>
+</p:sld>
+</file>
+
+<file path=ppt/slides/slide16.xml><?xml version="1.0" encoding="utf-8"?>
+<p:sld xmlns:a="http://schemas.openxmlformats.org/drawingml/2006/main" xmlns:r="http://schemas.openxmlformats.org/officeDocument/2006/relationships" xmlns:p="http://schemas.openxmlformats.org/presentationml/2006/main">
+  <p:cSld>
+    <p:bg>
+      <p:bgPr>
+        <a:blipFill dpi="0" rotWithShape="1">
+          <a:blip r:embed="rId2">
+            <a:alphaModFix amt="35000"/>
+            <a:lum/>
+          </a:blip>
+          <a:srcRect/>
+          <a:stretch>
+            <a:fillRect/>
+          </a:stretch>
+        </a:blipFill>
+        <a:effectLst/>
+      </p:bgPr>
+    </p:bg>
+    <p:spTree>
+      <p:nvGrpSpPr>
+        <p:cNvPr id="1" name=""/>
+        <p:cNvGrpSpPr/>
+        <p:nvPr/>
+      </p:nvGrpSpPr>
+      <p:grpSpPr>
+        <a:xfrm>
+          <a:off x="0" y="0"/>
+          <a:ext cx="0" cy="0"/>
+          <a:chOff x="0" y="0"/>
+          <a:chExt cx="0" cy="0"/>
+        </a:xfrm>
+      </p:grpSpPr>
+      <p:sp>
+        <p:nvSpPr>
+          <p:cNvPr id="2" name="Title 1">
+            <a:extLst>
+              <a:ext uri="{FF2B5EF4-FFF2-40B4-BE49-F238E27FC236}">
+                <a16:creationId xmlns:a16="http://schemas.microsoft.com/office/drawing/2014/main" id="{F1346390-67A1-36BB-72E3-035DA62E4ACB}"/>
+              </a:ext>
+            </a:extLst>
+          </p:cNvPr>
+          <p:cNvSpPr>
+            <a:spLocks noGrp="1"/>
+          </p:cNvSpPr>
+          <p:nvPr>
+            <p:ph type="title"/>
+          </p:nvPr>
+        </p:nvSpPr>
+        <p:spPr/>
+        <p:txBody>
+          <a:bodyPr/>
+          <a:lstStyle/>
+          <a:p>
+            <a:r>
+              <a:rPr lang="en-US" dirty="0"/>
+              <a:t>The Risky Play</a:t>
+            </a:r>
+          </a:p>
+        </p:txBody>
+      </p:sp>
+      <p:sp>
+        <p:nvSpPr>
+          <p:cNvPr id="3" name="Content Placeholder 2">
+            <a:extLst>
+              <a:ext uri="{FF2B5EF4-FFF2-40B4-BE49-F238E27FC236}">
+                <a16:creationId xmlns:a16="http://schemas.microsoft.com/office/drawing/2014/main" id="{C7BA4404-20B5-31B6-F277-5A3B263BA3E7}"/>
+              </a:ext>
+            </a:extLst>
+          </p:cNvPr>
+          <p:cNvSpPr>
+            <a:spLocks noGrp="1"/>
+          </p:cNvSpPr>
+          <p:nvPr>
+            <p:ph idx="1"/>
+          </p:nvPr>
+        </p:nvSpPr>
+        <p:spPr/>
+        <p:txBody>
+          <a:bodyPr>
+            <a:normAutofit lnSpcReduction="10000"/>
+          </a:bodyPr>
+          <a:lstStyle/>
+          <a:p>
+            <a:r>
+              <a:rPr lang="en-US" dirty="0"/>
+              <a:t>We acquired Modelo back in 2014</a:t>
+            </a:r>
+          </a:p>
+          <a:p>
+            <a:r>
+              <a:rPr lang="en-US" dirty="0"/>
+              <a:t>Remember Black Velvet</a:t>
+            </a:r>
+          </a:p>
+          <a:p>
+            <a:pPr lvl="1"/>
+            <a:r>
+              <a:rPr lang="en-US" dirty="0"/>
+              <a:t>Smooth and easy to drink</a:t>
+            </a:r>
+          </a:p>
+          <a:p>
+            <a:pPr lvl="1"/>
+            <a:r>
+              <a:rPr lang="en-US" dirty="0"/>
+              <a:t>Cheap and widely available</a:t>
+            </a:r>
+          </a:p>
+          <a:p>
+            <a:pPr lvl="1"/>
+            <a:r>
+              <a:rPr lang="en-US" dirty="0"/>
+              <a:t>Designed for casual drinkers</a:t>
+            </a:r>
+          </a:p>
+          <a:p>
+            <a:pPr lvl="1"/>
+            <a:r>
+              <a:rPr lang="en-US" dirty="0"/>
+              <a:t>Sells on brand recognition and loyalty</a:t>
+            </a:r>
+          </a:p>
+          <a:p>
+            <a:r>
+              <a:rPr lang="en-US" dirty="0"/>
+              <a:t>Sell Black Velvet and scale in the beer market</a:t>
+            </a:r>
+          </a:p>
+          <a:p>
+            <a:pPr lvl="1"/>
+            <a:r>
+              <a:rPr lang="en-US" dirty="0"/>
+              <a:t>Less expensive, more inclusive of “everyone”</a:t>
+            </a:r>
+          </a:p>
+          <a:p>
+            <a:pPr lvl="1"/>
+            <a:r>
+              <a:rPr lang="en-US" dirty="0"/>
+              <a:t>Market it as premium</a:t>
+            </a:r>
+          </a:p>
+          <a:p>
+            <a:r>
+              <a:rPr lang="en-US" dirty="0"/>
+              <a:t>Grab an advantage in a limitless potential market</a:t>
+            </a:r>
+          </a:p>
+        </p:txBody>
+      </p:sp>
+    </p:spTree>
+    <p:extLst>
+      <p:ext uri="{BB962C8B-B14F-4D97-AF65-F5344CB8AC3E}">
+        <p14:creationId xmlns:p14="http://schemas.microsoft.com/office/powerpoint/2010/main" val="1355991289"/>
+      </p:ext>
+    </p:extLst>
+  </p:cSld>
+  <p:clrMapOvr>
+    <a:masterClrMapping/>
+  </p:clrMapOvr>
+</p:sld>
+</file>
+
+<file path=ppt/slides/slide17.xml><?xml version="1.0" encoding="utf-8"?>
+<p:sld xmlns:a="http://schemas.openxmlformats.org/drawingml/2006/main" xmlns:r="http://schemas.openxmlformats.org/officeDocument/2006/relationships" xmlns:p="http://schemas.openxmlformats.org/presentationml/2006/main">
+  <p:cSld>
+    <p:spTree>
+      <p:nvGrpSpPr>
+        <p:cNvPr id="1" name=""/>
+        <p:cNvGrpSpPr/>
+        <p:nvPr/>
+      </p:nvGrpSpPr>
+      <p:grpSpPr>
+        <a:xfrm>
+          <a:off x="0" y="0"/>
+          <a:ext cx="0" cy="0"/>
+          <a:chOff x="0" y="0"/>
+          <a:chExt cx="0" cy="0"/>
+        </a:xfrm>
+      </p:grpSpPr>
+      <p:sp>
+        <p:nvSpPr>
+          <p:cNvPr id="2" name="Title 1">
+            <a:extLst>
+              <a:ext uri="{FF2B5EF4-FFF2-40B4-BE49-F238E27FC236}">
+                <a16:creationId xmlns:a16="http://schemas.microsoft.com/office/drawing/2014/main" id="{6C5B9C7E-C7E4-4571-EA4A-287C7C8AAB98}"/>
+              </a:ext>
+            </a:extLst>
+          </p:cNvPr>
+          <p:cNvSpPr>
+            <a:spLocks noGrp="1"/>
+          </p:cNvSpPr>
+          <p:nvPr>
+            <p:ph type="title"/>
+          </p:nvPr>
+        </p:nvSpPr>
+        <p:spPr/>
+        <p:txBody>
+          <a:bodyPr/>
+          <a:lstStyle/>
+          <a:p>
+            <a:r>
+              <a:rPr lang="en-US" dirty="0"/>
+              <a:t>Sources</a:t>
+            </a:r>
+          </a:p>
+        </p:txBody>
+      </p:sp>
+      <p:sp>
+        <p:nvSpPr>
+          <p:cNvPr id="3" name="Content Placeholder 2">
+            <a:extLst>
+              <a:ext uri="{FF2B5EF4-FFF2-40B4-BE49-F238E27FC236}">
+                <a16:creationId xmlns:a16="http://schemas.microsoft.com/office/drawing/2014/main" id="{47029E12-A6B2-FF8E-2CD0-0799379C94DF}"/>
+              </a:ext>
+            </a:extLst>
+          </p:cNvPr>
+          <p:cNvSpPr>
+            <a:spLocks noGrp="1"/>
+          </p:cNvSpPr>
+          <p:nvPr>
+            <p:ph idx="1"/>
+          </p:nvPr>
+        </p:nvSpPr>
+        <p:spPr/>
+        <p:txBody>
+          <a:bodyPr/>
+          <a:lstStyle/>
+          <a:p>
+            <a:r>
+              <a:rPr lang="en-US" dirty="0"/>
+              <a:t>State of Iowa, Alcoholic Beverages Division. (2014). </a:t>
+            </a:r>
+            <a:r>
+              <a:rPr lang="en-US" i="1" dirty="0"/>
+              <a:t>2014 Iowa liquor sales</a:t>
+            </a:r>
+            <a:r>
+              <a:rPr lang="en-US" dirty="0"/>
+              <a:t> [Data set]. Iowa Open Data. </a:t>
+            </a:r>
+            <a:r>
+              <a:rPr lang="en-US" dirty="0">
+                <a:hlinkClick r:id="rId2"/>
+              </a:rPr>
+              <a:t>https://data.iowa.gov/Sales-Distribution/2014-Iowa-Liquor-Sales/3m8f-uw4f/about_data</a:t>
+            </a:r>
+            <a:endParaRPr lang="en-US" dirty="0"/>
+          </a:p>
+          <a:p>
+            <a:r>
+              <a:rPr lang="fr-FR" dirty="0" err="1"/>
+              <a:t>OpenAI</a:t>
+            </a:r>
+            <a:r>
+              <a:rPr lang="fr-FR" dirty="0"/>
+              <a:t>. (2024). </a:t>
+            </a:r>
+            <a:r>
+              <a:rPr lang="fr-FR" i="1" dirty="0" err="1"/>
+              <a:t>ChatGPT</a:t>
+            </a:r>
+            <a:r>
+              <a:rPr lang="fr-FR" dirty="0"/>
+              <a:t> (Aug 2024 version) [Large </a:t>
+            </a:r>
+            <a:r>
+              <a:rPr lang="fr-FR" dirty="0" err="1"/>
+              <a:t>language</a:t>
+            </a:r>
+            <a:r>
+              <a:rPr lang="fr-FR" dirty="0"/>
+              <a:t> model]. </a:t>
+            </a:r>
+            <a:r>
+              <a:rPr lang="fr-FR" dirty="0">
+                <a:hlinkClick r:id="rId3"/>
+              </a:rPr>
+              <a:t>https://chat.openai.com/</a:t>
+            </a:r>
+            <a:endParaRPr lang="en-US" dirty="0"/>
+          </a:p>
+        </p:txBody>
+      </p:sp>
+    </p:spTree>
+    <p:extLst>
+      <p:ext uri="{BB962C8B-B14F-4D97-AF65-F5344CB8AC3E}">
+        <p14:creationId xmlns:p14="http://schemas.microsoft.com/office/powerpoint/2010/main" val="1352430235"/>
       </p:ext>
     </p:extLst>
   </p:cSld>
@@ -4542,7 +5601,7 @@
           <p:cNvPr id="2" name="Title 1">
             <a:extLst>
               <a:ext uri="{FF2B5EF4-FFF2-40B4-BE49-F238E27FC236}">
-                <a16:creationId xmlns:a16="http://schemas.microsoft.com/office/drawing/2014/main" id="{98C590B0-CD87-8061-6E30-BFE5DF5D1947}"/>
+                <a16:creationId xmlns:a16="http://schemas.microsoft.com/office/drawing/2014/main" id="{3BF32740-F662-BCD9-5E98-135BDC2BBE9F}"/>
               </a:ext>
             </a:extLst>
           </p:cNvPr>
@@ -4553,14 +5612,19 @@
             <p:ph type="title"/>
           </p:nvPr>
         </p:nvSpPr>
-        <p:spPr/>
-        <p:txBody>
-          <a:bodyPr/>
-          <a:lstStyle/>
-          <a:p>
-            <a:r>
-              <a:rPr lang="en-US" dirty="0"/>
-              <a:t>About Us</a:t>
+        <p:spPr>
+          <a:xfrm>
+            <a:off x="838200" y="365125"/>
+            <a:ext cx="5181600" cy="1325563"/>
+          </a:xfrm>
+        </p:spPr>
+        <p:txBody>
+          <a:bodyPr/>
+          <a:lstStyle/>
+          <a:p>
+            <a:r>
+              <a:rPr lang="en-US" dirty="0"/>
+              <a:t>Scenario</a:t>
             </a:r>
           </a:p>
         </p:txBody>
@@ -4570,52 +5634,85 @@
           <p:cNvPr id="3" name="Content Placeholder 2">
             <a:extLst>
               <a:ext uri="{FF2B5EF4-FFF2-40B4-BE49-F238E27FC236}">
-                <a16:creationId xmlns:a16="http://schemas.microsoft.com/office/drawing/2014/main" id="{FEE45D3A-A9EC-FB84-F3F2-F395D25570D9}"/>
-              </a:ext>
-            </a:extLst>
-          </p:cNvPr>
-          <p:cNvSpPr>
-            <a:spLocks noGrp="1"/>
-          </p:cNvSpPr>
-          <p:nvPr>
-            <p:ph idx="1"/>
-          </p:nvPr>
-        </p:nvSpPr>
-        <p:spPr/>
-        <p:txBody>
-          <a:bodyPr/>
-          <a:lstStyle/>
-          <a:p>
-            <a:r>
-              <a:rPr lang="en-US" dirty="0"/>
-              <a:t>Leading international producer and marketer of beer, wine, and spirits</a:t>
-            </a:r>
-          </a:p>
-          <a:p>
-            <a:pPr lvl="1"/>
-            <a:r>
-              <a:rPr lang="en-US" dirty="0"/>
-              <a:t>Markets in U.S, Mexico, Nea Zealand, and Italy</a:t>
-            </a:r>
-          </a:p>
-          <a:p>
-            <a:r>
-              <a:rPr lang="en-US" u="sng" dirty="0"/>
-              <a:t>Worth Reaching For</a:t>
-            </a:r>
-          </a:p>
-          <a:p>
-            <a:r>
-              <a:rPr lang="en-US" dirty="0"/>
-              <a:t>s</a:t>
-            </a:r>
-          </a:p>
-        </p:txBody>
-      </p:sp>
+                <a16:creationId xmlns:a16="http://schemas.microsoft.com/office/drawing/2014/main" id="{DEC6ED37-AF01-E906-5F3A-EEB9B5127614}"/>
+              </a:ext>
+            </a:extLst>
+          </p:cNvPr>
+          <p:cNvSpPr>
+            <a:spLocks noGrp="1"/>
+          </p:cNvSpPr>
+          <p:nvPr>
+            <p:ph sz="half" idx="1"/>
+          </p:nvPr>
+        </p:nvSpPr>
+        <p:spPr/>
+        <p:txBody>
+          <a:bodyPr>
+            <a:normAutofit fontScale="92500" lnSpcReduction="10000"/>
+          </a:bodyPr>
+          <a:lstStyle/>
+          <a:p>
+            <a:pPr marL="0" indent="0">
+              <a:buNone/>
+            </a:pPr>
+            <a:r>
+              <a:rPr lang="en-US" sz="3200" dirty="0"/>
+              <a:t>You have been brought on as a data consultant by Constellation Brands to analyze sales performance using the Iowa Liquor Sales database.</a:t>
+            </a:r>
+          </a:p>
+          <a:p>
+            <a:pPr marL="0" indent="0">
+              <a:buNone/>
+            </a:pPr>
+            <a:r>
+              <a:rPr lang="en-US" sz="3200" dirty="0"/>
+              <a:t>The company wants to better understand how it performed during that year across different markets to inform future strategy.</a:t>
+            </a:r>
+          </a:p>
+        </p:txBody>
+      </p:sp>
+      <p:pic>
+        <p:nvPicPr>
+          <p:cNvPr id="6" name="Content Placeholder 5">
+            <a:extLst>
+              <a:ext uri="{FF2B5EF4-FFF2-40B4-BE49-F238E27FC236}">
+                <a16:creationId xmlns:a16="http://schemas.microsoft.com/office/drawing/2014/main" id="{61726302-CF36-FBBD-4B17-69282DF882EC}"/>
+              </a:ext>
+            </a:extLst>
+          </p:cNvPr>
+          <p:cNvPicPr>
+            <a:picLocks noGrp="1" noChangeAspect="1"/>
+          </p:cNvPicPr>
+          <p:nvPr>
+            <p:ph sz="half" idx="2"/>
+          </p:nvPr>
+        </p:nvPicPr>
+        <p:blipFill>
+          <a:blip r:embed="rId3">
+            <a:extLst>
+              <a:ext uri="{28A0092B-C50C-407E-A947-70E740481C1C}">
+                <a14:useLocalDpi xmlns:a14="http://schemas.microsoft.com/office/drawing/2010/main" val="0"/>
+              </a:ext>
+            </a:extLst>
+          </a:blip>
+          <a:stretch>
+            <a:fillRect/>
+          </a:stretch>
+        </p:blipFill>
+        <p:spPr>
+          <a:xfrm>
+            <a:off x="6867525" y="368173"/>
+            <a:ext cx="4486275" cy="5811838"/>
+          </a:xfrm>
+          <a:prstGeom prst="rect">
+            <a:avLst/>
+          </a:prstGeom>
+        </p:spPr>
+      </p:pic>
     </p:spTree>
     <p:extLst>
       <p:ext uri="{BB962C8B-B14F-4D97-AF65-F5344CB8AC3E}">
-        <p14:creationId xmlns:p14="http://schemas.microsoft.com/office/powerpoint/2010/main" val="2354719096"/>
+        <p14:creationId xmlns:p14="http://schemas.microsoft.com/office/powerpoint/2010/main" val="2707976681"/>
       </p:ext>
     </p:extLst>
   </p:cSld>
@@ -4647,7 +5744,7 @@
           <p:cNvPr id="2" name="Title 1">
             <a:extLst>
               <a:ext uri="{FF2B5EF4-FFF2-40B4-BE49-F238E27FC236}">
-                <a16:creationId xmlns:a16="http://schemas.microsoft.com/office/drawing/2014/main" id="{3BF32740-F662-BCD9-5E98-135BDC2BBE9F}"/>
+                <a16:creationId xmlns:a16="http://schemas.microsoft.com/office/drawing/2014/main" id="{F21E1969-70DA-6CBA-2E14-DA01BA826045}"/>
               </a:ext>
             </a:extLst>
           </p:cNvPr>
@@ -4658,14 +5755,19 @@
             <p:ph type="title"/>
           </p:nvPr>
         </p:nvSpPr>
-        <p:spPr/>
-        <p:txBody>
-          <a:bodyPr/>
-          <a:lstStyle/>
-          <a:p>
-            <a:r>
-              <a:rPr lang="en-US" dirty="0"/>
-              <a:t>Scenario</a:t>
+        <p:spPr>
+          <a:xfrm>
+            <a:off x="838200" y="365125"/>
+            <a:ext cx="5181600" cy="1325563"/>
+          </a:xfrm>
+        </p:spPr>
+        <p:txBody>
+          <a:bodyPr/>
+          <a:lstStyle/>
+          <a:p>
+            <a:r>
+              <a:rPr lang="en-US" dirty="0"/>
+              <a:t>Agenda</a:t>
             </a:r>
           </a:p>
         </p:txBody>
@@ -4675,36 +5777,107 @@
           <p:cNvPr id="3" name="Content Placeholder 2">
             <a:extLst>
               <a:ext uri="{FF2B5EF4-FFF2-40B4-BE49-F238E27FC236}">
-                <a16:creationId xmlns:a16="http://schemas.microsoft.com/office/drawing/2014/main" id="{DEC6ED37-AF01-E906-5F3A-EEB9B5127614}"/>
-              </a:ext>
-            </a:extLst>
-          </p:cNvPr>
-          <p:cNvSpPr>
-            <a:spLocks noGrp="1"/>
-          </p:cNvSpPr>
-          <p:nvPr>
-            <p:ph idx="1"/>
-          </p:nvPr>
-        </p:nvSpPr>
-        <p:spPr/>
-        <p:txBody>
-          <a:bodyPr/>
-          <a:lstStyle/>
-          <a:p>
-            <a:pPr marL="0" indent="0">
-              <a:buNone/>
-            </a:pPr>
-            <a:r>
-              <a:rPr lang="en-US" dirty="0"/>
-              <a:t>You have been brought on as a data consultant by Constellation Brands to analyze sales performance using the Iowa Liquor Sales database The company wants to better understand how it performed during that year across different markets to inform future strategy.</a:t>
-            </a:r>
-          </a:p>
-        </p:txBody>
-      </p:sp>
+                <a16:creationId xmlns:a16="http://schemas.microsoft.com/office/drawing/2014/main" id="{8358E2B4-AAFA-FF16-67E3-B6DF3AF954F3}"/>
+              </a:ext>
+            </a:extLst>
+          </p:cNvPr>
+          <p:cNvSpPr>
+            <a:spLocks noGrp="1"/>
+          </p:cNvSpPr>
+          <p:nvPr>
+            <p:ph sz="half" idx="1"/>
+          </p:nvPr>
+        </p:nvSpPr>
+        <p:spPr/>
+        <p:txBody>
+          <a:bodyPr/>
+          <a:lstStyle/>
+          <a:p>
+            <a:pPr marL="285750" indent="-285750"/>
+            <a:r>
+              <a:rPr lang="en-US" dirty="0"/>
+              <a:t>Overview</a:t>
+            </a:r>
+          </a:p>
+          <a:p>
+            <a:pPr marL="285750" indent="-285750"/>
+            <a:r>
+              <a:rPr lang="en-US" dirty="0"/>
+              <a:t>County Analysis</a:t>
+            </a:r>
+          </a:p>
+          <a:p>
+            <a:pPr marL="285750" indent="-285750"/>
+            <a:r>
+              <a:rPr lang="en-US" dirty="0"/>
+              <a:t>Black Velvet</a:t>
+            </a:r>
+          </a:p>
+          <a:p>
+            <a:pPr marL="285750" indent="-285750"/>
+            <a:r>
+              <a:rPr lang="en-US" dirty="0"/>
+              <a:t>Tequila Industry</a:t>
+            </a:r>
+          </a:p>
+          <a:p>
+            <a:pPr marL="285750" indent="-285750"/>
+            <a:r>
+              <a:rPr lang="en-US" dirty="0"/>
+              <a:t>Competitors</a:t>
+            </a:r>
+          </a:p>
+          <a:p>
+            <a:pPr marL="285750" indent="-285750"/>
+            <a:r>
+              <a:rPr lang="en-US" dirty="0"/>
+              <a:t>Key Takeaways</a:t>
+            </a:r>
+          </a:p>
+        </p:txBody>
+      </p:sp>
+      <p:pic>
+        <p:nvPicPr>
+          <p:cNvPr id="6" name="Content Placeholder 5">
+            <a:extLst>
+              <a:ext uri="{FF2B5EF4-FFF2-40B4-BE49-F238E27FC236}">
+                <a16:creationId xmlns:a16="http://schemas.microsoft.com/office/drawing/2014/main" id="{ADF2BBCE-2767-728F-15CA-7A0CBCD9B09D}"/>
+              </a:ext>
+            </a:extLst>
+          </p:cNvPr>
+          <p:cNvPicPr>
+            <a:picLocks noGrp="1" noChangeAspect="1"/>
+          </p:cNvPicPr>
+          <p:nvPr>
+            <p:ph sz="half" idx="2"/>
+          </p:nvPr>
+        </p:nvPicPr>
+        <p:blipFill>
+          <a:blip r:embed="rId2">
+            <a:extLst>
+              <a:ext uri="{28A0092B-C50C-407E-A947-70E740481C1C}">
+                <a14:useLocalDpi xmlns:a14="http://schemas.microsoft.com/office/drawing/2010/main" val="0"/>
+              </a:ext>
+            </a:extLst>
+          </a:blip>
+          <a:stretch>
+            <a:fillRect/>
+          </a:stretch>
+        </p:blipFill>
+        <p:spPr>
+          <a:xfrm>
+            <a:off x="6172200" y="1701800"/>
+            <a:ext cx="5181600" cy="3454400"/>
+          </a:xfrm>
+          <a:prstGeom prst="rect">
+            <a:avLst/>
+          </a:prstGeom>
+        </p:spPr>
+      </p:pic>
     </p:spTree>
     <p:extLst>
       <p:ext uri="{BB962C8B-B14F-4D97-AF65-F5344CB8AC3E}">
-        <p14:creationId xmlns:p14="http://schemas.microsoft.com/office/powerpoint/2010/main" val="2707976681"/>
+        <p14:creationId xmlns:p14="http://schemas.microsoft.com/office/powerpoint/2010/main" val="3119712351"/>
       </p:ext>
     </p:extLst>
   </p:cSld>
@@ -4754,7 +5927,7 @@
           <a:p>
             <a:r>
               <a:rPr lang="en-US" dirty="0"/>
-              <a:t>Summary Stats for DB</a:t>
+              <a:t>Annual Snapshot</a:t>
             </a:r>
           </a:p>
         </p:txBody>
@@ -4781,12 +5954,34 @@
           <a:lstStyle/>
           <a:p>
             <a:r>
-              <a:rPr lang="en-US"/>
-              <a:t>Time Period (2014-01-01 to 2014-12-31)</a:t>
-            </a:r>
-          </a:p>
-          <a:p>
-            <a:endParaRPr lang="en-US" dirty="0"/>
+              <a:rPr lang="en-US" dirty="0"/>
+              <a:t>2014 Fiscal Year (Jan 1, 2014 – Dec 31, 2014)</a:t>
+            </a:r>
+          </a:p>
+          <a:p>
+            <a:r>
+              <a:rPr lang="en-US" dirty="0"/>
+              <a:t>155,408 Constellation-related transactions</a:t>
+            </a:r>
+          </a:p>
+          <a:p>
+            <a:r>
+              <a:rPr lang="en-US" dirty="0"/>
+              <a:t>Spirits market dominant</a:t>
+            </a:r>
+          </a:p>
+          <a:p>
+            <a:pPr lvl="1"/>
+            <a:r>
+              <a:rPr lang="en-US" dirty="0"/>
+              <a:t>100% coverage across 99 counties</a:t>
+            </a:r>
+          </a:p>
+          <a:p>
+            <a:r>
+              <a:rPr lang="en-US" dirty="0"/>
+              <a:t>Total Revenue: $23.49M</a:t>
+            </a:r>
           </a:p>
         </p:txBody>
       </p:sp>
@@ -4808,10 +6003,238 @@
   <p:cSld>
     <p:spTree>
       <p:nvGrpSpPr>
+        <p:cNvPr id="1" name=""/>
+        <p:cNvGrpSpPr/>
+        <p:nvPr/>
+      </p:nvGrpSpPr>
+      <p:grpSpPr>
+        <a:xfrm>
+          <a:off x="0" y="0"/>
+          <a:ext cx="0" cy="0"/>
+          <a:chOff x="0" y="0"/>
+          <a:chExt cx="0" cy="0"/>
+        </a:xfrm>
+      </p:grpSpPr>
+      <p:sp>
+        <p:nvSpPr>
+          <p:cNvPr id="2" name="Title 1">
+            <a:extLst>
+              <a:ext uri="{FF2B5EF4-FFF2-40B4-BE49-F238E27FC236}">
+                <a16:creationId xmlns:a16="http://schemas.microsoft.com/office/drawing/2014/main" id="{54DF5263-62CC-3990-2726-A93E0B44369F}"/>
+              </a:ext>
+            </a:extLst>
+          </p:cNvPr>
+          <p:cNvSpPr>
+            <a:spLocks noGrp="1"/>
+          </p:cNvSpPr>
+          <p:nvPr>
+            <p:ph type="title"/>
+          </p:nvPr>
+        </p:nvSpPr>
+        <p:spPr/>
+        <p:txBody>
+          <a:bodyPr/>
+          <a:lstStyle/>
+          <a:p>
+            <a:r>
+              <a:rPr lang="en-US" dirty="0"/>
+              <a:t>Geographical Analysis</a:t>
+            </a:r>
+          </a:p>
+        </p:txBody>
+      </p:sp>
+      <p:sp>
+        <p:nvSpPr>
+          <p:cNvPr id="4" name="Content Placeholder 3">
+            <a:extLst>
+              <a:ext uri="{FF2B5EF4-FFF2-40B4-BE49-F238E27FC236}">
+                <a16:creationId xmlns:a16="http://schemas.microsoft.com/office/drawing/2014/main" id="{6CF8047B-50AD-0D8C-4276-AD89AAC27248}"/>
+              </a:ext>
+            </a:extLst>
+          </p:cNvPr>
+          <p:cNvSpPr>
+            <a:spLocks noGrp="1"/>
+          </p:cNvSpPr>
+          <p:nvPr>
+            <p:ph sz="half" idx="2"/>
+          </p:nvPr>
+        </p:nvSpPr>
+        <p:spPr/>
+        <p:txBody>
+          <a:bodyPr/>
+          <a:lstStyle/>
+          <a:p>
+            <a:r>
+              <a:rPr lang="en-US" dirty="0"/>
+              <a:t>Annual Revenue</a:t>
+            </a:r>
+          </a:p>
+          <a:p>
+            <a:r>
+              <a:rPr lang="en-US" dirty="0"/>
+              <a:t>Top 3 earners</a:t>
+            </a:r>
+          </a:p>
+          <a:p>
+            <a:pPr lvl="1"/>
+            <a:r>
+              <a:rPr lang="en-US" dirty="0"/>
+              <a:t>Polk, Linn, Black Hawk</a:t>
+            </a:r>
+          </a:p>
+          <a:p>
+            <a:pPr lvl="1"/>
+            <a:r>
+              <a:rPr lang="en-US" dirty="0"/>
+              <a:t>Over $1M in revenue</a:t>
+            </a:r>
+          </a:p>
+          <a:p>
+            <a:pPr lvl="1"/>
+            <a:r>
+              <a:rPr lang="en-US" dirty="0"/>
+              <a:t>Polk: $3.73M</a:t>
+            </a:r>
+          </a:p>
+          <a:p>
+            <a:r>
+              <a:rPr lang="en-US" dirty="0"/>
+              <a:t>Top 3 Stragglers</a:t>
+            </a:r>
+          </a:p>
+          <a:p>
+            <a:pPr lvl="1"/>
+            <a:r>
+              <a:rPr lang="en-US" dirty="0"/>
+              <a:t>Keokuk, Hancock, Mills</a:t>
+            </a:r>
+          </a:p>
+          <a:p>
+            <a:pPr lvl="1"/>
+            <a:r>
+              <a:rPr lang="en-US" dirty="0"/>
+              <a:t>Keokuk: $22K</a:t>
+            </a:r>
+          </a:p>
+        </p:txBody>
+      </p:sp>
+      <p:grpSp>
+        <p:nvGrpSpPr>
+          <p:cNvPr id="9" name="Group 8">
+            <a:extLst>
+              <a:ext uri="{FF2B5EF4-FFF2-40B4-BE49-F238E27FC236}">
+                <a16:creationId xmlns:a16="http://schemas.microsoft.com/office/drawing/2014/main" id="{5FB93635-4EE4-5B6B-34C2-CBDB04210800}"/>
+              </a:ext>
+            </a:extLst>
+          </p:cNvPr>
+          <p:cNvGrpSpPr/>
+          <p:nvPr/>
+        </p:nvGrpSpPr>
+        <p:grpSpPr>
+          <a:xfrm>
+            <a:off x="1032140" y="2485592"/>
+            <a:ext cx="4793719" cy="3400736"/>
+            <a:chOff x="1032140" y="2485592"/>
+            <a:chExt cx="4793719" cy="3400736"/>
+          </a:xfrm>
+        </p:grpSpPr>
+        <p:pic>
+          <p:nvPicPr>
+            <p:cNvPr id="6" name="Content Placeholder 5">
+              <a:extLst>
+                <a:ext uri="{FF2B5EF4-FFF2-40B4-BE49-F238E27FC236}">
+                  <a16:creationId xmlns:a16="http://schemas.microsoft.com/office/drawing/2014/main" id="{2E4F7789-BB88-F7C4-B006-B403476CC22D}"/>
+                </a:ext>
+              </a:extLst>
+            </p:cNvPr>
+            <p:cNvPicPr>
+              <a:picLocks noChangeAspect="1"/>
+            </p:cNvPicPr>
+            <p:nvPr>
+              <p:ph sz="half" idx="1"/>
+            </p:nvPr>
+          </p:nvPicPr>
+          <p:blipFill>
+            <a:blip r:embed="rId2">
+              <a:extLst>
+                <a:ext uri="{28A0092B-C50C-407E-A947-70E740481C1C}">
+                  <a14:useLocalDpi xmlns:a14="http://schemas.microsoft.com/office/drawing/2010/main" val="0"/>
+                </a:ext>
+              </a:extLst>
+            </a:blip>
+            <a:srcRect/>
+            <a:stretch/>
+          </p:blipFill>
+          <p:spPr>
+            <a:xfrm>
+              <a:off x="1032140" y="2485592"/>
+              <a:ext cx="4793719" cy="3031404"/>
+            </a:xfrm>
+            <a:prstGeom prst="rect">
+              <a:avLst/>
+            </a:prstGeom>
+          </p:spPr>
+        </p:pic>
+        <p:sp>
+          <p:nvSpPr>
+            <p:cNvPr id="7" name="TextBox 6">
+              <a:extLst>
+                <a:ext uri="{FF2B5EF4-FFF2-40B4-BE49-F238E27FC236}">
+                  <a16:creationId xmlns:a16="http://schemas.microsoft.com/office/drawing/2014/main" id="{3D8EF388-B032-EDB6-B7D8-1F716938F817}"/>
+                </a:ext>
+              </a:extLst>
+            </p:cNvPr>
+            <p:cNvSpPr txBox="1">
+              <a:spLocks/>
+            </p:cNvSpPr>
+            <p:nvPr/>
+          </p:nvSpPr>
+          <p:spPr>
+            <a:xfrm>
+              <a:off x="1471636" y="5516996"/>
+              <a:ext cx="3914726" cy="369332"/>
+            </a:xfrm>
+            <a:prstGeom prst="rect">
+              <a:avLst/>
+            </a:prstGeom>
+            <a:noFill/>
+          </p:spPr>
+          <p:txBody>
+            <a:bodyPr wrap="none" rtlCol="0">
+              <a:spAutoFit/>
+            </a:bodyPr>
+            <a:lstStyle/>
+            <a:p>
+              <a:r>
+                <a:rPr lang="en-US" dirty="0"/>
+                <a:t>Figure 1: Annual Revenue by Counties</a:t>
+              </a:r>
+            </a:p>
+          </p:txBody>
+        </p:sp>
+      </p:grpSp>
+    </p:spTree>
+    <p:extLst>
+      <p:ext uri="{BB962C8B-B14F-4D97-AF65-F5344CB8AC3E}">
+        <p14:creationId xmlns:p14="http://schemas.microsoft.com/office/powerpoint/2010/main" val="4194034733"/>
+      </p:ext>
+    </p:extLst>
+  </p:cSld>
+  <p:clrMapOvr>
+    <a:masterClrMapping/>
+  </p:clrMapOvr>
+</p:sld>
+</file>
+
+<file path=ppt/slides/slide6.xml><?xml version="1.0" encoding="utf-8"?>
+<p:sld xmlns:a="http://schemas.openxmlformats.org/drawingml/2006/main" xmlns:r="http://schemas.openxmlformats.org/officeDocument/2006/relationships" xmlns:p="http://schemas.openxmlformats.org/presentationml/2006/main">
+  <p:cSld>
+    <p:spTree>
+      <p:nvGrpSpPr>
         <p:cNvPr id="1" name="">
           <a:extLst>
             <a:ext uri="{FF2B5EF4-FFF2-40B4-BE49-F238E27FC236}">
-              <a16:creationId xmlns:a16="http://schemas.microsoft.com/office/drawing/2014/main" id="{F2A57144-9F3D-F9FD-E111-0A4FC216E8AE}"/>
+              <a16:creationId xmlns:a16="http://schemas.microsoft.com/office/drawing/2014/main" id="{35B8D5A2-0804-0EAE-5003-B6D43B328825}"/>
             </a:ext>
           </a:extLst>
         </p:cNvPr>
@@ -4831,7 +6254,7 @@
           <p:cNvPr id="2" name="Title 1">
             <a:extLst>
               <a:ext uri="{FF2B5EF4-FFF2-40B4-BE49-F238E27FC236}">
-                <a16:creationId xmlns:a16="http://schemas.microsoft.com/office/drawing/2014/main" id="{032CCD00-30CA-51E6-61C2-694CF19FD787}"/>
+                <a16:creationId xmlns:a16="http://schemas.microsoft.com/office/drawing/2014/main" id="{F98EE88B-1CC0-8772-B14F-BA93D6E9F3E0}"/>
               </a:ext>
             </a:extLst>
           </p:cNvPr>
@@ -4848,9 +6271,10 @@
           <a:lstStyle/>
           <a:p>
             <a:r>
-              <a:rPr lang="en-US" dirty="0"/>
-              <a:t>Analysis 1 Strength 1</a:t>
-            </a:r>
+              <a:rPr lang="en-US"/>
+              <a:t>Geographical Analysis (Cont.)</a:t>
+            </a:r>
+            <a:endParaRPr lang="en-US" dirty="0"/>
           </a:p>
         </p:txBody>
       </p:sp>
@@ -4859,30 +6283,164 @@
           <p:cNvPr id="3" name="Content Placeholder 2">
             <a:extLst>
               <a:ext uri="{FF2B5EF4-FFF2-40B4-BE49-F238E27FC236}">
-                <a16:creationId xmlns:a16="http://schemas.microsoft.com/office/drawing/2014/main" id="{AD823C4C-116C-6C03-68F8-01B397D9709B}"/>
-              </a:ext>
-            </a:extLst>
-          </p:cNvPr>
-          <p:cNvSpPr>
-            <a:spLocks noGrp="1"/>
-          </p:cNvSpPr>
-          <p:nvPr>
-            <p:ph idx="1"/>
-          </p:nvPr>
-        </p:nvSpPr>
-        <p:spPr/>
-        <p:txBody>
-          <a:bodyPr/>
-          <a:lstStyle/>
-          <a:p>
-            <a:endParaRPr lang="en-US"/>
+                <a16:creationId xmlns:a16="http://schemas.microsoft.com/office/drawing/2014/main" id="{63FEE377-8DA5-E1AF-C347-8A931990D51D}"/>
+              </a:ext>
+            </a:extLst>
+          </p:cNvPr>
+          <p:cNvSpPr>
+            <a:spLocks noGrp="1"/>
+          </p:cNvSpPr>
+          <p:nvPr>
+            <p:ph sz="half" idx="1"/>
+          </p:nvPr>
+        </p:nvSpPr>
+        <p:spPr/>
+        <p:txBody>
+          <a:bodyPr/>
+          <a:lstStyle/>
+          <a:p>
+            <a:r>
+              <a:rPr lang="en-US" dirty="0"/>
+              <a:t>Revenue per Capita</a:t>
+            </a:r>
+          </a:p>
+          <a:p>
+            <a:r>
+              <a:rPr lang="en-US" dirty="0"/>
+              <a:t>Top 3 earners</a:t>
+            </a:r>
+          </a:p>
+          <a:p>
+            <a:pPr lvl="1"/>
+            <a:r>
+              <a:rPr lang="en-US" dirty="0"/>
+              <a:t>Dickinson, O’Brien, and Carroll</a:t>
+            </a:r>
+          </a:p>
+          <a:p>
+            <a:pPr lvl="1"/>
+            <a:r>
+              <a:rPr lang="en-US" dirty="0"/>
+              <a:t>Dickinson: $19.78 per capita</a:t>
+            </a:r>
+          </a:p>
+          <a:p>
+            <a:r>
+              <a:rPr lang="en-US" dirty="0"/>
+              <a:t>Polk, Linn, Black Hawk dropped down</a:t>
+            </a:r>
+          </a:p>
+          <a:p>
+            <a:pPr lvl="1"/>
+            <a:r>
+              <a:rPr lang="en-US" dirty="0"/>
+              <a:t>26</a:t>
+            </a:r>
+            <a:r>
+              <a:rPr lang="en-US" baseline="30000" dirty="0"/>
+              <a:t>th</a:t>
+            </a:r>
+            <a:r>
+              <a:rPr lang="en-US" dirty="0"/>
+              <a:t>, 23</a:t>
+            </a:r>
+            <a:r>
+              <a:rPr lang="en-US" baseline="30000" dirty="0"/>
+              <a:t>rd</a:t>
+            </a:r>
+            <a:r>
+              <a:rPr lang="en-US" dirty="0"/>
+              <a:t>, and 9</a:t>
+            </a:r>
+            <a:r>
+              <a:rPr lang="en-US" baseline="30000" dirty="0"/>
+              <a:t>th</a:t>
+            </a:r>
+            <a:r>
+              <a:rPr lang="en-US" dirty="0"/>
+              <a:t> respectively</a:t>
+            </a:r>
+          </a:p>
+        </p:txBody>
+      </p:sp>
+      <p:pic>
+        <p:nvPicPr>
+          <p:cNvPr id="6" name="Content Placeholder 5">
+            <a:extLst>
+              <a:ext uri="{FF2B5EF4-FFF2-40B4-BE49-F238E27FC236}">
+                <a16:creationId xmlns:a16="http://schemas.microsoft.com/office/drawing/2014/main" id="{8B15C579-7DA5-5D3D-8446-7C762EF1FB8F}"/>
+              </a:ext>
+            </a:extLst>
+          </p:cNvPr>
+          <p:cNvPicPr>
+            <a:picLocks noGrp="1" noChangeAspect="1"/>
+          </p:cNvPicPr>
+          <p:nvPr>
+            <p:ph sz="half" idx="2"/>
+          </p:nvPr>
+        </p:nvPicPr>
+        <p:blipFill>
+          <a:blip r:embed="rId3">
+            <a:extLst>
+              <a:ext uri="{28A0092B-C50C-407E-A947-70E740481C1C}">
+                <a14:useLocalDpi xmlns:a14="http://schemas.microsoft.com/office/drawing/2010/main" val="0"/>
+              </a:ext>
+            </a:extLst>
+          </a:blip>
+          <a:srcRect/>
+          <a:stretch/>
+        </p:blipFill>
+        <p:spPr>
+          <a:xfrm>
+            <a:off x="6472821" y="2625524"/>
+            <a:ext cx="4580357" cy="2751539"/>
+          </a:xfrm>
+          <a:prstGeom prst="rect">
+            <a:avLst/>
+          </a:prstGeom>
+        </p:spPr>
+      </p:pic>
+      <p:sp>
+        <p:nvSpPr>
+          <p:cNvPr id="7" name="TextBox 6">
+            <a:extLst>
+              <a:ext uri="{FF2B5EF4-FFF2-40B4-BE49-F238E27FC236}">
+                <a16:creationId xmlns:a16="http://schemas.microsoft.com/office/drawing/2014/main" id="{D370B5D0-42FE-E252-9B3E-259E61BF7AEC}"/>
+              </a:ext>
+            </a:extLst>
+          </p:cNvPr>
+          <p:cNvSpPr txBox="1">
+            <a:spLocks/>
+          </p:cNvSpPr>
+          <p:nvPr/>
+        </p:nvSpPr>
+        <p:spPr>
+          <a:xfrm>
+            <a:off x="6373498" y="5377063"/>
+            <a:ext cx="4779001" cy="369332"/>
+          </a:xfrm>
+          <a:prstGeom prst="rect">
+            <a:avLst/>
+          </a:prstGeom>
+          <a:noFill/>
+        </p:spPr>
+        <p:txBody>
+          <a:bodyPr wrap="none" rtlCol="0">
+            <a:spAutoFit/>
+          </a:bodyPr>
+          <a:lstStyle/>
+          <a:p>
+            <a:r>
+              <a:rPr lang="en-US" dirty="0"/>
+              <a:t>Figure 2: Revenue Per Capita By Iowa Counties</a:t>
+            </a:r>
           </a:p>
         </p:txBody>
       </p:sp>
     </p:spTree>
     <p:extLst>
       <p:ext uri="{BB962C8B-B14F-4D97-AF65-F5344CB8AC3E}">
-        <p14:creationId xmlns:p14="http://schemas.microsoft.com/office/powerpoint/2010/main" val="356150293"/>
+        <p14:creationId xmlns:p14="http://schemas.microsoft.com/office/powerpoint/2010/main" val="905782237"/>
       </p:ext>
     </p:extLst>
   </p:cSld>
@@ -4892,7 +6450,610 @@
 </p:sld>
 </file>
 
-<file path=ppt/slides/slide6.xml><?xml version="1.0" encoding="utf-8"?>
+<file path=ppt/slides/slide7.xml><?xml version="1.0" encoding="utf-8"?>
+<p:sld xmlns:a="http://schemas.openxmlformats.org/drawingml/2006/main" xmlns:r="http://schemas.openxmlformats.org/officeDocument/2006/relationships" xmlns:p="http://schemas.openxmlformats.org/presentationml/2006/main">
+  <p:cSld>
+    <p:spTree>
+      <p:nvGrpSpPr>
+        <p:cNvPr id="1" name=""/>
+        <p:cNvGrpSpPr/>
+        <p:nvPr/>
+      </p:nvGrpSpPr>
+      <p:grpSpPr>
+        <a:xfrm>
+          <a:off x="0" y="0"/>
+          <a:ext cx="0" cy="0"/>
+          <a:chOff x="0" y="0"/>
+          <a:chExt cx="0" cy="0"/>
+        </a:xfrm>
+      </p:grpSpPr>
+      <p:sp>
+        <p:nvSpPr>
+          <p:cNvPr id="8" name="Title 7">
+            <a:extLst>
+              <a:ext uri="{FF2B5EF4-FFF2-40B4-BE49-F238E27FC236}">
+                <a16:creationId xmlns:a16="http://schemas.microsoft.com/office/drawing/2014/main" id="{FE13B233-BC10-894D-2F30-A75D7F9CEB1D}"/>
+              </a:ext>
+            </a:extLst>
+          </p:cNvPr>
+          <p:cNvSpPr>
+            <a:spLocks noGrp="1"/>
+          </p:cNvSpPr>
+          <p:nvPr>
+            <p:ph type="title"/>
+          </p:nvPr>
+        </p:nvSpPr>
+        <p:spPr/>
+        <p:txBody>
+          <a:bodyPr/>
+          <a:lstStyle/>
+          <a:p>
+            <a:pPr algn="ctr"/>
+            <a:r>
+              <a:rPr lang="en-US" dirty="0"/>
+              <a:t>Total Revenue vs. Revenue per Capita</a:t>
+            </a:r>
+          </a:p>
+        </p:txBody>
+      </p:sp>
+      <p:sp>
+        <p:nvSpPr>
+          <p:cNvPr id="9" name="Text Placeholder 8">
+            <a:extLst>
+              <a:ext uri="{FF2B5EF4-FFF2-40B4-BE49-F238E27FC236}">
+                <a16:creationId xmlns:a16="http://schemas.microsoft.com/office/drawing/2014/main" id="{6B164FD9-76FE-4383-3B73-64357026F37F}"/>
+              </a:ext>
+            </a:extLst>
+          </p:cNvPr>
+          <p:cNvSpPr>
+            <a:spLocks noGrp="1"/>
+          </p:cNvSpPr>
+          <p:nvPr>
+            <p:ph type="body" idx="1"/>
+          </p:nvPr>
+        </p:nvSpPr>
+        <p:spPr/>
+        <p:txBody>
+          <a:bodyPr>
+            <a:normAutofit/>
+          </a:bodyPr>
+          <a:lstStyle/>
+          <a:p>
+            <a:r>
+              <a:rPr lang="en-US" sz="3200" dirty="0"/>
+              <a:t>Efficiency</a:t>
+            </a:r>
+          </a:p>
+        </p:txBody>
+      </p:sp>
+      <p:sp>
+        <p:nvSpPr>
+          <p:cNvPr id="10" name="Content Placeholder 9">
+            <a:extLst>
+              <a:ext uri="{FF2B5EF4-FFF2-40B4-BE49-F238E27FC236}">
+                <a16:creationId xmlns:a16="http://schemas.microsoft.com/office/drawing/2014/main" id="{55FF1E0D-BE69-A382-D0F3-AE5D166F1676}"/>
+              </a:ext>
+            </a:extLst>
+          </p:cNvPr>
+          <p:cNvSpPr>
+            <a:spLocks noGrp="1"/>
+          </p:cNvSpPr>
+          <p:nvPr>
+            <p:ph sz="half" idx="2"/>
+          </p:nvPr>
+        </p:nvSpPr>
+        <p:spPr>
+          <a:xfrm>
+            <a:off x="839788" y="2505075"/>
+            <a:ext cx="5157787" cy="3249549"/>
+          </a:xfrm>
+        </p:spPr>
+        <p:txBody>
+          <a:bodyPr>
+            <a:normAutofit/>
+          </a:bodyPr>
+          <a:lstStyle/>
+          <a:p>
+            <a:r>
+              <a:rPr lang="en-US" dirty="0"/>
+              <a:t>Polk, Linn, and Black Hawk</a:t>
+            </a:r>
+          </a:p>
+          <a:p>
+            <a:pPr lvl="1"/>
+            <a:r>
+              <a:rPr lang="en-US" dirty="0"/>
+              <a:t>Balanced lifestyles</a:t>
+            </a:r>
+          </a:p>
+          <a:p>
+            <a:r>
+              <a:rPr lang="en-US" dirty="0"/>
+              <a:t>Larger market, larger wallets</a:t>
+            </a:r>
+          </a:p>
+          <a:p>
+            <a:r>
+              <a:rPr lang="en-US" dirty="0"/>
+              <a:t>Average, if not sub-average spending</a:t>
+            </a:r>
+          </a:p>
+        </p:txBody>
+      </p:sp>
+      <p:sp>
+        <p:nvSpPr>
+          <p:cNvPr id="11" name="Text Placeholder 10">
+            <a:extLst>
+              <a:ext uri="{FF2B5EF4-FFF2-40B4-BE49-F238E27FC236}">
+                <a16:creationId xmlns:a16="http://schemas.microsoft.com/office/drawing/2014/main" id="{E9F710E8-21A0-BDAF-5C0B-9CB6087BFBF6}"/>
+              </a:ext>
+            </a:extLst>
+          </p:cNvPr>
+          <p:cNvSpPr>
+            <a:spLocks noGrp="1"/>
+          </p:cNvSpPr>
+          <p:nvPr>
+            <p:ph type="body" sz="quarter" idx="3"/>
+          </p:nvPr>
+        </p:nvSpPr>
+        <p:spPr/>
+        <p:txBody>
+          <a:bodyPr>
+            <a:normAutofit/>
+          </a:bodyPr>
+          <a:lstStyle/>
+          <a:p>
+            <a:r>
+              <a:rPr lang="en-US" sz="3200" dirty="0"/>
+              <a:t>Scaling</a:t>
+            </a:r>
+          </a:p>
+        </p:txBody>
+      </p:sp>
+      <p:sp>
+        <p:nvSpPr>
+          <p:cNvPr id="12" name="Content Placeholder 11">
+            <a:extLst>
+              <a:ext uri="{FF2B5EF4-FFF2-40B4-BE49-F238E27FC236}">
+                <a16:creationId xmlns:a16="http://schemas.microsoft.com/office/drawing/2014/main" id="{03C769D8-24EB-B8CF-8F5B-69782EB63CD5}"/>
+              </a:ext>
+            </a:extLst>
+          </p:cNvPr>
+          <p:cNvSpPr>
+            <a:spLocks noGrp="1"/>
+          </p:cNvSpPr>
+          <p:nvPr>
+            <p:ph sz="quarter" idx="4"/>
+          </p:nvPr>
+        </p:nvSpPr>
+        <p:spPr>
+          <a:xfrm>
+            <a:off x="6172200" y="2505075"/>
+            <a:ext cx="5183188" cy="3249549"/>
+          </a:xfrm>
+        </p:spPr>
+        <p:txBody>
+          <a:bodyPr>
+            <a:normAutofit/>
+          </a:bodyPr>
+          <a:lstStyle/>
+          <a:p>
+            <a:r>
+              <a:rPr lang="en-US" dirty="0"/>
+              <a:t>Dickinson, O’Brien, and Carroll</a:t>
+            </a:r>
+          </a:p>
+          <a:p>
+            <a:pPr lvl="1"/>
+            <a:r>
+              <a:rPr lang="en-US" dirty="0"/>
+              <a:t>Tourist, retail, breathtaking scenery</a:t>
+            </a:r>
+          </a:p>
+          <a:p>
+            <a:r>
+              <a:rPr lang="en-US" dirty="0"/>
+              <a:t>Big spenders</a:t>
+            </a:r>
+          </a:p>
+          <a:p>
+            <a:r>
+              <a:rPr lang="en-US" dirty="0"/>
+              <a:t>Volatile, low proportionate population</a:t>
+            </a:r>
+            <a:endParaRPr lang="en-US" sz="2400" dirty="0"/>
+          </a:p>
+        </p:txBody>
+      </p:sp>
+      <p:sp>
+        <p:nvSpPr>
+          <p:cNvPr id="13" name="Content Placeholder 11">
+            <a:extLst>
+              <a:ext uri="{FF2B5EF4-FFF2-40B4-BE49-F238E27FC236}">
+                <a16:creationId xmlns:a16="http://schemas.microsoft.com/office/drawing/2014/main" id="{79FA915E-535A-2E64-2413-9A6BB5906B21}"/>
+              </a:ext>
+            </a:extLst>
+          </p:cNvPr>
+          <p:cNvSpPr txBox="1">
+            <a:spLocks/>
+          </p:cNvSpPr>
+          <p:nvPr/>
+        </p:nvSpPr>
+        <p:spPr>
+          <a:xfrm>
+            <a:off x="836612" y="5754624"/>
+            <a:ext cx="10515600" cy="936690"/>
+          </a:xfrm>
+          <a:prstGeom prst="rect">
+            <a:avLst/>
+          </a:prstGeom>
+        </p:spPr>
+        <p:txBody>
+          <a:bodyPr vert="horz" lIns="91440" tIns="45720" rIns="91440" bIns="45720" rtlCol="0" anchor="t" anchorCtr="0">
+            <a:normAutofit/>
+          </a:bodyPr>
+          <a:lstStyle>
+            <a:lvl1pPr marL="228600" indent="-228600" algn="l" defTabSz="914400" rtl="0" eaLnBrk="1" latinLnBrk="0" hangingPunct="1">
+              <a:lnSpc>
+                <a:spcPct val="90000"/>
+              </a:lnSpc>
+              <a:spcBef>
+                <a:spcPts val="1000"/>
+              </a:spcBef>
+              <a:buFont typeface="Arial" panose="020B0604020202020204" pitchFamily="34" charset="0"/>
+              <a:buChar char="•"/>
+              <a:defRPr sz="2800" kern="1200">
+                <a:solidFill>
+                  <a:schemeClr val="tx1"/>
+                </a:solidFill>
+                <a:latin typeface="+mn-lt"/>
+                <a:ea typeface="+mn-ea"/>
+                <a:cs typeface="+mn-cs"/>
+              </a:defRPr>
+            </a:lvl1pPr>
+            <a:lvl2pPr marL="685800" indent="-228600" algn="l" defTabSz="914400" rtl="0" eaLnBrk="1" latinLnBrk="0" hangingPunct="1">
+              <a:lnSpc>
+                <a:spcPct val="90000"/>
+              </a:lnSpc>
+              <a:spcBef>
+                <a:spcPts val="500"/>
+              </a:spcBef>
+              <a:buFont typeface="Arial" panose="020B0604020202020204" pitchFamily="34" charset="0"/>
+              <a:buChar char="•"/>
+              <a:defRPr sz="2400" kern="1200">
+                <a:solidFill>
+                  <a:schemeClr val="tx1"/>
+                </a:solidFill>
+                <a:latin typeface="+mn-lt"/>
+                <a:ea typeface="+mn-ea"/>
+                <a:cs typeface="+mn-cs"/>
+              </a:defRPr>
+            </a:lvl2pPr>
+            <a:lvl3pPr marL="1143000" indent="-228600" algn="l" defTabSz="914400" rtl="0" eaLnBrk="1" latinLnBrk="0" hangingPunct="1">
+              <a:lnSpc>
+                <a:spcPct val="90000"/>
+              </a:lnSpc>
+              <a:spcBef>
+                <a:spcPts val="500"/>
+              </a:spcBef>
+              <a:buFont typeface="Arial" panose="020B0604020202020204" pitchFamily="34" charset="0"/>
+              <a:buChar char="•"/>
+              <a:defRPr sz="2000" kern="1200">
+                <a:solidFill>
+                  <a:schemeClr val="tx1"/>
+                </a:solidFill>
+                <a:latin typeface="+mn-lt"/>
+                <a:ea typeface="+mn-ea"/>
+                <a:cs typeface="+mn-cs"/>
+              </a:defRPr>
+            </a:lvl3pPr>
+            <a:lvl4pPr marL="1600200" indent="-228600" algn="l" defTabSz="914400" rtl="0" eaLnBrk="1" latinLnBrk="0" hangingPunct="1">
+              <a:lnSpc>
+                <a:spcPct val="90000"/>
+              </a:lnSpc>
+              <a:spcBef>
+                <a:spcPts val="500"/>
+              </a:spcBef>
+              <a:buFont typeface="Arial" panose="020B0604020202020204" pitchFamily="34" charset="0"/>
+              <a:buChar char="•"/>
+              <a:defRPr sz="1800" kern="1200">
+                <a:solidFill>
+                  <a:schemeClr val="tx1"/>
+                </a:solidFill>
+                <a:latin typeface="+mn-lt"/>
+                <a:ea typeface="+mn-ea"/>
+                <a:cs typeface="+mn-cs"/>
+              </a:defRPr>
+            </a:lvl4pPr>
+            <a:lvl5pPr marL="2057400" indent="-228600" algn="l" defTabSz="914400" rtl="0" eaLnBrk="1" latinLnBrk="0" hangingPunct="1">
+              <a:lnSpc>
+                <a:spcPct val="90000"/>
+              </a:lnSpc>
+              <a:spcBef>
+                <a:spcPts val="500"/>
+              </a:spcBef>
+              <a:buFont typeface="Arial" panose="020B0604020202020204" pitchFamily="34" charset="0"/>
+              <a:buChar char="•"/>
+              <a:defRPr sz="1800" kern="1200">
+                <a:solidFill>
+                  <a:schemeClr val="tx1"/>
+                </a:solidFill>
+                <a:latin typeface="+mn-lt"/>
+                <a:ea typeface="+mn-ea"/>
+                <a:cs typeface="+mn-cs"/>
+              </a:defRPr>
+            </a:lvl5pPr>
+            <a:lvl6pPr marL="2514600" indent="-228600" algn="l" defTabSz="914400" rtl="0" eaLnBrk="1" latinLnBrk="0" hangingPunct="1">
+              <a:lnSpc>
+                <a:spcPct val="90000"/>
+              </a:lnSpc>
+              <a:spcBef>
+                <a:spcPts val="500"/>
+              </a:spcBef>
+              <a:buFont typeface="Arial" panose="020B0604020202020204" pitchFamily="34" charset="0"/>
+              <a:buChar char="•"/>
+              <a:defRPr sz="1800" kern="1200">
+                <a:solidFill>
+                  <a:schemeClr val="tx1"/>
+                </a:solidFill>
+                <a:latin typeface="+mn-lt"/>
+                <a:ea typeface="+mn-ea"/>
+                <a:cs typeface="+mn-cs"/>
+              </a:defRPr>
+            </a:lvl6pPr>
+            <a:lvl7pPr marL="2971800" indent="-228600" algn="l" defTabSz="914400" rtl="0" eaLnBrk="1" latinLnBrk="0" hangingPunct="1">
+              <a:lnSpc>
+                <a:spcPct val="90000"/>
+              </a:lnSpc>
+              <a:spcBef>
+                <a:spcPts val="500"/>
+              </a:spcBef>
+              <a:buFont typeface="Arial" panose="020B0604020202020204" pitchFamily="34" charset="0"/>
+              <a:buChar char="•"/>
+              <a:defRPr sz="1800" kern="1200">
+                <a:solidFill>
+                  <a:schemeClr val="tx1"/>
+                </a:solidFill>
+                <a:latin typeface="+mn-lt"/>
+                <a:ea typeface="+mn-ea"/>
+                <a:cs typeface="+mn-cs"/>
+              </a:defRPr>
+            </a:lvl7pPr>
+            <a:lvl8pPr marL="3429000" indent="-228600" algn="l" defTabSz="914400" rtl="0" eaLnBrk="1" latinLnBrk="0" hangingPunct="1">
+              <a:lnSpc>
+                <a:spcPct val="90000"/>
+              </a:lnSpc>
+              <a:spcBef>
+                <a:spcPts val="500"/>
+              </a:spcBef>
+              <a:buFont typeface="Arial" panose="020B0604020202020204" pitchFamily="34" charset="0"/>
+              <a:buChar char="•"/>
+              <a:defRPr sz="1800" kern="1200">
+                <a:solidFill>
+                  <a:schemeClr val="tx1"/>
+                </a:solidFill>
+                <a:latin typeface="+mn-lt"/>
+                <a:ea typeface="+mn-ea"/>
+                <a:cs typeface="+mn-cs"/>
+              </a:defRPr>
+            </a:lvl8pPr>
+            <a:lvl9pPr marL="3886200" indent="-228600" algn="l" defTabSz="914400" rtl="0" eaLnBrk="1" latinLnBrk="0" hangingPunct="1">
+              <a:lnSpc>
+                <a:spcPct val="90000"/>
+              </a:lnSpc>
+              <a:spcBef>
+                <a:spcPts val="500"/>
+              </a:spcBef>
+              <a:buFont typeface="Arial" panose="020B0604020202020204" pitchFamily="34" charset="0"/>
+              <a:buChar char="•"/>
+              <a:defRPr sz="1800" kern="1200">
+                <a:solidFill>
+                  <a:schemeClr val="tx1"/>
+                </a:solidFill>
+                <a:latin typeface="+mn-lt"/>
+                <a:ea typeface="+mn-ea"/>
+                <a:cs typeface="+mn-cs"/>
+              </a:defRPr>
+            </a:lvl9pPr>
+          </a:lstStyle>
+          <a:p>
+            <a:pPr marL="0" indent="0" algn="ctr">
+              <a:buNone/>
+            </a:pPr>
+            <a:r>
+              <a:rPr lang="en-US" dirty="0">
+                <a:solidFill>
+                  <a:srgbClr val="FF0000"/>
+                </a:solidFill>
+              </a:rPr>
+              <a:t>Larger market </a:t>
+            </a:r>
+            <a:r>
+              <a:rPr lang="en-US" dirty="0">
+                <a:solidFill>
+                  <a:schemeClr val="tx2">
+                    <a:lumMod val="75000"/>
+                    <a:lumOff val="25000"/>
+                  </a:schemeClr>
+                </a:solidFill>
+              </a:rPr>
+              <a:t>*</a:t>
+            </a:r>
+            <a:r>
+              <a:rPr lang="en-US" dirty="0"/>
+              <a:t> </a:t>
+            </a:r>
+            <a:r>
+              <a:rPr lang="en-US" dirty="0">
+                <a:solidFill>
+                  <a:srgbClr val="FF0000"/>
+                </a:solidFill>
+              </a:rPr>
+              <a:t>Big Spenders</a:t>
+            </a:r>
+            <a:r>
+              <a:rPr lang="en-US" dirty="0"/>
+              <a:t> = </a:t>
+            </a:r>
+            <a:r>
+              <a:rPr lang="en-US" sz="5700" b="1" dirty="0">
+                <a:solidFill>
+                  <a:schemeClr val="accent6"/>
+                </a:solidFill>
+              </a:rPr>
+              <a:t>Big Money</a:t>
+            </a:r>
+          </a:p>
+        </p:txBody>
+      </p:sp>
+    </p:spTree>
+    <p:extLst>
+      <p:ext uri="{BB962C8B-B14F-4D97-AF65-F5344CB8AC3E}">
+        <p14:creationId xmlns:p14="http://schemas.microsoft.com/office/powerpoint/2010/main" val="1693661013"/>
+      </p:ext>
+    </p:extLst>
+  </p:cSld>
+  <p:clrMapOvr>
+    <a:masterClrMapping/>
+  </p:clrMapOvr>
+</p:sld>
+</file>
+
+<file path=ppt/slides/slide8.xml><?xml version="1.0" encoding="utf-8"?>
+<p:sld xmlns:a="http://schemas.openxmlformats.org/drawingml/2006/main" xmlns:r="http://schemas.openxmlformats.org/officeDocument/2006/relationships" xmlns:p="http://schemas.openxmlformats.org/presentationml/2006/main">
+  <p:cSld>
+    <p:spTree>
+      <p:nvGrpSpPr>
+        <p:cNvPr id="1" name=""/>
+        <p:cNvGrpSpPr/>
+        <p:nvPr/>
+      </p:nvGrpSpPr>
+      <p:grpSpPr>
+        <a:xfrm>
+          <a:off x="0" y="0"/>
+          <a:ext cx="0" cy="0"/>
+          <a:chOff x="0" y="0"/>
+          <a:chExt cx="0" cy="0"/>
+        </a:xfrm>
+      </p:grpSpPr>
+      <p:sp>
+        <p:nvSpPr>
+          <p:cNvPr id="7" name="Title 6">
+            <a:extLst>
+              <a:ext uri="{FF2B5EF4-FFF2-40B4-BE49-F238E27FC236}">
+                <a16:creationId xmlns:a16="http://schemas.microsoft.com/office/drawing/2014/main" id="{01095486-F521-F560-974B-1F07E15787F4}"/>
+              </a:ext>
+            </a:extLst>
+          </p:cNvPr>
+          <p:cNvSpPr>
+            <a:spLocks noGrp="1"/>
+          </p:cNvSpPr>
+          <p:nvPr>
+            <p:ph type="title"/>
+          </p:nvPr>
+        </p:nvSpPr>
+        <p:spPr/>
+        <p:txBody>
+          <a:bodyPr/>
+          <a:lstStyle/>
+          <a:p>
+            <a:r>
+              <a:rPr lang="en-US" dirty="0"/>
+              <a:t>So What?</a:t>
+            </a:r>
+          </a:p>
+        </p:txBody>
+      </p:sp>
+      <p:pic>
+        <p:nvPicPr>
+          <p:cNvPr id="12" name="Content Placeholder 11">
+            <a:extLst>
+              <a:ext uri="{FF2B5EF4-FFF2-40B4-BE49-F238E27FC236}">
+                <a16:creationId xmlns:a16="http://schemas.microsoft.com/office/drawing/2014/main" id="{C2C8AC4A-ABAF-9011-EFB2-7A38F8683A36}"/>
+              </a:ext>
+            </a:extLst>
+          </p:cNvPr>
+          <p:cNvPicPr>
+            <a:picLocks noGrp="1" noChangeAspect="1"/>
+          </p:cNvPicPr>
+          <p:nvPr>
+            <p:ph idx="1"/>
+          </p:nvPr>
+        </p:nvPicPr>
+        <p:blipFill>
+          <a:blip r:embed="rId2">
+            <a:extLst>
+              <a:ext uri="{28A0092B-C50C-407E-A947-70E740481C1C}">
+                <a14:useLocalDpi xmlns:a14="http://schemas.microsoft.com/office/drawing/2010/main" val="0"/>
+              </a:ext>
+            </a:extLst>
+          </a:blip>
+          <a:stretch>
+            <a:fillRect/>
+          </a:stretch>
+        </p:blipFill>
+        <p:spPr>
+          <a:xfrm>
+            <a:off x="2322010" y="1690688"/>
+            <a:ext cx="7547979" cy="4534266"/>
+          </a:xfrm>
+          <a:prstGeom prst="rect">
+            <a:avLst/>
+          </a:prstGeom>
+        </p:spPr>
+      </p:pic>
+      <p:sp>
+        <p:nvSpPr>
+          <p:cNvPr id="13" name="TextBox 12">
+            <a:extLst>
+              <a:ext uri="{FF2B5EF4-FFF2-40B4-BE49-F238E27FC236}">
+                <a16:creationId xmlns:a16="http://schemas.microsoft.com/office/drawing/2014/main" id="{17A05547-ABD2-3935-EED5-C5CBCD757B9D}"/>
+              </a:ext>
+            </a:extLst>
+          </p:cNvPr>
+          <p:cNvSpPr txBox="1">
+            <a:spLocks/>
+          </p:cNvSpPr>
+          <p:nvPr/>
+        </p:nvSpPr>
+        <p:spPr>
+          <a:xfrm>
+            <a:off x="2425743" y="6224954"/>
+            <a:ext cx="7340536" cy="369332"/>
+          </a:xfrm>
+          <a:prstGeom prst="rect">
+            <a:avLst/>
+          </a:prstGeom>
+          <a:noFill/>
+        </p:spPr>
+        <p:txBody>
+          <a:bodyPr wrap="none" rtlCol="0">
+            <a:spAutoFit/>
+          </a:bodyPr>
+          <a:lstStyle/>
+          <a:p>
+            <a:pPr algn="ctr"/>
+            <a:r>
+              <a:rPr lang="en-US" dirty="0"/>
+              <a:t>Figure 3: Revenue per Capita vs Total Revenue: Weak positive correlation</a:t>
+            </a:r>
+          </a:p>
+        </p:txBody>
+      </p:sp>
+    </p:spTree>
+    <p:extLst>
+      <p:ext uri="{BB962C8B-B14F-4D97-AF65-F5344CB8AC3E}">
+        <p14:creationId xmlns:p14="http://schemas.microsoft.com/office/powerpoint/2010/main" val="1928695364"/>
+      </p:ext>
+    </p:extLst>
+  </p:cSld>
+  <p:clrMapOvr>
+    <a:masterClrMapping/>
+  </p:clrMapOvr>
+</p:sld>
+</file>
+
+<file path=ppt/slides/slide9.xml><?xml version="1.0" encoding="utf-8"?>
 <p:sld xmlns:a="http://schemas.openxmlformats.org/drawingml/2006/main" xmlns:r="http://schemas.openxmlformats.org/officeDocument/2006/relationships" xmlns:p="http://schemas.openxmlformats.org/presentationml/2006/main">
   <p:cSld>
     <p:spTree>
@@ -4938,7 +7099,37 @@
           <a:p>
             <a:r>
               <a:rPr lang="en-US" dirty="0"/>
-              <a:t>Analysis 1 Strengths 2</a:t>
+              <a:t>Product Performance</a:t>
+            </a:r>
+          </a:p>
+        </p:txBody>
+      </p:sp>
+      <p:sp>
+        <p:nvSpPr>
+          <p:cNvPr id="5" name="Text Placeholder 4">
+            <a:extLst>
+              <a:ext uri="{FF2B5EF4-FFF2-40B4-BE49-F238E27FC236}">
+                <a16:creationId xmlns:a16="http://schemas.microsoft.com/office/drawing/2014/main" id="{46C2FA9A-8EE2-9316-A6FC-DFABB436CD96}"/>
+              </a:ext>
+            </a:extLst>
+          </p:cNvPr>
+          <p:cNvSpPr>
+            <a:spLocks noGrp="1"/>
+          </p:cNvSpPr>
+          <p:nvPr>
+            <p:ph type="body" idx="1"/>
+          </p:nvPr>
+        </p:nvSpPr>
+        <p:spPr/>
+        <p:txBody>
+          <a:bodyPr>
+            <a:normAutofit/>
+          </a:bodyPr>
+          <a:lstStyle/>
+          <a:p>
+            <a:r>
+              <a:rPr lang="en-US" sz="3200" dirty="0"/>
+              <a:t>Best</a:t>
             </a:r>
           </a:p>
         </p:txBody>
@@ -4956,15 +7147,123 @@
             <a:spLocks noGrp="1"/>
           </p:cNvSpPr>
           <p:nvPr>
-            <p:ph idx="1"/>
-          </p:nvPr>
-        </p:nvSpPr>
-        <p:spPr/>
-        <p:txBody>
-          <a:bodyPr/>
-          <a:lstStyle/>
-          <a:p>
-            <a:endParaRPr lang="en-US"/>
+            <p:ph sz="half" idx="2"/>
+          </p:nvPr>
+        </p:nvSpPr>
+        <p:spPr/>
+        <p:txBody>
+          <a:bodyPr/>
+          <a:lstStyle/>
+          <a:p>
+            <a:r>
+              <a:rPr lang="en-US" dirty="0"/>
+              <a:t>Product: </a:t>
+            </a:r>
+            <a:r>
+              <a:rPr lang="en-US" b="1" dirty="0"/>
+              <a:t>Black Velvet</a:t>
+            </a:r>
+          </a:p>
+          <a:p>
+            <a:r>
+              <a:rPr lang="en-US" dirty="0"/>
+              <a:t>Series: Black Velvet</a:t>
+            </a:r>
+          </a:p>
+          <a:p>
+            <a:r>
+              <a:rPr lang="en-US" dirty="0"/>
+              <a:t>Category: </a:t>
+            </a:r>
+            <a:r>
+              <a:rPr lang="en-US" b="1" dirty="0"/>
+              <a:t>Whiskies</a:t>
+            </a:r>
+          </a:p>
+          <a:p>
+            <a:pPr lvl="1"/>
+            <a:r>
+              <a:rPr lang="en-US" dirty="0"/>
+              <a:t>Canadian Whiskies</a:t>
+            </a:r>
+          </a:p>
+        </p:txBody>
+      </p:sp>
+      <p:sp>
+        <p:nvSpPr>
+          <p:cNvPr id="6" name="Text Placeholder 5">
+            <a:extLst>
+              <a:ext uri="{FF2B5EF4-FFF2-40B4-BE49-F238E27FC236}">
+                <a16:creationId xmlns:a16="http://schemas.microsoft.com/office/drawing/2014/main" id="{094B69B4-C269-592A-185B-67C7D4AE498E}"/>
+              </a:ext>
+            </a:extLst>
+          </p:cNvPr>
+          <p:cNvSpPr>
+            <a:spLocks noGrp="1"/>
+          </p:cNvSpPr>
+          <p:nvPr>
+            <p:ph type="body" sz="quarter" idx="3"/>
+          </p:nvPr>
+        </p:nvSpPr>
+        <p:spPr/>
+        <p:txBody>
+          <a:bodyPr>
+            <a:normAutofit/>
+          </a:bodyPr>
+          <a:lstStyle/>
+          <a:p>
+            <a:r>
+              <a:rPr lang="en-US" sz="3200" dirty="0"/>
+              <a:t>Worst</a:t>
+            </a:r>
+          </a:p>
+        </p:txBody>
+      </p:sp>
+      <p:sp>
+        <p:nvSpPr>
+          <p:cNvPr id="7" name="Content Placeholder 6">
+            <a:extLst>
+              <a:ext uri="{FF2B5EF4-FFF2-40B4-BE49-F238E27FC236}">
+                <a16:creationId xmlns:a16="http://schemas.microsoft.com/office/drawing/2014/main" id="{06FBBFEA-2AFE-FED3-0006-8103B758DDEC}"/>
+              </a:ext>
+            </a:extLst>
+          </p:cNvPr>
+          <p:cNvSpPr>
+            <a:spLocks noGrp="1"/>
+          </p:cNvSpPr>
+          <p:nvPr>
+            <p:ph sz="quarter" idx="4"/>
+          </p:nvPr>
+        </p:nvSpPr>
+        <p:spPr/>
+        <p:txBody>
+          <a:bodyPr/>
+          <a:lstStyle/>
+          <a:p>
+            <a:r>
+              <a:rPr lang="en-US" dirty="0"/>
+              <a:t>Product: </a:t>
+            </a:r>
+            <a:r>
+              <a:rPr lang="en-US" b="1" dirty="0"/>
+              <a:t>Canadian Mac Naughton Whiskey</a:t>
+            </a:r>
+          </a:p>
+          <a:p>
+            <a:r>
+              <a:rPr lang="en-US" dirty="0"/>
+              <a:t>Series: Canadian Mac Naughton Whiskey</a:t>
+            </a:r>
+          </a:p>
+          <a:p>
+            <a:r>
+              <a:rPr lang="en-US" dirty="0"/>
+              <a:t>Category: </a:t>
+            </a:r>
+            <a:r>
+              <a:rPr lang="en-US" b="1" dirty="0"/>
+              <a:t>Tequila</a:t>
+            </a:r>
           </a:p>
         </p:txBody>
       </p:sp>
@@ -4972,273 +7271,6 @@
     <p:extLst>
       <p:ext uri="{BB962C8B-B14F-4D97-AF65-F5344CB8AC3E}">
         <p14:creationId xmlns:p14="http://schemas.microsoft.com/office/powerpoint/2010/main" val="2996620938"/>
-      </p:ext>
-    </p:extLst>
-  </p:cSld>
-  <p:clrMapOvr>
-    <a:masterClrMapping/>
-  </p:clrMapOvr>
-</p:sld>
-</file>
-
-<file path=ppt/slides/slide7.xml><?xml version="1.0" encoding="utf-8"?>
-<p:sld xmlns:a="http://schemas.openxmlformats.org/drawingml/2006/main" xmlns:r="http://schemas.openxmlformats.org/officeDocument/2006/relationships" xmlns:p="http://schemas.openxmlformats.org/presentationml/2006/main">
-  <p:cSld>
-    <p:spTree>
-      <p:nvGrpSpPr>
-        <p:cNvPr id="1" name="">
-          <a:extLst>
-            <a:ext uri="{FF2B5EF4-FFF2-40B4-BE49-F238E27FC236}">
-              <a16:creationId xmlns:a16="http://schemas.microsoft.com/office/drawing/2014/main" id="{FF36F8D8-9E85-FEE4-7A37-E3799247A7B5}"/>
-            </a:ext>
-          </a:extLst>
-        </p:cNvPr>
-        <p:cNvGrpSpPr/>
-        <p:nvPr/>
-      </p:nvGrpSpPr>
-      <p:grpSpPr>
-        <a:xfrm>
-          <a:off x="0" y="0"/>
-          <a:ext cx="0" cy="0"/>
-          <a:chOff x="0" y="0"/>
-          <a:chExt cx="0" cy="0"/>
-        </a:xfrm>
-      </p:grpSpPr>
-      <p:sp>
-        <p:nvSpPr>
-          <p:cNvPr id="2" name="Title 1">
-            <a:extLst>
-              <a:ext uri="{FF2B5EF4-FFF2-40B4-BE49-F238E27FC236}">
-                <a16:creationId xmlns:a16="http://schemas.microsoft.com/office/drawing/2014/main" id="{DE1C1A9D-2042-8FBB-DEDE-D181A6DE87DC}"/>
-              </a:ext>
-            </a:extLst>
-          </p:cNvPr>
-          <p:cNvSpPr>
-            <a:spLocks noGrp="1"/>
-          </p:cNvSpPr>
-          <p:nvPr>
-            <p:ph type="title"/>
-          </p:nvPr>
-        </p:nvSpPr>
-        <p:spPr/>
-        <p:txBody>
-          <a:bodyPr/>
-          <a:lstStyle/>
-          <a:p>
-            <a:r>
-              <a:rPr lang="en-US" dirty="0"/>
-              <a:t>Analysis 2 Weaknesses 1</a:t>
-            </a:r>
-          </a:p>
-        </p:txBody>
-      </p:sp>
-      <p:sp>
-        <p:nvSpPr>
-          <p:cNvPr id="3" name="Content Placeholder 2">
-            <a:extLst>
-              <a:ext uri="{FF2B5EF4-FFF2-40B4-BE49-F238E27FC236}">
-                <a16:creationId xmlns:a16="http://schemas.microsoft.com/office/drawing/2014/main" id="{0395F842-E000-BE3D-C22F-45DD9C956619}"/>
-              </a:ext>
-            </a:extLst>
-          </p:cNvPr>
-          <p:cNvSpPr>
-            <a:spLocks noGrp="1"/>
-          </p:cNvSpPr>
-          <p:nvPr>
-            <p:ph idx="1"/>
-          </p:nvPr>
-        </p:nvSpPr>
-        <p:spPr/>
-        <p:txBody>
-          <a:bodyPr/>
-          <a:lstStyle/>
-          <a:p>
-            <a:endParaRPr lang="en-US"/>
-          </a:p>
-        </p:txBody>
-      </p:sp>
-    </p:spTree>
-    <p:extLst>
-      <p:ext uri="{BB962C8B-B14F-4D97-AF65-F5344CB8AC3E}">
-        <p14:creationId xmlns:p14="http://schemas.microsoft.com/office/powerpoint/2010/main" val="3150154730"/>
-      </p:ext>
-    </p:extLst>
-  </p:cSld>
-  <p:clrMapOvr>
-    <a:masterClrMapping/>
-  </p:clrMapOvr>
-</p:sld>
-</file>
-
-<file path=ppt/slides/slide8.xml><?xml version="1.0" encoding="utf-8"?>
-<p:sld xmlns:a="http://schemas.openxmlformats.org/drawingml/2006/main" xmlns:r="http://schemas.openxmlformats.org/officeDocument/2006/relationships" xmlns:p="http://schemas.openxmlformats.org/presentationml/2006/main">
-  <p:cSld>
-    <p:spTree>
-      <p:nvGrpSpPr>
-        <p:cNvPr id="1" name="">
-          <a:extLst>
-            <a:ext uri="{FF2B5EF4-FFF2-40B4-BE49-F238E27FC236}">
-              <a16:creationId xmlns:a16="http://schemas.microsoft.com/office/drawing/2014/main" id="{0BAA6A4C-7A5C-7A0B-F7C6-0CCF312147E1}"/>
-            </a:ext>
-          </a:extLst>
-        </p:cNvPr>
-        <p:cNvGrpSpPr/>
-        <p:nvPr/>
-      </p:nvGrpSpPr>
-      <p:grpSpPr>
-        <a:xfrm>
-          <a:off x="0" y="0"/>
-          <a:ext cx="0" cy="0"/>
-          <a:chOff x="0" y="0"/>
-          <a:chExt cx="0" cy="0"/>
-        </a:xfrm>
-      </p:grpSpPr>
-      <p:sp>
-        <p:nvSpPr>
-          <p:cNvPr id="2" name="Title 1">
-            <a:extLst>
-              <a:ext uri="{FF2B5EF4-FFF2-40B4-BE49-F238E27FC236}">
-                <a16:creationId xmlns:a16="http://schemas.microsoft.com/office/drawing/2014/main" id="{8BC28EA6-2CCD-7FC7-6EB6-4F0EB72E511F}"/>
-              </a:ext>
-            </a:extLst>
-          </p:cNvPr>
-          <p:cNvSpPr>
-            <a:spLocks noGrp="1"/>
-          </p:cNvSpPr>
-          <p:nvPr>
-            <p:ph type="title"/>
-          </p:nvPr>
-        </p:nvSpPr>
-        <p:spPr/>
-        <p:txBody>
-          <a:bodyPr/>
-          <a:lstStyle/>
-          <a:p>
-            <a:r>
-              <a:rPr lang="en-US" dirty="0"/>
-              <a:t>Analysis 2 Weaknesses 2</a:t>
-            </a:r>
-          </a:p>
-        </p:txBody>
-      </p:sp>
-      <p:sp>
-        <p:nvSpPr>
-          <p:cNvPr id="3" name="Content Placeholder 2">
-            <a:extLst>
-              <a:ext uri="{FF2B5EF4-FFF2-40B4-BE49-F238E27FC236}">
-                <a16:creationId xmlns:a16="http://schemas.microsoft.com/office/drawing/2014/main" id="{8134932C-0E57-C49F-2D12-9BB65C82AE82}"/>
-              </a:ext>
-            </a:extLst>
-          </p:cNvPr>
-          <p:cNvSpPr>
-            <a:spLocks noGrp="1"/>
-          </p:cNvSpPr>
-          <p:nvPr>
-            <p:ph idx="1"/>
-          </p:nvPr>
-        </p:nvSpPr>
-        <p:spPr/>
-        <p:txBody>
-          <a:bodyPr/>
-          <a:lstStyle/>
-          <a:p>
-            <a:endParaRPr lang="en-US"/>
-          </a:p>
-        </p:txBody>
-      </p:sp>
-    </p:spTree>
-    <p:extLst>
-      <p:ext uri="{BB962C8B-B14F-4D97-AF65-F5344CB8AC3E}">
-        <p14:creationId xmlns:p14="http://schemas.microsoft.com/office/powerpoint/2010/main" val="343516046"/>
-      </p:ext>
-    </p:extLst>
-  </p:cSld>
-  <p:clrMapOvr>
-    <a:masterClrMapping/>
-  </p:clrMapOvr>
-</p:sld>
-</file>
-
-<file path=ppt/slides/slide9.xml><?xml version="1.0" encoding="utf-8"?>
-<p:sld xmlns:a="http://schemas.openxmlformats.org/drawingml/2006/main" xmlns:r="http://schemas.openxmlformats.org/officeDocument/2006/relationships" xmlns:p="http://schemas.openxmlformats.org/presentationml/2006/main">
-  <p:cSld>
-    <p:spTree>
-      <p:nvGrpSpPr>
-        <p:cNvPr id="1" name="">
-          <a:extLst>
-            <a:ext uri="{FF2B5EF4-FFF2-40B4-BE49-F238E27FC236}">
-              <a16:creationId xmlns:a16="http://schemas.microsoft.com/office/drawing/2014/main" id="{06B155D0-0685-0B6D-0C83-2F643820DA84}"/>
-            </a:ext>
-          </a:extLst>
-        </p:cNvPr>
-        <p:cNvGrpSpPr/>
-        <p:nvPr/>
-      </p:nvGrpSpPr>
-      <p:grpSpPr>
-        <a:xfrm>
-          <a:off x="0" y="0"/>
-          <a:ext cx="0" cy="0"/>
-          <a:chOff x="0" y="0"/>
-          <a:chExt cx="0" cy="0"/>
-        </a:xfrm>
-      </p:grpSpPr>
-      <p:sp>
-        <p:nvSpPr>
-          <p:cNvPr id="2" name="Title 1">
-            <a:extLst>
-              <a:ext uri="{FF2B5EF4-FFF2-40B4-BE49-F238E27FC236}">
-                <a16:creationId xmlns:a16="http://schemas.microsoft.com/office/drawing/2014/main" id="{94F3DFCE-0E39-2858-5029-E0852243D3E6}"/>
-              </a:ext>
-            </a:extLst>
-          </p:cNvPr>
-          <p:cNvSpPr>
-            <a:spLocks noGrp="1"/>
-          </p:cNvSpPr>
-          <p:nvPr>
-            <p:ph type="title"/>
-          </p:nvPr>
-        </p:nvSpPr>
-        <p:spPr/>
-        <p:txBody>
-          <a:bodyPr/>
-          <a:lstStyle/>
-          <a:p>
-            <a:r>
-              <a:rPr lang="en-US" dirty="0"/>
-              <a:t>Analysis 3 Opportunities 1</a:t>
-            </a:r>
-          </a:p>
-        </p:txBody>
-      </p:sp>
-      <p:sp>
-        <p:nvSpPr>
-          <p:cNvPr id="3" name="Content Placeholder 2">
-            <a:extLst>
-              <a:ext uri="{FF2B5EF4-FFF2-40B4-BE49-F238E27FC236}">
-                <a16:creationId xmlns:a16="http://schemas.microsoft.com/office/drawing/2014/main" id="{6D5416EB-D749-4744-3FBF-1CB6BF91BA3A}"/>
-              </a:ext>
-            </a:extLst>
-          </p:cNvPr>
-          <p:cNvSpPr>
-            <a:spLocks noGrp="1"/>
-          </p:cNvSpPr>
-          <p:nvPr>
-            <p:ph idx="1"/>
-          </p:nvPr>
-        </p:nvSpPr>
-        <p:spPr/>
-        <p:txBody>
-          <a:bodyPr/>
-          <a:lstStyle/>
-          <a:p>
-            <a:endParaRPr lang="en-US"/>
-          </a:p>
-        </p:txBody>
-      </p:sp>
-    </p:spTree>
-    <p:extLst>
-      <p:ext uri="{BB962C8B-B14F-4D97-AF65-F5344CB8AC3E}">
-        <p14:creationId xmlns:p14="http://schemas.microsoft.com/office/powerpoint/2010/main" val="3435706688"/>
       </p:ext>
     </p:extLst>
   </p:cSld>

--- a/week-04/Pham_liquor_sales_presentation.pptx
+++ b/week-04/Pham_liquor_sales_presentation.pptx
@@ -213,7 +213,7 @@
           <a:p>
             <a:fld id="{5B0FB398-5626-4DAA-BD19-B2F8F3D1EB3C}" type="datetimeFigureOut">
               <a:rPr lang="en-US" smtClean="0"/>
-              <a:t>4/30/2026</a:t>
+              <a:t>5/1/2026</a:t>
             </a:fld>
             <a:endParaRPr lang="en-US"/>
           </a:p>
@@ -1060,6 +1060,90 @@
               <a:t>	Acquisition of Modelo to enter the beer market in 2013</a:t>
             </a:r>
           </a:p>
+          <a:p>
+            <a:endParaRPr lang="en-US" dirty="0"/>
+          </a:p>
+          <a:p>
+            <a:r>
+              <a:rPr lang="en-US" dirty="0"/>
+              <a:t>We have influence in </a:t>
+            </a:r>
+            <a:r>
+              <a:rPr lang="en-US" b="1" u="sng" dirty="0">
+                <a:solidFill>
+                  <a:srgbClr val="00B050"/>
+                </a:solidFill>
+              </a:rPr>
+              <a:t>100%</a:t>
+            </a:r>
+            <a:r>
+              <a:rPr lang="en-US" dirty="0"/>
+              <a:t> of Iowa</a:t>
+            </a:r>
+          </a:p>
+          <a:p>
+            <a:r>
+              <a:rPr lang="en-US" dirty="0"/>
+              <a:t>Scale spender efficiency to larger markets through marketing recreational activities/promotions</a:t>
+            </a:r>
+          </a:p>
+          <a:p>
+            <a:pPr lvl="1"/>
+            <a:r>
+              <a:rPr lang="en-US" dirty="0"/>
+              <a:t>Potential global revenue growth </a:t>
+            </a:r>
+            <a:r>
+              <a:rPr lang="en-US" b="1" u="sng" dirty="0">
+                <a:solidFill>
+                  <a:srgbClr val="00B050"/>
+                </a:solidFill>
+              </a:rPr>
+              <a:t>over 100%</a:t>
+            </a:r>
+          </a:p>
+          <a:p>
+            <a:r>
+              <a:rPr lang="en-US" dirty="0"/>
+              <a:t>More budget towards researching and marketing Black Velvet and its variants; whisky industry</a:t>
+            </a:r>
+          </a:p>
+          <a:p>
+            <a:pPr lvl="1"/>
+            <a:r>
+              <a:rPr lang="en-US" dirty="0"/>
+              <a:t>Replicate its success among </a:t>
+            </a:r>
+            <a:r>
+              <a:rPr lang="en-US" dirty="0" err="1"/>
+              <a:t>Svedka</a:t>
+            </a:r>
+            <a:endParaRPr lang="en-US" dirty="0"/>
+          </a:p>
+          <a:p>
+            <a:pPr lvl="1"/>
+            <a:r>
+              <a:rPr lang="en-US" dirty="0"/>
+              <a:t>May be expensive</a:t>
+            </a:r>
+          </a:p>
+          <a:p>
+            <a:r>
+              <a:rPr lang="en-US" dirty="0"/>
+              <a:t>Reconsider Tequila pilot marketing or drop completely</a:t>
+            </a:r>
+          </a:p>
+          <a:p>
+            <a:r>
+              <a:rPr lang="en-US" dirty="0"/>
+              <a:t>As with customer loyalty, make our brands </a:t>
+            </a:r>
+            <a:r>
+              <a:rPr lang="en-US" b="1" u="sng" dirty="0"/>
+              <a:t>worth reaching for</a:t>
+            </a:r>
+            <a:endParaRPr lang="en-US" dirty="0"/>
+          </a:p>
         </p:txBody>
       </p:sp>
       <p:sp>
@@ -1245,7 +1329,7 @@
           <a:p>
             <a:fld id="{1C7CE9BF-C1FF-4E9B-97E6-64DC9D713536}" type="datetimeFigureOut">
               <a:rPr lang="en-US" smtClean="0"/>
-              <a:t>4/30/2026</a:t>
+              <a:t>5/1/2026</a:t>
             </a:fld>
             <a:endParaRPr lang="en-US"/>
           </a:p>
@@ -1443,7 +1527,7 @@
           <a:p>
             <a:fld id="{1C7CE9BF-C1FF-4E9B-97E6-64DC9D713536}" type="datetimeFigureOut">
               <a:rPr lang="en-US" smtClean="0"/>
-              <a:t>4/30/2026</a:t>
+              <a:t>5/1/2026</a:t>
             </a:fld>
             <a:endParaRPr lang="en-US"/>
           </a:p>
@@ -1651,7 +1735,7 @@
           <a:p>
             <a:fld id="{1C7CE9BF-C1FF-4E9B-97E6-64DC9D713536}" type="datetimeFigureOut">
               <a:rPr lang="en-US" smtClean="0"/>
-              <a:t>4/30/2026</a:t>
+              <a:t>5/1/2026</a:t>
             </a:fld>
             <a:endParaRPr lang="en-US"/>
           </a:p>
@@ -1849,7 +1933,7 @@
           <a:p>
             <a:fld id="{1C7CE9BF-C1FF-4E9B-97E6-64DC9D713536}" type="datetimeFigureOut">
               <a:rPr lang="en-US" smtClean="0"/>
-              <a:t>4/30/2026</a:t>
+              <a:t>5/1/2026</a:t>
             </a:fld>
             <a:endParaRPr lang="en-US"/>
           </a:p>
@@ -2124,7 +2208,7 @@
           <a:p>
             <a:fld id="{1C7CE9BF-C1FF-4E9B-97E6-64DC9D713536}" type="datetimeFigureOut">
               <a:rPr lang="en-US" smtClean="0"/>
-              <a:t>4/30/2026</a:t>
+              <a:t>5/1/2026</a:t>
             </a:fld>
             <a:endParaRPr lang="en-US"/>
           </a:p>
@@ -2389,7 +2473,7 @@
           <a:p>
             <a:fld id="{1C7CE9BF-C1FF-4E9B-97E6-64DC9D713536}" type="datetimeFigureOut">
               <a:rPr lang="en-US" smtClean="0"/>
-              <a:t>4/30/2026</a:t>
+              <a:t>5/1/2026</a:t>
             </a:fld>
             <a:endParaRPr lang="en-US"/>
           </a:p>
@@ -2801,7 +2885,7 @@
           <a:p>
             <a:fld id="{1C7CE9BF-C1FF-4E9B-97E6-64DC9D713536}" type="datetimeFigureOut">
               <a:rPr lang="en-US" smtClean="0"/>
-              <a:t>4/30/2026</a:t>
+              <a:t>5/1/2026</a:t>
             </a:fld>
             <a:endParaRPr lang="en-US"/>
           </a:p>
@@ -2942,7 +3026,7 @@
           <a:p>
             <a:fld id="{1C7CE9BF-C1FF-4E9B-97E6-64DC9D713536}" type="datetimeFigureOut">
               <a:rPr lang="en-US" smtClean="0"/>
-              <a:t>4/30/2026</a:t>
+              <a:t>5/1/2026</a:t>
             </a:fld>
             <a:endParaRPr lang="en-US"/>
           </a:p>
@@ -3055,7 +3139,7 @@
           <a:p>
             <a:fld id="{1C7CE9BF-C1FF-4E9B-97E6-64DC9D713536}" type="datetimeFigureOut">
               <a:rPr lang="en-US" smtClean="0"/>
-              <a:t>4/30/2026</a:t>
+              <a:t>5/1/2026</a:t>
             </a:fld>
             <a:endParaRPr lang="en-US"/>
           </a:p>
@@ -3366,7 +3450,7 @@
           <a:p>
             <a:fld id="{1C7CE9BF-C1FF-4E9B-97E6-64DC9D713536}" type="datetimeFigureOut">
               <a:rPr lang="en-US" smtClean="0"/>
-              <a:t>4/30/2026</a:t>
+              <a:t>5/1/2026</a:t>
             </a:fld>
             <a:endParaRPr lang="en-US"/>
           </a:p>
@@ -3654,7 +3738,7 @@
           <a:p>
             <a:fld id="{1C7CE9BF-C1FF-4E9B-97E6-64DC9D713536}" type="datetimeFigureOut">
               <a:rPr lang="en-US" smtClean="0"/>
-              <a:t>4/30/2026</a:t>
+              <a:t>5/1/2026</a:t>
             </a:fld>
             <a:endParaRPr lang="en-US"/>
           </a:p>
@@ -3895,7 +3979,7 @@
           <a:p>
             <a:fld id="{1C7CE9BF-C1FF-4E9B-97E6-64DC9D713536}" type="datetimeFigureOut">
               <a:rPr lang="en-US" smtClean="0"/>
-              <a:t>4/30/2026</a:t>
+              <a:t>5/1/2026</a:t>
             </a:fld>
             <a:endParaRPr lang="en-US"/>
           </a:p>
@@ -4298,6 +4382,14 @@
 <file path=ppt/slides/slide1.xml><?xml version="1.0" encoding="utf-8"?>
 <p:sld xmlns:a="http://schemas.openxmlformats.org/drawingml/2006/main" xmlns:r="http://schemas.openxmlformats.org/officeDocument/2006/relationships" xmlns:p="http://schemas.openxmlformats.org/presentationml/2006/main">
   <p:cSld>
+    <p:bg>
+      <p:bgPr>
+        <a:solidFill>
+          <a:schemeClr val="bg1"/>
+        </a:solidFill>
+        <a:effectLst/>
+      </p:bgPr>
+    </p:bg>
     <p:spTree>
       <p:nvGrpSpPr>
         <p:cNvPr id="1" name=""/>
@@ -4312,6 +4404,306 @@
           <a:chExt cx="0" cy="0"/>
         </a:xfrm>
       </p:grpSpPr>
+      <p:sp useBgFill="1">
+        <p:nvSpPr>
+          <p:cNvPr id="14" name="Rectangle 13">
+            <a:extLst>
+              <a:ext uri="{FF2B5EF4-FFF2-40B4-BE49-F238E27FC236}">
+                <a16:creationId xmlns:a16="http://schemas.microsoft.com/office/drawing/2014/main" id="{8555C5B3-193A-4749-9AFD-682E53CDDE8F}"/>
+              </a:ext>
+              <a:ext uri="{C183D7F6-B498-43B3-948B-1728B52AA6E4}">
+                <adec:decorative xmlns:adec="http://schemas.microsoft.com/office/drawing/2017/decorative" val="1"/>
+              </a:ext>
+            </a:extLst>
+          </p:cNvPr>
+          <p:cNvSpPr>
+            <a:spLocks noGrp="1" noRot="1" noChangeAspect="1" noMove="1" noResize="1" noEditPoints="1" noAdjustHandles="1" noChangeArrowheads="1" noChangeShapeType="1" noTextEdit="1"/>
+          </p:cNvSpPr>
+          <p:nvPr>
+            <p:extLst>
+              <p:ext uri="{386F3935-93C4-4BCD-93E2-E3B085C9AB24}">
+                <p16:designElem xmlns:p16="http://schemas.microsoft.com/office/powerpoint/2015/main" val="1"/>
+              </p:ext>
+            </p:extLst>
+          </p:nvPr>
+        </p:nvSpPr>
+        <p:spPr>
+          <a:xfrm>
+            <a:off x="0" y="0"/>
+            <a:ext cx="12192000" cy="6858000"/>
+          </a:xfrm>
+          <a:prstGeom prst="rect">
+            <a:avLst/>
+          </a:prstGeom>
+          <a:ln w="12700" cap="flat" cmpd="sng" algn="ctr">
+            <a:noFill/>
+            <a:prstDash val="solid"/>
+            <a:miter lim="800000"/>
+          </a:ln>
+          <a:effectLst/>
+          <a:extLst>
+            <a:ext uri="{91240B29-F687-4F45-9708-019B960494DF}">
+              <a14:hiddenLine xmlns:a14="http://schemas.microsoft.com/office/drawing/2010/main" w="12700" cap="flat" cmpd="sng" algn="ctr">
+                <a:solidFill>
+                  <a:schemeClr val="accent1">
+                    <a:shade val="50000"/>
+                  </a:schemeClr>
+                </a:solidFill>
+                <a:prstDash val="solid"/>
+                <a:miter lim="800000"/>
+              </a14:hiddenLine>
+            </a:ext>
+          </a:extLst>
+        </p:spPr>
+        <p:style>
+          <a:lnRef idx="2">
+            <a:schemeClr val="accent1">
+              <a:shade val="50000"/>
+            </a:schemeClr>
+          </a:lnRef>
+          <a:fillRef idx="1">
+            <a:schemeClr val="accent1"/>
+          </a:fillRef>
+          <a:effectRef idx="0">
+            <a:schemeClr val="accent1"/>
+          </a:effectRef>
+          <a:fontRef idx="minor">
+            <a:schemeClr val="lt1"/>
+          </a:fontRef>
+        </p:style>
+        <p:txBody>
+          <a:bodyPr rtlCol="0" anchor="ctr"/>
+          <a:lstStyle/>
+          <a:p>
+            <a:pPr algn="ctr"/>
+            <a:endParaRPr lang="en-US" dirty="0"/>
+          </a:p>
+        </p:txBody>
+      </p:sp>
+      <p:sp>
+        <p:nvSpPr>
+          <p:cNvPr id="16" name="Rectangle 15">
+            <a:extLst>
+              <a:ext uri="{FF2B5EF4-FFF2-40B4-BE49-F238E27FC236}">
+                <a16:creationId xmlns:a16="http://schemas.microsoft.com/office/drawing/2014/main" id="{2EAE06A6-F76A-41C9-827A-C561B004485C}"/>
+              </a:ext>
+              <a:ext uri="{C183D7F6-B498-43B3-948B-1728B52AA6E4}">
+                <adec:decorative xmlns:adec="http://schemas.microsoft.com/office/drawing/2017/decorative" val="1"/>
+              </a:ext>
+            </a:extLst>
+          </p:cNvPr>
+          <p:cNvSpPr>
+            <a:spLocks noGrp="1" noRot="1" noChangeAspect="1" noMove="1" noResize="1" noEditPoints="1" noAdjustHandles="1" noChangeArrowheads="1" noChangeShapeType="1" noTextEdit="1"/>
+          </p:cNvSpPr>
+          <p:nvPr>
+            <p:extLst>
+              <p:ext uri="{386F3935-93C4-4BCD-93E2-E3B085C9AB24}">
+                <p16:designElem xmlns:p16="http://schemas.microsoft.com/office/powerpoint/2015/main" val="1"/>
+              </p:ext>
+            </p:extLst>
+          </p:nvPr>
+        </p:nvSpPr>
+        <p:spPr>
+          <a:xfrm flipH="1">
+            <a:off x="0" y="-3"/>
+            <a:ext cx="12192000" cy="6858000"/>
+          </a:xfrm>
+          <a:prstGeom prst="rect">
+            <a:avLst/>
+          </a:prstGeom>
+          <a:gradFill>
+            <a:gsLst>
+              <a:gs pos="0">
+                <a:srgbClr val="000000"/>
+              </a:gs>
+              <a:gs pos="100000">
+                <a:schemeClr val="accent1">
+                  <a:lumMod val="75000"/>
+                </a:schemeClr>
+              </a:gs>
+            </a:gsLst>
+            <a:lin ang="6600000" scaled="0"/>
+          </a:gradFill>
+          <a:ln>
+            <a:noFill/>
+          </a:ln>
+        </p:spPr>
+        <p:style>
+          <a:lnRef idx="2">
+            <a:schemeClr val="accent1">
+              <a:shade val="50000"/>
+            </a:schemeClr>
+          </a:lnRef>
+          <a:fillRef idx="1">
+            <a:schemeClr val="accent1"/>
+          </a:fillRef>
+          <a:effectRef idx="0">
+            <a:schemeClr val="accent1"/>
+          </a:effectRef>
+          <a:fontRef idx="minor">
+            <a:schemeClr val="lt1"/>
+          </a:fontRef>
+        </p:style>
+        <p:txBody>
+          <a:bodyPr rtlCol="0" anchor="ctr"/>
+          <a:lstStyle/>
+          <a:p>
+            <a:pPr algn="ctr"/>
+            <a:endParaRPr lang="en-US" dirty="0"/>
+          </a:p>
+        </p:txBody>
+      </p:sp>
+      <p:sp>
+        <p:nvSpPr>
+          <p:cNvPr id="18" name="Rectangle 17">
+            <a:extLst>
+              <a:ext uri="{FF2B5EF4-FFF2-40B4-BE49-F238E27FC236}">
+                <a16:creationId xmlns:a16="http://schemas.microsoft.com/office/drawing/2014/main" id="{89F9D4E8-0639-444B-949B-9518585061AF}"/>
+              </a:ext>
+              <a:ext uri="{C183D7F6-B498-43B3-948B-1728B52AA6E4}">
+                <adec:decorative xmlns:adec="http://schemas.microsoft.com/office/drawing/2017/decorative" val="1"/>
+              </a:ext>
+            </a:extLst>
+          </p:cNvPr>
+          <p:cNvSpPr>
+            <a:spLocks noGrp="1" noRot="1" noChangeAspect="1" noMove="1" noResize="1" noEditPoints="1" noAdjustHandles="1" noChangeArrowheads="1" noChangeShapeType="1" noTextEdit="1"/>
+          </p:cNvSpPr>
+          <p:nvPr>
+            <p:extLst>
+              <p:ext uri="{386F3935-93C4-4BCD-93E2-E3B085C9AB24}">
+                <p16:designElem xmlns:p16="http://schemas.microsoft.com/office/powerpoint/2015/main" val="1"/>
+              </p:ext>
+            </p:extLst>
+          </p:nvPr>
+        </p:nvSpPr>
+        <p:spPr>
+          <a:xfrm flipH="1">
+            <a:off x="480861" y="0"/>
+            <a:ext cx="7661934" cy="6858000"/>
+          </a:xfrm>
+          <a:prstGeom prst="rect">
+            <a:avLst/>
+          </a:prstGeom>
+          <a:gradFill>
+            <a:gsLst>
+              <a:gs pos="0">
+                <a:schemeClr val="accent1">
+                  <a:lumMod val="75000"/>
+                  <a:alpha val="45000"/>
+                </a:schemeClr>
+              </a:gs>
+              <a:gs pos="100000">
+                <a:srgbClr val="000000">
+                  <a:alpha val="29000"/>
+                </a:srgbClr>
+              </a:gs>
+            </a:gsLst>
+            <a:lin ang="12000000" scaled="0"/>
+          </a:gradFill>
+          <a:ln>
+            <a:noFill/>
+          </a:ln>
+        </p:spPr>
+        <p:style>
+          <a:lnRef idx="2">
+            <a:schemeClr val="accent1">
+              <a:shade val="50000"/>
+            </a:schemeClr>
+          </a:lnRef>
+          <a:fillRef idx="1">
+            <a:schemeClr val="accent1"/>
+          </a:fillRef>
+          <a:effectRef idx="0">
+            <a:schemeClr val="accent1"/>
+          </a:effectRef>
+          <a:fontRef idx="minor">
+            <a:schemeClr val="lt1"/>
+          </a:fontRef>
+        </p:style>
+        <p:txBody>
+          <a:bodyPr rtlCol="0" anchor="ctr"/>
+          <a:lstStyle/>
+          <a:p>
+            <a:pPr algn="ctr"/>
+            <a:endParaRPr lang="en-US" dirty="0"/>
+          </a:p>
+        </p:txBody>
+      </p:sp>
+      <p:sp>
+        <p:nvSpPr>
+          <p:cNvPr id="20" name="Rectangle 19">
+            <a:extLst>
+              <a:ext uri="{FF2B5EF4-FFF2-40B4-BE49-F238E27FC236}">
+                <a16:creationId xmlns:a16="http://schemas.microsoft.com/office/drawing/2014/main" id="{7E3DA7A2-ED70-4BBA-AB72-00AD461FA405}"/>
+              </a:ext>
+              <a:ext uri="{C183D7F6-B498-43B3-948B-1728B52AA6E4}">
+                <adec:decorative xmlns:adec="http://schemas.microsoft.com/office/drawing/2017/decorative" val="1"/>
+              </a:ext>
+            </a:extLst>
+          </p:cNvPr>
+          <p:cNvSpPr>
+            <a:spLocks noGrp="1" noRot="1" noChangeAspect="1" noMove="1" noResize="1" noEditPoints="1" noAdjustHandles="1" noChangeArrowheads="1" noChangeShapeType="1" noTextEdit="1"/>
+          </p:cNvSpPr>
+          <p:nvPr>
+            <p:extLst>
+              <p:ext uri="{386F3935-93C4-4BCD-93E2-E3B085C9AB24}">
+                <p16:designElem xmlns:p16="http://schemas.microsoft.com/office/powerpoint/2015/main" val="1"/>
+              </p:ext>
+            </p:extLst>
+          </p:nvPr>
+        </p:nvSpPr>
+        <p:spPr>
+          <a:xfrm rot="10800000" flipH="1">
+            <a:off x="480862" y="-6"/>
+            <a:ext cx="11711138" cy="6410334"/>
+          </a:xfrm>
+          <a:prstGeom prst="rect">
+            <a:avLst/>
+          </a:prstGeom>
+          <a:gradFill>
+            <a:gsLst>
+              <a:gs pos="0">
+                <a:schemeClr val="accent1">
+                  <a:alpha val="0"/>
+                </a:schemeClr>
+              </a:gs>
+              <a:gs pos="100000">
+                <a:srgbClr val="000000">
+                  <a:alpha val="41000"/>
+                </a:srgbClr>
+              </a:gs>
+            </a:gsLst>
+            <a:lin ang="18000000" scaled="0"/>
+          </a:gradFill>
+          <a:ln>
+            <a:noFill/>
+          </a:ln>
+        </p:spPr>
+        <p:style>
+          <a:lnRef idx="2">
+            <a:schemeClr val="accent1">
+              <a:shade val="50000"/>
+            </a:schemeClr>
+          </a:lnRef>
+          <a:fillRef idx="1">
+            <a:schemeClr val="accent1"/>
+          </a:fillRef>
+          <a:effectRef idx="0">
+            <a:schemeClr val="accent1"/>
+          </a:effectRef>
+          <a:fontRef idx="minor">
+            <a:schemeClr val="lt1"/>
+          </a:fontRef>
+        </p:style>
+        <p:txBody>
+          <a:bodyPr rtlCol="0" anchor="ctr"/>
+          <a:lstStyle/>
+          <a:p>
+            <a:pPr algn="ctr"/>
+            <a:endParaRPr lang="en-US" dirty="0"/>
+          </a:p>
+        </p:txBody>
+      </p:sp>
       <p:sp>
         <p:nvSpPr>
           <p:cNvPr id="2" name="Title 1">
@@ -4328,13 +4720,25 @@
             <p:ph type="ctrTitle"/>
           </p:nvPr>
         </p:nvSpPr>
-        <p:spPr/>
-        <p:txBody>
-          <a:bodyPr/>
-          <a:lstStyle/>
-          <a:p>
-            <a:r>
-              <a:rPr lang="en-US" dirty="0"/>
+        <p:spPr>
+          <a:xfrm>
+            <a:off x="1127208" y="857251"/>
+            <a:ext cx="4747280" cy="3098061"/>
+          </a:xfrm>
+        </p:spPr>
+        <p:txBody>
+          <a:bodyPr anchor="b">
+            <a:normAutofit/>
+          </a:bodyPr>
+          <a:lstStyle/>
+          <a:p>
+            <a:pPr algn="l"/>
+            <a:r>
+              <a:rPr lang="en-US" sz="4800">
+                <a:solidFill>
+                  <a:srgbClr val="FFFFFF"/>
+                </a:solidFill>
+              </a:rPr>
               <a:t>Constellation Brands</a:t>
             </a:r>
           </a:p>
@@ -4342,6 +4746,82 @@
       </p:sp>
       <p:sp>
         <p:nvSpPr>
+          <p:cNvPr id="22" name="Rectangle 21">
+            <a:extLst>
+              <a:ext uri="{FF2B5EF4-FFF2-40B4-BE49-F238E27FC236}">
+                <a16:creationId xmlns:a16="http://schemas.microsoft.com/office/drawing/2014/main" id="{FC485432-3647-4218-B5D3-15D3FA222B13}"/>
+              </a:ext>
+              <a:ext uri="{C183D7F6-B498-43B3-948B-1728B52AA6E4}">
+                <adec:decorative xmlns:adec="http://schemas.microsoft.com/office/drawing/2017/decorative" val="1"/>
+              </a:ext>
+            </a:extLst>
+          </p:cNvPr>
+          <p:cNvSpPr>
+            <a:spLocks noGrp="1" noRot="1" noChangeAspect="1" noMove="1" noResize="1" noEditPoints="1" noAdjustHandles="1" noChangeArrowheads="1" noChangeShapeType="1" noTextEdit="1"/>
+          </p:cNvSpPr>
+          <p:nvPr>
+            <p:extLst>
+              <p:ext uri="{386F3935-93C4-4BCD-93E2-E3B085C9AB24}">
+                <p16:designElem xmlns:p16="http://schemas.microsoft.com/office/powerpoint/2015/main" val="1"/>
+              </p:ext>
+            </p:extLst>
+          </p:nvPr>
+        </p:nvSpPr>
+        <p:spPr>
+          <a:xfrm rot="16200000">
+            <a:off x="4844797" y="-489206"/>
+            <a:ext cx="2502408" cy="12191998"/>
+          </a:xfrm>
+          <a:prstGeom prst="rect">
+            <a:avLst/>
+          </a:prstGeom>
+          <a:gradFill>
+            <a:gsLst>
+              <a:gs pos="0">
+                <a:schemeClr val="accent1">
+                  <a:alpha val="24000"/>
+                </a:schemeClr>
+              </a:gs>
+              <a:gs pos="78000">
+                <a:schemeClr val="accent1">
+                  <a:lumMod val="50000"/>
+                  <a:alpha val="0"/>
+                </a:schemeClr>
+              </a:gs>
+            </a:gsLst>
+            <a:lin ang="10200000" scaled="0"/>
+          </a:gradFill>
+          <a:ln>
+            <a:noFill/>
+          </a:ln>
+        </p:spPr>
+        <p:style>
+          <a:lnRef idx="2">
+            <a:schemeClr val="accent1">
+              <a:shade val="50000"/>
+            </a:schemeClr>
+          </a:lnRef>
+          <a:fillRef idx="1">
+            <a:schemeClr val="accent1"/>
+          </a:fillRef>
+          <a:effectRef idx="0">
+            <a:schemeClr val="accent1"/>
+          </a:effectRef>
+          <a:fontRef idx="minor">
+            <a:schemeClr val="lt1"/>
+          </a:fontRef>
+        </p:style>
+        <p:txBody>
+          <a:bodyPr rtlCol="0" anchor="ctr"/>
+          <a:lstStyle/>
+          <a:p>
+            <a:pPr algn="ctr"/>
+            <a:endParaRPr lang="en-US"/>
+          </a:p>
+        </p:txBody>
+      </p:sp>
+      <p:sp>
+        <p:nvSpPr>
           <p:cNvPr id="3" name="Subtitle 2">
             <a:extLst>
               <a:ext uri="{FF2B5EF4-FFF2-40B4-BE49-F238E27FC236}">
@@ -4356,24 +4836,161 @@
             <p:ph type="subTitle" idx="1"/>
           </p:nvPr>
         </p:nvSpPr>
-        <p:spPr/>
-        <p:txBody>
-          <a:bodyPr/>
-          <a:lstStyle/>
-          <a:p>
-            <a:r>
-              <a:rPr lang="en-US" dirty="0"/>
+        <p:spPr>
+          <a:xfrm>
+            <a:off x="1127208" y="4756265"/>
+            <a:ext cx="4393278" cy="1244483"/>
+          </a:xfrm>
+        </p:spPr>
+        <p:txBody>
+          <a:bodyPr anchor="t">
+            <a:normAutofit/>
+          </a:bodyPr>
+          <a:lstStyle/>
+          <a:p>
+            <a:pPr algn="l"/>
+            <a:r>
+              <a:rPr lang="en-US" sz="1300">
+                <a:solidFill>
+                  <a:srgbClr val="FFFFFF"/>
+                </a:solidFill>
+              </a:rPr>
               <a:t>2014 Iowa Liquor Sales Analysis</a:t>
             </a:r>
           </a:p>
           <a:p>
-            <a:r>
-              <a:rPr lang="en-US" dirty="0"/>
-              <a:t>YUU – Capstone 1</a:t>
-            </a:r>
-          </a:p>
-        </p:txBody>
-      </p:sp>
+            <a:pPr algn="l"/>
+            <a:r>
+              <a:rPr lang="en-US" sz="1300">
+                <a:solidFill>
+                  <a:srgbClr val="FFFFFF"/>
+                </a:solidFill>
+              </a:rPr>
+              <a:t>Pham, Longley</a:t>
+            </a:r>
+          </a:p>
+          <a:p>
+            <a:pPr algn="l"/>
+            <a:r>
+              <a:rPr lang="en-US" sz="1300">
+                <a:solidFill>
+                  <a:srgbClr val="FFFFFF"/>
+                </a:solidFill>
+              </a:rPr>
+              <a:t>Year Up United – Data Academy</a:t>
+            </a:r>
+          </a:p>
+          <a:p>
+            <a:pPr algn="l"/>
+            <a:r>
+              <a:rPr lang="en-US" sz="1300">
+                <a:solidFill>
+                  <a:srgbClr val="FFFFFF"/>
+                </a:solidFill>
+              </a:rPr>
+              <a:t>Capstone 1</a:t>
+            </a:r>
+          </a:p>
+        </p:txBody>
+      </p:sp>
+      <p:sp>
+        <p:nvSpPr>
+          <p:cNvPr id="24" name="Oval 23">
+            <a:extLst>
+              <a:ext uri="{FF2B5EF4-FFF2-40B4-BE49-F238E27FC236}">
+                <a16:creationId xmlns:a16="http://schemas.microsoft.com/office/drawing/2014/main" id="{F4AFDDCA-6ABA-4D23-8A5C-1BF0F4308148}"/>
+              </a:ext>
+              <a:ext uri="{C183D7F6-B498-43B3-948B-1728B52AA6E4}">
+                <adec:decorative xmlns:adec="http://schemas.microsoft.com/office/drawing/2017/decorative" val="1"/>
+              </a:ext>
+            </a:extLst>
+          </p:cNvPr>
+          <p:cNvSpPr>
+            <a:spLocks noGrp="1" noRot="1" noChangeAspect="1" noMove="1" noResize="1" noEditPoints="1" noAdjustHandles="1" noChangeArrowheads="1" noChangeShapeType="1" noTextEdit="1"/>
+          </p:cNvSpPr>
+          <p:nvPr>
+            <p:extLst>
+              <p:ext uri="{386F3935-93C4-4BCD-93E2-E3B085C9AB24}">
+                <p16:designElem xmlns:p16="http://schemas.microsoft.com/office/powerpoint/2015/main" val="1"/>
+              </p:ext>
+            </p:extLst>
+          </p:nvPr>
+        </p:nvSpPr>
+        <p:spPr>
+          <a:xfrm>
+            <a:off x="6390589" y="1062544"/>
+            <a:ext cx="4756162" cy="4756162"/>
+          </a:xfrm>
+          <a:prstGeom prst="ellipse">
+            <a:avLst/>
+          </a:prstGeom>
+          <a:solidFill>
+            <a:schemeClr val="bg1"/>
+          </a:solidFill>
+          <a:ln>
+            <a:noFill/>
+          </a:ln>
+        </p:spPr>
+        <p:style>
+          <a:lnRef idx="2">
+            <a:schemeClr val="accent1">
+              <a:shade val="50000"/>
+            </a:schemeClr>
+          </a:lnRef>
+          <a:fillRef idx="1">
+            <a:schemeClr val="accent1"/>
+          </a:fillRef>
+          <a:effectRef idx="0">
+            <a:schemeClr val="accent1"/>
+          </a:effectRef>
+          <a:fontRef idx="minor">
+            <a:schemeClr val="lt1"/>
+          </a:fontRef>
+        </p:style>
+        <p:txBody>
+          <a:bodyPr rtlCol="0" anchor="ctr"/>
+          <a:lstStyle/>
+          <a:p>
+            <a:pPr algn="ctr"/>
+            <a:endParaRPr lang="en-US"/>
+          </a:p>
+        </p:txBody>
+      </p:sp>
+      <p:pic>
+        <p:nvPicPr>
+          <p:cNvPr id="5" name="Picture 4">
+            <a:extLst>
+              <a:ext uri="{FF2B5EF4-FFF2-40B4-BE49-F238E27FC236}">
+                <a16:creationId xmlns:a16="http://schemas.microsoft.com/office/drawing/2014/main" id="{35214212-7631-C026-FD63-B5C279DCEF37}"/>
+              </a:ext>
+            </a:extLst>
+          </p:cNvPr>
+          <p:cNvPicPr>
+            <a:picLocks noChangeAspect="1"/>
+          </p:cNvPicPr>
+          <p:nvPr/>
+        </p:nvPicPr>
+        <p:blipFill>
+          <a:blip r:embed="rId3">
+            <a:extLst>
+              <a:ext uri="{28A0092B-C50C-407E-A947-70E740481C1C}">
+                <a14:useLocalDpi xmlns:a14="http://schemas.microsoft.com/office/drawing/2010/main" val="0"/>
+              </a:ext>
+            </a:extLst>
+          </a:blip>
+          <a:srcRect t="7812" b="7812"/>
+          <a:stretch/>
+        </p:blipFill>
+        <p:spPr>
+          <a:xfrm>
+            <a:off x="6915078" y="2298496"/>
+            <a:ext cx="3707184" cy="2261002"/>
+          </a:xfrm>
+          <a:prstGeom prst="rect">
+            <a:avLst/>
+          </a:prstGeom>
+        </p:spPr>
+      </p:pic>
     </p:spTree>
     <p:extLst>
       <p:ext uri="{BB962C8B-B14F-4D97-AF65-F5344CB8AC3E}">
@@ -4390,6 +5007,21 @@
 <file path=ppt/slides/slide10.xml><?xml version="1.0" encoding="utf-8"?>
 <p:sld xmlns:a="http://schemas.openxmlformats.org/drawingml/2006/main" xmlns:r="http://schemas.openxmlformats.org/officeDocument/2006/relationships" xmlns:p="http://schemas.openxmlformats.org/presentationml/2006/main">
   <p:cSld>
+    <p:bg>
+      <p:bgPr>
+        <a:blipFill dpi="0" rotWithShape="1">
+          <a:blip r:embed="rId2">
+            <a:alphaModFix amt="15000"/>
+            <a:lum/>
+          </a:blip>
+          <a:srcRect/>
+          <a:stretch>
+            <a:fillRect/>
+          </a:stretch>
+        </a:blipFill>
+        <a:effectLst/>
+      </p:bgPr>
+    </p:bg>
     <p:spTree>
       <p:nvGrpSpPr>
         <p:cNvPr id="1" name=""/>
@@ -4449,7 +5081,7 @@
           </p:nvPr>
         </p:nvPicPr>
         <p:blipFill>
-          <a:blip r:embed="rId2">
+          <a:blip r:embed="rId3">
             <a:extLst>
               <a:ext uri="{28A0092B-C50C-407E-A947-70E740481C1C}">
                 <a14:useLocalDpi xmlns:a14="http://schemas.microsoft.com/office/drawing/2010/main" val="0"/>
@@ -4487,7 +5119,7 @@
           </p:nvPr>
         </p:nvPicPr>
         <p:blipFill>
-          <a:blip r:embed="rId3">
+          <a:blip r:embed="rId4">
             <a:extLst>
               <a:ext uri="{28A0092B-C50C-407E-A947-70E740481C1C}">
                 <a14:useLocalDpi xmlns:a14="http://schemas.microsoft.com/office/drawing/2010/main" val="0"/>
@@ -4600,6 +5232,14 @@
 <file path=ppt/slides/slide11.xml><?xml version="1.0" encoding="utf-8"?>
 <p:sld xmlns:a="http://schemas.openxmlformats.org/drawingml/2006/main" xmlns:r="http://schemas.openxmlformats.org/officeDocument/2006/relationships" xmlns:p="http://schemas.openxmlformats.org/presentationml/2006/main">
   <p:cSld>
+    <p:bg>
+      <p:bgPr>
+        <a:solidFill>
+          <a:schemeClr val="bg1"/>
+        </a:solidFill>
+        <a:effectLst/>
+      </p:bgPr>
+    </p:bg>
     <p:spTree>
       <p:nvGrpSpPr>
         <p:cNvPr id="1" name="">
@@ -4620,6 +5260,82 @@
           <a:chExt cx="0" cy="0"/>
         </a:xfrm>
       </p:grpSpPr>
+      <p:sp useBgFill="1">
+        <p:nvSpPr>
+          <p:cNvPr id="23" name="Rectangle 22">
+            <a:extLst>
+              <a:ext uri="{FF2B5EF4-FFF2-40B4-BE49-F238E27FC236}">
+                <a16:creationId xmlns:a16="http://schemas.microsoft.com/office/drawing/2014/main" id="{12609869-9E80-471B-A487-A53288E0E791}"/>
+              </a:ext>
+              <a:ext uri="{C183D7F6-B498-43B3-948B-1728B52AA6E4}">
+                <adec:decorative xmlns:adec="http://schemas.microsoft.com/office/drawing/2017/decorative" val="1"/>
+              </a:ext>
+            </a:extLst>
+          </p:cNvPr>
+          <p:cNvSpPr>
+            <a:spLocks noGrp="1" noRot="1" noChangeAspect="1" noMove="1" noResize="1" noEditPoints="1" noAdjustHandles="1" noChangeArrowheads="1" noChangeShapeType="1" noTextEdit="1"/>
+          </p:cNvSpPr>
+          <p:nvPr>
+            <p:extLst>
+              <p:ext uri="{386F3935-93C4-4BCD-93E2-E3B085C9AB24}">
+                <p16:designElem xmlns:p16="http://schemas.microsoft.com/office/powerpoint/2015/main" val="1"/>
+              </p:ext>
+            </p:extLst>
+          </p:nvPr>
+        </p:nvSpPr>
+        <p:spPr>
+          <a:xfrm>
+            <a:off x="0" y="0"/>
+            <a:ext cx="12192000" cy="6858000"/>
+          </a:xfrm>
+          <a:prstGeom prst="rect">
+            <a:avLst/>
+          </a:prstGeom>
+          <a:ln w="12700" cap="flat" cmpd="sng" algn="ctr">
+            <a:noFill/>
+            <a:prstDash val="solid"/>
+            <a:miter lim="800000"/>
+          </a:ln>
+          <a:effectLst/>
+          <a:extLst>
+            <a:ext uri="{91240B29-F687-4F45-9708-019B960494DF}">
+              <a14:hiddenLine xmlns:a14="http://schemas.microsoft.com/office/drawing/2010/main" w="12700" cap="flat" cmpd="sng" algn="ctr">
+                <a:solidFill>
+                  <a:schemeClr val="accent1">
+                    <a:shade val="50000"/>
+                  </a:schemeClr>
+                </a:solidFill>
+                <a:prstDash val="solid"/>
+                <a:miter lim="800000"/>
+              </a14:hiddenLine>
+            </a:ext>
+          </a:extLst>
+        </p:spPr>
+        <p:style>
+          <a:lnRef idx="2">
+            <a:schemeClr val="accent1">
+              <a:shade val="50000"/>
+            </a:schemeClr>
+          </a:lnRef>
+          <a:fillRef idx="1">
+            <a:schemeClr val="accent1"/>
+          </a:fillRef>
+          <a:effectRef idx="0">
+            <a:schemeClr val="accent1"/>
+          </a:effectRef>
+          <a:fontRef idx="minor">
+            <a:schemeClr val="lt1"/>
+          </a:fontRef>
+        </p:style>
+        <p:txBody>
+          <a:bodyPr rtlCol="0" anchor="ctr"/>
+          <a:lstStyle/>
+          <a:p>
+            <a:pPr algn="ctr"/>
+            <a:endParaRPr lang="en-US"/>
+          </a:p>
+        </p:txBody>
+      </p:sp>
       <p:sp>
         <p:nvSpPr>
           <p:cNvPr id="2" name="Title 1">
@@ -4636,93 +5352,412 @@
             <p:ph type="title"/>
           </p:nvPr>
         </p:nvSpPr>
-        <p:spPr/>
-        <p:txBody>
-          <a:bodyPr/>
-          <a:lstStyle/>
-          <a:p>
-            <a:r>
-              <a:rPr lang="en-US" dirty="0"/>
-              <a:t>Black Velvet: The King of the Bottom Shelf</a:t>
-            </a:r>
-          </a:p>
-        </p:txBody>
-      </p:sp>
-      <p:sp>
-        <p:nvSpPr>
-          <p:cNvPr id="3" name="Content Placeholder 2">
-            <a:extLst>
-              <a:ext uri="{FF2B5EF4-FFF2-40B4-BE49-F238E27FC236}">
-                <a16:creationId xmlns:a16="http://schemas.microsoft.com/office/drawing/2014/main" id="{0395F842-E000-BE3D-C22F-45DD9C956619}"/>
-              </a:ext>
-            </a:extLst>
-          </p:cNvPr>
-          <p:cNvSpPr>
-            <a:spLocks noGrp="1"/>
-          </p:cNvSpPr>
-          <p:nvPr>
-            <p:ph sz="half" idx="1"/>
-          </p:nvPr>
-        </p:nvSpPr>
-        <p:spPr/>
-        <p:txBody>
-          <a:bodyPr>
+        <p:spPr>
+          <a:xfrm>
+            <a:off x="1136397" y="502020"/>
+            <a:ext cx="5323715" cy="1642970"/>
+          </a:xfrm>
+        </p:spPr>
+        <p:txBody>
+          <a:bodyPr vert="horz" lIns="91440" tIns="45720" rIns="91440" bIns="45720" rtlCol="0" anchor="b">
             <a:normAutofit/>
           </a:bodyPr>
           <a:lstStyle/>
           <a:p>
             <a:r>
-              <a:rPr lang="en-US" dirty="0"/>
+              <a:rPr lang="en-US" sz="4000" kern="1200">
+                <a:solidFill>
+                  <a:schemeClr val="tx1"/>
+                </a:solidFill>
+                <a:latin typeface="+mj-lt"/>
+                <a:ea typeface="+mj-ea"/>
+                <a:cs typeface="+mj-cs"/>
+              </a:rPr>
+              <a:t>Black Velvet: The King of the Bottom Shelf</a:t>
+            </a:r>
+          </a:p>
+        </p:txBody>
+      </p:sp>
+      <p:sp>
+        <p:nvSpPr>
+          <p:cNvPr id="3" name="Content Placeholder 2">
+            <a:extLst>
+              <a:ext uri="{FF2B5EF4-FFF2-40B4-BE49-F238E27FC236}">
+                <a16:creationId xmlns:a16="http://schemas.microsoft.com/office/drawing/2014/main" id="{0395F842-E000-BE3D-C22F-45DD9C956619}"/>
+              </a:ext>
+            </a:extLst>
+          </p:cNvPr>
+          <p:cNvSpPr>
+            <a:spLocks noGrp="1"/>
+          </p:cNvSpPr>
+          <p:nvPr>
+            <p:ph sz="half" idx="1"/>
+          </p:nvPr>
+        </p:nvSpPr>
+        <p:spPr>
+          <a:xfrm>
+            <a:off x="1144923" y="2405894"/>
+            <a:ext cx="5315189" cy="3535083"/>
+          </a:xfrm>
+        </p:spPr>
+        <p:txBody>
+          <a:bodyPr vert="horz" lIns="91440" tIns="45720" rIns="91440" bIns="45720" rtlCol="0" anchor="t">
+            <a:normAutofit/>
+          </a:bodyPr>
+          <a:lstStyle/>
+          <a:p>
+            <a:r>
+              <a:rPr lang="en-US" sz="2000"/>
               <a:t>$19.7M out of $19.77M in Whiskey sales</a:t>
             </a:r>
           </a:p>
           <a:p>
             <a:pPr lvl="1"/>
             <a:r>
-              <a:rPr lang="en-US" dirty="0"/>
+              <a:rPr lang="en-US" sz="2000"/>
               <a:t>Controls 16% of overall market</a:t>
             </a:r>
           </a:p>
           <a:p>
             <a:pPr lvl="1"/>
             <a:r>
-              <a:rPr lang="en-US" dirty="0"/>
+              <a:rPr lang="en-US" sz="2000"/>
               <a:t>#1 among all whiskey brands</a:t>
             </a:r>
           </a:p>
           <a:p>
             <a:r>
-              <a:rPr lang="en-US" dirty="0"/>
+              <a:rPr lang="en-US" sz="2000"/>
               <a:t>Why?</a:t>
             </a:r>
           </a:p>
           <a:p>
             <a:pPr lvl="1"/>
             <a:r>
-              <a:rPr lang="en-US" dirty="0"/>
+              <a:rPr lang="en-US" sz="2000"/>
               <a:t>Smooth and easy to drink</a:t>
             </a:r>
           </a:p>
           <a:p>
             <a:pPr lvl="1"/>
             <a:r>
-              <a:rPr lang="en-US" dirty="0"/>
+              <a:rPr lang="en-US" sz="2000"/>
               <a:t>Cheap and widely available</a:t>
             </a:r>
           </a:p>
           <a:p>
             <a:pPr lvl="1"/>
             <a:r>
-              <a:rPr lang="en-US" dirty="0"/>
+              <a:rPr lang="en-US" sz="2000"/>
               <a:t>Designed for casual drinkers</a:t>
             </a:r>
           </a:p>
           <a:p>
             <a:pPr lvl="1"/>
             <a:r>
-              <a:rPr lang="en-US" dirty="0"/>
+              <a:rPr lang="en-US" sz="2000"/>
               <a:t>Sells on brand recognition and loyalty</a:t>
             </a:r>
+          </a:p>
+        </p:txBody>
+      </p:sp>
+      <p:sp>
+        <p:nvSpPr>
+          <p:cNvPr id="24" name="Rectangle 23">
+            <a:extLst>
+              <a:ext uri="{FF2B5EF4-FFF2-40B4-BE49-F238E27FC236}">
+                <a16:creationId xmlns:a16="http://schemas.microsoft.com/office/drawing/2014/main" id="{7004738A-9D34-43E8-97D2-CA0EED4F8BE0}"/>
+              </a:ext>
+              <a:ext uri="{C183D7F6-B498-43B3-948B-1728B52AA6E4}">
+                <adec:decorative xmlns:adec="http://schemas.microsoft.com/office/drawing/2017/decorative" val="1"/>
+              </a:ext>
+            </a:extLst>
+          </p:cNvPr>
+          <p:cNvSpPr>
+            <a:spLocks noGrp="1" noRot="1" noChangeAspect="1" noMove="1" noResize="1" noEditPoints="1" noAdjustHandles="1" noChangeArrowheads="1" noChangeShapeType="1" noTextEdit="1"/>
+          </p:cNvSpPr>
+          <p:nvPr>
+            <p:extLst>
+              <p:ext uri="{386F3935-93C4-4BCD-93E2-E3B085C9AB24}">
+                <p16:designElem xmlns:p16="http://schemas.microsoft.com/office/powerpoint/2015/main" val="1"/>
+              </p:ext>
+            </p:extLst>
+          </p:nvPr>
+        </p:nvSpPr>
+        <p:spPr>
+          <a:xfrm rot="10800000" flipH="1">
+            <a:off x="8123333" y="-5"/>
+            <a:ext cx="4092521" cy="6858000"/>
+          </a:xfrm>
+          <a:prstGeom prst="rect">
+            <a:avLst/>
+          </a:prstGeom>
+          <a:gradFill>
+            <a:gsLst>
+              <a:gs pos="8000">
+                <a:srgbClr val="000000">
+                  <a:alpha val="94000"/>
+                </a:srgbClr>
+              </a:gs>
+              <a:gs pos="100000">
+                <a:schemeClr val="accent1"/>
+              </a:gs>
+            </a:gsLst>
+            <a:lin ang="2400000" scaled="0"/>
+          </a:gradFill>
+          <a:ln>
+            <a:noFill/>
+          </a:ln>
+        </p:spPr>
+        <p:style>
+          <a:lnRef idx="2">
+            <a:schemeClr val="accent1">
+              <a:shade val="50000"/>
+            </a:schemeClr>
+          </a:lnRef>
+          <a:fillRef idx="1">
+            <a:schemeClr val="accent1"/>
+          </a:fillRef>
+          <a:effectRef idx="0">
+            <a:schemeClr val="accent1"/>
+          </a:effectRef>
+          <a:fontRef idx="minor">
+            <a:schemeClr val="lt1"/>
+          </a:fontRef>
+        </p:style>
+        <p:txBody>
+          <a:bodyPr rtlCol="0" anchor="ctr"/>
+          <a:lstStyle/>
+          <a:p>
+            <a:pPr algn="ctr"/>
+            <a:endParaRPr lang="en-US"/>
+          </a:p>
+        </p:txBody>
+      </p:sp>
+      <p:sp>
+        <p:nvSpPr>
+          <p:cNvPr id="25" name="Rectangle 24">
+            <a:extLst>
+              <a:ext uri="{FF2B5EF4-FFF2-40B4-BE49-F238E27FC236}">
+                <a16:creationId xmlns:a16="http://schemas.microsoft.com/office/drawing/2014/main" id="{B8B8D07F-F13E-443E-BA68-2D26672D76B9}"/>
+              </a:ext>
+              <a:ext uri="{C183D7F6-B498-43B3-948B-1728B52AA6E4}">
+                <adec:decorative xmlns:adec="http://schemas.microsoft.com/office/drawing/2017/decorative" val="1"/>
+              </a:ext>
+            </a:extLst>
+          </p:cNvPr>
+          <p:cNvSpPr>
+            <a:spLocks noGrp="1" noRot="1" noChangeAspect="1" noMove="1" noResize="1" noEditPoints="1" noAdjustHandles="1" noChangeArrowheads="1" noChangeShapeType="1" noTextEdit="1"/>
+          </p:cNvSpPr>
+          <p:nvPr>
+            <p:extLst>
+              <p:ext uri="{386F3935-93C4-4BCD-93E2-E3B085C9AB24}">
+                <p16:designElem xmlns:p16="http://schemas.microsoft.com/office/powerpoint/2015/main" val="1"/>
+              </p:ext>
+            </p:extLst>
+          </p:nvPr>
+        </p:nvSpPr>
+        <p:spPr>
+          <a:xfrm rot="10800000" flipH="1">
+            <a:off x="8123333" y="-2"/>
+            <a:ext cx="4092521" cy="6400369"/>
+          </a:xfrm>
+          <a:prstGeom prst="rect">
+            <a:avLst/>
+          </a:prstGeom>
+          <a:gradFill>
+            <a:gsLst>
+              <a:gs pos="31000">
+                <a:schemeClr val="accent1">
+                  <a:lumMod val="50000"/>
+                  <a:alpha val="0"/>
+                </a:schemeClr>
+              </a:gs>
+              <a:gs pos="100000">
+                <a:schemeClr val="accent1">
+                  <a:lumMod val="50000"/>
+                  <a:alpha val="26000"/>
+                </a:schemeClr>
+              </a:gs>
+            </a:gsLst>
+            <a:lin ang="18000000" scaled="0"/>
+          </a:gradFill>
+          <a:ln>
+            <a:noFill/>
+          </a:ln>
+        </p:spPr>
+        <p:style>
+          <a:lnRef idx="2">
+            <a:schemeClr val="accent1">
+              <a:shade val="50000"/>
+            </a:schemeClr>
+          </a:lnRef>
+          <a:fillRef idx="1">
+            <a:schemeClr val="accent1"/>
+          </a:fillRef>
+          <a:effectRef idx="0">
+            <a:schemeClr val="accent1"/>
+          </a:effectRef>
+          <a:fontRef idx="minor">
+            <a:schemeClr val="lt1"/>
+          </a:fontRef>
+        </p:style>
+        <p:txBody>
+          <a:bodyPr rtlCol="0" anchor="ctr"/>
+          <a:lstStyle/>
+          <a:p>
+            <a:pPr algn="ctr"/>
+            <a:endParaRPr lang="en-US" dirty="0"/>
+          </a:p>
+        </p:txBody>
+      </p:sp>
+      <p:sp>
+        <p:nvSpPr>
+          <p:cNvPr id="26" name="Rectangle 25">
+            <a:extLst>
+              <a:ext uri="{FF2B5EF4-FFF2-40B4-BE49-F238E27FC236}">
+                <a16:creationId xmlns:a16="http://schemas.microsoft.com/office/drawing/2014/main" id="{2813A4FA-24A5-41ED-A534-3807D1B2F344}"/>
+              </a:ext>
+              <a:ext uri="{C183D7F6-B498-43B3-948B-1728B52AA6E4}">
+                <adec:decorative xmlns:adec="http://schemas.microsoft.com/office/drawing/2017/decorative" val="1"/>
+              </a:ext>
+            </a:extLst>
+          </p:cNvPr>
+          <p:cNvSpPr>
+            <a:spLocks noGrp="1" noRot="1" noChangeAspect="1" noMove="1" noResize="1" noEditPoints="1" noAdjustHandles="1" noChangeArrowheads="1" noChangeShapeType="1" noTextEdit="1"/>
+          </p:cNvSpPr>
+          <p:nvPr>
+            <p:extLst>
+              <p:ext uri="{386F3935-93C4-4BCD-93E2-E3B085C9AB24}">
+                <p16:designElem xmlns:p16="http://schemas.microsoft.com/office/powerpoint/2015/main" val="1"/>
+              </p:ext>
+            </p:extLst>
+          </p:nvPr>
+        </p:nvSpPr>
+        <p:spPr>
+          <a:xfrm rot="10800000" flipH="1">
+            <a:off x="8123333" y="-22"/>
+            <a:ext cx="4068667" cy="6400389"/>
+          </a:xfrm>
+          <a:prstGeom prst="rect">
+            <a:avLst/>
+          </a:prstGeom>
+          <a:gradFill>
+            <a:gsLst>
+              <a:gs pos="0">
+                <a:schemeClr val="accent1">
+                  <a:alpha val="0"/>
+                </a:schemeClr>
+              </a:gs>
+              <a:gs pos="72000">
+                <a:srgbClr val="000000">
+                  <a:alpha val="21000"/>
+                </a:srgbClr>
+              </a:gs>
+            </a:gsLst>
+            <a:lin ang="3000000" scaled="0"/>
+          </a:gradFill>
+          <a:ln>
+            <a:noFill/>
+          </a:ln>
+        </p:spPr>
+        <p:style>
+          <a:lnRef idx="2">
+            <a:schemeClr val="accent1">
+              <a:shade val="50000"/>
+            </a:schemeClr>
+          </a:lnRef>
+          <a:fillRef idx="1">
+            <a:schemeClr val="accent1"/>
+          </a:fillRef>
+          <a:effectRef idx="0">
+            <a:schemeClr val="accent1"/>
+          </a:effectRef>
+          <a:fontRef idx="minor">
+            <a:schemeClr val="lt1"/>
+          </a:fontRef>
+        </p:style>
+        <p:txBody>
+          <a:bodyPr rtlCol="0" anchor="ctr"/>
+          <a:lstStyle/>
+          <a:p>
+            <a:pPr algn="ctr"/>
+            <a:endParaRPr lang="en-US" dirty="0"/>
+          </a:p>
+        </p:txBody>
+      </p:sp>
+      <p:sp>
+        <p:nvSpPr>
+          <p:cNvPr id="27" name="Rectangle 26">
+            <a:extLst>
+              <a:ext uri="{FF2B5EF4-FFF2-40B4-BE49-F238E27FC236}">
+                <a16:creationId xmlns:a16="http://schemas.microsoft.com/office/drawing/2014/main" id="{C3944F27-CA70-4E84-A51A-E6BF89558979}"/>
+              </a:ext>
+              <a:ext uri="{C183D7F6-B498-43B3-948B-1728B52AA6E4}">
+                <adec:decorative xmlns:adec="http://schemas.microsoft.com/office/drawing/2017/decorative" val="1"/>
+              </a:ext>
+            </a:extLst>
+          </p:cNvPr>
+          <p:cNvSpPr>
+            <a:spLocks noGrp="1" noRot="1" noChangeAspect="1" noMove="1" noResize="1" noEditPoints="1" noAdjustHandles="1" noChangeArrowheads="1" noChangeShapeType="1" noTextEdit="1"/>
+          </p:cNvSpPr>
+          <p:nvPr>
+            <p:extLst>
+              <p:ext uri="{386F3935-93C4-4BCD-93E2-E3B085C9AB24}">
+                <p16:designElem xmlns:p16="http://schemas.microsoft.com/office/powerpoint/2015/main" val="1"/>
+              </p:ext>
+            </p:extLst>
+          </p:nvPr>
+        </p:nvSpPr>
+        <p:spPr>
+          <a:xfrm rot="10800000" flipH="1">
+            <a:off x="8123333" y="-10"/>
+            <a:ext cx="3611467" cy="6857997"/>
+          </a:xfrm>
+          <a:prstGeom prst="rect">
+            <a:avLst/>
+          </a:prstGeom>
+          <a:gradFill>
+            <a:gsLst>
+              <a:gs pos="0">
+                <a:schemeClr val="accent1">
+                  <a:alpha val="0"/>
+                </a:schemeClr>
+              </a:gs>
+              <a:gs pos="93000">
+                <a:srgbClr val="000000">
+                  <a:alpha val="29000"/>
+                </a:srgbClr>
+              </a:gs>
+            </a:gsLst>
+            <a:lin ang="5400000" scaled="0"/>
+          </a:gradFill>
+          <a:ln>
+            <a:noFill/>
+          </a:ln>
+        </p:spPr>
+        <p:style>
+          <a:lnRef idx="2">
+            <a:schemeClr val="accent1">
+              <a:shade val="50000"/>
+            </a:schemeClr>
+          </a:lnRef>
+          <a:fillRef idx="1">
+            <a:schemeClr val="accent1"/>
+          </a:fillRef>
+          <a:effectRef idx="0">
+            <a:schemeClr val="accent1"/>
+          </a:effectRef>
+          <a:fontRef idx="minor">
+            <a:schemeClr val="lt1"/>
+          </a:fontRef>
+        </p:style>
+        <p:txBody>
+          <a:bodyPr rtlCol="0" anchor="ctr"/>
+          <a:lstStyle/>
+          <a:p>
+            <a:pPr algn="ctr"/>
+            <a:endParaRPr lang="en-US" dirty="0"/>
           </a:p>
         </p:txBody>
       </p:sp>
@@ -4756,8 +5791,8 @@
         </p:blipFill>
         <p:spPr>
           <a:xfrm>
-            <a:off x="7935300" y="1825625"/>
-            <a:ext cx="1655400" cy="4351338"/>
+            <a:off x="9205964" y="664306"/>
+            <a:ext cx="1927257" cy="5071731"/>
           </a:xfrm>
           <a:prstGeom prst="rect">
             <a:avLst/>
@@ -4913,6 +5948,14 @@
 <file path=ppt/slides/slide13.xml><?xml version="1.0" encoding="utf-8"?>
 <p:sld xmlns:a="http://schemas.openxmlformats.org/drawingml/2006/main" xmlns:r="http://schemas.openxmlformats.org/officeDocument/2006/relationships" xmlns:p="http://schemas.openxmlformats.org/presentationml/2006/main">
   <p:cSld>
+    <p:bg>
+      <p:bgPr>
+        <a:solidFill>
+          <a:schemeClr val="bg1"/>
+        </a:solidFill>
+        <a:effectLst/>
+      </p:bgPr>
+    </p:bg>
     <p:spTree>
       <p:nvGrpSpPr>
         <p:cNvPr id="1" name="">
@@ -4933,6 +5976,479 @@
           <a:chExt cx="0" cy="0"/>
         </a:xfrm>
       </p:grpSpPr>
+      <p:sp useBgFill="1">
+        <p:nvSpPr>
+          <p:cNvPr id="15" name="Rectangle 14">
+            <a:extLst>
+              <a:ext uri="{FF2B5EF4-FFF2-40B4-BE49-F238E27FC236}">
+                <a16:creationId xmlns:a16="http://schemas.microsoft.com/office/drawing/2014/main" id="{A8384FB5-9ADC-4DDC-881B-597D56F5B15D}"/>
+              </a:ext>
+              <a:ext uri="{C183D7F6-B498-43B3-948B-1728B52AA6E4}">
+                <adec:decorative xmlns:adec="http://schemas.microsoft.com/office/drawing/2017/decorative" val="1"/>
+              </a:ext>
+            </a:extLst>
+          </p:cNvPr>
+          <p:cNvSpPr>
+            <a:spLocks noGrp="1" noRot="1" noChangeAspect="1" noMove="1" noResize="1" noEditPoints="1" noAdjustHandles="1" noChangeArrowheads="1" noChangeShapeType="1" noTextEdit="1"/>
+          </p:cNvSpPr>
+          <p:nvPr>
+            <p:extLst>
+              <p:ext uri="{386F3935-93C4-4BCD-93E2-E3B085C9AB24}">
+                <p16:designElem xmlns:p16="http://schemas.microsoft.com/office/powerpoint/2015/main" val="1"/>
+              </p:ext>
+            </p:extLst>
+          </p:nvPr>
+        </p:nvSpPr>
+        <p:spPr>
+          <a:xfrm>
+            <a:off x="0" y="0"/>
+            <a:ext cx="12192000" cy="6858000"/>
+          </a:xfrm>
+          <a:prstGeom prst="rect">
+            <a:avLst/>
+          </a:prstGeom>
+          <a:ln w="12700" cap="flat" cmpd="sng" algn="ctr">
+            <a:noFill/>
+            <a:prstDash val="solid"/>
+            <a:miter lim="800000"/>
+          </a:ln>
+          <a:effectLst/>
+          <a:extLst>
+            <a:ext uri="{91240B29-F687-4F45-9708-019B960494DF}">
+              <a14:hiddenLine xmlns:a14="http://schemas.microsoft.com/office/drawing/2010/main" w="12700" cap="flat" cmpd="sng" algn="ctr">
+                <a:solidFill>
+                  <a:schemeClr val="accent1">
+                    <a:shade val="50000"/>
+                  </a:schemeClr>
+                </a:solidFill>
+                <a:prstDash val="solid"/>
+                <a:miter lim="800000"/>
+              </a14:hiddenLine>
+            </a:ext>
+          </a:extLst>
+        </p:spPr>
+        <p:style>
+          <a:lnRef idx="2">
+            <a:schemeClr val="accent1">
+              <a:shade val="50000"/>
+            </a:schemeClr>
+          </a:lnRef>
+          <a:fillRef idx="1">
+            <a:schemeClr val="accent1"/>
+          </a:fillRef>
+          <a:effectRef idx="0">
+            <a:schemeClr val="accent1"/>
+          </a:effectRef>
+          <a:fontRef idx="minor">
+            <a:schemeClr val="lt1"/>
+          </a:fontRef>
+        </p:style>
+        <p:txBody>
+          <a:bodyPr rtlCol="0" anchor="ctr"/>
+          <a:lstStyle/>
+          <a:p>
+            <a:pPr algn="ctr"/>
+            <a:endParaRPr lang="en-US"/>
+          </a:p>
+        </p:txBody>
+      </p:sp>
+      <p:sp>
+        <p:nvSpPr>
+          <p:cNvPr id="17" name="Rectangle 16">
+            <a:extLst>
+              <a:ext uri="{FF2B5EF4-FFF2-40B4-BE49-F238E27FC236}">
+                <a16:creationId xmlns:a16="http://schemas.microsoft.com/office/drawing/2014/main" id="{91E5A9A7-95C6-4F4F-B00E-C82E07FE62EF}"/>
+              </a:ext>
+              <a:ext uri="{C183D7F6-B498-43B3-948B-1728B52AA6E4}">
+                <adec:decorative xmlns:adec="http://schemas.microsoft.com/office/drawing/2017/decorative" val="1"/>
+              </a:ext>
+            </a:extLst>
+          </p:cNvPr>
+          <p:cNvSpPr>
+            <a:spLocks noGrp="1" noRot="1" noChangeAspect="1" noMove="1" noResize="1" noEditPoints="1" noAdjustHandles="1" noChangeArrowheads="1" noChangeShapeType="1" noTextEdit="1"/>
+          </p:cNvSpPr>
+          <p:nvPr>
+            <p:extLst>
+              <p:ext uri="{386F3935-93C4-4BCD-93E2-E3B085C9AB24}">
+                <p16:designElem xmlns:p16="http://schemas.microsoft.com/office/powerpoint/2015/main" val="1"/>
+              </p:ext>
+            </p:extLst>
+          </p:nvPr>
+        </p:nvSpPr>
+        <p:spPr>
+          <a:xfrm rot="5400000" flipH="1">
+            <a:off x="-1417539" y="1417538"/>
+            <a:ext cx="6875818" cy="4040744"/>
+          </a:xfrm>
+          <a:prstGeom prst="rect">
+            <a:avLst/>
+          </a:prstGeom>
+          <a:gradFill>
+            <a:gsLst>
+              <a:gs pos="0">
+                <a:srgbClr val="000000"/>
+              </a:gs>
+              <a:gs pos="100000">
+                <a:schemeClr val="accent1">
+                  <a:lumMod val="75000"/>
+                </a:schemeClr>
+              </a:gs>
+            </a:gsLst>
+            <a:lin ang="18600000" scaled="0"/>
+          </a:gradFill>
+          <a:ln>
+            <a:noFill/>
+          </a:ln>
+        </p:spPr>
+        <p:style>
+          <a:lnRef idx="2">
+            <a:schemeClr val="accent1">
+              <a:shade val="50000"/>
+            </a:schemeClr>
+          </a:lnRef>
+          <a:fillRef idx="1">
+            <a:schemeClr val="accent1"/>
+          </a:fillRef>
+          <a:effectRef idx="0">
+            <a:schemeClr val="accent1"/>
+          </a:effectRef>
+          <a:fontRef idx="minor">
+            <a:schemeClr val="lt1"/>
+          </a:fontRef>
+        </p:style>
+        <p:txBody>
+          <a:bodyPr rtlCol="0" anchor="ctr"/>
+          <a:lstStyle/>
+          <a:p>
+            <a:pPr algn="ctr"/>
+            <a:endParaRPr lang="en-US" dirty="0"/>
+          </a:p>
+        </p:txBody>
+      </p:sp>
+      <p:sp>
+        <p:nvSpPr>
+          <p:cNvPr id="19" name="Rectangle 18">
+            <a:extLst>
+              <a:ext uri="{FF2B5EF4-FFF2-40B4-BE49-F238E27FC236}">
+                <a16:creationId xmlns:a16="http://schemas.microsoft.com/office/drawing/2014/main" id="{D07DD2DE-F619-49DD-B5E7-03A290FF4ED1}"/>
+              </a:ext>
+              <a:ext uri="{C183D7F6-B498-43B3-948B-1728B52AA6E4}">
+                <adec:decorative xmlns:adec="http://schemas.microsoft.com/office/drawing/2017/decorative" val="1"/>
+              </a:ext>
+            </a:extLst>
+          </p:cNvPr>
+          <p:cNvSpPr>
+            <a:spLocks noGrp="1" noRot="1" noChangeAspect="1" noMove="1" noResize="1" noEditPoints="1" noAdjustHandles="1" noChangeArrowheads="1" noChangeShapeType="1" noTextEdit="1"/>
+          </p:cNvSpPr>
+          <p:nvPr>
+            <p:extLst>
+              <p:ext uri="{386F3935-93C4-4BCD-93E2-E3B085C9AB24}">
+                <p16:designElem xmlns:p16="http://schemas.microsoft.com/office/powerpoint/2015/main" val="1"/>
+              </p:ext>
+            </p:extLst>
+          </p:nvPr>
+        </p:nvSpPr>
+        <p:spPr>
+          <a:xfrm rot="16200000">
+            <a:off x="-158495" y="2660473"/>
+            <a:ext cx="4355594" cy="4038603"/>
+          </a:xfrm>
+          <a:prstGeom prst="rect">
+            <a:avLst/>
+          </a:prstGeom>
+          <a:gradFill>
+            <a:gsLst>
+              <a:gs pos="0">
+                <a:schemeClr val="accent1">
+                  <a:alpha val="50000"/>
+                </a:schemeClr>
+              </a:gs>
+              <a:gs pos="100000">
+                <a:schemeClr val="accent1">
+                  <a:lumMod val="50000"/>
+                  <a:alpha val="0"/>
+                </a:schemeClr>
+              </a:gs>
+            </a:gsLst>
+            <a:lin ang="11400000" scaled="0"/>
+          </a:gradFill>
+          <a:ln>
+            <a:noFill/>
+          </a:ln>
+        </p:spPr>
+        <p:style>
+          <a:lnRef idx="2">
+            <a:schemeClr val="accent1">
+              <a:shade val="50000"/>
+            </a:schemeClr>
+          </a:lnRef>
+          <a:fillRef idx="1">
+            <a:schemeClr val="accent1"/>
+          </a:fillRef>
+          <a:effectRef idx="0">
+            <a:schemeClr val="accent1"/>
+          </a:effectRef>
+          <a:fontRef idx="minor">
+            <a:schemeClr val="lt1"/>
+          </a:fontRef>
+        </p:style>
+        <p:txBody>
+          <a:bodyPr rtlCol="0" anchor="ctr"/>
+          <a:lstStyle/>
+          <a:p>
+            <a:pPr algn="ctr"/>
+            <a:endParaRPr lang="en-US"/>
+          </a:p>
+        </p:txBody>
+      </p:sp>
+      <p:sp>
+        <p:nvSpPr>
+          <p:cNvPr id="21" name="Rectangle 20">
+            <a:extLst>
+              <a:ext uri="{FF2B5EF4-FFF2-40B4-BE49-F238E27FC236}">
+                <a16:creationId xmlns:a16="http://schemas.microsoft.com/office/drawing/2014/main" id="{85149191-5F60-4A28-AAFF-039F96B0F3EC}"/>
+              </a:ext>
+              <a:ext uri="{C183D7F6-B498-43B3-948B-1728B52AA6E4}">
+                <adec:decorative xmlns:adec="http://schemas.microsoft.com/office/drawing/2017/decorative" val="1"/>
+              </a:ext>
+            </a:extLst>
+          </p:cNvPr>
+          <p:cNvSpPr>
+            <a:spLocks noGrp="1" noRot="1" noChangeAspect="1" noMove="1" noResize="1" noEditPoints="1" noAdjustHandles="1" noChangeArrowheads="1" noChangeShapeType="1" noTextEdit="1"/>
+          </p:cNvSpPr>
+          <p:nvPr>
+            <p:extLst>
+              <p:ext uri="{386F3935-93C4-4BCD-93E2-E3B085C9AB24}">
+                <p16:designElem xmlns:p16="http://schemas.microsoft.com/office/powerpoint/2015/main" val="1"/>
+              </p:ext>
+            </p:extLst>
+          </p:nvPr>
+        </p:nvSpPr>
+        <p:spPr>
+          <a:xfrm rot="16200000" flipH="1">
+            <a:off x="-1180882" y="1638085"/>
+            <a:ext cx="6857572" cy="3581401"/>
+          </a:xfrm>
+          <a:prstGeom prst="rect">
+            <a:avLst/>
+          </a:prstGeom>
+          <a:gradFill>
+            <a:gsLst>
+              <a:gs pos="0">
+                <a:srgbClr val="000000">
+                  <a:alpha val="59000"/>
+                </a:srgbClr>
+              </a:gs>
+              <a:gs pos="69000">
+                <a:schemeClr val="accent1">
+                  <a:alpha val="0"/>
+                </a:schemeClr>
+              </a:gs>
+            </a:gsLst>
+            <a:lin ang="13200000" scaled="0"/>
+          </a:gradFill>
+          <a:ln>
+            <a:noFill/>
+          </a:ln>
+        </p:spPr>
+        <p:style>
+          <a:lnRef idx="2">
+            <a:schemeClr val="accent1">
+              <a:shade val="50000"/>
+            </a:schemeClr>
+          </a:lnRef>
+          <a:fillRef idx="1">
+            <a:schemeClr val="accent1"/>
+          </a:fillRef>
+          <a:effectRef idx="0">
+            <a:schemeClr val="accent1"/>
+          </a:effectRef>
+          <a:fontRef idx="minor">
+            <a:schemeClr val="lt1"/>
+          </a:fontRef>
+        </p:style>
+        <p:txBody>
+          <a:bodyPr rtlCol="0" anchor="ctr"/>
+          <a:lstStyle/>
+          <a:p>
+            <a:pPr algn="ctr"/>
+            <a:endParaRPr lang="en-US" dirty="0"/>
+          </a:p>
+        </p:txBody>
+      </p:sp>
+      <p:sp>
+        <p:nvSpPr>
+          <p:cNvPr id="23" name="Freeform: Shape 22">
+            <a:extLst>
+              <a:ext uri="{FF2B5EF4-FFF2-40B4-BE49-F238E27FC236}">
+                <a16:creationId xmlns:a16="http://schemas.microsoft.com/office/drawing/2014/main" id="{F8260ED5-17F7-4158-B241-D51DD4CF1B7E}"/>
+              </a:ext>
+              <a:ext uri="{C183D7F6-B498-43B3-948B-1728B52AA6E4}">
+                <adec:decorative xmlns:adec="http://schemas.microsoft.com/office/drawing/2017/decorative" val="1"/>
+              </a:ext>
+            </a:extLst>
+          </p:cNvPr>
+          <p:cNvSpPr>
+            <a:spLocks noGrp="1" noRot="1" noChangeAspect="1" noMove="1" noResize="1" noEditPoints="1" noAdjustHandles="1" noChangeArrowheads="1" noChangeShapeType="1" noTextEdit="1"/>
+          </p:cNvSpPr>
+          <p:nvPr>
+            <p:extLst>
+              <p:ext uri="{386F3935-93C4-4BCD-93E2-E3B085C9AB24}">
+                <p16:designElem xmlns:p16="http://schemas.microsoft.com/office/powerpoint/2015/main" val="1"/>
+              </p:ext>
+            </p:extLst>
+          </p:nvPr>
+        </p:nvSpPr>
+        <p:spPr>
+          <a:xfrm rot="6097846">
+            <a:off x="-747355" y="1201312"/>
+            <a:ext cx="4808302" cy="4088666"/>
+          </a:xfrm>
+          <a:custGeom>
+            <a:avLst/>
+            <a:gdLst>
+              <a:gd name="connsiteX0" fmla="*/ 48844 w 4808302"/>
+              <a:gd name="connsiteY0" fmla="*/ 2888671 h 4088666"/>
+              <a:gd name="connsiteX1" fmla="*/ 0 w 4808302"/>
+              <a:gd name="connsiteY1" fmla="*/ 2404151 h 4088666"/>
+              <a:gd name="connsiteX2" fmla="*/ 2404151 w 4808302"/>
+              <a:gd name="connsiteY2" fmla="*/ 0 h 4088666"/>
+              <a:gd name="connsiteX3" fmla="*/ 4808302 w 4808302"/>
+              <a:gd name="connsiteY3" fmla="*/ 2404151 h 4088666"/>
+              <a:gd name="connsiteX4" fmla="*/ 4700216 w 4808302"/>
+              <a:gd name="connsiteY4" fmla="*/ 3119072 h 4088666"/>
+              <a:gd name="connsiteX5" fmla="*/ 4643143 w 4808302"/>
+              <a:gd name="connsiteY5" fmla="*/ 3275009 h 4088666"/>
+              <a:gd name="connsiteX6" fmla="*/ 690093 w 4808302"/>
+              <a:gd name="connsiteY6" fmla="*/ 4088666 h 4088666"/>
+              <a:gd name="connsiteX7" fmla="*/ 548991 w 4808302"/>
+              <a:gd name="connsiteY7" fmla="*/ 3933414 h 4088666"/>
+              <a:gd name="connsiteX8" fmla="*/ 48844 w 4808302"/>
+              <a:gd name="connsiteY8" fmla="*/ 2888671 h 4088666"/>
+            </a:gdLst>
+            <a:ahLst/>
+            <a:cxnLst>
+              <a:cxn ang="0">
+                <a:pos x="connsiteX0" y="connsiteY0"/>
+              </a:cxn>
+              <a:cxn ang="0">
+                <a:pos x="connsiteX1" y="connsiteY1"/>
+              </a:cxn>
+              <a:cxn ang="0">
+                <a:pos x="connsiteX2" y="connsiteY2"/>
+              </a:cxn>
+              <a:cxn ang="0">
+                <a:pos x="connsiteX3" y="connsiteY3"/>
+              </a:cxn>
+              <a:cxn ang="0">
+                <a:pos x="connsiteX4" y="connsiteY4"/>
+              </a:cxn>
+              <a:cxn ang="0">
+                <a:pos x="connsiteX5" y="connsiteY5"/>
+              </a:cxn>
+              <a:cxn ang="0">
+                <a:pos x="connsiteX6" y="connsiteY6"/>
+              </a:cxn>
+              <a:cxn ang="0">
+                <a:pos x="connsiteX7" y="connsiteY7"/>
+              </a:cxn>
+              <a:cxn ang="0">
+                <a:pos x="connsiteX8" y="connsiteY8"/>
+              </a:cxn>
+            </a:cxnLst>
+            <a:rect l="l" t="t" r="r" b="b"/>
+            <a:pathLst>
+              <a:path w="4808302" h="4088666">
+                <a:moveTo>
+                  <a:pt x="48844" y="2888671"/>
+                </a:moveTo>
+                <a:cubicBezTo>
+                  <a:pt x="16818" y="2732167"/>
+                  <a:pt x="0" y="2570123"/>
+                  <a:pt x="0" y="2404151"/>
+                </a:cubicBezTo>
+                <a:cubicBezTo>
+                  <a:pt x="0" y="1076375"/>
+                  <a:pt x="1076375" y="0"/>
+                  <a:pt x="2404151" y="0"/>
+                </a:cubicBezTo>
+                <a:cubicBezTo>
+                  <a:pt x="3731927" y="0"/>
+                  <a:pt x="4808302" y="1076375"/>
+                  <a:pt x="4808302" y="2404151"/>
+                </a:cubicBezTo>
+                <a:cubicBezTo>
+                  <a:pt x="4808302" y="2653109"/>
+                  <a:pt x="4770461" y="2893229"/>
+                  <a:pt x="4700216" y="3119072"/>
+                </a:cubicBezTo>
+                <a:lnTo>
+                  <a:pt x="4643143" y="3275009"/>
+                </a:lnTo>
+                <a:lnTo>
+                  <a:pt x="690093" y="4088666"/>
+                </a:lnTo>
+                <a:lnTo>
+                  <a:pt x="548991" y="3933414"/>
+                </a:lnTo>
+                <a:cubicBezTo>
+                  <a:pt x="304015" y="3636572"/>
+                  <a:pt x="128908" y="3279932"/>
+                  <a:pt x="48844" y="2888671"/>
+                </a:cubicBezTo>
+                <a:close/>
+              </a:path>
+            </a:pathLst>
+          </a:custGeom>
+          <a:gradFill>
+            <a:gsLst>
+              <a:gs pos="39000">
+                <a:schemeClr val="accent1">
+                  <a:lumMod val="60000"/>
+                  <a:lumOff val="40000"/>
+                  <a:alpha val="0"/>
+                </a:schemeClr>
+              </a:gs>
+              <a:gs pos="100000">
+                <a:schemeClr val="accent1">
+                  <a:lumMod val="75000"/>
+                  <a:alpha val="26000"/>
+                </a:schemeClr>
+              </a:gs>
+            </a:gsLst>
+            <a:lin ang="18600000" scaled="0"/>
+          </a:gradFill>
+          <a:ln>
+            <a:noFill/>
+          </a:ln>
+        </p:spPr>
+        <p:style>
+          <a:lnRef idx="2">
+            <a:schemeClr val="accent1">
+              <a:shade val="50000"/>
+            </a:schemeClr>
+          </a:lnRef>
+          <a:fillRef idx="1">
+            <a:schemeClr val="accent1"/>
+          </a:fillRef>
+          <a:effectRef idx="0">
+            <a:schemeClr val="accent1"/>
+          </a:effectRef>
+          <a:fontRef idx="minor">
+            <a:schemeClr val="lt1"/>
+          </a:fontRef>
+        </p:style>
+        <p:txBody>
+          <a:bodyPr wrap="square" rtlCol="0" anchor="ctr">
+            <a:noAutofit/>
+          </a:bodyPr>
+          <a:lstStyle/>
+          <a:p>
+            <a:pPr algn="ctr"/>
+            <a:endParaRPr lang="en-US" dirty="0"/>
+          </a:p>
+        </p:txBody>
+      </p:sp>
       <p:sp>
         <p:nvSpPr>
           <p:cNvPr id="2" name="Title 1">
@@ -4949,13 +6465,27 @@
             <p:ph type="title"/>
           </p:nvPr>
         </p:nvSpPr>
-        <p:spPr/>
-        <p:txBody>
-          <a:bodyPr/>
-          <a:lstStyle/>
-          <a:p>
-            <a:r>
-              <a:rPr lang="en-US" dirty="0"/>
+        <p:spPr>
+          <a:xfrm>
+            <a:off x="660041" y="2767106"/>
+            <a:ext cx="2880828" cy="3071906"/>
+          </a:xfrm>
+        </p:spPr>
+        <p:txBody>
+          <a:bodyPr vert="horz" lIns="91440" tIns="45720" rIns="91440" bIns="45720" rtlCol="0" anchor="t">
+            <a:normAutofit/>
+          </a:bodyPr>
+          <a:lstStyle/>
+          <a:p>
+            <a:r>
+              <a:rPr lang="en-US" sz="4000" kern="1200">
+                <a:solidFill>
+                  <a:srgbClr val="FFFFFF"/>
+                </a:solidFill>
+                <a:latin typeface="+mj-lt"/>
+                <a:ea typeface="+mj-ea"/>
+                <a:cs typeface="+mj-cs"/>
+              </a:rPr>
               <a:t>Other Market Mentions</a:t>
             </a:r>
           </a:p>
@@ -4991,8 +6521,8 @@
         </p:blipFill>
         <p:spPr>
           <a:xfrm>
-            <a:off x="1516236" y="1690688"/>
-            <a:ext cx="9159528" cy="4850885"/>
+            <a:off x="4502428" y="1514177"/>
+            <a:ext cx="7225748" cy="3829645"/>
           </a:xfrm>
           <a:prstGeom prst="rect">
             <a:avLst/>
@@ -5015,6 +6545,14 @@
 <file path=ppt/slides/slide14.xml><?xml version="1.0" encoding="utf-8"?>
 <p:sld xmlns:a="http://schemas.openxmlformats.org/drawingml/2006/main" xmlns:r="http://schemas.openxmlformats.org/officeDocument/2006/relationships" xmlns:p="http://schemas.openxmlformats.org/presentationml/2006/main">
   <p:cSld>
+    <p:bg>
+      <p:bgPr>
+        <a:solidFill>
+          <a:schemeClr val="bg1"/>
+        </a:solidFill>
+        <a:effectLst/>
+      </p:bgPr>
+    </p:bg>
     <p:spTree>
       <p:nvGrpSpPr>
         <p:cNvPr id="1" name="">
@@ -5035,6 +6573,479 @@
           <a:chExt cx="0" cy="0"/>
         </a:xfrm>
       </p:grpSpPr>
+      <p:sp useBgFill="1">
+        <p:nvSpPr>
+          <p:cNvPr id="15" name="Rectangle 14">
+            <a:extLst>
+              <a:ext uri="{FF2B5EF4-FFF2-40B4-BE49-F238E27FC236}">
+                <a16:creationId xmlns:a16="http://schemas.microsoft.com/office/drawing/2014/main" id="{A8384FB5-9ADC-4DDC-881B-597D56F5B15D}"/>
+              </a:ext>
+              <a:ext uri="{C183D7F6-B498-43B3-948B-1728B52AA6E4}">
+                <adec:decorative xmlns:adec="http://schemas.microsoft.com/office/drawing/2017/decorative" val="1"/>
+              </a:ext>
+            </a:extLst>
+          </p:cNvPr>
+          <p:cNvSpPr>
+            <a:spLocks noGrp="1" noRot="1" noChangeAspect="1" noMove="1" noResize="1" noEditPoints="1" noAdjustHandles="1" noChangeArrowheads="1" noChangeShapeType="1" noTextEdit="1"/>
+          </p:cNvSpPr>
+          <p:nvPr>
+            <p:extLst>
+              <p:ext uri="{386F3935-93C4-4BCD-93E2-E3B085C9AB24}">
+                <p16:designElem xmlns:p16="http://schemas.microsoft.com/office/powerpoint/2015/main" val="1"/>
+              </p:ext>
+            </p:extLst>
+          </p:nvPr>
+        </p:nvSpPr>
+        <p:spPr>
+          <a:xfrm>
+            <a:off x="0" y="0"/>
+            <a:ext cx="12192000" cy="6858000"/>
+          </a:xfrm>
+          <a:prstGeom prst="rect">
+            <a:avLst/>
+          </a:prstGeom>
+          <a:ln w="12700" cap="flat" cmpd="sng" algn="ctr">
+            <a:noFill/>
+            <a:prstDash val="solid"/>
+            <a:miter lim="800000"/>
+          </a:ln>
+          <a:effectLst/>
+          <a:extLst>
+            <a:ext uri="{91240B29-F687-4F45-9708-019B960494DF}">
+              <a14:hiddenLine xmlns:a14="http://schemas.microsoft.com/office/drawing/2010/main" w="12700" cap="flat" cmpd="sng" algn="ctr">
+                <a:solidFill>
+                  <a:schemeClr val="accent1">
+                    <a:shade val="50000"/>
+                  </a:schemeClr>
+                </a:solidFill>
+                <a:prstDash val="solid"/>
+                <a:miter lim="800000"/>
+              </a14:hiddenLine>
+            </a:ext>
+          </a:extLst>
+        </p:spPr>
+        <p:style>
+          <a:lnRef idx="2">
+            <a:schemeClr val="accent1">
+              <a:shade val="50000"/>
+            </a:schemeClr>
+          </a:lnRef>
+          <a:fillRef idx="1">
+            <a:schemeClr val="accent1"/>
+          </a:fillRef>
+          <a:effectRef idx="0">
+            <a:schemeClr val="accent1"/>
+          </a:effectRef>
+          <a:fontRef idx="minor">
+            <a:schemeClr val="lt1"/>
+          </a:fontRef>
+        </p:style>
+        <p:txBody>
+          <a:bodyPr rtlCol="0" anchor="ctr"/>
+          <a:lstStyle/>
+          <a:p>
+            <a:pPr algn="ctr"/>
+            <a:endParaRPr lang="en-US"/>
+          </a:p>
+        </p:txBody>
+      </p:sp>
+      <p:sp>
+        <p:nvSpPr>
+          <p:cNvPr id="17" name="Rectangle 16">
+            <a:extLst>
+              <a:ext uri="{FF2B5EF4-FFF2-40B4-BE49-F238E27FC236}">
+                <a16:creationId xmlns:a16="http://schemas.microsoft.com/office/drawing/2014/main" id="{91E5A9A7-95C6-4F4F-B00E-C82E07FE62EF}"/>
+              </a:ext>
+              <a:ext uri="{C183D7F6-B498-43B3-948B-1728B52AA6E4}">
+                <adec:decorative xmlns:adec="http://schemas.microsoft.com/office/drawing/2017/decorative" val="1"/>
+              </a:ext>
+            </a:extLst>
+          </p:cNvPr>
+          <p:cNvSpPr>
+            <a:spLocks noGrp="1" noRot="1" noChangeAspect="1" noMove="1" noResize="1" noEditPoints="1" noAdjustHandles="1" noChangeArrowheads="1" noChangeShapeType="1" noTextEdit="1"/>
+          </p:cNvSpPr>
+          <p:nvPr>
+            <p:extLst>
+              <p:ext uri="{386F3935-93C4-4BCD-93E2-E3B085C9AB24}">
+                <p16:designElem xmlns:p16="http://schemas.microsoft.com/office/powerpoint/2015/main" val="1"/>
+              </p:ext>
+            </p:extLst>
+          </p:nvPr>
+        </p:nvSpPr>
+        <p:spPr>
+          <a:xfrm rot="5400000" flipH="1">
+            <a:off x="-1417539" y="1417538"/>
+            <a:ext cx="6875818" cy="4040744"/>
+          </a:xfrm>
+          <a:prstGeom prst="rect">
+            <a:avLst/>
+          </a:prstGeom>
+          <a:gradFill>
+            <a:gsLst>
+              <a:gs pos="0">
+                <a:srgbClr val="000000"/>
+              </a:gs>
+              <a:gs pos="100000">
+                <a:schemeClr val="accent1">
+                  <a:lumMod val="75000"/>
+                </a:schemeClr>
+              </a:gs>
+            </a:gsLst>
+            <a:lin ang="18600000" scaled="0"/>
+          </a:gradFill>
+          <a:ln>
+            <a:noFill/>
+          </a:ln>
+        </p:spPr>
+        <p:style>
+          <a:lnRef idx="2">
+            <a:schemeClr val="accent1">
+              <a:shade val="50000"/>
+            </a:schemeClr>
+          </a:lnRef>
+          <a:fillRef idx="1">
+            <a:schemeClr val="accent1"/>
+          </a:fillRef>
+          <a:effectRef idx="0">
+            <a:schemeClr val="accent1"/>
+          </a:effectRef>
+          <a:fontRef idx="minor">
+            <a:schemeClr val="lt1"/>
+          </a:fontRef>
+        </p:style>
+        <p:txBody>
+          <a:bodyPr rtlCol="0" anchor="ctr"/>
+          <a:lstStyle/>
+          <a:p>
+            <a:pPr algn="ctr"/>
+            <a:endParaRPr lang="en-US" dirty="0"/>
+          </a:p>
+        </p:txBody>
+      </p:sp>
+      <p:sp>
+        <p:nvSpPr>
+          <p:cNvPr id="19" name="Rectangle 18">
+            <a:extLst>
+              <a:ext uri="{FF2B5EF4-FFF2-40B4-BE49-F238E27FC236}">
+                <a16:creationId xmlns:a16="http://schemas.microsoft.com/office/drawing/2014/main" id="{D07DD2DE-F619-49DD-B5E7-03A290FF4ED1}"/>
+              </a:ext>
+              <a:ext uri="{C183D7F6-B498-43B3-948B-1728B52AA6E4}">
+                <adec:decorative xmlns:adec="http://schemas.microsoft.com/office/drawing/2017/decorative" val="1"/>
+              </a:ext>
+            </a:extLst>
+          </p:cNvPr>
+          <p:cNvSpPr>
+            <a:spLocks noGrp="1" noRot="1" noChangeAspect="1" noMove="1" noResize="1" noEditPoints="1" noAdjustHandles="1" noChangeArrowheads="1" noChangeShapeType="1" noTextEdit="1"/>
+          </p:cNvSpPr>
+          <p:nvPr>
+            <p:extLst>
+              <p:ext uri="{386F3935-93C4-4BCD-93E2-E3B085C9AB24}">
+                <p16:designElem xmlns:p16="http://schemas.microsoft.com/office/powerpoint/2015/main" val="1"/>
+              </p:ext>
+            </p:extLst>
+          </p:nvPr>
+        </p:nvSpPr>
+        <p:spPr>
+          <a:xfrm rot="16200000">
+            <a:off x="-158495" y="2660473"/>
+            <a:ext cx="4355594" cy="4038603"/>
+          </a:xfrm>
+          <a:prstGeom prst="rect">
+            <a:avLst/>
+          </a:prstGeom>
+          <a:gradFill>
+            <a:gsLst>
+              <a:gs pos="0">
+                <a:schemeClr val="accent1">
+                  <a:alpha val="50000"/>
+                </a:schemeClr>
+              </a:gs>
+              <a:gs pos="100000">
+                <a:schemeClr val="accent1">
+                  <a:lumMod val="50000"/>
+                  <a:alpha val="0"/>
+                </a:schemeClr>
+              </a:gs>
+            </a:gsLst>
+            <a:lin ang="11400000" scaled="0"/>
+          </a:gradFill>
+          <a:ln>
+            <a:noFill/>
+          </a:ln>
+        </p:spPr>
+        <p:style>
+          <a:lnRef idx="2">
+            <a:schemeClr val="accent1">
+              <a:shade val="50000"/>
+            </a:schemeClr>
+          </a:lnRef>
+          <a:fillRef idx="1">
+            <a:schemeClr val="accent1"/>
+          </a:fillRef>
+          <a:effectRef idx="0">
+            <a:schemeClr val="accent1"/>
+          </a:effectRef>
+          <a:fontRef idx="minor">
+            <a:schemeClr val="lt1"/>
+          </a:fontRef>
+        </p:style>
+        <p:txBody>
+          <a:bodyPr rtlCol="0" anchor="ctr"/>
+          <a:lstStyle/>
+          <a:p>
+            <a:pPr algn="ctr"/>
+            <a:endParaRPr lang="en-US"/>
+          </a:p>
+        </p:txBody>
+      </p:sp>
+      <p:sp>
+        <p:nvSpPr>
+          <p:cNvPr id="21" name="Rectangle 20">
+            <a:extLst>
+              <a:ext uri="{FF2B5EF4-FFF2-40B4-BE49-F238E27FC236}">
+                <a16:creationId xmlns:a16="http://schemas.microsoft.com/office/drawing/2014/main" id="{85149191-5F60-4A28-AAFF-039F96B0F3EC}"/>
+              </a:ext>
+              <a:ext uri="{C183D7F6-B498-43B3-948B-1728B52AA6E4}">
+                <adec:decorative xmlns:adec="http://schemas.microsoft.com/office/drawing/2017/decorative" val="1"/>
+              </a:ext>
+            </a:extLst>
+          </p:cNvPr>
+          <p:cNvSpPr>
+            <a:spLocks noGrp="1" noRot="1" noChangeAspect="1" noMove="1" noResize="1" noEditPoints="1" noAdjustHandles="1" noChangeArrowheads="1" noChangeShapeType="1" noTextEdit="1"/>
+          </p:cNvSpPr>
+          <p:nvPr>
+            <p:extLst>
+              <p:ext uri="{386F3935-93C4-4BCD-93E2-E3B085C9AB24}">
+                <p16:designElem xmlns:p16="http://schemas.microsoft.com/office/powerpoint/2015/main" val="1"/>
+              </p:ext>
+            </p:extLst>
+          </p:nvPr>
+        </p:nvSpPr>
+        <p:spPr>
+          <a:xfrm rot="16200000" flipH="1">
+            <a:off x="-1180882" y="1638085"/>
+            <a:ext cx="6857572" cy="3581401"/>
+          </a:xfrm>
+          <a:prstGeom prst="rect">
+            <a:avLst/>
+          </a:prstGeom>
+          <a:gradFill>
+            <a:gsLst>
+              <a:gs pos="0">
+                <a:srgbClr val="000000">
+                  <a:alpha val="59000"/>
+                </a:srgbClr>
+              </a:gs>
+              <a:gs pos="69000">
+                <a:schemeClr val="accent1">
+                  <a:alpha val="0"/>
+                </a:schemeClr>
+              </a:gs>
+            </a:gsLst>
+            <a:lin ang="13200000" scaled="0"/>
+          </a:gradFill>
+          <a:ln>
+            <a:noFill/>
+          </a:ln>
+        </p:spPr>
+        <p:style>
+          <a:lnRef idx="2">
+            <a:schemeClr val="accent1">
+              <a:shade val="50000"/>
+            </a:schemeClr>
+          </a:lnRef>
+          <a:fillRef idx="1">
+            <a:schemeClr val="accent1"/>
+          </a:fillRef>
+          <a:effectRef idx="0">
+            <a:schemeClr val="accent1"/>
+          </a:effectRef>
+          <a:fontRef idx="minor">
+            <a:schemeClr val="lt1"/>
+          </a:fontRef>
+        </p:style>
+        <p:txBody>
+          <a:bodyPr rtlCol="0" anchor="ctr"/>
+          <a:lstStyle/>
+          <a:p>
+            <a:pPr algn="ctr"/>
+            <a:endParaRPr lang="en-US" dirty="0"/>
+          </a:p>
+        </p:txBody>
+      </p:sp>
+      <p:sp>
+        <p:nvSpPr>
+          <p:cNvPr id="23" name="Freeform: Shape 22">
+            <a:extLst>
+              <a:ext uri="{FF2B5EF4-FFF2-40B4-BE49-F238E27FC236}">
+                <a16:creationId xmlns:a16="http://schemas.microsoft.com/office/drawing/2014/main" id="{F8260ED5-17F7-4158-B241-D51DD4CF1B7E}"/>
+              </a:ext>
+              <a:ext uri="{C183D7F6-B498-43B3-948B-1728B52AA6E4}">
+                <adec:decorative xmlns:adec="http://schemas.microsoft.com/office/drawing/2017/decorative" val="1"/>
+              </a:ext>
+            </a:extLst>
+          </p:cNvPr>
+          <p:cNvSpPr>
+            <a:spLocks noGrp="1" noRot="1" noChangeAspect="1" noMove="1" noResize="1" noEditPoints="1" noAdjustHandles="1" noChangeArrowheads="1" noChangeShapeType="1" noTextEdit="1"/>
+          </p:cNvSpPr>
+          <p:nvPr>
+            <p:extLst>
+              <p:ext uri="{386F3935-93C4-4BCD-93E2-E3B085C9AB24}">
+                <p16:designElem xmlns:p16="http://schemas.microsoft.com/office/powerpoint/2015/main" val="1"/>
+              </p:ext>
+            </p:extLst>
+          </p:nvPr>
+        </p:nvSpPr>
+        <p:spPr>
+          <a:xfrm rot="6097846">
+            <a:off x="-747355" y="1201312"/>
+            <a:ext cx="4808302" cy="4088666"/>
+          </a:xfrm>
+          <a:custGeom>
+            <a:avLst/>
+            <a:gdLst>
+              <a:gd name="connsiteX0" fmla="*/ 48844 w 4808302"/>
+              <a:gd name="connsiteY0" fmla="*/ 2888671 h 4088666"/>
+              <a:gd name="connsiteX1" fmla="*/ 0 w 4808302"/>
+              <a:gd name="connsiteY1" fmla="*/ 2404151 h 4088666"/>
+              <a:gd name="connsiteX2" fmla="*/ 2404151 w 4808302"/>
+              <a:gd name="connsiteY2" fmla="*/ 0 h 4088666"/>
+              <a:gd name="connsiteX3" fmla="*/ 4808302 w 4808302"/>
+              <a:gd name="connsiteY3" fmla="*/ 2404151 h 4088666"/>
+              <a:gd name="connsiteX4" fmla="*/ 4700216 w 4808302"/>
+              <a:gd name="connsiteY4" fmla="*/ 3119072 h 4088666"/>
+              <a:gd name="connsiteX5" fmla="*/ 4643143 w 4808302"/>
+              <a:gd name="connsiteY5" fmla="*/ 3275009 h 4088666"/>
+              <a:gd name="connsiteX6" fmla="*/ 690093 w 4808302"/>
+              <a:gd name="connsiteY6" fmla="*/ 4088666 h 4088666"/>
+              <a:gd name="connsiteX7" fmla="*/ 548991 w 4808302"/>
+              <a:gd name="connsiteY7" fmla="*/ 3933414 h 4088666"/>
+              <a:gd name="connsiteX8" fmla="*/ 48844 w 4808302"/>
+              <a:gd name="connsiteY8" fmla="*/ 2888671 h 4088666"/>
+            </a:gdLst>
+            <a:ahLst/>
+            <a:cxnLst>
+              <a:cxn ang="0">
+                <a:pos x="connsiteX0" y="connsiteY0"/>
+              </a:cxn>
+              <a:cxn ang="0">
+                <a:pos x="connsiteX1" y="connsiteY1"/>
+              </a:cxn>
+              <a:cxn ang="0">
+                <a:pos x="connsiteX2" y="connsiteY2"/>
+              </a:cxn>
+              <a:cxn ang="0">
+                <a:pos x="connsiteX3" y="connsiteY3"/>
+              </a:cxn>
+              <a:cxn ang="0">
+                <a:pos x="connsiteX4" y="connsiteY4"/>
+              </a:cxn>
+              <a:cxn ang="0">
+                <a:pos x="connsiteX5" y="connsiteY5"/>
+              </a:cxn>
+              <a:cxn ang="0">
+                <a:pos x="connsiteX6" y="connsiteY6"/>
+              </a:cxn>
+              <a:cxn ang="0">
+                <a:pos x="connsiteX7" y="connsiteY7"/>
+              </a:cxn>
+              <a:cxn ang="0">
+                <a:pos x="connsiteX8" y="connsiteY8"/>
+              </a:cxn>
+            </a:cxnLst>
+            <a:rect l="l" t="t" r="r" b="b"/>
+            <a:pathLst>
+              <a:path w="4808302" h="4088666">
+                <a:moveTo>
+                  <a:pt x="48844" y="2888671"/>
+                </a:moveTo>
+                <a:cubicBezTo>
+                  <a:pt x="16818" y="2732167"/>
+                  <a:pt x="0" y="2570123"/>
+                  <a:pt x="0" y="2404151"/>
+                </a:cubicBezTo>
+                <a:cubicBezTo>
+                  <a:pt x="0" y="1076375"/>
+                  <a:pt x="1076375" y="0"/>
+                  <a:pt x="2404151" y="0"/>
+                </a:cubicBezTo>
+                <a:cubicBezTo>
+                  <a:pt x="3731927" y="0"/>
+                  <a:pt x="4808302" y="1076375"/>
+                  <a:pt x="4808302" y="2404151"/>
+                </a:cubicBezTo>
+                <a:cubicBezTo>
+                  <a:pt x="4808302" y="2653109"/>
+                  <a:pt x="4770461" y="2893229"/>
+                  <a:pt x="4700216" y="3119072"/>
+                </a:cubicBezTo>
+                <a:lnTo>
+                  <a:pt x="4643143" y="3275009"/>
+                </a:lnTo>
+                <a:lnTo>
+                  <a:pt x="690093" y="4088666"/>
+                </a:lnTo>
+                <a:lnTo>
+                  <a:pt x="548991" y="3933414"/>
+                </a:lnTo>
+                <a:cubicBezTo>
+                  <a:pt x="304015" y="3636572"/>
+                  <a:pt x="128908" y="3279932"/>
+                  <a:pt x="48844" y="2888671"/>
+                </a:cubicBezTo>
+                <a:close/>
+              </a:path>
+            </a:pathLst>
+          </a:custGeom>
+          <a:gradFill>
+            <a:gsLst>
+              <a:gs pos="39000">
+                <a:schemeClr val="accent1">
+                  <a:lumMod val="60000"/>
+                  <a:lumOff val="40000"/>
+                  <a:alpha val="0"/>
+                </a:schemeClr>
+              </a:gs>
+              <a:gs pos="100000">
+                <a:schemeClr val="accent1">
+                  <a:lumMod val="75000"/>
+                  <a:alpha val="26000"/>
+                </a:schemeClr>
+              </a:gs>
+            </a:gsLst>
+            <a:lin ang="18600000" scaled="0"/>
+          </a:gradFill>
+          <a:ln>
+            <a:noFill/>
+          </a:ln>
+        </p:spPr>
+        <p:style>
+          <a:lnRef idx="2">
+            <a:schemeClr val="accent1">
+              <a:shade val="50000"/>
+            </a:schemeClr>
+          </a:lnRef>
+          <a:fillRef idx="1">
+            <a:schemeClr val="accent1"/>
+          </a:fillRef>
+          <a:effectRef idx="0">
+            <a:schemeClr val="accent1"/>
+          </a:effectRef>
+          <a:fontRef idx="minor">
+            <a:schemeClr val="lt1"/>
+          </a:fontRef>
+        </p:style>
+        <p:txBody>
+          <a:bodyPr wrap="square" rtlCol="0" anchor="ctr">
+            <a:noAutofit/>
+          </a:bodyPr>
+          <a:lstStyle/>
+          <a:p>
+            <a:pPr algn="ctr"/>
+            <a:endParaRPr lang="en-US" dirty="0"/>
+          </a:p>
+        </p:txBody>
+      </p:sp>
       <p:sp>
         <p:nvSpPr>
           <p:cNvPr id="2" name="Title 1">
@@ -5051,13 +7062,27 @@
             <p:ph type="title"/>
           </p:nvPr>
         </p:nvSpPr>
-        <p:spPr/>
-        <p:txBody>
-          <a:bodyPr/>
-          <a:lstStyle/>
-          <a:p>
-            <a:r>
-              <a:rPr lang="en-US" dirty="0"/>
+        <p:spPr>
+          <a:xfrm>
+            <a:off x="660041" y="2767106"/>
+            <a:ext cx="2880828" cy="3071906"/>
+          </a:xfrm>
+        </p:spPr>
+        <p:txBody>
+          <a:bodyPr vert="horz" lIns="91440" tIns="45720" rIns="91440" bIns="45720" rtlCol="0" anchor="t">
+            <a:normAutofit/>
+          </a:bodyPr>
+          <a:lstStyle/>
+          <a:p>
+            <a:r>
+              <a:rPr lang="en-US" sz="4000" kern="1200">
+                <a:solidFill>
+                  <a:srgbClr val="FFFFFF"/>
+                </a:solidFill>
+                <a:latin typeface="+mj-lt"/>
+                <a:ea typeface="+mj-ea"/>
+                <a:cs typeface="+mj-cs"/>
+              </a:rPr>
               <a:t>Other Market Mentions</a:t>
             </a:r>
           </a:p>
@@ -5087,13 +7112,12 @@
               </a:ext>
             </a:extLst>
           </a:blip>
-          <a:srcRect/>
           <a:stretch/>
         </p:blipFill>
         <p:spPr>
           <a:xfrm>
-            <a:off x="1516236" y="1690688"/>
-            <a:ext cx="9159528" cy="4850885"/>
+            <a:off x="4502428" y="1514177"/>
+            <a:ext cx="7225748" cy="3829645"/>
           </a:xfrm>
           <a:prstGeom prst="rect">
             <a:avLst/>
@@ -5183,7 +7207,7 @@
         <p:spPr/>
         <p:txBody>
           <a:bodyPr>
-            <a:normAutofit lnSpcReduction="10000"/>
+            <a:normAutofit/>
           </a:bodyPr>
           <a:lstStyle/>
           <a:p>
@@ -5228,26 +7252,7 @@
           <a:p>
             <a:r>
               <a:rPr lang="en-US" dirty="0"/>
-              <a:t>More budget towards researching and marketing Black Velvet and its variants; whisky industry</a:t>
-            </a:r>
-          </a:p>
-          <a:p>
-            <a:pPr lvl="1"/>
-            <a:r>
-              <a:rPr lang="en-US" dirty="0"/>
-              <a:t>Replicate its success among </a:t>
-            </a:r>
-            <a:r>
-              <a:rPr lang="en-US" dirty="0" err="1"/>
-              <a:t>Svedka</a:t>
-            </a:r>
-            <a:endParaRPr lang="en-US" dirty="0"/>
-          </a:p>
-          <a:p>
-            <a:pPr lvl="1"/>
-            <a:r>
-              <a:rPr lang="en-US" dirty="0"/>
-              <a:t>May be expensive</a:t>
+              <a:t>More budget towards researching and marketing Black Velvet</a:t>
             </a:r>
           </a:p>
           <a:p>
@@ -5448,6 +7453,14 @@
 <file path=ppt/slides/slide17.xml><?xml version="1.0" encoding="utf-8"?>
 <p:sld xmlns:a="http://schemas.openxmlformats.org/drawingml/2006/main" xmlns:r="http://schemas.openxmlformats.org/officeDocument/2006/relationships" xmlns:p="http://schemas.openxmlformats.org/presentationml/2006/main">
   <p:cSld>
+    <p:bg>
+      <p:bgPr>
+        <a:solidFill>
+          <a:schemeClr val="bg1"/>
+        </a:solidFill>
+        <a:effectLst/>
+      </p:bgPr>
+    </p:bg>
     <p:spTree>
       <p:nvGrpSpPr>
         <p:cNvPr id="1" name=""/>
@@ -5462,6 +7475,628 @@
           <a:chExt cx="0" cy="0"/>
         </a:xfrm>
       </p:grpSpPr>
+      <p:sp useBgFill="1">
+        <p:nvSpPr>
+          <p:cNvPr id="8" name="Rectangle 7">
+            <a:extLst>
+              <a:ext uri="{FF2B5EF4-FFF2-40B4-BE49-F238E27FC236}">
+                <a16:creationId xmlns:a16="http://schemas.microsoft.com/office/drawing/2014/main" id="{09588DA8-065E-4F6F-8EFD-43104AB2E0CF}"/>
+              </a:ext>
+              <a:ext uri="{C183D7F6-B498-43B3-948B-1728B52AA6E4}">
+                <adec:decorative xmlns:adec="http://schemas.microsoft.com/office/drawing/2017/decorative" val="1"/>
+              </a:ext>
+            </a:extLst>
+          </p:cNvPr>
+          <p:cNvSpPr>
+            <a:spLocks noGrp="1" noRot="1" noChangeAspect="1" noMove="1" noResize="1" noEditPoints="1" noAdjustHandles="1" noChangeArrowheads="1" noChangeShapeType="1" noTextEdit="1"/>
+          </p:cNvSpPr>
+          <p:nvPr>
+            <p:extLst>
+              <p:ext uri="{386F3935-93C4-4BCD-93E2-E3B085C9AB24}">
+                <p16:designElem xmlns:p16="http://schemas.microsoft.com/office/powerpoint/2015/main" val="1"/>
+              </p:ext>
+            </p:extLst>
+          </p:nvPr>
+        </p:nvSpPr>
+        <p:spPr>
+          <a:xfrm>
+            <a:off x="0" y="0"/>
+            <a:ext cx="12192000" cy="6858000"/>
+          </a:xfrm>
+          <a:prstGeom prst="rect">
+            <a:avLst/>
+          </a:prstGeom>
+          <a:ln w="12700" cap="flat" cmpd="sng" algn="ctr">
+            <a:noFill/>
+            <a:prstDash val="solid"/>
+            <a:miter lim="800000"/>
+          </a:ln>
+          <a:effectLst/>
+          <a:extLst>
+            <a:ext uri="{91240B29-F687-4F45-9708-019B960494DF}">
+              <a14:hiddenLine xmlns:a14="http://schemas.microsoft.com/office/drawing/2010/main" w="12700" cap="flat" cmpd="sng" algn="ctr">
+                <a:solidFill>
+                  <a:schemeClr val="accent1">
+                    <a:shade val="50000"/>
+                  </a:schemeClr>
+                </a:solidFill>
+                <a:prstDash val="solid"/>
+                <a:miter lim="800000"/>
+              </a14:hiddenLine>
+            </a:ext>
+          </a:extLst>
+        </p:spPr>
+        <p:style>
+          <a:lnRef idx="2">
+            <a:schemeClr val="accent1">
+              <a:shade val="50000"/>
+            </a:schemeClr>
+          </a:lnRef>
+          <a:fillRef idx="1">
+            <a:schemeClr val="accent1"/>
+          </a:fillRef>
+          <a:effectRef idx="0">
+            <a:schemeClr val="accent1"/>
+          </a:effectRef>
+          <a:fontRef idx="minor">
+            <a:schemeClr val="lt1"/>
+          </a:fontRef>
+        </p:style>
+        <p:txBody>
+          <a:bodyPr rtlCol="0" anchor="ctr"/>
+          <a:lstStyle/>
+          <a:p>
+            <a:pPr algn="ctr"/>
+            <a:endParaRPr lang="en-US"/>
+          </a:p>
+        </p:txBody>
+      </p:sp>
+      <p:sp useBgFill="1">
+        <p:nvSpPr>
+          <p:cNvPr id="10" name="Rectangle 9">
+            <a:extLst>
+              <a:ext uri="{FF2B5EF4-FFF2-40B4-BE49-F238E27FC236}">
+                <a16:creationId xmlns:a16="http://schemas.microsoft.com/office/drawing/2014/main" id="{C4285719-470E-454C-AF62-8323075F1F5B}"/>
+              </a:ext>
+              <a:ext uri="{C183D7F6-B498-43B3-948B-1728B52AA6E4}">
+                <adec:decorative xmlns:adec="http://schemas.microsoft.com/office/drawing/2017/decorative" val="1"/>
+              </a:ext>
+            </a:extLst>
+          </p:cNvPr>
+          <p:cNvSpPr>
+            <a:spLocks noGrp="1" noRot="1" noChangeAspect="1" noMove="1" noResize="1" noEditPoints="1" noAdjustHandles="1" noChangeArrowheads="1" noChangeShapeType="1" noTextEdit="1"/>
+          </p:cNvSpPr>
+          <p:nvPr>
+            <p:extLst>
+              <p:ext uri="{386F3935-93C4-4BCD-93E2-E3B085C9AB24}">
+                <p16:designElem xmlns:p16="http://schemas.microsoft.com/office/powerpoint/2015/main" val="1"/>
+              </p:ext>
+            </p:extLst>
+          </p:nvPr>
+        </p:nvSpPr>
+        <p:spPr>
+          <a:xfrm>
+            <a:off x="0" y="0"/>
+            <a:ext cx="12188952" cy="6858000"/>
+          </a:xfrm>
+          <a:prstGeom prst="rect">
+            <a:avLst/>
+          </a:prstGeom>
+          <a:ln w="12700" cap="flat" cmpd="sng" algn="ctr">
+            <a:noFill/>
+            <a:prstDash val="solid"/>
+            <a:miter lim="800000"/>
+          </a:ln>
+          <a:effectLst/>
+          <a:extLst>
+            <a:ext uri="{91240B29-F687-4F45-9708-019B960494DF}">
+              <a14:hiddenLine xmlns:a14="http://schemas.microsoft.com/office/drawing/2010/main" w="12700" cap="flat" cmpd="sng" algn="ctr">
+                <a:solidFill>
+                  <a:schemeClr val="accent1">
+                    <a:shade val="50000"/>
+                  </a:schemeClr>
+                </a:solidFill>
+                <a:prstDash val="solid"/>
+                <a:miter lim="800000"/>
+              </a14:hiddenLine>
+            </a:ext>
+          </a:extLst>
+        </p:spPr>
+        <p:style>
+          <a:lnRef idx="2">
+            <a:schemeClr val="accent1">
+              <a:shade val="50000"/>
+            </a:schemeClr>
+          </a:lnRef>
+          <a:fillRef idx="1">
+            <a:schemeClr val="accent1"/>
+          </a:fillRef>
+          <a:effectRef idx="0">
+            <a:schemeClr val="accent1"/>
+          </a:effectRef>
+          <a:fontRef idx="minor">
+            <a:schemeClr val="lt1"/>
+          </a:fontRef>
+        </p:style>
+        <p:txBody>
+          <a:bodyPr rtlCol="0" anchor="ctr"/>
+          <a:lstStyle/>
+          <a:p>
+            <a:pPr algn="ctr"/>
+            <a:endParaRPr lang="en-US"/>
+          </a:p>
+        </p:txBody>
+      </p:sp>
+      <p:sp>
+        <p:nvSpPr>
+          <p:cNvPr id="12" name="Rectangle 11">
+            <a:extLst>
+              <a:ext uri="{FF2B5EF4-FFF2-40B4-BE49-F238E27FC236}">
+                <a16:creationId xmlns:a16="http://schemas.microsoft.com/office/drawing/2014/main" id="{CD9FE4EF-C4D8-49A0-B2FF-81D8DB7D8A24}"/>
+              </a:ext>
+              <a:ext uri="{C183D7F6-B498-43B3-948B-1728B52AA6E4}">
+                <adec:decorative xmlns:adec="http://schemas.microsoft.com/office/drawing/2017/decorative" val="1"/>
+              </a:ext>
+            </a:extLst>
+          </p:cNvPr>
+          <p:cNvSpPr>
+            <a:spLocks noGrp="1" noRot="1" noChangeAspect="1" noMove="1" noResize="1" noEditPoints="1" noAdjustHandles="1" noChangeArrowheads="1" noChangeShapeType="1" noTextEdit="1"/>
+          </p:cNvSpPr>
+          <p:nvPr>
+            <p:extLst>
+              <p:ext uri="{386F3935-93C4-4BCD-93E2-E3B085C9AB24}">
+                <p16:designElem xmlns:p16="http://schemas.microsoft.com/office/powerpoint/2015/main" val="1"/>
+              </p:ext>
+            </p:extLst>
+          </p:nvPr>
+        </p:nvSpPr>
+        <p:spPr>
+          <a:xfrm rot="5400000" flipH="1">
+            <a:off x="-1410084" y="1410082"/>
+            <a:ext cx="6858000" cy="4037836"/>
+          </a:xfrm>
+          <a:prstGeom prst="rect">
+            <a:avLst/>
+          </a:prstGeom>
+          <a:gradFill>
+            <a:gsLst>
+              <a:gs pos="8000">
+                <a:srgbClr val="000000"/>
+              </a:gs>
+              <a:gs pos="100000">
+                <a:schemeClr val="accent1">
+                  <a:lumMod val="75000"/>
+                </a:schemeClr>
+              </a:gs>
+            </a:gsLst>
+            <a:lin ang="3000000" scaled="0"/>
+          </a:gradFill>
+          <a:ln>
+            <a:noFill/>
+          </a:ln>
+        </p:spPr>
+        <p:style>
+          <a:lnRef idx="2">
+            <a:schemeClr val="accent1">
+              <a:shade val="50000"/>
+            </a:schemeClr>
+          </a:lnRef>
+          <a:fillRef idx="1">
+            <a:schemeClr val="accent1"/>
+          </a:fillRef>
+          <a:effectRef idx="0">
+            <a:schemeClr val="accent1"/>
+          </a:effectRef>
+          <a:fontRef idx="minor">
+            <a:schemeClr val="lt1"/>
+          </a:fontRef>
+        </p:style>
+        <p:txBody>
+          <a:bodyPr rtlCol="0" anchor="ctr"/>
+          <a:lstStyle/>
+          <a:p>
+            <a:pPr algn="ctr"/>
+            <a:endParaRPr lang="en-US"/>
+          </a:p>
+        </p:txBody>
+      </p:sp>
+      <p:sp>
+        <p:nvSpPr>
+          <p:cNvPr id="14" name="Rectangle 13">
+            <a:extLst>
+              <a:ext uri="{FF2B5EF4-FFF2-40B4-BE49-F238E27FC236}">
+                <a16:creationId xmlns:a16="http://schemas.microsoft.com/office/drawing/2014/main" id="{4300840D-0A0B-4512-BACA-B439D5B9C57C}"/>
+              </a:ext>
+              <a:ext uri="{C183D7F6-B498-43B3-948B-1728B52AA6E4}">
+                <adec:decorative xmlns:adec="http://schemas.microsoft.com/office/drawing/2017/decorative" val="1"/>
+              </a:ext>
+            </a:extLst>
+          </p:cNvPr>
+          <p:cNvSpPr>
+            <a:spLocks noGrp="1" noRot="1" noChangeAspect="1" noMove="1" noResize="1" noEditPoints="1" noAdjustHandles="1" noChangeArrowheads="1" noChangeShapeType="1" noTextEdit="1"/>
+          </p:cNvSpPr>
+          <p:nvPr>
+            <p:extLst>
+              <p:ext uri="{386F3935-93C4-4BCD-93E2-E3B085C9AB24}">
+                <p16:designElem xmlns:p16="http://schemas.microsoft.com/office/powerpoint/2015/main" val="1"/>
+              </p:ext>
+            </p:extLst>
+          </p:nvPr>
+        </p:nvSpPr>
+        <p:spPr>
+          <a:xfrm rot="5400000" flipH="1">
+            <a:off x="-1410085" y="1420219"/>
+            <a:ext cx="6857999" cy="4037839"/>
+          </a:xfrm>
+          <a:prstGeom prst="rect">
+            <a:avLst/>
+          </a:prstGeom>
+          <a:gradFill>
+            <a:gsLst>
+              <a:gs pos="0">
+                <a:srgbClr val="000000">
+                  <a:alpha val="0"/>
+                </a:srgbClr>
+              </a:gs>
+              <a:gs pos="99000">
+                <a:schemeClr val="accent1">
+                  <a:alpha val="46000"/>
+                </a:schemeClr>
+              </a:gs>
+            </a:gsLst>
+            <a:lin ang="1800000" scaled="0"/>
+          </a:gradFill>
+          <a:ln>
+            <a:noFill/>
+          </a:ln>
+        </p:spPr>
+        <p:style>
+          <a:lnRef idx="2">
+            <a:schemeClr val="accent1">
+              <a:shade val="50000"/>
+            </a:schemeClr>
+          </a:lnRef>
+          <a:fillRef idx="1">
+            <a:schemeClr val="accent1"/>
+          </a:fillRef>
+          <a:effectRef idx="0">
+            <a:schemeClr val="accent1"/>
+          </a:effectRef>
+          <a:fontRef idx="minor">
+            <a:schemeClr val="lt1"/>
+          </a:fontRef>
+        </p:style>
+        <p:txBody>
+          <a:bodyPr rtlCol="0" anchor="ctr"/>
+          <a:lstStyle/>
+          <a:p>
+            <a:pPr algn="ctr"/>
+            <a:endParaRPr lang="en-US"/>
+          </a:p>
+        </p:txBody>
+      </p:sp>
+      <p:sp>
+        <p:nvSpPr>
+          <p:cNvPr id="16" name="Rectangle 15">
+            <a:extLst>
+              <a:ext uri="{FF2B5EF4-FFF2-40B4-BE49-F238E27FC236}">
+                <a16:creationId xmlns:a16="http://schemas.microsoft.com/office/drawing/2014/main" id="{D2B78728-A580-49A7-84F9-6EF6F583ADE0}"/>
+              </a:ext>
+              <a:ext uri="{C183D7F6-B498-43B3-948B-1728B52AA6E4}">
+                <adec:decorative xmlns:adec="http://schemas.microsoft.com/office/drawing/2017/decorative" val="1"/>
+              </a:ext>
+            </a:extLst>
+          </p:cNvPr>
+          <p:cNvSpPr>
+            <a:spLocks noGrp="1" noRot="1" noChangeAspect="1" noMove="1" noResize="1" noEditPoints="1" noAdjustHandles="1" noChangeArrowheads="1" noChangeShapeType="1" noTextEdit="1"/>
+          </p:cNvSpPr>
+          <p:nvPr>
+            <p:extLst>
+              <p:ext uri="{386F3935-93C4-4BCD-93E2-E3B085C9AB24}">
+                <p16:designElem xmlns:p16="http://schemas.microsoft.com/office/powerpoint/2015/main" val="1"/>
+              </p:ext>
+            </p:extLst>
+          </p:nvPr>
+        </p:nvSpPr>
+        <p:spPr>
+          <a:xfrm rot="5400000" flipH="1">
+            <a:off x="767923" y="3588085"/>
+            <a:ext cx="2501979" cy="4037841"/>
+          </a:xfrm>
+          <a:prstGeom prst="rect">
+            <a:avLst/>
+          </a:prstGeom>
+          <a:gradFill>
+            <a:gsLst>
+              <a:gs pos="2000">
+                <a:schemeClr val="accent1">
+                  <a:alpha val="29000"/>
+                </a:schemeClr>
+              </a:gs>
+              <a:gs pos="100000">
+                <a:srgbClr val="000000">
+                  <a:alpha val="30000"/>
+                </a:srgbClr>
+              </a:gs>
+            </a:gsLst>
+            <a:lin ang="7800000" scaled="0"/>
+          </a:gradFill>
+          <a:ln>
+            <a:noFill/>
+          </a:ln>
+        </p:spPr>
+        <p:style>
+          <a:lnRef idx="2">
+            <a:schemeClr val="accent1">
+              <a:shade val="50000"/>
+            </a:schemeClr>
+          </a:lnRef>
+          <a:fillRef idx="1">
+            <a:schemeClr val="accent1"/>
+          </a:fillRef>
+          <a:effectRef idx="0">
+            <a:schemeClr val="accent1"/>
+          </a:effectRef>
+          <a:fontRef idx="minor">
+            <a:schemeClr val="lt1"/>
+          </a:fontRef>
+        </p:style>
+        <p:txBody>
+          <a:bodyPr rtlCol="0" anchor="ctr"/>
+          <a:lstStyle/>
+          <a:p>
+            <a:pPr algn="ctr"/>
+            <a:endParaRPr lang="en-US" dirty="0"/>
+          </a:p>
+        </p:txBody>
+      </p:sp>
+      <p:sp>
+        <p:nvSpPr>
+          <p:cNvPr id="18" name="Freeform: Shape 17">
+            <a:extLst>
+              <a:ext uri="{FF2B5EF4-FFF2-40B4-BE49-F238E27FC236}">
+                <a16:creationId xmlns:a16="http://schemas.microsoft.com/office/drawing/2014/main" id="{38FAA1A1-D861-433F-88FA-1E9D6FD31D11}"/>
+              </a:ext>
+              <a:ext uri="{C183D7F6-B498-43B3-948B-1728B52AA6E4}">
+                <adec:decorative xmlns:adec="http://schemas.microsoft.com/office/drawing/2017/decorative" val="1"/>
+              </a:ext>
+            </a:extLst>
+          </p:cNvPr>
+          <p:cNvSpPr>
+            <a:spLocks noGrp="1" noRot="1" noChangeAspect="1" noMove="1" noResize="1" noEditPoints="1" noAdjustHandles="1" noChangeArrowheads="1" noChangeShapeType="1" noTextEdit="1"/>
+          </p:cNvSpPr>
+          <p:nvPr>
+            <p:extLst>
+              <p:ext uri="{386F3935-93C4-4BCD-93E2-E3B085C9AB24}">
+                <p16:designElem xmlns:p16="http://schemas.microsoft.com/office/powerpoint/2015/main" val="1"/>
+              </p:ext>
+            </p:extLst>
+          </p:nvPr>
+        </p:nvSpPr>
+        <p:spPr>
+          <a:xfrm rot="20635413">
+            <a:off x="-501737" y="969718"/>
+            <a:ext cx="3900357" cy="4178958"/>
+          </a:xfrm>
+          <a:custGeom>
+            <a:avLst/>
+            <a:gdLst>
+              <a:gd name="connsiteX0" fmla="*/ 2432225 w 3900357"/>
+              <a:gd name="connsiteY0" fmla="*/ 93939 h 4178958"/>
+              <a:gd name="connsiteX1" fmla="*/ 3900357 w 3900357"/>
+              <a:gd name="connsiteY1" fmla="*/ 2089479 h 4178958"/>
+              <a:gd name="connsiteX2" fmla="*/ 1810878 w 3900357"/>
+              <a:gd name="connsiteY2" fmla="*/ 4178958 h 4178958"/>
+              <a:gd name="connsiteX3" fmla="*/ 78249 w 3900357"/>
+              <a:gd name="connsiteY3" fmla="*/ 3257727 h 4178958"/>
+              <a:gd name="connsiteX4" fmla="*/ 0 w 3900357"/>
+              <a:gd name="connsiteY4" fmla="*/ 3128923 h 4178958"/>
+              <a:gd name="connsiteX5" fmla="*/ 831324 w 3900357"/>
+              <a:gd name="connsiteY5" fmla="*/ 244281 h 4178958"/>
+              <a:gd name="connsiteX6" fmla="*/ 997559 w 3900357"/>
+              <a:gd name="connsiteY6" fmla="*/ 164202 h 4178958"/>
+              <a:gd name="connsiteX7" fmla="*/ 1810878 w 3900357"/>
+              <a:gd name="connsiteY7" fmla="*/ 0 h 4178958"/>
+              <a:gd name="connsiteX8" fmla="*/ 2432225 w 3900357"/>
+              <a:gd name="connsiteY8" fmla="*/ 93939 h 4178958"/>
+            </a:gdLst>
+            <a:ahLst/>
+            <a:cxnLst>
+              <a:cxn ang="0">
+                <a:pos x="connsiteX0" y="connsiteY0"/>
+              </a:cxn>
+              <a:cxn ang="0">
+                <a:pos x="connsiteX1" y="connsiteY1"/>
+              </a:cxn>
+              <a:cxn ang="0">
+                <a:pos x="connsiteX2" y="connsiteY2"/>
+              </a:cxn>
+              <a:cxn ang="0">
+                <a:pos x="connsiteX3" y="connsiteY3"/>
+              </a:cxn>
+              <a:cxn ang="0">
+                <a:pos x="connsiteX4" y="connsiteY4"/>
+              </a:cxn>
+              <a:cxn ang="0">
+                <a:pos x="connsiteX5" y="connsiteY5"/>
+              </a:cxn>
+              <a:cxn ang="0">
+                <a:pos x="connsiteX6" y="connsiteY6"/>
+              </a:cxn>
+              <a:cxn ang="0">
+                <a:pos x="connsiteX7" y="connsiteY7"/>
+              </a:cxn>
+              <a:cxn ang="0">
+                <a:pos x="connsiteX8" y="connsiteY8"/>
+              </a:cxn>
+            </a:cxnLst>
+            <a:rect l="l" t="t" r="r" b="b"/>
+            <a:pathLst>
+              <a:path w="3900357" h="4178958">
+                <a:moveTo>
+                  <a:pt x="2432225" y="93939"/>
+                </a:moveTo>
+                <a:cubicBezTo>
+                  <a:pt x="3282786" y="358491"/>
+                  <a:pt x="3900357" y="1151865"/>
+                  <a:pt x="3900357" y="2089479"/>
+                </a:cubicBezTo>
+                <a:cubicBezTo>
+                  <a:pt x="3900357" y="3243466"/>
+                  <a:pt x="2964865" y="4178958"/>
+                  <a:pt x="1810878" y="4178958"/>
+                </a:cubicBezTo>
+                <a:cubicBezTo>
+                  <a:pt x="1089636" y="4178958"/>
+                  <a:pt x="453744" y="3813531"/>
+                  <a:pt x="78249" y="3257727"/>
+                </a:cubicBezTo>
+                <a:lnTo>
+                  <a:pt x="0" y="3128923"/>
+                </a:lnTo>
+                <a:lnTo>
+                  <a:pt x="831324" y="244281"/>
+                </a:lnTo>
+                <a:lnTo>
+                  <a:pt x="997559" y="164202"/>
+                </a:lnTo>
+                <a:cubicBezTo>
+                  <a:pt x="1247540" y="58468"/>
+                  <a:pt x="1522381" y="0"/>
+                  <a:pt x="1810878" y="0"/>
+                </a:cubicBezTo>
+                <a:cubicBezTo>
+                  <a:pt x="2027251" y="0"/>
+                  <a:pt x="2235942" y="32888"/>
+                  <a:pt x="2432225" y="93939"/>
+                </a:cubicBezTo>
+                <a:close/>
+              </a:path>
+            </a:pathLst>
+          </a:custGeom>
+          <a:gradFill>
+            <a:gsLst>
+              <a:gs pos="29000">
+                <a:srgbClr val="000000">
+                  <a:alpha val="0"/>
+                </a:srgbClr>
+              </a:gs>
+              <a:gs pos="100000">
+                <a:schemeClr val="accent1">
+                  <a:alpha val="43000"/>
+                </a:schemeClr>
+              </a:gs>
+            </a:gsLst>
+            <a:lin ang="1800000" scaled="0"/>
+          </a:gradFill>
+          <a:ln>
+            <a:noFill/>
+          </a:ln>
+        </p:spPr>
+        <p:style>
+          <a:lnRef idx="2">
+            <a:schemeClr val="accent1">
+              <a:shade val="50000"/>
+            </a:schemeClr>
+          </a:lnRef>
+          <a:fillRef idx="1">
+            <a:schemeClr val="accent1"/>
+          </a:fillRef>
+          <a:effectRef idx="0">
+            <a:schemeClr val="accent1"/>
+          </a:effectRef>
+          <a:fontRef idx="minor">
+            <a:schemeClr val="lt1"/>
+          </a:fontRef>
+        </p:style>
+        <p:txBody>
+          <a:bodyPr wrap="square" rtlCol="0" anchor="ctr">
+            <a:noAutofit/>
+          </a:bodyPr>
+          <a:lstStyle/>
+          <a:p>
+            <a:pPr algn="ctr"/>
+            <a:endParaRPr lang="en-US" dirty="0"/>
+          </a:p>
+        </p:txBody>
+      </p:sp>
+      <p:sp>
+        <p:nvSpPr>
+          <p:cNvPr id="20" name="Rectangle 19">
+            <a:extLst>
+              <a:ext uri="{FF2B5EF4-FFF2-40B4-BE49-F238E27FC236}">
+                <a16:creationId xmlns:a16="http://schemas.microsoft.com/office/drawing/2014/main" id="{8D71EDA1-87BF-4D5D-AB79-F346FD19278A}"/>
+              </a:ext>
+              <a:ext uri="{C183D7F6-B498-43B3-948B-1728B52AA6E4}">
+                <adec:decorative xmlns:adec="http://schemas.microsoft.com/office/drawing/2017/decorative" val="1"/>
+              </a:ext>
+            </a:extLst>
+          </p:cNvPr>
+          <p:cNvSpPr>
+            <a:spLocks noGrp="1" noRot="1" noChangeAspect="1" noMove="1" noResize="1" noEditPoints="1" noAdjustHandles="1" noChangeArrowheads="1" noChangeShapeType="1" noTextEdit="1"/>
+          </p:cNvSpPr>
+          <p:nvPr>
+            <p:extLst>
+              <p:ext uri="{386F3935-93C4-4BCD-93E2-E3B085C9AB24}">
+                <p16:designElem xmlns:p16="http://schemas.microsoft.com/office/powerpoint/2015/main" val="1"/>
+              </p:ext>
+            </p:extLst>
+          </p:nvPr>
+        </p:nvSpPr>
+        <p:spPr>
+          <a:xfrm rot="5400000" flipH="1">
+            <a:off x="-1410093" y="1399943"/>
+            <a:ext cx="6858003" cy="4037835"/>
+          </a:xfrm>
+          <a:prstGeom prst="rect">
+            <a:avLst/>
+          </a:prstGeom>
+          <a:gradFill>
+            <a:gsLst>
+              <a:gs pos="0">
+                <a:srgbClr val="000000">
+                  <a:alpha val="0"/>
+                </a:srgbClr>
+              </a:gs>
+              <a:gs pos="99000">
+                <a:schemeClr val="accent1">
+                  <a:lumMod val="60000"/>
+                  <a:lumOff val="40000"/>
+                  <a:alpha val="11000"/>
+                </a:schemeClr>
+              </a:gs>
+            </a:gsLst>
+            <a:lin ang="7200000" scaled="0"/>
+          </a:gradFill>
+          <a:ln>
+            <a:noFill/>
+          </a:ln>
+        </p:spPr>
+        <p:style>
+          <a:lnRef idx="2">
+            <a:schemeClr val="accent1">
+              <a:shade val="50000"/>
+            </a:schemeClr>
+          </a:lnRef>
+          <a:fillRef idx="1">
+            <a:schemeClr val="accent1"/>
+          </a:fillRef>
+          <a:effectRef idx="0">
+            <a:schemeClr val="accent1"/>
+          </a:effectRef>
+          <a:fontRef idx="minor">
+            <a:schemeClr val="lt1"/>
+          </a:fontRef>
+        </p:style>
+        <p:txBody>
+          <a:bodyPr rtlCol="0" anchor="ctr"/>
+          <a:lstStyle/>
+          <a:p>
+            <a:pPr algn="ctr"/>
+            <a:endParaRPr lang="en-US"/>
+          </a:p>
+        </p:txBody>
+      </p:sp>
       <p:sp>
         <p:nvSpPr>
           <p:cNvPr id="2" name="Title 1">
@@ -5478,13 +8113,25 @@
             <p:ph type="title"/>
           </p:nvPr>
         </p:nvSpPr>
-        <p:spPr/>
-        <p:txBody>
-          <a:bodyPr/>
-          <a:lstStyle/>
-          <a:p>
-            <a:r>
-              <a:rPr lang="en-US" dirty="0"/>
+        <p:spPr>
+          <a:xfrm>
+            <a:off x="466722" y="586855"/>
+            <a:ext cx="3201366" cy="3387497"/>
+          </a:xfrm>
+        </p:spPr>
+        <p:txBody>
+          <a:bodyPr anchor="b">
+            <a:normAutofit/>
+          </a:bodyPr>
+          <a:lstStyle/>
+          <a:p>
+            <a:pPr algn="r"/>
+            <a:r>
+              <a:rPr lang="en-US" sz="4000">
+                <a:solidFill>
+                  <a:srgbClr val="FFFFFF"/>
+                </a:solidFill>
+              </a:rPr>
               <a:t>Sources</a:t>
             </a:r>
           </a:p>
@@ -5506,63 +8153,58 @@
             <p:ph idx="1"/>
           </p:nvPr>
         </p:nvSpPr>
-        <p:spPr/>
-        <p:txBody>
-          <a:bodyPr/>
-          <a:lstStyle/>
-          <a:p>
-            <a:r>
-              <a:rPr lang="en-US" dirty="0"/>
+        <p:spPr>
+          <a:xfrm>
+            <a:off x="4810259" y="649480"/>
+            <a:ext cx="6555347" cy="5546047"/>
+          </a:xfrm>
+        </p:spPr>
+        <p:txBody>
+          <a:bodyPr anchor="ctr">
+            <a:normAutofit/>
+          </a:bodyPr>
+          <a:lstStyle/>
+          <a:p>
+            <a:r>
+              <a:rPr lang="en-US" sz="2000"/>
               <a:t>State of Iowa, Alcoholic Beverages Division. (2014). </a:t>
             </a:r>
             <a:r>
-              <a:rPr lang="en-US" i="1" dirty="0"/>
+              <a:rPr lang="en-US" sz="2000" i="1"/>
               <a:t>2014 Iowa liquor sales</a:t>
             </a:r>
             <a:r>
-              <a:rPr lang="en-US" dirty="0"/>
+              <a:rPr lang="en-US" sz="2000"/>
               <a:t> [Data set]. Iowa Open Data. </a:t>
             </a:r>
             <a:r>
-              <a:rPr lang="en-US" dirty="0">
+              <a:rPr lang="en-US" sz="2000">
                 <a:hlinkClick r:id="rId2"/>
               </a:rPr>
               <a:t>https://data.iowa.gov/Sales-Distribution/2014-Iowa-Liquor-Sales/3m8f-uw4f/about_data</a:t>
             </a:r>
-            <a:endParaRPr lang="en-US" dirty="0"/>
-          </a:p>
-          <a:p>
-            <a:r>
-              <a:rPr lang="fr-FR" dirty="0" err="1"/>
-              <a:t>OpenAI</a:t>
-            </a:r>
-            <a:r>
-              <a:rPr lang="fr-FR" dirty="0"/>
-              <a:t>. (2024). </a:t>
-            </a:r>
-            <a:r>
-              <a:rPr lang="fr-FR" i="1" dirty="0" err="1"/>
+            <a:endParaRPr lang="en-US" sz="2000"/>
+          </a:p>
+          <a:p>
+            <a:r>
+              <a:rPr lang="fr-FR" sz="2000"/>
+              <a:t>OpenAI. (2024). </a:t>
+            </a:r>
+            <a:r>
+              <a:rPr lang="fr-FR" sz="2000" i="1"/>
               <a:t>ChatGPT</a:t>
             </a:r>
             <a:r>
-              <a:rPr lang="fr-FR" dirty="0"/>
-              <a:t> (Aug 2024 version) [Large </a:t>
-            </a:r>
-            <a:r>
-              <a:rPr lang="fr-FR" dirty="0" err="1"/>
-              <a:t>language</a:t>
-            </a:r>
-            <a:r>
-              <a:rPr lang="fr-FR" dirty="0"/>
-              <a:t> model]. </a:t>
-            </a:r>
-            <a:r>
-              <a:rPr lang="fr-FR" dirty="0">
+              <a:rPr lang="fr-FR" sz="2000"/>
+              <a:t> (Aug 2024 version) [Large language model]. </a:t>
+            </a:r>
+            <a:r>
+              <a:rPr lang="fr-FR" sz="2000">
                 <a:hlinkClick r:id="rId3"/>
               </a:rPr>
               <a:t>https://chat.openai.com/</a:t>
             </a:r>
-            <a:endParaRPr lang="en-US" dirty="0"/>
+            <a:endParaRPr lang="en-US" sz="2000"/>
           </a:p>
         </p:txBody>
       </p:sp>
@@ -5582,6 +8224,14 @@
 <file path=ppt/slides/slide2.xml><?xml version="1.0" encoding="utf-8"?>
 <p:sld xmlns:a="http://schemas.openxmlformats.org/drawingml/2006/main" xmlns:r="http://schemas.openxmlformats.org/officeDocument/2006/relationships" xmlns:p="http://schemas.openxmlformats.org/presentationml/2006/main">
   <p:cSld>
+    <p:bg>
+      <p:bgPr>
+        <a:solidFill>
+          <a:schemeClr val="bg1"/>
+        </a:solidFill>
+        <a:effectLst/>
+      </p:bgPr>
+    </p:bg>
     <p:spTree>
       <p:nvGrpSpPr>
         <p:cNvPr id="1" name=""/>
@@ -5596,34 +8246,119 @@
           <a:chExt cx="0" cy="0"/>
         </a:xfrm>
       </p:grpSpPr>
-      <p:sp>
-        <p:nvSpPr>
-          <p:cNvPr id="2" name="Title 1">
-            <a:extLst>
-              <a:ext uri="{FF2B5EF4-FFF2-40B4-BE49-F238E27FC236}">
-                <a16:creationId xmlns:a16="http://schemas.microsoft.com/office/drawing/2014/main" id="{3BF32740-F662-BCD9-5E98-135BDC2BBE9F}"/>
-              </a:ext>
-            </a:extLst>
-          </p:cNvPr>
-          <p:cNvSpPr>
-            <a:spLocks noGrp="1"/>
-          </p:cNvSpPr>
-          <p:nvPr>
-            <p:ph type="title"/>
+      <p:sp useBgFill="1">
+        <p:nvSpPr>
+          <p:cNvPr id="11" name="Rectangle 10">
+            <a:extLst>
+              <a:ext uri="{FF2B5EF4-FFF2-40B4-BE49-F238E27FC236}">
+                <a16:creationId xmlns:a16="http://schemas.microsoft.com/office/drawing/2014/main" id="{12609869-9E80-471B-A487-A53288E0E791}"/>
+              </a:ext>
+              <a:ext uri="{C183D7F6-B498-43B3-948B-1728B52AA6E4}">
+                <adec:decorative xmlns:adec="http://schemas.microsoft.com/office/drawing/2017/decorative" val="1"/>
+              </a:ext>
+            </a:extLst>
+          </p:cNvPr>
+          <p:cNvSpPr>
+            <a:spLocks noGrp="1" noRot="1" noChangeAspect="1" noMove="1" noResize="1" noEditPoints="1" noAdjustHandles="1" noChangeArrowheads="1" noChangeShapeType="1" noTextEdit="1"/>
+          </p:cNvSpPr>
+          <p:nvPr>
+            <p:extLst>
+              <p:ext uri="{386F3935-93C4-4BCD-93E2-E3B085C9AB24}">
+                <p16:designElem xmlns:p16="http://schemas.microsoft.com/office/powerpoint/2015/main" val="1"/>
+              </p:ext>
+            </p:extLst>
           </p:nvPr>
         </p:nvSpPr>
         <p:spPr>
           <a:xfrm>
-            <a:off x="838200" y="365125"/>
-            <a:ext cx="5181600" cy="1325563"/>
+            <a:off x="0" y="0"/>
+            <a:ext cx="12192000" cy="6858000"/>
+          </a:xfrm>
+          <a:prstGeom prst="rect">
+            <a:avLst/>
+          </a:prstGeom>
+          <a:ln w="12700" cap="flat" cmpd="sng" algn="ctr">
+            <a:noFill/>
+            <a:prstDash val="solid"/>
+            <a:miter lim="800000"/>
+          </a:ln>
+          <a:effectLst/>
+          <a:extLst>
+            <a:ext uri="{91240B29-F687-4F45-9708-019B960494DF}">
+              <a14:hiddenLine xmlns:a14="http://schemas.microsoft.com/office/drawing/2010/main" w="12700" cap="flat" cmpd="sng" algn="ctr">
+                <a:solidFill>
+                  <a:schemeClr val="accent1">
+                    <a:shade val="50000"/>
+                  </a:schemeClr>
+                </a:solidFill>
+                <a:prstDash val="solid"/>
+                <a:miter lim="800000"/>
+              </a14:hiddenLine>
+            </a:ext>
+          </a:extLst>
+        </p:spPr>
+        <p:style>
+          <a:lnRef idx="2">
+            <a:schemeClr val="accent1">
+              <a:shade val="50000"/>
+            </a:schemeClr>
+          </a:lnRef>
+          <a:fillRef idx="1">
+            <a:schemeClr val="accent1"/>
+          </a:fillRef>
+          <a:effectRef idx="0">
+            <a:schemeClr val="accent1"/>
+          </a:effectRef>
+          <a:fontRef idx="minor">
+            <a:schemeClr val="lt1"/>
+          </a:fontRef>
+        </p:style>
+        <p:txBody>
+          <a:bodyPr rtlCol="0" anchor="ctr"/>
+          <a:lstStyle/>
+          <a:p>
+            <a:pPr algn="ctr"/>
+            <a:endParaRPr lang="en-US"/>
+          </a:p>
+        </p:txBody>
+      </p:sp>
+      <p:sp>
+        <p:nvSpPr>
+          <p:cNvPr id="2" name="Title 1">
+            <a:extLst>
+              <a:ext uri="{FF2B5EF4-FFF2-40B4-BE49-F238E27FC236}">
+                <a16:creationId xmlns:a16="http://schemas.microsoft.com/office/drawing/2014/main" id="{3BF32740-F662-BCD9-5E98-135BDC2BBE9F}"/>
+              </a:ext>
+            </a:extLst>
+          </p:cNvPr>
+          <p:cNvSpPr>
+            <a:spLocks noGrp="1"/>
+          </p:cNvSpPr>
+          <p:nvPr>
+            <p:ph type="title"/>
+          </p:nvPr>
+        </p:nvSpPr>
+        <p:spPr>
+          <a:xfrm>
+            <a:off x="1136397" y="502020"/>
+            <a:ext cx="5323715" cy="1642970"/>
           </a:xfrm>
         </p:spPr>
         <p:txBody>
-          <a:bodyPr/>
-          <a:lstStyle/>
-          <a:p>
-            <a:r>
-              <a:rPr lang="en-US" dirty="0"/>
+          <a:bodyPr vert="horz" lIns="91440" tIns="45720" rIns="91440" bIns="45720" rtlCol="0" anchor="b">
+            <a:normAutofit/>
+          </a:bodyPr>
+          <a:lstStyle/>
+          <a:p>
+            <a:r>
+              <a:rPr lang="en-US" sz="4000" kern="1200">
+                <a:solidFill>
+                  <a:schemeClr val="tx1"/>
+                </a:solidFill>
+                <a:latin typeface="+mj-lt"/>
+                <a:ea typeface="+mj-ea"/>
+                <a:cs typeface="+mj-cs"/>
+              </a:rPr>
               <a:t>Scenario</a:t>
             </a:r>
           </a:p>
@@ -5645,29 +8380,330 @@
             <p:ph sz="half" idx="1"/>
           </p:nvPr>
         </p:nvSpPr>
-        <p:spPr/>
-        <p:txBody>
-          <a:bodyPr>
-            <a:normAutofit fontScale="92500" lnSpcReduction="10000"/>
+        <p:spPr>
+          <a:xfrm>
+            <a:off x="1144923" y="2405894"/>
+            <a:ext cx="5315189" cy="3535083"/>
+          </a:xfrm>
+        </p:spPr>
+        <p:txBody>
+          <a:bodyPr vert="horz" lIns="91440" tIns="45720" rIns="91440" bIns="45720" rtlCol="0" anchor="t">
+            <a:normAutofit/>
           </a:bodyPr>
           <a:lstStyle/>
           <a:p>
-            <a:pPr marL="0" indent="0">
-              <a:buNone/>
-            </a:pPr>
-            <a:r>
-              <a:rPr lang="en-US" sz="3200" dirty="0"/>
+            <a:pPr marL="0"/>
+            <a:r>
+              <a:rPr lang="en-US" sz="2000" dirty="0"/>
               <a:t>You have been brought on as a data consultant by Constellation Brands to analyze sales performance using the Iowa Liquor Sales database.</a:t>
             </a:r>
           </a:p>
           <a:p>
-            <a:pPr marL="0" indent="0">
-              <a:buNone/>
-            </a:pPr>
-            <a:r>
-              <a:rPr lang="en-US" sz="3200" dirty="0"/>
+            <a:pPr marL="0"/>
+            <a:r>
+              <a:rPr lang="en-US" sz="2000" dirty="0"/>
               <a:t>The company wants to better understand how it performed during that year across different markets to inform future strategy.</a:t>
             </a:r>
+          </a:p>
+        </p:txBody>
+      </p:sp>
+      <p:sp>
+        <p:nvSpPr>
+          <p:cNvPr id="13" name="Rectangle 12">
+            <a:extLst>
+              <a:ext uri="{FF2B5EF4-FFF2-40B4-BE49-F238E27FC236}">
+                <a16:creationId xmlns:a16="http://schemas.microsoft.com/office/drawing/2014/main" id="{7004738A-9D34-43E8-97D2-CA0EED4F8BE0}"/>
+              </a:ext>
+              <a:ext uri="{C183D7F6-B498-43B3-948B-1728B52AA6E4}">
+                <adec:decorative xmlns:adec="http://schemas.microsoft.com/office/drawing/2017/decorative" val="1"/>
+              </a:ext>
+            </a:extLst>
+          </p:cNvPr>
+          <p:cNvSpPr>
+            <a:spLocks noGrp="1" noRot="1" noChangeAspect="1" noMove="1" noResize="1" noEditPoints="1" noAdjustHandles="1" noChangeArrowheads="1" noChangeShapeType="1" noTextEdit="1"/>
+          </p:cNvSpPr>
+          <p:nvPr>
+            <p:extLst>
+              <p:ext uri="{386F3935-93C4-4BCD-93E2-E3B085C9AB24}">
+                <p16:designElem xmlns:p16="http://schemas.microsoft.com/office/powerpoint/2015/main" val="1"/>
+              </p:ext>
+            </p:extLst>
+          </p:nvPr>
+        </p:nvSpPr>
+        <p:spPr>
+          <a:xfrm rot="10800000" flipH="1">
+            <a:off x="8123333" y="-5"/>
+            <a:ext cx="4092521" cy="6858000"/>
+          </a:xfrm>
+          <a:prstGeom prst="rect">
+            <a:avLst/>
+          </a:prstGeom>
+          <a:gradFill>
+            <a:gsLst>
+              <a:gs pos="8000">
+                <a:srgbClr val="000000">
+                  <a:alpha val="94000"/>
+                </a:srgbClr>
+              </a:gs>
+              <a:gs pos="100000">
+                <a:schemeClr val="accent1"/>
+              </a:gs>
+            </a:gsLst>
+            <a:lin ang="2400000" scaled="0"/>
+          </a:gradFill>
+          <a:ln>
+            <a:noFill/>
+          </a:ln>
+        </p:spPr>
+        <p:style>
+          <a:lnRef idx="2">
+            <a:schemeClr val="accent1">
+              <a:shade val="50000"/>
+            </a:schemeClr>
+          </a:lnRef>
+          <a:fillRef idx="1">
+            <a:schemeClr val="accent1"/>
+          </a:fillRef>
+          <a:effectRef idx="0">
+            <a:schemeClr val="accent1"/>
+          </a:effectRef>
+          <a:fontRef idx="minor">
+            <a:schemeClr val="lt1"/>
+          </a:fontRef>
+        </p:style>
+        <p:txBody>
+          <a:bodyPr rtlCol="0" anchor="ctr"/>
+          <a:lstStyle/>
+          <a:p>
+            <a:pPr algn="ctr"/>
+            <a:endParaRPr lang="en-US"/>
+          </a:p>
+        </p:txBody>
+      </p:sp>
+      <p:sp>
+        <p:nvSpPr>
+          <p:cNvPr id="15" name="Rectangle 14">
+            <a:extLst>
+              <a:ext uri="{FF2B5EF4-FFF2-40B4-BE49-F238E27FC236}">
+                <a16:creationId xmlns:a16="http://schemas.microsoft.com/office/drawing/2014/main" id="{B8B8D07F-F13E-443E-BA68-2D26672D76B9}"/>
+              </a:ext>
+              <a:ext uri="{C183D7F6-B498-43B3-948B-1728B52AA6E4}">
+                <adec:decorative xmlns:adec="http://schemas.microsoft.com/office/drawing/2017/decorative" val="1"/>
+              </a:ext>
+            </a:extLst>
+          </p:cNvPr>
+          <p:cNvSpPr>
+            <a:spLocks noGrp="1" noRot="1" noChangeAspect="1" noMove="1" noResize="1" noEditPoints="1" noAdjustHandles="1" noChangeArrowheads="1" noChangeShapeType="1" noTextEdit="1"/>
+          </p:cNvSpPr>
+          <p:nvPr>
+            <p:extLst>
+              <p:ext uri="{386F3935-93C4-4BCD-93E2-E3B085C9AB24}">
+                <p16:designElem xmlns:p16="http://schemas.microsoft.com/office/powerpoint/2015/main" val="1"/>
+              </p:ext>
+            </p:extLst>
+          </p:nvPr>
+        </p:nvSpPr>
+        <p:spPr>
+          <a:xfrm rot="10800000" flipH="1">
+            <a:off x="8123333" y="-2"/>
+            <a:ext cx="4092521" cy="6400369"/>
+          </a:xfrm>
+          <a:prstGeom prst="rect">
+            <a:avLst/>
+          </a:prstGeom>
+          <a:gradFill>
+            <a:gsLst>
+              <a:gs pos="31000">
+                <a:schemeClr val="accent1">
+                  <a:lumMod val="50000"/>
+                  <a:alpha val="0"/>
+                </a:schemeClr>
+              </a:gs>
+              <a:gs pos="100000">
+                <a:schemeClr val="accent1">
+                  <a:lumMod val="50000"/>
+                  <a:alpha val="26000"/>
+                </a:schemeClr>
+              </a:gs>
+            </a:gsLst>
+            <a:lin ang="18000000" scaled="0"/>
+          </a:gradFill>
+          <a:ln>
+            <a:noFill/>
+          </a:ln>
+        </p:spPr>
+        <p:style>
+          <a:lnRef idx="2">
+            <a:schemeClr val="accent1">
+              <a:shade val="50000"/>
+            </a:schemeClr>
+          </a:lnRef>
+          <a:fillRef idx="1">
+            <a:schemeClr val="accent1"/>
+          </a:fillRef>
+          <a:effectRef idx="0">
+            <a:schemeClr val="accent1"/>
+          </a:effectRef>
+          <a:fontRef idx="minor">
+            <a:schemeClr val="lt1"/>
+          </a:fontRef>
+        </p:style>
+        <p:txBody>
+          <a:bodyPr rtlCol="0" anchor="ctr"/>
+          <a:lstStyle/>
+          <a:p>
+            <a:pPr algn="ctr"/>
+            <a:endParaRPr lang="en-US" dirty="0"/>
+          </a:p>
+        </p:txBody>
+      </p:sp>
+      <p:sp>
+        <p:nvSpPr>
+          <p:cNvPr id="17" name="Rectangle 16">
+            <a:extLst>
+              <a:ext uri="{FF2B5EF4-FFF2-40B4-BE49-F238E27FC236}">
+                <a16:creationId xmlns:a16="http://schemas.microsoft.com/office/drawing/2014/main" id="{2813A4FA-24A5-41ED-A534-3807D1B2F344}"/>
+              </a:ext>
+              <a:ext uri="{C183D7F6-B498-43B3-948B-1728B52AA6E4}">
+                <adec:decorative xmlns:adec="http://schemas.microsoft.com/office/drawing/2017/decorative" val="1"/>
+              </a:ext>
+            </a:extLst>
+          </p:cNvPr>
+          <p:cNvSpPr>
+            <a:spLocks noGrp="1" noRot="1" noChangeAspect="1" noMove="1" noResize="1" noEditPoints="1" noAdjustHandles="1" noChangeArrowheads="1" noChangeShapeType="1" noTextEdit="1"/>
+          </p:cNvSpPr>
+          <p:nvPr>
+            <p:extLst>
+              <p:ext uri="{386F3935-93C4-4BCD-93E2-E3B085C9AB24}">
+                <p16:designElem xmlns:p16="http://schemas.microsoft.com/office/powerpoint/2015/main" val="1"/>
+              </p:ext>
+            </p:extLst>
+          </p:nvPr>
+        </p:nvSpPr>
+        <p:spPr>
+          <a:xfrm rot="10800000" flipH="1">
+            <a:off x="8123333" y="-22"/>
+            <a:ext cx="4068667" cy="6400389"/>
+          </a:xfrm>
+          <a:prstGeom prst="rect">
+            <a:avLst/>
+          </a:prstGeom>
+          <a:gradFill>
+            <a:gsLst>
+              <a:gs pos="0">
+                <a:schemeClr val="accent1">
+                  <a:alpha val="0"/>
+                </a:schemeClr>
+              </a:gs>
+              <a:gs pos="72000">
+                <a:srgbClr val="000000">
+                  <a:alpha val="21000"/>
+                </a:srgbClr>
+              </a:gs>
+            </a:gsLst>
+            <a:lin ang="3000000" scaled="0"/>
+          </a:gradFill>
+          <a:ln>
+            <a:noFill/>
+          </a:ln>
+        </p:spPr>
+        <p:style>
+          <a:lnRef idx="2">
+            <a:schemeClr val="accent1">
+              <a:shade val="50000"/>
+            </a:schemeClr>
+          </a:lnRef>
+          <a:fillRef idx="1">
+            <a:schemeClr val="accent1"/>
+          </a:fillRef>
+          <a:effectRef idx="0">
+            <a:schemeClr val="accent1"/>
+          </a:effectRef>
+          <a:fontRef idx="minor">
+            <a:schemeClr val="lt1"/>
+          </a:fontRef>
+        </p:style>
+        <p:txBody>
+          <a:bodyPr rtlCol="0" anchor="ctr"/>
+          <a:lstStyle/>
+          <a:p>
+            <a:pPr algn="ctr"/>
+            <a:endParaRPr lang="en-US" dirty="0"/>
+          </a:p>
+        </p:txBody>
+      </p:sp>
+      <p:sp>
+        <p:nvSpPr>
+          <p:cNvPr id="19" name="Rectangle 18">
+            <a:extLst>
+              <a:ext uri="{FF2B5EF4-FFF2-40B4-BE49-F238E27FC236}">
+                <a16:creationId xmlns:a16="http://schemas.microsoft.com/office/drawing/2014/main" id="{C3944F27-CA70-4E84-A51A-E6BF89558979}"/>
+              </a:ext>
+              <a:ext uri="{C183D7F6-B498-43B3-948B-1728B52AA6E4}">
+                <adec:decorative xmlns:adec="http://schemas.microsoft.com/office/drawing/2017/decorative" val="1"/>
+              </a:ext>
+            </a:extLst>
+          </p:cNvPr>
+          <p:cNvSpPr>
+            <a:spLocks noGrp="1" noRot="1" noChangeAspect="1" noMove="1" noResize="1" noEditPoints="1" noAdjustHandles="1" noChangeArrowheads="1" noChangeShapeType="1" noTextEdit="1"/>
+          </p:cNvSpPr>
+          <p:nvPr>
+            <p:extLst>
+              <p:ext uri="{386F3935-93C4-4BCD-93E2-E3B085C9AB24}">
+                <p16:designElem xmlns:p16="http://schemas.microsoft.com/office/powerpoint/2015/main" val="1"/>
+              </p:ext>
+            </p:extLst>
+          </p:nvPr>
+        </p:nvSpPr>
+        <p:spPr>
+          <a:xfrm rot="10800000" flipH="1">
+            <a:off x="8123333" y="-10"/>
+            <a:ext cx="3611467" cy="6857997"/>
+          </a:xfrm>
+          <a:prstGeom prst="rect">
+            <a:avLst/>
+          </a:prstGeom>
+          <a:gradFill>
+            <a:gsLst>
+              <a:gs pos="0">
+                <a:schemeClr val="accent1">
+                  <a:alpha val="0"/>
+                </a:schemeClr>
+              </a:gs>
+              <a:gs pos="93000">
+                <a:srgbClr val="000000">
+                  <a:alpha val="29000"/>
+                </a:srgbClr>
+              </a:gs>
+            </a:gsLst>
+            <a:lin ang="5400000" scaled="0"/>
+          </a:gradFill>
+          <a:ln>
+            <a:noFill/>
+          </a:ln>
+        </p:spPr>
+        <p:style>
+          <a:lnRef idx="2">
+            <a:schemeClr val="accent1">
+              <a:shade val="50000"/>
+            </a:schemeClr>
+          </a:lnRef>
+          <a:fillRef idx="1">
+            <a:schemeClr val="accent1"/>
+          </a:fillRef>
+          <a:effectRef idx="0">
+            <a:schemeClr val="accent1"/>
+          </a:effectRef>
+          <a:fontRef idx="minor">
+            <a:schemeClr val="lt1"/>
+          </a:fontRef>
+        </p:style>
+        <p:txBody>
+          <a:bodyPr rtlCol="0" anchor="ctr"/>
+          <a:lstStyle/>
+          <a:p>
+            <a:pPr algn="ctr"/>
+            <a:endParaRPr lang="en-US" dirty="0"/>
           </a:p>
         </p:txBody>
       </p:sp>
@@ -5701,8 +8737,8 @@
         </p:blipFill>
         <p:spPr>
           <a:xfrm>
-            <a:off x="6867525" y="368173"/>
-            <a:ext cx="4486275" cy="5811838"/>
+            <a:off x="7075967" y="1359681"/>
+            <a:ext cx="4170530" cy="4170530"/>
           </a:xfrm>
           <a:prstGeom prst="rect">
             <a:avLst/>
@@ -5725,6 +8761,14 @@
 <file path=ppt/slides/slide3.xml><?xml version="1.0" encoding="utf-8"?>
 <p:sld xmlns:a="http://schemas.openxmlformats.org/drawingml/2006/main" xmlns:r="http://schemas.openxmlformats.org/officeDocument/2006/relationships" xmlns:p="http://schemas.openxmlformats.org/presentationml/2006/main">
   <p:cSld>
+    <p:bg>
+      <p:bgPr>
+        <a:solidFill>
+          <a:schemeClr val="bg1"/>
+        </a:solidFill>
+        <a:effectLst/>
+      </p:bgPr>
+    </p:bg>
     <p:spTree>
       <p:nvGrpSpPr>
         <p:cNvPr id="1" name=""/>
@@ -5739,34 +8783,119 @@
           <a:chExt cx="0" cy="0"/>
         </a:xfrm>
       </p:grpSpPr>
-      <p:sp>
-        <p:nvSpPr>
-          <p:cNvPr id="2" name="Title 1">
-            <a:extLst>
-              <a:ext uri="{FF2B5EF4-FFF2-40B4-BE49-F238E27FC236}">
-                <a16:creationId xmlns:a16="http://schemas.microsoft.com/office/drawing/2014/main" id="{F21E1969-70DA-6CBA-2E14-DA01BA826045}"/>
-              </a:ext>
-            </a:extLst>
-          </p:cNvPr>
-          <p:cNvSpPr>
-            <a:spLocks noGrp="1"/>
-          </p:cNvSpPr>
-          <p:nvPr>
-            <p:ph type="title"/>
+      <p:sp useBgFill="1">
+        <p:nvSpPr>
+          <p:cNvPr id="11" name="Rectangle 10">
+            <a:extLst>
+              <a:ext uri="{FF2B5EF4-FFF2-40B4-BE49-F238E27FC236}">
+                <a16:creationId xmlns:a16="http://schemas.microsoft.com/office/drawing/2014/main" id="{12609869-9E80-471B-A487-A53288E0E791}"/>
+              </a:ext>
+              <a:ext uri="{C183D7F6-B498-43B3-948B-1728B52AA6E4}">
+                <adec:decorative xmlns:adec="http://schemas.microsoft.com/office/drawing/2017/decorative" val="1"/>
+              </a:ext>
+            </a:extLst>
+          </p:cNvPr>
+          <p:cNvSpPr>
+            <a:spLocks noGrp="1" noRot="1" noChangeAspect="1" noMove="1" noResize="1" noEditPoints="1" noAdjustHandles="1" noChangeArrowheads="1" noChangeShapeType="1" noTextEdit="1"/>
+          </p:cNvSpPr>
+          <p:nvPr>
+            <p:extLst>
+              <p:ext uri="{386F3935-93C4-4BCD-93E2-E3B085C9AB24}">
+                <p16:designElem xmlns:p16="http://schemas.microsoft.com/office/powerpoint/2015/main" val="1"/>
+              </p:ext>
+            </p:extLst>
           </p:nvPr>
         </p:nvSpPr>
         <p:spPr>
           <a:xfrm>
-            <a:off x="838200" y="365125"/>
-            <a:ext cx="5181600" cy="1325563"/>
+            <a:off x="0" y="0"/>
+            <a:ext cx="12192000" cy="6858000"/>
+          </a:xfrm>
+          <a:prstGeom prst="rect">
+            <a:avLst/>
+          </a:prstGeom>
+          <a:ln w="12700" cap="flat" cmpd="sng" algn="ctr">
+            <a:noFill/>
+            <a:prstDash val="solid"/>
+            <a:miter lim="800000"/>
+          </a:ln>
+          <a:effectLst/>
+          <a:extLst>
+            <a:ext uri="{91240B29-F687-4F45-9708-019B960494DF}">
+              <a14:hiddenLine xmlns:a14="http://schemas.microsoft.com/office/drawing/2010/main" w="12700" cap="flat" cmpd="sng" algn="ctr">
+                <a:solidFill>
+                  <a:schemeClr val="accent1">
+                    <a:shade val="50000"/>
+                  </a:schemeClr>
+                </a:solidFill>
+                <a:prstDash val="solid"/>
+                <a:miter lim="800000"/>
+              </a14:hiddenLine>
+            </a:ext>
+          </a:extLst>
+        </p:spPr>
+        <p:style>
+          <a:lnRef idx="2">
+            <a:schemeClr val="accent1">
+              <a:shade val="50000"/>
+            </a:schemeClr>
+          </a:lnRef>
+          <a:fillRef idx="1">
+            <a:schemeClr val="accent1"/>
+          </a:fillRef>
+          <a:effectRef idx="0">
+            <a:schemeClr val="accent1"/>
+          </a:effectRef>
+          <a:fontRef idx="minor">
+            <a:schemeClr val="lt1"/>
+          </a:fontRef>
+        </p:style>
+        <p:txBody>
+          <a:bodyPr rtlCol="0" anchor="ctr"/>
+          <a:lstStyle/>
+          <a:p>
+            <a:pPr algn="ctr"/>
+            <a:endParaRPr lang="en-US"/>
+          </a:p>
+        </p:txBody>
+      </p:sp>
+      <p:sp>
+        <p:nvSpPr>
+          <p:cNvPr id="2" name="Title 1">
+            <a:extLst>
+              <a:ext uri="{FF2B5EF4-FFF2-40B4-BE49-F238E27FC236}">
+                <a16:creationId xmlns:a16="http://schemas.microsoft.com/office/drawing/2014/main" id="{F21E1969-70DA-6CBA-2E14-DA01BA826045}"/>
+              </a:ext>
+            </a:extLst>
+          </p:cNvPr>
+          <p:cNvSpPr>
+            <a:spLocks noGrp="1"/>
+          </p:cNvSpPr>
+          <p:nvPr>
+            <p:ph type="title"/>
+          </p:nvPr>
+        </p:nvSpPr>
+        <p:spPr>
+          <a:xfrm>
+            <a:off x="1136397" y="502020"/>
+            <a:ext cx="5323715" cy="1642970"/>
           </a:xfrm>
         </p:spPr>
         <p:txBody>
-          <a:bodyPr/>
-          <a:lstStyle/>
-          <a:p>
-            <a:r>
-              <a:rPr lang="en-US" dirty="0"/>
+          <a:bodyPr vert="horz" lIns="91440" tIns="45720" rIns="91440" bIns="45720" rtlCol="0" anchor="b">
+            <a:normAutofit/>
+          </a:bodyPr>
+          <a:lstStyle/>
+          <a:p>
+            <a:r>
+              <a:rPr lang="en-US" sz="4000" kern="1200">
+                <a:solidFill>
+                  <a:schemeClr val="tx1"/>
+                </a:solidFill>
+                <a:latin typeface="+mj-lt"/>
+                <a:ea typeface="+mj-ea"/>
+                <a:cs typeface="+mj-cs"/>
+              </a:rPr>
               <a:t>Agenda</a:t>
             </a:r>
           </a:p>
@@ -5788,51 +8917,358 @@
             <p:ph sz="half" idx="1"/>
           </p:nvPr>
         </p:nvSpPr>
-        <p:spPr/>
-        <p:txBody>
-          <a:bodyPr/>
-          <a:lstStyle/>
-          <a:p>
-            <a:pPr marL="285750" indent="-285750"/>
-            <a:r>
-              <a:rPr lang="en-US" dirty="0"/>
+        <p:spPr>
+          <a:xfrm>
+            <a:off x="1144923" y="2405894"/>
+            <a:ext cx="5315189" cy="3535083"/>
+          </a:xfrm>
+        </p:spPr>
+        <p:txBody>
+          <a:bodyPr vert="horz" lIns="91440" tIns="45720" rIns="91440" bIns="45720" rtlCol="0" anchor="t">
+            <a:normAutofit/>
+          </a:bodyPr>
+          <a:lstStyle/>
+          <a:p>
+            <a:pPr marL="285750"/>
+            <a:r>
+              <a:rPr lang="en-US" sz="2000"/>
               <a:t>Overview</a:t>
             </a:r>
           </a:p>
           <a:p>
-            <a:pPr marL="285750" indent="-285750"/>
-            <a:r>
-              <a:rPr lang="en-US" dirty="0"/>
+            <a:pPr marL="285750"/>
+            <a:r>
+              <a:rPr lang="en-US" sz="2000"/>
               <a:t>County Analysis</a:t>
             </a:r>
           </a:p>
           <a:p>
-            <a:pPr marL="285750" indent="-285750"/>
-            <a:r>
-              <a:rPr lang="en-US" dirty="0"/>
+            <a:pPr marL="285750"/>
+            <a:r>
+              <a:rPr lang="en-US" sz="2000"/>
               <a:t>Black Velvet</a:t>
             </a:r>
           </a:p>
           <a:p>
-            <a:pPr marL="285750" indent="-285750"/>
-            <a:r>
-              <a:rPr lang="en-US" dirty="0"/>
+            <a:pPr marL="285750"/>
+            <a:r>
+              <a:rPr lang="en-US" sz="2000"/>
               <a:t>Tequila Industry</a:t>
             </a:r>
           </a:p>
           <a:p>
-            <a:pPr marL="285750" indent="-285750"/>
-            <a:r>
-              <a:rPr lang="en-US" dirty="0"/>
+            <a:pPr marL="285750"/>
+            <a:r>
+              <a:rPr lang="en-US" sz="2000"/>
               <a:t>Competitors</a:t>
             </a:r>
           </a:p>
           <a:p>
-            <a:pPr marL="285750" indent="-285750"/>
-            <a:r>
-              <a:rPr lang="en-US" dirty="0"/>
+            <a:pPr marL="285750"/>
+            <a:r>
+              <a:rPr lang="en-US" sz="2000"/>
               <a:t>Key Takeaways</a:t>
             </a:r>
+          </a:p>
+        </p:txBody>
+      </p:sp>
+      <p:sp>
+        <p:nvSpPr>
+          <p:cNvPr id="13" name="Rectangle 12">
+            <a:extLst>
+              <a:ext uri="{FF2B5EF4-FFF2-40B4-BE49-F238E27FC236}">
+                <a16:creationId xmlns:a16="http://schemas.microsoft.com/office/drawing/2014/main" id="{7004738A-9D34-43E8-97D2-CA0EED4F8BE0}"/>
+              </a:ext>
+              <a:ext uri="{C183D7F6-B498-43B3-948B-1728B52AA6E4}">
+                <adec:decorative xmlns:adec="http://schemas.microsoft.com/office/drawing/2017/decorative" val="1"/>
+              </a:ext>
+            </a:extLst>
+          </p:cNvPr>
+          <p:cNvSpPr>
+            <a:spLocks noGrp="1" noRot="1" noChangeAspect="1" noMove="1" noResize="1" noEditPoints="1" noAdjustHandles="1" noChangeArrowheads="1" noChangeShapeType="1" noTextEdit="1"/>
+          </p:cNvSpPr>
+          <p:nvPr>
+            <p:extLst>
+              <p:ext uri="{386F3935-93C4-4BCD-93E2-E3B085C9AB24}">
+                <p16:designElem xmlns:p16="http://schemas.microsoft.com/office/powerpoint/2015/main" val="1"/>
+              </p:ext>
+            </p:extLst>
+          </p:nvPr>
+        </p:nvSpPr>
+        <p:spPr>
+          <a:xfrm rot="10800000" flipH="1">
+            <a:off x="8123333" y="-5"/>
+            <a:ext cx="4092521" cy="6858000"/>
+          </a:xfrm>
+          <a:prstGeom prst="rect">
+            <a:avLst/>
+          </a:prstGeom>
+          <a:gradFill>
+            <a:gsLst>
+              <a:gs pos="8000">
+                <a:srgbClr val="000000">
+                  <a:alpha val="94000"/>
+                </a:srgbClr>
+              </a:gs>
+              <a:gs pos="100000">
+                <a:schemeClr val="accent1"/>
+              </a:gs>
+            </a:gsLst>
+            <a:lin ang="2400000" scaled="0"/>
+          </a:gradFill>
+          <a:ln>
+            <a:noFill/>
+          </a:ln>
+        </p:spPr>
+        <p:style>
+          <a:lnRef idx="2">
+            <a:schemeClr val="accent1">
+              <a:shade val="50000"/>
+            </a:schemeClr>
+          </a:lnRef>
+          <a:fillRef idx="1">
+            <a:schemeClr val="accent1"/>
+          </a:fillRef>
+          <a:effectRef idx="0">
+            <a:schemeClr val="accent1"/>
+          </a:effectRef>
+          <a:fontRef idx="minor">
+            <a:schemeClr val="lt1"/>
+          </a:fontRef>
+        </p:style>
+        <p:txBody>
+          <a:bodyPr rtlCol="0" anchor="ctr"/>
+          <a:lstStyle/>
+          <a:p>
+            <a:pPr algn="ctr"/>
+            <a:endParaRPr lang="en-US"/>
+          </a:p>
+        </p:txBody>
+      </p:sp>
+      <p:sp>
+        <p:nvSpPr>
+          <p:cNvPr id="15" name="Rectangle 14">
+            <a:extLst>
+              <a:ext uri="{FF2B5EF4-FFF2-40B4-BE49-F238E27FC236}">
+                <a16:creationId xmlns:a16="http://schemas.microsoft.com/office/drawing/2014/main" id="{B8B8D07F-F13E-443E-BA68-2D26672D76B9}"/>
+              </a:ext>
+              <a:ext uri="{C183D7F6-B498-43B3-948B-1728B52AA6E4}">
+                <adec:decorative xmlns:adec="http://schemas.microsoft.com/office/drawing/2017/decorative" val="1"/>
+              </a:ext>
+            </a:extLst>
+          </p:cNvPr>
+          <p:cNvSpPr>
+            <a:spLocks noGrp="1" noRot="1" noChangeAspect="1" noMove="1" noResize="1" noEditPoints="1" noAdjustHandles="1" noChangeArrowheads="1" noChangeShapeType="1" noTextEdit="1"/>
+          </p:cNvSpPr>
+          <p:nvPr>
+            <p:extLst>
+              <p:ext uri="{386F3935-93C4-4BCD-93E2-E3B085C9AB24}">
+                <p16:designElem xmlns:p16="http://schemas.microsoft.com/office/powerpoint/2015/main" val="1"/>
+              </p:ext>
+            </p:extLst>
+          </p:nvPr>
+        </p:nvSpPr>
+        <p:spPr>
+          <a:xfrm rot="10800000" flipH="1">
+            <a:off x="8123333" y="-2"/>
+            <a:ext cx="4092521" cy="6400369"/>
+          </a:xfrm>
+          <a:prstGeom prst="rect">
+            <a:avLst/>
+          </a:prstGeom>
+          <a:gradFill>
+            <a:gsLst>
+              <a:gs pos="31000">
+                <a:schemeClr val="accent1">
+                  <a:lumMod val="50000"/>
+                  <a:alpha val="0"/>
+                </a:schemeClr>
+              </a:gs>
+              <a:gs pos="100000">
+                <a:schemeClr val="accent1">
+                  <a:lumMod val="50000"/>
+                  <a:alpha val="26000"/>
+                </a:schemeClr>
+              </a:gs>
+            </a:gsLst>
+            <a:lin ang="18000000" scaled="0"/>
+          </a:gradFill>
+          <a:ln>
+            <a:noFill/>
+          </a:ln>
+        </p:spPr>
+        <p:style>
+          <a:lnRef idx="2">
+            <a:schemeClr val="accent1">
+              <a:shade val="50000"/>
+            </a:schemeClr>
+          </a:lnRef>
+          <a:fillRef idx="1">
+            <a:schemeClr val="accent1"/>
+          </a:fillRef>
+          <a:effectRef idx="0">
+            <a:schemeClr val="accent1"/>
+          </a:effectRef>
+          <a:fontRef idx="minor">
+            <a:schemeClr val="lt1"/>
+          </a:fontRef>
+        </p:style>
+        <p:txBody>
+          <a:bodyPr rtlCol="0" anchor="ctr"/>
+          <a:lstStyle/>
+          <a:p>
+            <a:pPr algn="ctr"/>
+            <a:endParaRPr lang="en-US" dirty="0"/>
+          </a:p>
+        </p:txBody>
+      </p:sp>
+      <p:sp>
+        <p:nvSpPr>
+          <p:cNvPr id="17" name="Rectangle 16">
+            <a:extLst>
+              <a:ext uri="{FF2B5EF4-FFF2-40B4-BE49-F238E27FC236}">
+                <a16:creationId xmlns:a16="http://schemas.microsoft.com/office/drawing/2014/main" id="{2813A4FA-24A5-41ED-A534-3807D1B2F344}"/>
+              </a:ext>
+              <a:ext uri="{C183D7F6-B498-43B3-948B-1728B52AA6E4}">
+                <adec:decorative xmlns:adec="http://schemas.microsoft.com/office/drawing/2017/decorative" val="1"/>
+              </a:ext>
+            </a:extLst>
+          </p:cNvPr>
+          <p:cNvSpPr>
+            <a:spLocks noGrp="1" noRot="1" noChangeAspect="1" noMove="1" noResize="1" noEditPoints="1" noAdjustHandles="1" noChangeArrowheads="1" noChangeShapeType="1" noTextEdit="1"/>
+          </p:cNvSpPr>
+          <p:nvPr>
+            <p:extLst>
+              <p:ext uri="{386F3935-93C4-4BCD-93E2-E3B085C9AB24}">
+                <p16:designElem xmlns:p16="http://schemas.microsoft.com/office/powerpoint/2015/main" val="1"/>
+              </p:ext>
+            </p:extLst>
+          </p:nvPr>
+        </p:nvSpPr>
+        <p:spPr>
+          <a:xfrm rot="10800000" flipH="1">
+            <a:off x="8123333" y="-22"/>
+            <a:ext cx="4068667" cy="6400389"/>
+          </a:xfrm>
+          <a:prstGeom prst="rect">
+            <a:avLst/>
+          </a:prstGeom>
+          <a:gradFill>
+            <a:gsLst>
+              <a:gs pos="0">
+                <a:schemeClr val="accent1">
+                  <a:alpha val="0"/>
+                </a:schemeClr>
+              </a:gs>
+              <a:gs pos="72000">
+                <a:srgbClr val="000000">
+                  <a:alpha val="21000"/>
+                </a:srgbClr>
+              </a:gs>
+            </a:gsLst>
+            <a:lin ang="3000000" scaled="0"/>
+          </a:gradFill>
+          <a:ln>
+            <a:noFill/>
+          </a:ln>
+        </p:spPr>
+        <p:style>
+          <a:lnRef idx="2">
+            <a:schemeClr val="accent1">
+              <a:shade val="50000"/>
+            </a:schemeClr>
+          </a:lnRef>
+          <a:fillRef idx="1">
+            <a:schemeClr val="accent1"/>
+          </a:fillRef>
+          <a:effectRef idx="0">
+            <a:schemeClr val="accent1"/>
+          </a:effectRef>
+          <a:fontRef idx="minor">
+            <a:schemeClr val="lt1"/>
+          </a:fontRef>
+        </p:style>
+        <p:txBody>
+          <a:bodyPr rtlCol="0" anchor="ctr"/>
+          <a:lstStyle/>
+          <a:p>
+            <a:pPr algn="ctr"/>
+            <a:endParaRPr lang="en-US" dirty="0"/>
+          </a:p>
+        </p:txBody>
+      </p:sp>
+      <p:sp>
+        <p:nvSpPr>
+          <p:cNvPr id="19" name="Rectangle 18">
+            <a:extLst>
+              <a:ext uri="{FF2B5EF4-FFF2-40B4-BE49-F238E27FC236}">
+                <a16:creationId xmlns:a16="http://schemas.microsoft.com/office/drawing/2014/main" id="{C3944F27-CA70-4E84-A51A-E6BF89558979}"/>
+              </a:ext>
+              <a:ext uri="{C183D7F6-B498-43B3-948B-1728B52AA6E4}">
+                <adec:decorative xmlns:adec="http://schemas.microsoft.com/office/drawing/2017/decorative" val="1"/>
+              </a:ext>
+            </a:extLst>
+          </p:cNvPr>
+          <p:cNvSpPr>
+            <a:spLocks noGrp="1" noRot="1" noChangeAspect="1" noMove="1" noResize="1" noEditPoints="1" noAdjustHandles="1" noChangeArrowheads="1" noChangeShapeType="1" noTextEdit="1"/>
+          </p:cNvSpPr>
+          <p:nvPr>
+            <p:extLst>
+              <p:ext uri="{386F3935-93C4-4BCD-93E2-E3B085C9AB24}">
+                <p16:designElem xmlns:p16="http://schemas.microsoft.com/office/powerpoint/2015/main" val="1"/>
+              </p:ext>
+            </p:extLst>
+          </p:nvPr>
+        </p:nvSpPr>
+        <p:spPr>
+          <a:xfrm rot="10800000" flipH="1">
+            <a:off x="8123333" y="-10"/>
+            <a:ext cx="3611467" cy="6857997"/>
+          </a:xfrm>
+          <a:prstGeom prst="rect">
+            <a:avLst/>
+          </a:prstGeom>
+          <a:gradFill>
+            <a:gsLst>
+              <a:gs pos="0">
+                <a:schemeClr val="accent1">
+                  <a:alpha val="0"/>
+                </a:schemeClr>
+              </a:gs>
+              <a:gs pos="93000">
+                <a:srgbClr val="000000">
+                  <a:alpha val="29000"/>
+                </a:srgbClr>
+              </a:gs>
+            </a:gsLst>
+            <a:lin ang="5400000" scaled="0"/>
+          </a:gradFill>
+          <a:ln>
+            <a:noFill/>
+          </a:ln>
+        </p:spPr>
+        <p:style>
+          <a:lnRef idx="2">
+            <a:schemeClr val="accent1">
+              <a:shade val="50000"/>
+            </a:schemeClr>
+          </a:lnRef>
+          <a:fillRef idx="1">
+            <a:schemeClr val="accent1"/>
+          </a:fillRef>
+          <a:effectRef idx="0">
+            <a:schemeClr val="accent1"/>
+          </a:effectRef>
+          <a:fontRef idx="minor">
+            <a:schemeClr val="lt1"/>
+          </a:fontRef>
+        </p:style>
+        <p:txBody>
+          <a:bodyPr rtlCol="0" anchor="ctr"/>
+          <a:lstStyle/>
+          <a:p>
+            <a:pPr algn="ctr"/>
+            <a:endParaRPr lang="en-US" dirty="0"/>
           </a:p>
         </p:txBody>
       </p:sp>
@@ -5866,8 +9302,8 @@
         </p:blipFill>
         <p:spPr>
           <a:xfrm>
-            <a:off x="6172200" y="1701800"/>
-            <a:ext cx="5181600" cy="3454400"/>
+            <a:off x="7075967" y="2053032"/>
+            <a:ext cx="4170530" cy="2783828"/>
           </a:xfrm>
           <a:prstGeom prst="rect">
             <a:avLst/>
@@ -5890,6 +9326,14 @@
 <file path=ppt/slides/slide4.xml><?xml version="1.0" encoding="utf-8"?>
 <p:sld xmlns:a="http://schemas.openxmlformats.org/drawingml/2006/main" xmlns:r="http://schemas.openxmlformats.org/officeDocument/2006/relationships" xmlns:p="http://schemas.openxmlformats.org/presentationml/2006/main">
   <p:cSld>
+    <p:bg>
+      <p:bgPr>
+        <a:solidFill>
+          <a:schemeClr val="bg1"/>
+        </a:solidFill>
+        <a:effectLst/>
+      </p:bgPr>
+    </p:bg>
     <p:spTree>
       <p:nvGrpSpPr>
         <p:cNvPr id="1" name=""/>
@@ -5904,6 +9348,457 @@
           <a:chExt cx="0" cy="0"/>
         </a:xfrm>
       </p:grpSpPr>
+      <p:sp useBgFill="1">
+        <p:nvSpPr>
+          <p:cNvPr id="19" name="Rectangle 18">
+            <a:extLst>
+              <a:ext uri="{FF2B5EF4-FFF2-40B4-BE49-F238E27FC236}">
+                <a16:creationId xmlns:a16="http://schemas.microsoft.com/office/drawing/2014/main" id="{DEE2AD96-B495-4E06-9291-B71706F728CB}"/>
+              </a:ext>
+              <a:ext uri="{C183D7F6-B498-43B3-948B-1728B52AA6E4}">
+                <adec:decorative xmlns:adec="http://schemas.microsoft.com/office/drawing/2017/decorative" val="1"/>
+              </a:ext>
+            </a:extLst>
+          </p:cNvPr>
+          <p:cNvSpPr>
+            <a:spLocks noGrp="1" noRot="1" noChangeAspect="1" noMove="1" noResize="1" noEditPoints="1" noAdjustHandles="1" noChangeArrowheads="1" noChangeShapeType="1" noTextEdit="1"/>
+          </p:cNvSpPr>
+          <p:nvPr>
+            <p:extLst>
+              <p:ext uri="{386F3935-93C4-4BCD-93E2-E3B085C9AB24}">
+                <p16:designElem xmlns:p16="http://schemas.microsoft.com/office/powerpoint/2015/main" val="1"/>
+              </p:ext>
+            </p:extLst>
+          </p:nvPr>
+        </p:nvSpPr>
+        <p:spPr>
+          <a:xfrm>
+            <a:off x="0" y="0"/>
+            <a:ext cx="12192000" cy="6858000"/>
+          </a:xfrm>
+          <a:prstGeom prst="rect">
+            <a:avLst/>
+          </a:prstGeom>
+          <a:ln w="12700" cap="flat" cmpd="sng" algn="ctr">
+            <a:noFill/>
+            <a:prstDash val="solid"/>
+            <a:miter lim="800000"/>
+          </a:ln>
+          <a:effectLst/>
+          <a:extLst>
+            <a:ext uri="{91240B29-F687-4F45-9708-019B960494DF}">
+              <a14:hiddenLine xmlns:a14="http://schemas.microsoft.com/office/drawing/2010/main" w="12700" cap="flat" cmpd="sng" algn="ctr">
+                <a:solidFill>
+                  <a:schemeClr val="accent1">
+                    <a:shade val="50000"/>
+                  </a:schemeClr>
+                </a:solidFill>
+                <a:prstDash val="solid"/>
+                <a:miter lim="800000"/>
+              </a14:hiddenLine>
+            </a:ext>
+          </a:extLst>
+        </p:spPr>
+        <p:style>
+          <a:lnRef idx="2">
+            <a:schemeClr val="accent1">
+              <a:shade val="50000"/>
+            </a:schemeClr>
+          </a:lnRef>
+          <a:fillRef idx="1">
+            <a:schemeClr val="accent1"/>
+          </a:fillRef>
+          <a:effectRef idx="0">
+            <a:schemeClr val="accent1"/>
+          </a:effectRef>
+          <a:fontRef idx="minor">
+            <a:schemeClr val="lt1"/>
+          </a:fontRef>
+        </p:style>
+        <p:txBody>
+          <a:bodyPr rtlCol="0" anchor="ctr"/>
+          <a:lstStyle/>
+          <a:p>
+            <a:pPr algn="ctr"/>
+            <a:endParaRPr lang="en-US"/>
+          </a:p>
+        </p:txBody>
+      </p:sp>
+      <p:sp>
+        <p:nvSpPr>
+          <p:cNvPr id="20" name="Rectangle 19">
+            <a:extLst>
+              <a:ext uri="{FF2B5EF4-FFF2-40B4-BE49-F238E27FC236}">
+                <a16:creationId xmlns:a16="http://schemas.microsoft.com/office/drawing/2014/main" id="{53CF6D67-C5A8-4ADD-9E8E-1E38CA1D3166}"/>
+              </a:ext>
+              <a:ext uri="{C183D7F6-B498-43B3-948B-1728B52AA6E4}">
+                <adec:decorative xmlns:adec="http://schemas.microsoft.com/office/drawing/2017/decorative" val="1"/>
+              </a:ext>
+            </a:extLst>
+          </p:cNvPr>
+          <p:cNvSpPr>
+            <a:spLocks noGrp="1" noRot="1" noChangeAspect="1" noMove="1" noResize="1" noEditPoints="1" noAdjustHandles="1" noChangeArrowheads="1" noChangeShapeType="1" noTextEdit="1"/>
+          </p:cNvSpPr>
+          <p:nvPr>
+            <p:extLst>
+              <p:ext uri="{386F3935-93C4-4BCD-93E2-E3B085C9AB24}">
+                <p16:designElem xmlns:p16="http://schemas.microsoft.com/office/powerpoint/2015/main" val="1"/>
+              </p:ext>
+            </p:extLst>
+          </p:nvPr>
+        </p:nvSpPr>
+        <p:spPr>
+          <a:xfrm rot="5400000" flipH="1">
+            <a:off x="-638515" y="639280"/>
+            <a:ext cx="6858000" cy="5579440"/>
+          </a:xfrm>
+          <a:prstGeom prst="rect">
+            <a:avLst/>
+          </a:prstGeom>
+          <a:gradFill>
+            <a:gsLst>
+              <a:gs pos="8000">
+                <a:srgbClr val="000000"/>
+              </a:gs>
+              <a:gs pos="100000">
+                <a:schemeClr val="accent1">
+                  <a:lumMod val="75000"/>
+                </a:schemeClr>
+              </a:gs>
+            </a:gsLst>
+            <a:lin ang="3000000" scaled="0"/>
+          </a:gradFill>
+          <a:ln>
+            <a:noFill/>
+          </a:ln>
+        </p:spPr>
+        <p:style>
+          <a:lnRef idx="2">
+            <a:schemeClr val="accent1">
+              <a:shade val="50000"/>
+            </a:schemeClr>
+          </a:lnRef>
+          <a:fillRef idx="1">
+            <a:schemeClr val="accent1"/>
+          </a:fillRef>
+          <a:effectRef idx="0">
+            <a:schemeClr val="accent1"/>
+          </a:effectRef>
+          <a:fontRef idx="minor">
+            <a:schemeClr val="lt1"/>
+          </a:fontRef>
+        </p:style>
+        <p:txBody>
+          <a:bodyPr rtlCol="0" anchor="ctr"/>
+          <a:lstStyle/>
+          <a:p>
+            <a:pPr algn="ctr"/>
+            <a:endParaRPr lang="en-US"/>
+          </a:p>
+        </p:txBody>
+      </p:sp>
+      <p:sp>
+        <p:nvSpPr>
+          <p:cNvPr id="21" name="Rectangle 20">
+            <a:extLst>
+              <a:ext uri="{FF2B5EF4-FFF2-40B4-BE49-F238E27FC236}">
+                <a16:creationId xmlns:a16="http://schemas.microsoft.com/office/drawing/2014/main" id="{86909FA0-B515-4681-B7A8-FA281D133B94}"/>
+              </a:ext>
+              <a:ext uri="{C183D7F6-B498-43B3-948B-1728B52AA6E4}">
+                <adec:decorative xmlns:adec="http://schemas.microsoft.com/office/drawing/2017/decorative" val="1"/>
+              </a:ext>
+            </a:extLst>
+          </p:cNvPr>
+          <p:cNvSpPr>
+            <a:spLocks noGrp="1" noRot="1" noChangeAspect="1" noMove="1" noResize="1" noEditPoints="1" noAdjustHandles="1" noChangeArrowheads="1" noChangeShapeType="1" noTextEdit="1"/>
+          </p:cNvSpPr>
+          <p:nvPr>
+            <p:extLst>
+              <p:ext uri="{386F3935-93C4-4BCD-93E2-E3B085C9AB24}">
+                <p16:designElem xmlns:p16="http://schemas.microsoft.com/office/powerpoint/2015/main" val="1"/>
+              </p:ext>
+            </p:extLst>
+          </p:nvPr>
+        </p:nvSpPr>
+        <p:spPr>
+          <a:xfrm rot="5400000" flipH="1">
+            <a:off x="-393206" y="395206"/>
+            <a:ext cx="6346209" cy="5576080"/>
+          </a:xfrm>
+          <a:prstGeom prst="rect">
+            <a:avLst/>
+          </a:prstGeom>
+          <a:gradFill>
+            <a:gsLst>
+              <a:gs pos="0">
+                <a:srgbClr val="000000">
+                  <a:alpha val="0"/>
+                </a:srgbClr>
+              </a:gs>
+              <a:gs pos="99000">
+                <a:schemeClr val="accent1">
+                  <a:alpha val="0"/>
+                </a:schemeClr>
+              </a:gs>
+            </a:gsLst>
+            <a:lin ang="1800000" scaled="0"/>
+          </a:gradFill>
+          <a:ln>
+            <a:noFill/>
+          </a:ln>
+        </p:spPr>
+        <p:style>
+          <a:lnRef idx="2">
+            <a:schemeClr val="accent1">
+              <a:shade val="50000"/>
+            </a:schemeClr>
+          </a:lnRef>
+          <a:fillRef idx="1">
+            <a:schemeClr val="accent1"/>
+          </a:fillRef>
+          <a:effectRef idx="0">
+            <a:schemeClr val="accent1"/>
+          </a:effectRef>
+          <a:fontRef idx="minor">
+            <a:schemeClr val="lt1"/>
+          </a:fontRef>
+        </p:style>
+        <p:txBody>
+          <a:bodyPr rtlCol="0" anchor="ctr"/>
+          <a:lstStyle/>
+          <a:p>
+            <a:pPr algn="ctr"/>
+            <a:endParaRPr lang="en-US"/>
+          </a:p>
+        </p:txBody>
+      </p:sp>
+      <p:sp>
+        <p:nvSpPr>
+          <p:cNvPr id="22" name="Rectangle 21">
+            <a:extLst>
+              <a:ext uri="{FF2B5EF4-FFF2-40B4-BE49-F238E27FC236}">
+                <a16:creationId xmlns:a16="http://schemas.microsoft.com/office/drawing/2014/main" id="{21C9FE86-FCC3-4A31-AA1C-C882262B7FE7}"/>
+              </a:ext>
+              <a:ext uri="{C183D7F6-B498-43B3-948B-1728B52AA6E4}">
+                <adec:decorative xmlns:adec="http://schemas.microsoft.com/office/drawing/2017/decorative" val="1"/>
+              </a:ext>
+            </a:extLst>
+          </p:cNvPr>
+          <p:cNvSpPr>
+            <a:spLocks noGrp="1" noRot="1" noChangeAspect="1" noMove="1" noResize="1" noEditPoints="1" noAdjustHandles="1" noChangeArrowheads="1" noChangeShapeType="1" noTextEdit="1"/>
+          </p:cNvSpPr>
+          <p:nvPr>
+            <p:extLst>
+              <p:ext uri="{386F3935-93C4-4BCD-93E2-E3B085C9AB24}">
+                <p16:designElem xmlns:p16="http://schemas.microsoft.com/office/powerpoint/2015/main" val="1"/>
+              </p:ext>
+            </p:extLst>
+          </p:nvPr>
+        </p:nvSpPr>
+        <p:spPr>
+          <a:xfrm rot="5400000" flipH="1">
+            <a:off x="1528907" y="2818967"/>
+            <a:ext cx="2501979" cy="5576080"/>
+          </a:xfrm>
+          <a:prstGeom prst="rect">
+            <a:avLst/>
+          </a:prstGeom>
+          <a:gradFill>
+            <a:gsLst>
+              <a:gs pos="2000">
+                <a:schemeClr val="accent1">
+                  <a:alpha val="29000"/>
+                </a:schemeClr>
+              </a:gs>
+              <a:gs pos="100000">
+                <a:srgbClr val="000000">
+                  <a:alpha val="30000"/>
+                </a:srgbClr>
+              </a:gs>
+            </a:gsLst>
+            <a:lin ang="7800000" scaled="0"/>
+          </a:gradFill>
+          <a:ln>
+            <a:noFill/>
+          </a:ln>
+        </p:spPr>
+        <p:style>
+          <a:lnRef idx="2">
+            <a:schemeClr val="accent1">
+              <a:shade val="50000"/>
+            </a:schemeClr>
+          </a:lnRef>
+          <a:fillRef idx="1">
+            <a:schemeClr val="accent1"/>
+          </a:fillRef>
+          <a:effectRef idx="0">
+            <a:schemeClr val="accent1"/>
+          </a:effectRef>
+          <a:fontRef idx="minor">
+            <a:schemeClr val="lt1"/>
+          </a:fontRef>
+        </p:style>
+        <p:txBody>
+          <a:bodyPr rtlCol="0" anchor="ctr"/>
+          <a:lstStyle/>
+          <a:p>
+            <a:pPr algn="ctr"/>
+            <a:endParaRPr lang="en-US" dirty="0"/>
+          </a:p>
+        </p:txBody>
+      </p:sp>
+      <p:sp>
+        <p:nvSpPr>
+          <p:cNvPr id="23" name="Rectangle 22">
+            <a:extLst>
+              <a:ext uri="{FF2B5EF4-FFF2-40B4-BE49-F238E27FC236}">
+                <a16:creationId xmlns:a16="http://schemas.microsoft.com/office/drawing/2014/main" id="{7D96243B-ECED-4B71-8E06-AE9A285EAD20}"/>
+              </a:ext>
+              <a:ext uri="{C183D7F6-B498-43B3-948B-1728B52AA6E4}">
+                <adec:decorative xmlns:adec="http://schemas.microsoft.com/office/drawing/2017/decorative" val="1"/>
+              </a:ext>
+            </a:extLst>
+          </p:cNvPr>
+          <p:cNvSpPr>
+            <a:spLocks noGrp="1" noRot="1" noChangeAspect="1" noMove="1" noResize="1" noEditPoints="1" noAdjustHandles="1" noChangeArrowheads="1" noChangeShapeType="1" noTextEdit="1"/>
+          </p:cNvSpPr>
+          <p:nvPr>
+            <p:extLst>
+              <p:ext uri="{386F3935-93C4-4BCD-93E2-E3B085C9AB24}">
+                <p16:designElem xmlns:p16="http://schemas.microsoft.com/office/powerpoint/2015/main" val="1"/>
+              </p:ext>
+            </p:extLst>
+          </p:nvPr>
+        </p:nvSpPr>
+        <p:spPr>
+          <a:xfrm rot="5400000" flipH="1">
+            <a:off x="-425002" y="852793"/>
+            <a:ext cx="6858001" cy="5152412"/>
+          </a:xfrm>
+          <a:prstGeom prst="rect">
+            <a:avLst/>
+          </a:prstGeom>
+          <a:gradFill>
+            <a:gsLst>
+              <a:gs pos="0">
+                <a:srgbClr val="000000">
+                  <a:alpha val="0"/>
+                </a:srgbClr>
+              </a:gs>
+              <a:gs pos="99000">
+                <a:schemeClr val="accent1">
+                  <a:alpha val="11000"/>
+                </a:schemeClr>
+              </a:gs>
+            </a:gsLst>
+            <a:lin ang="7800000" scaled="0"/>
+          </a:gradFill>
+          <a:ln>
+            <a:noFill/>
+          </a:ln>
+        </p:spPr>
+        <p:style>
+          <a:lnRef idx="2">
+            <a:schemeClr val="accent1">
+              <a:shade val="50000"/>
+            </a:schemeClr>
+          </a:lnRef>
+          <a:fillRef idx="1">
+            <a:schemeClr val="accent1"/>
+          </a:fillRef>
+          <a:effectRef idx="0">
+            <a:schemeClr val="accent1"/>
+          </a:effectRef>
+          <a:fontRef idx="minor">
+            <a:schemeClr val="lt1"/>
+          </a:fontRef>
+        </p:style>
+        <p:txBody>
+          <a:bodyPr rtlCol="0" anchor="ctr"/>
+          <a:lstStyle/>
+          <a:p>
+            <a:pPr algn="ctr"/>
+            <a:endParaRPr lang="en-US"/>
+          </a:p>
+        </p:txBody>
+      </p:sp>
+      <p:sp>
+        <p:nvSpPr>
+          <p:cNvPr id="18" name="Oval 17">
+            <a:extLst>
+              <a:ext uri="{FF2B5EF4-FFF2-40B4-BE49-F238E27FC236}">
+                <a16:creationId xmlns:a16="http://schemas.microsoft.com/office/drawing/2014/main" id="{A09989E4-EFDC-4A90-A633-E0525FB4139E}"/>
+              </a:ext>
+              <a:ext uri="{C183D7F6-B498-43B3-948B-1728B52AA6E4}">
+                <adec:decorative xmlns:adec="http://schemas.microsoft.com/office/drawing/2017/decorative" val="1"/>
+              </a:ext>
+            </a:extLst>
+          </p:cNvPr>
+          <p:cNvSpPr>
+            <a:spLocks noGrp="1" noRot="1" noChangeAspect="1" noMove="1" noResize="1" noEditPoints="1" noAdjustHandles="1" noChangeArrowheads="1" noChangeShapeType="1" noTextEdit="1"/>
+          </p:cNvSpPr>
+          <p:nvPr>
+            <p:extLst>
+              <p:ext uri="{386F3935-93C4-4BCD-93E2-E3B085C9AB24}">
+                <p16:designElem xmlns:p16="http://schemas.microsoft.com/office/powerpoint/2015/main" val="1"/>
+              </p:ext>
+            </p:extLst>
+          </p:nvPr>
+        </p:nvSpPr>
+        <p:spPr>
+          <a:xfrm rot="6097846">
+            <a:off x="818753" y="1128497"/>
+            <a:ext cx="4318303" cy="4318303"/>
+          </a:xfrm>
+          <a:prstGeom prst="ellipse">
+            <a:avLst/>
+          </a:prstGeom>
+          <a:gradFill>
+            <a:gsLst>
+              <a:gs pos="39000">
+                <a:schemeClr val="accent1">
+                  <a:alpha val="0"/>
+                </a:schemeClr>
+              </a:gs>
+              <a:gs pos="100000">
+                <a:schemeClr val="accent1">
+                  <a:lumMod val="60000"/>
+                  <a:lumOff val="40000"/>
+                  <a:alpha val="15000"/>
+                </a:schemeClr>
+              </a:gs>
+            </a:gsLst>
+            <a:lin ang="17400000" scaled="0"/>
+          </a:gradFill>
+          <a:ln>
+            <a:noFill/>
+          </a:ln>
+        </p:spPr>
+        <p:style>
+          <a:lnRef idx="2">
+            <a:schemeClr val="accent1">
+              <a:shade val="50000"/>
+            </a:schemeClr>
+          </a:lnRef>
+          <a:fillRef idx="1">
+            <a:schemeClr val="accent1"/>
+          </a:fillRef>
+          <a:effectRef idx="0">
+            <a:schemeClr val="accent1"/>
+          </a:effectRef>
+          <a:fontRef idx="minor">
+            <a:schemeClr val="lt1"/>
+          </a:fontRef>
+        </p:style>
+        <p:txBody>
+          <a:bodyPr rtlCol="0" anchor="ctr"/>
+          <a:lstStyle/>
+          <a:p>
+            <a:pPr algn="ctr"/>
+            <a:endParaRPr lang="en-US" dirty="0"/>
+          </a:p>
+        </p:txBody>
+      </p:sp>
       <p:sp>
         <p:nvSpPr>
           <p:cNvPr id="2" name="Title 1">
@@ -5920,13 +9815,25 @@
             <p:ph type="title"/>
           </p:nvPr>
         </p:nvSpPr>
-        <p:spPr/>
-        <p:txBody>
-          <a:bodyPr/>
-          <a:lstStyle/>
-          <a:p>
-            <a:r>
-              <a:rPr lang="en-US" dirty="0"/>
+        <p:spPr>
+          <a:xfrm>
+            <a:off x="826396" y="586855"/>
+            <a:ext cx="4230100" cy="3387497"/>
+          </a:xfrm>
+        </p:spPr>
+        <p:txBody>
+          <a:bodyPr anchor="b">
+            <a:normAutofit/>
+          </a:bodyPr>
+          <a:lstStyle/>
+          <a:p>
+            <a:pPr algn="r"/>
+            <a:r>
+              <a:rPr lang="en-US" sz="4000">
+                <a:solidFill>
+                  <a:srgbClr val="FFFFFF"/>
+                </a:solidFill>
+              </a:rPr>
               <a:t>Annual Snapshot</a:t>
             </a:r>
           </a:p>
@@ -5948,38 +9855,52 @@
             <p:ph idx="1"/>
           </p:nvPr>
         </p:nvSpPr>
-        <p:spPr/>
-        <p:txBody>
-          <a:bodyPr/>
-          <a:lstStyle/>
-          <a:p>
-            <a:r>
-              <a:rPr lang="en-US" dirty="0"/>
-              <a:t>2014 Fiscal Year (Jan 1, 2014 – Dec 31, 2014)</a:t>
-            </a:r>
-          </a:p>
-          <a:p>
-            <a:r>
-              <a:rPr lang="en-US" dirty="0"/>
+        <p:spPr>
+          <a:xfrm>
+            <a:off x="6503158" y="649480"/>
+            <a:ext cx="4862447" cy="5546047"/>
+          </a:xfrm>
+        </p:spPr>
+        <p:txBody>
+          <a:bodyPr anchor="ctr">
+            <a:normAutofit/>
+          </a:bodyPr>
+          <a:lstStyle/>
+          <a:p>
+            <a:r>
+              <a:rPr lang="en-US" sz="2000" dirty="0"/>
+              <a:t>2014 Fiscal Year</a:t>
+            </a:r>
+          </a:p>
+          <a:p>
+            <a:pPr lvl="1"/>
+            <a:r>
+              <a:rPr lang="en-US" sz="1600" dirty="0"/>
+              <a:t>Jan 1, 2014 – Dec 31, 2014</a:t>
+            </a:r>
+          </a:p>
+          <a:p>
+            <a:r>
+              <a:rPr lang="en-US" sz="2000" dirty="0"/>
               <a:t>155,408 Constellation-related transactions</a:t>
             </a:r>
           </a:p>
           <a:p>
             <a:r>
-              <a:rPr lang="en-US" dirty="0"/>
+              <a:rPr lang="en-US" sz="2000" dirty="0"/>
               <a:t>Spirits market dominant</a:t>
             </a:r>
           </a:p>
           <a:p>
             <a:pPr lvl="1"/>
             <a:r>
-              <a:rPr lang="en-US" dirty="0"/>
+              <a:rPr lang="en-US" sz="2000" dirty="0"/>
               <a:t>100% coverage across 99 counties</a:t>
             </a:r>
           </a:p>
           <a:p>
             <a:r>
-              <a:rPr lang="en-US" dirty="0"/>
+              <a:rPr lang="en-US" sz="2000" dirty="0"/>
               <a:t>Total Revenue: $23.49M</a:t>
             </a:r>
           </a:p>
@@ -6001,6 +9922,14 @@
 <file path=ppt/slides/slide5.xml><?xml version="1.0" encoding="utf-8"?>
 <p:sld xmlns:a="http://schemas.openxmlformats.org/drawingml/2006/main" xmlns:r="http://schemas.openxmlformats.org/officeDocument/2006/relationships" xmlns:p="http://schemas.openxmlformats.org/presentationml/2006/main">
   <p:cSld>
+    <p:bg>
+      <p:bgPr>
+        <a:solidFill>
+          <a:schemeClr val="bg1"/>
+        </a:solidFill>
+        <a:effectLst/>
+      </p:bgPr>
+    </p:bg>
     <p:spTree>
       <p:nvGrpSpPr>
         <p:cNvPr id="1" name=""/>
@@ -6015,6 +9944,82 @@
           <a:chExt cx="0" cy="0"/>
         </a:xfrm>
       </p:grpSpPr>
+      <p:sp useBgFill="1">
+        <p:nvSpPr>
+          <p:cNvPr id="14" name="Rectangle 13">
+            <a:extLst>
+              <a:ext uri="{FF2B5EF4-FFF2-40B4-BE49-F238E27FC236}">
+                <a16:creationId xmlns:a16="http://schemas.microsoft.com/office/drawing/2014/main" id="{979E27D9-03C7-44E2-9FF8-15D0C8506AF7}"/>
+              </a:ext>
+              <a:ext uri="{C183D7F6-B498-43B3-948B-1728B52AA6E4}">
+                <adec:decorative xmlns:adec="http://schemas.microsoft.com/office/drawing/2017/decorative" val="1"/>
+              </a:ext>
+            </a:extLst>
+          </p:cNvPr>
+          <p:cNvSpPr>
+            <a:spLocks noGrp="1" noRot="1" noChangeAspect="1" noMove="1" noResize="1" noEditPoints="1" noAdjustHandles="1" noChangeArrowheads="1" noChangeShapeType="1" noTextEdit="1"/>
+          </p:cNvSpPr>
+          <p:nvPr>
+            <p:extLst>
+              <p:ext uri="{386F3935-93C4-4BCD-93E2-E3B085C9AB24}">
+                <p16:designElem xmlns:p16="http://schemas.microsoft.com/office/powerpoint/2015/main" val="1"/>
+              </p:ext>
+            </p:extLst>
+          </p:nvPr>
+        </p:nvSpPr>
+        <p:spPr>
+          <a:xfrm>
+            <a:off x="0" y="0"/>
+            <a:ext cx="12192000" cy="6858000"/>
+          </a:xfrm>
+          <a:prstGeom prst="rect">
+            <a:avLst/>
+          </a:prstGeom>
+          <a:ln w="12700" cap="flat" cmpd="sng" algn="ctr">
+            <a:noFill/>
+            <a:prstDash val="solid"/>
+            <a:miter lim="800000"/>
+          </a:ln>
+          <a:effectLst/>
+          <a:extLst>
+            <a:ext uri="{91240B29-F687-4F45-9708-019B960494DF}">
+              <a14:hiddenLine xmlns:a14="http://schemas.microsoft.com/office/drawing/2010/main" w="12700" cap="flat" cmpd="sng" algn="ctr">
+                <a:solidFill>
+                  <a:schemeClr val="accent1">
+                    <a:shade val="50000"/>
+                  </a:schemeClr>
+                </a:solidFill>
+                <a:prstDash val="solid"/>
+                <a:miter lim="800000"/>
+              </a14:hiddenLine>
+            </a:ext>
+          </a:extLst>
+        </p:spPr>
+        <p:style>
+          <a:lnRef idx="2">
+            <a:schemeClr val="accent1">
+              <a:shade val="50000"/>
+            </a:schemeClr>
+          </a:lnRef>
+          <a:fillRef idx="1">
+            <a:schemeClr val="accent1"/>
+          </a:fillRef>
+          <a:effectRef idx="0">
+            <a:schemeClr val="accent1"/>
+          </a:effectRef>
+          <a:fontRef idx="minor">
+            <a:schemeClr val="lt1"/>
+          </a:fontRef>
+        </p:style>
+        <p:txBody>
+          <a:bodyPr rtlCol="0" anchor="ctr"/>
+          <a:lstStyle/>
+          <a:p>
+            <a:pPr algn="ctr"/>
+            <a:endParaRPr lang="en-US"/>
+          </a:p>
+        </p:txBody>
+      </p:sp>
       <p:sp>
         <p:nvSpPr>
           <p:cNvPr id="2" name="Title 1">
@@ -6031,13 +10036,27 @@
             <p:ph type="title"/>
           </p:nvPr>
         </p:nvSpPr>
-        <p:spPr/>
-        <p:txBody>
-          <a:bodyPr/>
-          <a:lstStyle/>
-          <a:p>
-            <a:r>
-              <a:rPr lang="en-US" dirty="0"/>
+        <p:spPr>
+          <a:xfrm>
+            <a:off x="1136397" y="502021"/>
+            <a:ext cx="4959603" cy="1642969"/>
+          </a:xfrm>
+        </p:spPr>
+        <p:txBody>
+          <a:bodyPr vert="horz" lIns="91440" tIns="45720" rIns="91440" bIns="45720" rtlCol="0" anchor="b">
+            <a:normAutofit/>
+          </a:bodyPr>
+          <a:lstStyle/>
+          <a:p>
+            <a:r>
+              <a:rPr lang="en-US" sz="4000" kern="1200">
+                <a:solidFill>
+                  <a:schemeClr val="tx1"/>
+                </a:solidFill>
+                <a:latin typeface="+mj-lt"/>
+                <a:ea typeface="+mj-ea"/>
+                <a:cs typeface="+mj-cs"/>
+              </a:rPr>
               <a:t>Geographical Analysis</a:t>
             </a:r>
           </a:p>
@@ -6059,62 +10078,215 @@
             <p:ph sz="half" idx="2"/>
           </p:nvPr>
         </p:nvSpPr>
-        <p:spPr/>
-        <p:txBody>
-          <a:bodyPr/>
-          <a:lstStyle/>
-          <a:p>
-            <a:r>
-              <a:rPr lang="en-US" dirty="0"/>
+        <p:spPr>
+          <a:xfrm>
+            <a:off x="1136397" y="2418408"/>
+            <a:ext cx="4959603" cy="3522569"/>
+          </a:xfrm>
+        </p:spPr>
+        <p:txBody>
+          <a:bodyPr vert="horz" lIns="91440" tIns="45720" rIns="91440" bIns="45720" rtlCol="0" anchor="t">
+            <a:normAutofit/>
+          </a:bodyPr>
+          <a:lstStyle/>
+          <a:p>
+            <a:r>
+              <a:rPr lang="en-US" sz="2000"/>
               <a:t>Annual Revenue</a:t>
             </a:r>
           </a:p>
           <a:p>
             <a:r>
-              <a:rPr lang="en-US" dirty="0"/>
+              <a:rPr lang="en-US" sz="2000"/>
               <a:t>Top 3 earners</a:t>
             </a:r>
           </a:p>
           <a:p>
             <a:pPr lvl="1"/>
             <a:r>
-              <a:rPr lang="en-US" dirty="0"/>
+              <a:rPr lang="en-US" sz="2000"/>
               <a:t>Polk, Linn, Black Hawk</a:t>
             </a:r>
           </a:p>
           <a:p>
             <a:pPr lvl="1"/>
             <a:r>
-              <a:rPr lang="en-US" dirty="0"/>
+              <a:rPr lang="en-US" sz="2000"/>
               <a:t>Over $1M in revenue</a:t>
             </a:r>
           </a:p>
           <a:p>
             <a:pPr lvl="1"/>
             <a:r>
-              <a:rPr lang="en-US" dirty="0"/>
+              <a:rPr lang="en-US" sz="2000"/>
               <a:t>Polk: $3.73M</a:t>
             </a:r>
           </a:p>
           <a:p>
             <a:r>
-              <a:rPr lang="en-US" dirty="0"/>
+              <a:rPr lang="en-US" sz="2000"/>
               <a:t>Top 3 Stragglers</a:t>
             </a:r>
           </a:p>
           <a:p>
             <a:pPr lvl="1"/>
             <a:r>
-              <a:rPr lang="en-US" dirty="0"/>
+              <a:rPr lang="en-US" sz="2000"/>
               <a:t>Keokuk, Hancock, Mills</a:t>
             </a:r>
           </a:p>
           <a:p>
             <a:pPr lvl="1"/>
             <a:r>
-              <a:rPr lang="en-US" dirty="0"/>
+              <a:rPr lang="en-US" sz="2000"/>
               <a:t>Keokuk: $22K</a:t>
             </a:r>
+          </a:p>
+        </p:txBody>
+      </p:sp>
+      <p:sp>
+        <p:nvSpPr>
+          <p:cNvPr id="16" name="Rectangle 15">
+            <a:extLst>
+              <a:ext uri="{FF2B5EF4-FFF2-40B4-BE49-F238E27FC236}">
+                <a16:creationId xmlns:a16="http://schemas.microsoft.com/office/drawing/2014/main" id="{EEBF1590-3B36-48EE-A89D-3B6F3CB256AB}"/>
+              </a:ext>
+              <a:ext uri="{C183D7F6-B498-43B3-948B-1728B52AA6E4}">
+                <adec:decorative xmlns:adec="http://schemas.microsoft.com/office/drawing/2017/decorative" val="1"/>
+              </a:ext>
+            </a:extLst>
+          </p:cNvPr>
+          <p:cNvSpPr>
+            <a:spLocks noGrp="1" noRot="1" noChangeAspect="1" noMove="1" noResize="1" noEditPoints="1" noAdjustHandles="1" noChangeArrowheads="1" noChangeShapeType="1" noTextEdit="1"/>
+          </p:cNvSpPr>
+          <p:nvPr>
+            <p:extLst>
+              <p:ext uri="{386F3935-93C4-4BCD-93E2-E3B085C9AB24}">
+                <p16:designElem xmlns:p16="http://schemas.microsoft.com/office/powerpoint/2015/main" val="1"/>
+              </p:ext>
+            </p:extLst>
+          </p:nvPr>
+        </p:nvSpPr>
+        <p:spPr>
+          <a:xfrm rot="10800000" flipH="1">
+            <a:off x="0" y="6400799"/>
+            <a:ext cx="12192000" cy="456773"/>
+          </a:xfrm>
+          <a:prstGeom prst="rect">
+            <a:avLst/>
+          </a:prstGeom>
+          <a:gradFill>
+            <a:gsLst>
+              <a:gs pos="0">
+                <a:schemeClr val="accent1"/>
+              </a:gs>
+              <a:gs pos="78000">
+                <a:srgbClr val="000000"/>
+              </a:gs>
+            </a:gsLst>
+            <a:lin ang="2400000" scaled="0"/>
+          </a:gradFill>
+          <a:ln>
+            <a:noFill/>
+          </a:ln>
+        </p:spPr>
+        <p:style>
+          <a:lnRef idx="2">
+            <a:schemeClr val="accent1">
+              <a:shade val="50000"/>
+            </a:schemeClr>
+          </a:lnRef>
+          <a:fillRef idx="1">
+            <a:schemeClr val="accent1"/>
+          </a:fillRef>
+          <a:effectRef idx="0">
+            <a:schemeClr val="accent1"/>
+          </a:effectRef>
+          <a:fontRef idx="minor">
+            <a:schemeClr val="lt1"/>
+          </a:fontRef>
+        </p:style>
+        <p:txBody>
+          <a:bodyPr rtlCol="0" anchor="ctr"/>
+          <a:lstStyle/>
+          <a:p>
+            <a:pPr algn="ctr"/>
+            <a:endParaRPr lang="en-US"/>
+          </a:p>
+        </p:txBody>
+      </p:sp>
+      <p:sp>
+        <p:nvSpPr>
+          <p:cNvPr id="18" name="Rectangle 17">
+            <a:extLst>
+              <a:ext uri="{FF2B5EF4-FFF2-40B4-BE49-F238E27FC236}">
+                <a16:creationId xmlns:a16="http://schemas.microsoft.com/office/drawing/2014/main" id="{AC8F6C8C-AB5A-4548-942D-E3FD40ACBC49}"/>
+              </a:ext>
+              <a:ext uri="{C183D7F6-B498-43B3-948B-1728B52AA6E4}">
+                <adec:decorative xmlns:adec="http://schemas.microsoft.com/office/drawing/2017/decorative" val="1"/>
+              </a:ext>
+            </a:extLst>
+          </p:cNvPr>
+          <p:cNvSpPr>
+            <a:spLocks noGrp="1" noRot="1" noChangeAspect="1" noMove="1" noResize="1" noEditPoints="1" noAdjustHandles="1" noChangeArrowheads="1" noChangeShapeType="1" noTextEdit="1"/>
+          </p:cNvSpPr>
+          <p:nvPr>
+            <p:extLst>
+              <p:ext uri="{386F3935-93C4-4BCD-93E2-E3B085C9AB24}">
+                <p16:designElem xmlns:p16="http://schemas.microsoft.com/office/powerpoint/2015/main" val="1"/>
+              </p:ext>
+            </p:extLst>
+          </p:nvPr>
+        </p:nvSpPr>
+        <p:spPr>
+          <a:xfrm flipH="1">
+            <a:off x="4038600" y="6400799"/>
+            <a:ext cx="8153398" cy="456772"/>
+          </a:xfrm>
+          <a:prstGeom prst="rect">
+            <a:avLst/>
+          </a:prstGeom>
+          <a:gradFill>
+            <a:gsLst>
+              <a:gs pos="0">
+                <a:srgbClr val="000000">
+                  <a:alpha val="63000"/>
+                </a:srgbClr>
+              </a:gs>
+              <a:gs pos="100000">
+                <a:schemeClr val="accent1">
+                  <a:lumMod val="75000"/>
+                </a:schemeClr>
+              </a:gs>
+            </a:gsLst>
+            <a:lin ang="13800000" scaled="0"/>
+          </a:gradFill>
+          <a:ln>
+            <a:noFill/>
+          </a:ln>
+        </p:spPr>
+        <p:style>
+          <a:lnRef idx="2">
+            <a:schemeClr val="accent1">
+              <a:shade val="50000"/>
+            </a:schemeClr>
+          </a:lnRef>
+          <a:fillRef idx="1">
+            <a:schemeClr val="accent1"/>
+          </a:fillRef>
+          <a:effectRef idx="0">
+            <a:schemeClr val="accent1"/>
+          </a:effectRef>
+          <a:fontRef idx="minor">
+            <a:schemeClr val="lt1"/>
+          </a:fontRef>
+        </p:style>
+        <p:txBody>
+          <a:bodyPr rtlCol="0" anchor="ctr"/>
+          <a:lstStyle/>
+          <a:p>
+            <a:pPr algn="ctr"/>
+            <a:endParaRPr lang="en-US"/>
           </a:p>
         </p:txBody>
       </p:sp>
@@ -6132,8 +10304,8 @@
         </p:nvGrpSpPr>
         <p:grpSpPr>
           <a:xfrm>
-            <a:off x="1032140" y="2485592"/>
-            <a:ext cx="4793719" cy="3400736"/>
+            <a:off x="6512442" y="1377279"/>
+            <a:ext cx="5201023" cy="3689684"/>
             <a:chOff x="1032140" y="2485592"/>
             <a:chExt cx="4793719" cy="3400736"/>
           </a:xfrm>
@@ -6148,7 +10320,7 @@
               </a:extLst>
             </p:cNvPr>
             <p:cNvPicPr>
-              <a:picLocks noChangeAspect="1"/>
+              <a:picLocks noGrp="1" noChangeAspect="1"/>
             </p:cNvPicPr>
             <p:nvPr>
               <p:ph sz="half" idx="1"/>
@@ -6205,10 +10377,23 @@
             </a:bodyPr>
             <a:lstStyle/>
             <a:p>
+              <a:pPr defTabSz="987552">
+                <a:spcAft>
+                  <a:spcPts val="600"/>
+                </a:spcAft>
+              </a:pPr>
               <a:r>
-                <a:rPr lang="en-US" dirty="0"/>
+                <a:rPr lang="en-US" sz="1944" kern="1200">
+                  <a:solidFill>
+                    <a:schemeClr val="tx1"/>
+                  </a:solidFill>
+                  <a:latin typeface="+mn-lt"/>
+                  <a:ea typeface="+mn-ea"/>
+                  <a:cs typeface="+mn-cs"/>
+                </a:rPr>
                 <a:t>Figure 1: Annual Revenue by Counties</a:t>
               </a:r>
+              <a:endParaRPr lang="en-US"/>
             </a:p>
           </p:txBody>
         </p:sp>
@@ -6229,6 +10414,21 @@
 <file path=ppt/slides/slide6.xml><?xml version="1.0" encoding="utf-8"?>
 <p:sld xmlns:a="http://schemas.openxmlformats.org/drawingml/2006/main" xmlns:r="http://schemas.openxmlformats.org/officeDocument/2006/relationships" xmlns:p="http://schemas.openxmlformats.org/presentationml/2006/main">
   <p:cSld>
+    <p:bg>
+      <p:bgPr>
+        <a:blipFill dpi="0" rotWithShape="1">
+          <a:blip r:embed="rId4">
+            <a:alphaModFix amt="15000"/>
+            <a:lum/>
+          </a:blip>
+          <a:srcRect/>
+          <a:stretch>
+            <a:fillRect/>
+          </a:stretch>
+        </a:blipFill>
+        <a:effectLst/>
+      </p:bgPr>
+    </p:bg>
     <p:spTree>
       <p:nvGrpSpPr>
         <p:cNvPr id="1" name="">
@@ -6380,20 +10580,19 @@
           </p:nvPr>
         </p:nvPicPr>
         <p:blipFill>
-          <a:blip r:embed="rId3">
+          <a:blip r:embed="rId5">
             <a:extLst>
               <a:ext uri="{28A0092B-C50C-407E-A947-70E740481C1C}">
                 <a14:useLocalDpi xmlns:a14="http://schemas.microsoft.com/office/drawing/2010/main" val="0"/>
               </a:ext>
             </a:extLst>
           </a:blip>
-          <a:srcRect/>
           <a:stretch/>
         </p:blipFill>
         <p:spPr>
           <a:xfrm>
-            <a:off x="6472821" y="2625524"/>
-            <a:ext cx="4580357" cy="2751539"/>
+            <a:off x="6367526" y="1825625"/>
+            <a:ext cx="4790948" cy="2845751"/>
           </a:xfrm>
           <a:prstGeom prst="rect">
             <a:avLst/>
@@ -6416,7 +10615,7 @@
         </p:nvSpPr>
         <p:spPr>
           <a:xfrm>
-            <a:off x="6373498" y="5377063"/>
+            <a:off x="6373498" y="4624270"/>
             <a:ext cx="4779001" cy="369332"/>
           </a:xfrm>
           <a:prstGeom prst="rect">
@@ -6445,7 +10644,7 @@
     </p:extLst>
   </p:cSld>
   <p:clrMapOvr>
-    <a:masterClrMapping/>
+    <a:overrideClrMapping bg1="lt1" tx1="dk1" bg2="lt2" tx2="dk2" accent1="accent1" accent2="accent2" accent3="accent3" accent4="accent4" accent5="accent5" accent6="accent6" hlink="hlink" folHlink="folHlink"/>
   </p:clrMapOvr>
 </p:sld>
 </file>
@@ -6453,6 +10652,21 @@
 <file path=ppt/slides/slide7.xml><?xml version="1.0" encoding="utf-8"?>
 <p:sld xmlns:a="http://schemas.openxmlformats.org/drawingml/2006/main" xmlns:r="http://schemas.openxmlformats.org/officeDocument/2006/relationships" xmlns:p="http://schemas.openxmlformats.org/presentationml/2006/main">
   <p:cSld>
+    <p:bg>
+      <p:bgPr>
+        <a:blipFill dpi="0" rotWithShape="1">
+          <a:blip r:embed="rId2">
+            <a:alphaModFix amt="15000"/>
+            <a:lum/>
+          </a:blip>
+          <a:srcRect/>
+          <a:stretch>
+            <a:fillRect/>
+          </a:stretch>
+        </a:blipFill>
+        <a:effectLst/>
+      </p:bgPr>
+    </p:bg>
     <p:spTree>
       <p:nvGrpSpPr>
         <p:cNvPr id="1" name=""/>
@@ -6681,7 +10895,7 @@
         </p:nvSpPr>
         <p:spPr>
           <a:xfrm>
-            <a:off x="836612" y="5754624"/>
+            <a:off x="838200" y="5754624"/>
             <a:ext cx="10515600" cy="936690"/>
           </a:xfrm>
           <a:prstGeom prst="rect">
@@ -6922,6 +11136,14 @@
 <file path=ppt/slides/slide8.xml><?xml version="1.0" encoding="utf-8"?>
 <p:sld xmlns:a="http://schemas.openxmlformats.org/drawingml/2006/main" xmlns:r="http://schemas.openxmlformats.org/officeDocument/2006/relationships" xmlns:p="http://schemas.openxmlformats.org/presentationml/2006/main">
   <p:cSld>
+    <p:bg>
+      <p:bgPr>
+        <a:solidFill>
+          <a:schemeClr val="bg1"/>
+        </a:solidFill>
+        <a:effectLst/>
+      </p:bgPr>
+    </p:bg>
     <p:spTree>
       <p:nvGrpSpPr>
         <p:cNvPr id="1" name=""/>
@@ -6936,6 +11158,309 @@
           <a:chExt cx="0" cy="0"/>
         </a:xfrm>
       </p:grpSpPr>
+      <p:sp useBgFill="1">
+        <p:nvSpPr>
+          <p:cNvPr id="18" name="Rectangle 17">
+            <a:extLst>
+              <a:ext uri="{FF2B5EF4-FFF2-40B4-BE49-F238E27FC236}">
+                <a16:creationId xmlns:a16="http://schemas.microsoft.com/office/drawing/2014/main" id="{A8384FB5-9ADC-4DDC-881B-597D56F5B15D}"/>
+              </a:ext>
+              <a:ext uri="{C183D7F6-B498-43B3-948B-1728B52AA6E4}">
+                <adec:decorative xmlns:adec="http://schemas.microsoft.com/office/drawing/2017/decorative" val="1"/>
+              </a:ext>
+            </a:extLst>
+          </p:cNvPr>
+          <p:cNvSpPr>
+            <a:spLocks noGrp="1" noRot="1" noChangeAspect="1" noMove="1" noResize="1" noEditPoints="1" noAdjustHandles="1" noChangeArrowheads="1" noChangeShapeType="1" noTextEdit="1"/>
+          </p:cNvSpPr>
+          <p:nvPr>
+            <p:extLst>
+              <p:ext uri="{386F3935-93C4-4BCD-93E2-E3B085C9AB24}">
+                <p16:designElem xmlns:p16="http://schemas.microsoft.com/office/powerpoint/2015/main" val="1"/>
+              </p:ext>
+            </p:extLst>
+          </p:nvPr>
+        </p:nvSpPr>
+        <p:spPr>
+          <a:xfrm>
+            <a:off x="0" y="0"/>
+            <a:ext cx="12192000" cy="6858000"/>
+          </a:xfrm>
+          <a:prstGeom prst="rect">
+            <a:avLst/>
+          </a:prstGeom>
+          <a:ln w="12700" cap="flat" cmpd="sng" algn="ctr">
+            <a:noFill/>
+            <a:prstDash val="solid"/>
+            <a:miter lim="800000"/>
+          </a:ln>
+          <a:effectLst/>
+          <a:extLst>
+            <a:ext uri="{91240B29-F687-4F45-9708-019B960494DF}">
+              <a14:hiddenLine xmlns:a14="http://schemas.microsoft.com/office/drawing/2010/main" w="12700" cap="flat" cmpd="sng" algn="ctr">
+                <a:solidFill>
+                  <a:schemeClr val="accent1">
+                    <a:shade val="50000"/>
+                  </a:schemeClr>
+                </a:solidFill>
+                <a:prstDash val="solid"/>
+                <a:miter lim="800000"/>
+              </a14:hiddenLine>
+            </a:ext>
+          </a:extLst>
+        </p:spPr>
+        <p:style>
+          <a:lnRef idx="2">
+            <a:schemeClr val="accent1">
+              <a:shade val="50000"/>
+            </a:schemeClr>
+          </a:lnRef>
+          <a:fillRef idx="1">
+            <a:schemeClr val="accent1"/>
+          </a:fillRef>
+          <a:effectRef idx="0">
+            <a:schemeClr val="accent1"/>
+          </a:effectRef>
+          <a:fontRef idx="minor">
+            <a:schemeClr val="lt1"/>
+          </a:fontRef>
+        </p:style>
+        <p:txBody>
+          <a:bodyPr rtlCol="0" anchor="ctr"/>
+          <a:lstStyle/>
+          <a:p>
+            <a:pPr algn="ctr"/>
+            <a:endParaRPr lang="en-US"/>
+          </a:p>
+        </p:txBody>
+      </p:sp>
+      <p:sp>
+        <p:nvSpPr>
+          <p:cNvPr id="20" name="Rectangle 19">
+            <a:extLst>
+              <a:ext uri="{FF2B5EF4-FFF2-40B4-BE49-F238E27FC236}">
+                <a16:creationId xmlns:a16="http://schemas.microsoft.com/office/drawing/2014/main" id="{1199E1B1-A8C0-4FE8-A5A8-1CB41D69F857}"/>
+              </a:ext>
+              <a:ext uri="{C183D7F6-B498-43B3-948B-1728B52AA6E4}">
+                <adec:decorative xmlns:adec="http://schemas.microsoft.com/office/drawing/2017/decorative" val="1"/>
+              </a:ext>
+            </a:extLst>
+          </p:cNvPr>
+          <p:cNvSpPr>
+            <a:spLocks noGrp="1" noRot="1" noChangeAspect="1" noMove="1" noResize="1" noEditPoints="1" noAdjustHandles="1" noChangeArrowheads="1" noChangeShapeType="1" noTextEdit="1"/>
+          </p:cNvSpPr>
+          <p:nvPr>
+            <p:extLst>
+              <p:ext uri="{386F3935-93C4-4BCD-93E2-E3B085C9AB24}">
+                <p16:designElem xmlns:p16="http://schemas.microsoft.com/office/powerpoint/2015/main" val="1"/>
+              </p:ext>
+            </p:extLst>
+          </p:nvPr>
+        </p:nvSpPr>
+        <p:spPr>
+          <a:xfrm rot="10800000" flipH="1">
+            <a:off x="2" y="0"/>
+            <a:ext cx="12191998" cy="1575955"/>
+          </a:xfrm>
+          <a:prstGeom prst="rect">
+            <a:avLst/>
+          </a:prstGeom>
+          <a:gradFill>
+            <a:gsLst>
+              <a:gs pos="0">
+                <a:srgbClr val="000000">
+                  <a:alpha val="96000"/>
+                </a:srgbClr>
+              </a:gs>
+              <a:gs pos="100000">
+                <a:schemeClr val="accent1">
+                  <a:lumMod val="75000"/>
+                </a:schemeClr>
+              </a:gs>
+            </a:gsLst>
+            <a:lin ang="6000000" scaled="0"/>
+          </a:gradFill>
+          <a:ln>
+            <a:noFill/>
+          </a:ln>
+        </p:spPr>
+        <p:style>
+          <a:lnRef idx="2">
+            <a:schemeClr val="accent1">
+              <a:shade val="50000"/>
+            </a:schemeClr>
+          </a:lnRef>
+          <a:fillRef idx="1">
+            <a:schemeClr val="accent1"/>
+          </a:fillRef>
+          <a:effectRef idx="0">
+            <a:schemeClr val="accent1"/>
+          </a:effectRef>
+          <a:fontRef idx="minor">
+            <a:schemeClr val="lt1"/>
+          </a:fontRef>
+        </p:style>
+        <p:txBody>
+          <a:bodyPr rtlCol="0" anchor="ctr"/>
+          <a:lstStyle/>
+          <a:p>
+            <a:pPr algn="ctr"/>
+            <a:endParaRPr lang="en-US"/>
+          </a:p>
+        </p:txBody>
+      </p:sp>
+      <p:sp>
+        <p:nvSpPr>
+          <p:cNvPr id="22" name="Rectangle 21">
+            <a:extLst>
+              <a:ext uri="{FF2B5EF4-FFF2-40B4-BE49-F238E27FC236}">
+                <a16:creationId xmlns:a16="http://schemas.microsoft.com/office/drawing/2014/main" id="{84A8DE83-DE75-4B41-9DB4-A7EC0B0DEC0B}"/>
+              </a:ext>
+              <a:ext uri="{C183D7F6-B498-43B3-948B-1728B52AA6E4}">
+                <adec:decorative xmlns:adec="http://schemas.microsoft.com/office/drawing/2017/decorative" val="1"/>
+              </a:ext>
+            </a:extLst>
+          </p:cNvPr>
+          <p:cNvSpPr>
+            <a:spLocks noGrp="1" noRot="1" noChangeAspect="1" noMove="1" noResize="1" noEditPoints="1" noAdjustHandles="1" noChangeArrowheads="1" noChangeShapeType="1" noTextEdit="1"/>
+          </p:cNvSpPr>
+          <p:nvPr>
+            <p:extLst>
+              <p:ext uri="{386F3935-93C4-4BCD-93E2-E3B085C9AB24}">
+                <p16:designElem xmlns:p16="http://schemas.microsoft.com/office/powerpoint/2015/main" val="1"/>
+              </p:ext>
+            </p:extLst>
+          </p:nvPr>
+        </p:nvSpPr>
+        <p:spPr>
+          <a:xfrm>
+            <a:off x="0" y="0"/>
+            <a:ext cx="8128856" cy="1575461"/>
+          </a:xfrm>
+          <a:prstGeom prst="rect">
+            <a:avLst/>
+          </a:prstGeom>
+          <a:gradFill>
+            <a:gsLst>
+              <a:gs pos="0">
+                <a:schemeClr val="accent1">
+                  <a:alpha val="41000"/>
+                </a:schemeClr>
+              </a:gs>
+              <a:gs pos="74000">
+                <a:schemeClr val="accent1">
+                  <a:lumMod val="60000"/>
+                  <a:lumOff val="40000"/>
+                  <a:alpha val="0"/>
+                </a:schemeClr>
+              </a:gs>
+            </a:gsLst>
+            <a:lin ang="8400000" scaled="0"/>
+          </a:gradFill>
+          <a:ln>
+            <a:noFill/>
+          </a:ln>
+        </p:spPr>
+        <p:style>
+          <a:lnRef idx="2">
+            <a:schemeClr val="accent1">
+              <a:shade val="50000"/>
+            </a:schemeClr>
+          </a:lnRef>
+          <a:fillRef idx="1">
+            <a:schemeClr val="accent1"/>
+          </a:fillRef>
+          <a:effectRef idx="0">
+            <a:schemeClr val="accent1"/>
+          </a:effectRef>
+          <a:fontRef idx="minor">
+            <a:schemeClr val="lt1"/>
+          </a:fontRef>
+        </p:style>
+        <p:txBody>
+          <a:bodyPr rtlCol="0" anchor="ctr"/>
+          <a:lstStyle/>
+          <a:p>
+            <a:pPr algn="ctr"/>
+            <a:endParaRPr lang="en-US"/>
+          </a:p>
+        </p:txBody>
+      </p:sp>
+      <p:sp>
+        <p:nvSpPr>
+          <p:cNvPr id="24" name="Rectangle 23">
+            <a:extLst>
+              <a:ext uri="{FF2B5EF4-FFF2-40B4-BE49-F238E27FC236}">
+                <a16:creationId xmlns:a16="http://schemas.microsoft.com/office/drawing/2014/main" id="{A7009A0A-BEF5-4EAC-AF15-E4F9F002E239}"/>
+              </a:ext>
+              <a:ext uri="{C183D7F6-B498-43B3-948B-1728B52AA6E4}">
+                <adec:decorative xmlns:adec="http://schemas.microsoft.com/office/drawing/2017/decorative" val="1"/>
+              </a:ext>
+            </a:extLst>
+          </p:cNvPr>
+          <p:cNvSpPr>
+            <a:spLocks noGrp="1" noRot="1" noChangeAspect="1" noMove="1" noResize="1" noEditPoints="1" noAdjustHandles="1" noChangeArrowheads="1" noChangeShapeType="1" noTextEdit="1"/>
+          </p:cNvSpPr>
+          <p:nvPr>
+            <p:extLst>
+              <p:ext uri="{386F3935-93C4-4BCD-93E2-E3B085C9AB24}">
+                <p16:designElem xmlns:p16="http://schemas.microsoft.com/office/powerpoint/2015/main" val="1"/>
+              </p:ext>
+            </p:extLst>
+          </p:nvPr>
+        </p:nvSpPr>
+        <p:spPr>
+          <a:xfrm flipH="1">
+            <a:off x="-3" y="-1"/>
+            <a:ext cx="12192002" cy="1574311"/>
+          </a:xfrm>
+          <a:prstGeom prst="rect">
+            <a:avLst/>
+          </a:prstGeom>
+          <a:gradFill>
+            <a:gsLst>
+              <a:gs pos="0">
+                <a:srgbClr val="000000">
+                  <a:alpha val="63000"/>
+                </a:srgbClr>
+              </a:gs>
+              <a:gs pos="78000">
+                <a:schemeClr val="accent1">
+                  <a:alpha val="15000"/>
+                </a:schemeClr>
+              </a:gs>
+            </a:gsLst>
+            <a:lin ang="15600000" scaled="0"/>
+          </a:gradFill>
+          <a:ln>
+            <a:noFill/>
+          </a:ln>
+        </p:spPr>
+        <p:style>
+          <a:lnRef idx="2">
+            <a:schemeClr val="accent1">
+              <a:shade val="50000"/>
+            </a:schemeClr>
+          </a:lnRef>
+          <a:fillRef idx="1">
+            <a:schemeClr val="accent1"/>
+          </a:fillRef>
+          <a:effectRef idx="0">
+            <a:schemeClr val="accent1"/>
+          </a:effectRef>
+          <a:fontRef idx="minor">
+            <a:schemeClr val="lt1"/>
+          </a:fontRef>
+        </p:style>
+        <p:txBody>
+          <a:bodyPr rtlCol="0" anchor="ctr"/>
+          <a:lstStyle/>
+          <a:p>
+            <a:pPr algn="ctr"/>
+            <a:endParaRPr lang="en-US"/>
+          </a:p>
+        </p:txBody>
+      </p:sp>
       <p:sp>
         <p:nvSpPr>
           <p:cNvPr id="7" name="Title 6">
@@ -6952,14 +11477,79 @@
             <p:ph type="title"/>
           </p:nvPr>
         </p:nvSpPr>
-        <p:spPr/>
-        <p:txBody>
-          <a:bodyPr/>
-          <a:lstStyle/>
-          <a:p>
-            <a:r>
-              <a:rPr lang="en-US" dirty="0"/>
+        <p:spPr>
+          <a:xfrm>
+            <a:off x="699713" y="248038"/>
+            <a:ext cx="7063721" cy="1159200"/>
+          </a:xfrm>
+        </p:spPr>
+        <p:txBody>
+          <a:bodyPr vert="horz" lIns="91440" tIns="45720" rIns="91440" bIns="45720" rtlCol="0" anchor="ctr">
+            <a:normAutofit/>
+          </a:bodyPr>
+          <a:lstStyle/>
+          <a:p>
+            <a:r>
+              <a:rPr lang="en-US" sz="4000" kern="1200">
+                <a:solidFill>
+                  <a:srgbClr val="FFFFFF"/>
+                </a:solidFill>
+                <a:latin typeface="+mj-lt"/>
+                <a:ea typeface="+mj-ea"/>
+                <a:cs typeface="+mj-cs"/>
+              </a:rPr>
               <a:t>So What?</a:t>
+            </a:r>
+          </a:p>
+        </p:txBody>
+      </p:sp>
+      <p:sp>
+        <p:nvSpPr>
+          <p:cNvPr id="13" name="TextBox 12">
+            <a:extLst>
+              <a:ext uri="{FF2B5EF4-FFF2-40B4-BE49-F238E27FC236}">
+                <a16:creationId xmlns:a16="http://schemas.microsoft.com/office/drawing/2014/main" id="{17A05547-ABD2-3935-EED5-C5CBCD757B9D}"/>
+              </a:ext>
+            </a:extLst>
+          </p:cNvPr>
+          <p:cNvSpPr txBox="1">
+            <a:spLocks/>
+          </p:cNvSpPr>
+          <p:nvPr/>
+        </p:nvSpPr>
+        <p:spPr>
+          <a:xfrm>
+            <a:off x="8572499" y="390832"/>
+            <a:ext cx="3233585" cy="873612"/>
+          </a:xfrm>
+          <a:prstGeom prst="rect">
+            <a:avLst/>
+          </a:prstGeom>
+        </p:spPr>
+        <p:txBody>
+          <a:bodyPr vert="horz" lIns="91440" tIns="45720" rIns="91440" bIns="45720" rtlCol="0" anchor="ctr">
+            <a:normAutofit/>
+          </a:bodyPr>
+          <a:lstStyle/>
+          <a:p>
+            <a:pPr>
+              <a:lnSpc>
+                <a:spcPct val="90000"/>
+              </a:lnSpc>
+              <a:spcBef>
+                <a:spcPts val="1000"/>
+              </a:spcBef>
+            </a:pPr>
+            <a:r>
+              <a:rPr lang="en-US" sz="1700" kern="1200">
+                <a:solidFill>
+                  <a:srgbClr val="FFFFFF"/>
+                </a:solidFill>
+                <a:latin typeface="+mn-lt"/>
+                <a:ea typeface="+mn-ea"/>
+                <a:cs typeface="+mn-cs"/>
+              </a:rPr>
+              <a:t>Figure 3: Revenue per Capita vs Total Revenue: Weak positive correlation</a:t>
             </a:r>
           </a:p>
         </p:txBody>
@@ -6994,52 +11584,14 @@
         </p:blipFill>
         <p:spPr>
           <a:xfrm>
-            <a:off x="2322010" y="1690688"/>
-            <a:ext cx="7547979" cy="4534266"/>
+            <a:off x="2385870" y="1966293"/>
+            <a:ext cx="7420259" cy="4452160"/>
           </a:xfrm>
           <a:prstGeom prst="rect">
             <a:avLst/>
           </a:prstGeom>
         </p:spPr>
       </p:pic>
-      <p:sp>
-        <p:nvSpPr>
-          <p:cNvPr id="13" name="TextBox 12">
-            <a:extLst>
-              <a:ext uri="{FF2B5EF4-FFF2-40B4-BE49-F238E27FC236}">
-                <a16:creationId xmlns:a16="http://schemas.microsoft.com/office/drawing/2014/main" id="{17A05547-ABD2-3935-EED5-C5CBCD757B9D}"/>
-              </a:ext>
-            </a:extLst>
-          </p:cNvPr>
-          <p:cNvSpPr txBox="1">
-            <a:spLocks/>
-          </p:cNvSpPr>
-          <p:nvPr/>
-        </p:nvSpPr>
-        <p:spPr>
-          <a:xfrm>
-            <a:off x="2425743" y="6224954"/>
-            <a:ext cx="7340536" cy="369332"/>
-          </a:xfrm>
-          <a:prstGeom prst="rect">
-            <a:avLst/>
-          </a:prstGeom>
-          <a:noFill/>
-        </p:spPr>
-        <p:txBody>
-          <a:bodyPr wrap="none" rtlCol="0">
-            <a:spAutoFit/>
-          </a:bodyPr>
-          <a:lstStyle/>
-          <a:p>
-            <a:pPr algn="ctr"/>
-            <a:r>
-              <a:rPr lang="en-US" dirty="0"/>
-              <a:t>Figure 3: Revenue per Capita vs Total Revenue: Weak positive correlation</a:t>
-            </a:r>
-          </a:p>
-        </p:txBody>
-      </p:sp>
     </p:spTree>
     <p:extLst>
       <p:ext uri="{BB962C8B-B14F-4D97-AF65-F5344CB8AC3E}">
@@ -7056,6 +11608,21 @@
 <file path=ppt/slides/slide9.xml><?xml version="1.0" encoding="utf-8"?>
 <p:sld xmlns:a="http://schemas.openxmlformats.org/drawingml/2006/main" xmlns:r="http://schemas.openxmlformats.org/officeDocument/2006/relationships" xmlns:p="http://schemas.openxmlformats.org/presentationml/2006/main">
   <p:cSld>
+    <p:bg>
+      <p:bgPr>
+        <a:blipFill dpi="0" rotWithShape="1">
+          <a:blip r:embed="rId2">
+            <a:alphaModFix amt="15000"/>
+            <a:lum/>
+          </a:blip>
+          <a:srcRect/>
+          <a:stretch>
+            <a:fillRect/>
+          </a:stretch>
+        </a:blipFill>
+        <a:effectLst/>
+      </p:bgPr>
+    </p:bg>
     <p:spTree>
       <p:nvGrpSpPr>
         <p:cNvPr id="1" name="">
@@ -7908,4 +12475,47 @@
     </a:ext>
   </a:extLst>
 </a:theme>
+</file>
+
+<file path=ppt/theme/themeOverride1.xml><?xml version="1.0" encoding="utf-8"?>
+<a:themeOverride xmlns:a="http://schemas.openxmlformats.org/drawingml/2006/main">
+  <a:clrScheme name="Office">
+    <a:dk1>
+      <a:sysClr val="windowText" lastClr="000000"/>
+    </a:dk1>
+    <a:lt1>
+      <a:sysClr val="window" lastClr="FFFFFF"/>
+    </a:lt1>
+    <a:dk2>
+      <a:srgbClr val="0E2841"/>
+    </a:dk2>
+    <a:lt2>
+      <a:srgbClr val="E8E8E8"/>
+    </a:lt2>
+    <a:accent1>
+      <a:srgbClr val="156082"/>
+    </a:accent1>
+    <a:accent2>
+      <a:srgbClr val="E97132"/>
+    </a:accent2>
+    <a:accent3>
+      <a:srgbClr val="196B24"/>
+    </a:accent3>
+    <a:accent4>
+      <a:srgbClr val="0F9ED5"/>
+    </a:accent4>
+    <a:accent5>
+      <a:srgbClr val="A02B93"/>
+    </a:accent5>
+    <a:accent6>
+      <a:srgbClr val="4EA72E"/>
+    </a:accent6>
+    <a:hlink>
+      <a:srgbClr val="467886"/>
+    </a:hlink>
+    <a:folHlink>
+      <a:srgbClr val="96607D"/>
+    </a:folHlink>
+  </a:clrScheme>
+</a:themeOverride>
 </file>
--- a/week-04/Pham_liquor_sales_presentation.pptx
+++ b/week-04/Pham_liquor_sales_presentation.pptx
@@ -524,7 +524,16 @@
           <a:bodyPr/>
           <a:lstStyle/>
           <a:p>
-            <a:endParaRPr lang="en-US" dirty="0"/>
+            <a:r>
+              <a:rPr lang="en-US" dirty="0"/>
+              <a:t>Name</a:t>
+            </a:r>
+          </a:p>
+          <a:p>
+            <a:r>
+              <a:rPr lang="en-US" dirty="0"/>
+              <a:t>Aspiring Data Analyst at Year Up United – Chicago location</a:t>
+            </a:r>
           </a:p>
         </p:txBody>
       </p:sp>
@@ -555,6 +564,983 @@
     <p:extLst>
       <p:ext uri="{BB962C8B-B14F-4D97-AF65-F5344CB8AC3E}">
         <p14:creationId xmlns:p14="http://schemas.microsoft.com/office/powerpoint/2010/main" val="3788611534"/>
+      </p:ext>
+    </p:extLst>
+  </p:cSld>
+  <p:clrMapOvr>
+    <a:masterClrMapping/>
+  </p:clrMapOvr>
+</p:notes>
+</file>
+
+<file path=ppt/notesSlides/notesSlide10.xml><?xml version="1.0" encoding="utf-8"?>
+<p:notes xmlns:a="http://schemas.openxmlformats.org/drawingml/2006/main" xmlns:r="http://schemas.openxmlformats.org/officeDocument/2006/relationships" xmlns:p="http://schemas.openxmlformats.org/presentationml/2006/main">
+  <p:cSld>
+    <p:spTree>
+      <p:nvGrpSpPr>
+        <p:cNvPr id="1" name=""/>
+        <p:cNvGrpSpPr/>
+        <p:nvPr/>
+      </p:nvGrpSpPr>
+      <p:grpSpPr>
+        <a:xfrm>
+          <a:off x="0" y="0"/>
+          <a:ext cx="0" cy="0"/>
+          <a:chOff x="0" y="0"/>
+          <a:chExt cx="0" cy="0"/>
+        </a:xfrm>
+      </p:grpSpPr>
+      <p:sp>
+        <p:nvSpPr>
+          <p:cNvPr id="2" name="Slide Image Placeholder 1"/>
+          <p:cNvSpPr>
+            <a:spLocks noGrp="1" noRot="1" noChangeAspect="1"/>
+          </p:cNvSpPr>
+          <p:nvPr>
+            <p:ph type="sldImg"/>
+          </p:nvPr>
+        </p:nvSpPr>
+        <p:spPr/>
+      </p:sp>
+      <p:sp>
+        <p:nvSpPr>
+          <p:cNvPr id="3" name="Notes Placeholder 2"/>
+          <p:cNvSpPr>
+            <a:spLocks noGrp="1"/>
+          </p:cNvSpPr>
+          <p:nvPr>
+            <p:ph type="body" idx="1"/>
+          </p:nvPr>
+        </p:nvSpPr>
+        <p:spPr/>
+        <p:txBody>
+          <a:bodyPr/>
+          <a:lstStyle/>
+          <a:p>
+            <a:r>
+              <a:rPr lang="en-US" dirty="0"/>
+              <a:t>Constellation products did best in Whiskies and Black Velvet (give numbers)</a:t>
+            </a:r>
+          </a:p>
+        </p:txBody>
+      </p:sp>
+      <p:sp>
+        <p:nvSpPr>
+          <p:cNvPr id="4" name="Slide Number Placeholder 3"/>
+          <p:cNvSpPr>
+            <a:spLocks noGrp="1"/>
+          </p:cNvSpPr>
+          <p:nvPr>
+            <p:ph type="sldNum" sz="quarter" idx="5"/>
+          </p:nvPr>
+        </p:nvSpPr>
+        <p:spPr/>
+        <p:txBody>
+          <a:bodyPr/>
+          <a:lstStyle/>
+          <a:p>
+            <a:fld id="{9A18230D-6974-4A26-8365-62E356C4785F}" type="slidenum">
+              <a:rPr lang="en-US" smtClean="0"/>
+              <a:t>10</a:t>
+            </a:fld>
+            <a:endParaRPr lang="en-US"/>
+          </a:p>
+        </p:txBody>
+      </p:sp>
+    </p:spTree>
+    <p:extLst>
+      <p:ext uri="{BB962C8B-B14F-4D97-AF65-F5344CB8AC3E}">
+        <p14:creationId xmlns:p14="http://schemas.microsoft.com/office/powerpoint/2010/main" val="2649187972"/>
+      </p:ext>
+    </p:extLst>
+  </p:cSld>
+  <p:clrMapOvr>
+    <a:masterClrMapping/>
+  </p:clrMapOvr>
+</p:notes>
+</file>
+
+<file path=ppt/notesSlides/notesSlide11.xml><?xml version="1.0" encoding="utf-8"?>
+<p:notes xmlns:a="http://schemas.openxmlformats.org/drawingml/2006/main" xmlns:r="http://schemas.openxmlformats.org/officeDocument/2006/relationships" xmlns:p="http://schemas.openxmlformats.org/presentationml/2006/main">
+  <p:cSld>
+    <p:spTree>
+      <p:nvGrpSpPr>
+        <p:cNvPr id="1" name=""/>
+        <p:cNvGrpSpPr/>
+        <p:nvPr/>
+      </p:nvGrpSpPr>
+      <p:grpSpPr>
+        <a:xfrm>
+          <a:off x="0" y="0"/>
+          <a:ext cx="0" cy="0"/>
+          <a:chOff x="0" y="0"/>
+          <a:chExt cx="0" cy="0"/>
+        </a:xfrm>
+      </p:grpSpPr>
+      <p:sp>
+        <p:nvSpPr>
+          <p:cNvPr id="2" name="Slide Image Placeholder 1"/>
+          <p:cNvSpPr>
+            <a:spLocks noGrp="1" noRot="1" noChangeAspect="1"/>
+          </p:cNvSpPr>
+          <p:nvPr>
+            <p:ph type="sldImg"/>
+          </p:nvPr>
+        </p:nvSpPr>
+        <p:spPr/>
+      </p:sp>
+      <p:sp>
+        <p:nvSpPr>
+          <p:cNvPr id="3" name="Notes Placeholder 2"/>
+          <p:cNvSpPr>
+            <a:spLocks noGrp="1"/>
+          </p:cNvSpPr>
+          <p:nvPr>
+            <p:ph type="body" idx="1"/>
+          </p:nvPr>
+        </p:nvSpPr>
+        <p:spPr/>
+        <p:txBody>
+          <a:bodyPr/>
+          <a:lstStyle/>
+          <a:p>
+            <a:r>
+              <a:rPr lang="en-US" dirty="0"/>
+              <a:t>Black Velvet</a:t>
+            </a:r>
+          </a:p>
+          <a:p>
+            <a:pPr marL="0" marR="0" lvl="0" indent="0" algn="l" defTabSz="914400" rtl="0" eaLnBrk="1" fontAlgn="auto" latinLnBrk="0" hangingPunct="1">
+              <a:lnSpc>
+                <a:spcPct val="100000"/>
+              </a:lnSpc>
+              <a:spcBef>
+                <a:spcPts val="0"/>
+              </a:spcBef>
+              <a:spcAft>
+                <a:spcPts val="0"/>
+              </a:spcAft>
+              <a:buClrTx/>
+              <a:buSzTx/>
+              <a:buFontTx/>
+              <a:buNone/>
+              <a:tabLst/>
+              <a:defRPr/>
+            </a:pPr>
+            <a:r>
+              <a:rPr lang="en-US" dirty="0"/>
+              <a:t>Makes up 99.7% of whiskey sales.</a:t>
+            </a:r>
+          </a:p>
+          <a:p>
+            <a:r>
+              <a:rPr lang="en-US" dirty="0"/>
+              <a:t>#1 leading product among all other competitors</a:t>
+            </a:r>
+          </a:p>
+          <a:p>
+            <a:endParaRPr lang="en-US" dirty="0"/>
+          </a:p>
+          <a:p>
+            <a:r>
+              <a:rPr lang="en-US" dirty="0"/>
+              <a:t>“Something you can crack open without worry about cost and being around friends and family.”</a:t>
+            </a:r>
+          </a:p>
+          <a:p>
+            <a:endParaRPr lang="en-US" dirty="0"/>
+          </a:p>
+          <a:p>
+            <a:endParaRPr lang="en-US" dirty="0"/>
+          </a:p>
+          <a:p>
+            <a:r>
+              <a:rPr lang="en-US" dirty="0"/>
+              <a:t>We can set the pace, we can widen the gap, but we will own the finish line</a:t>
+            </a:r>
+          </a:p>
+          <a:p>
+            <a:r>
+              <a:rPr lang="en-US" dirty="0"/>
+              <a:t>(within the whiskey industry</a:t>
+            </a:r>
+          </a:p>
+        </p:txBody>
+      </p:sp>
+      <p:sp>
+        <p:nvSpPr>
+          <p:cNvPr id="4" name="Slide Number Placeholder 3"/>
+          <p:cNvSpPr>
+            <a:spLocks noGrp="1"/>
+          </p:cNvSpPr>
+          <p:nvPr>
+            <p:ph type="sldNum" sz="quarter" idx="5"/>
+          </p:nvPr>
+        </p:nvSpPr>
+        <p:spPr/>
+        <p:txBody>
+          <a:bodyPr/>
+          <a:lstStyle/>
+          <a:p>
+            <a:fld id="{9A18230D-6974-4A26-8365-62E356C4785F}" type="slidenum">
+              <a:rPr lang="en-US" smtClean="0"/>
+              <a:t>11</a:t>
+            </a:fld>
+            <a:endParaRPr lang="en-US"/>
+          </a:p>
+        </p:txBody>
+      </p:sp>
+    </p:spTree>
+    <p:extLst>
+      <p:ext uri="{BB962C8B-B14F-4D97-AF65-F5344CB8AC3E}">
+        <p14:creationId xmlns:p14="http://schemas.microsoft.com/office/powerpoint/2010/main" val="3511772830"/>
+      </p:ext>
+    </p:extLst>
+  </p:cSld>
+  <p:clrMapOvr>
+    <a:masterClrMapping/>
+  </p:clrMapOvr>
+</p:notes>
+</file>
+
+<file path=ppt/notesSlides/notesSlide12.xml><?xml version="1.0" encoding="utf-8"?>
+<p:notes xmlns:a="http://schemas.openxmlformats.org/drawingml/2006/main" xmlns:r="http://schemas.openxmlformats.org/officeDocument/2006/relationships" xmlns:p="http://schemas.openxmlformats.org/presentationml/2006/main">
+  <p:cSld>
+    <p:spTree>
+      <p:nvGrpSpPr>
+        <p:cNvPr id="1" name=""/>
+        <p:cNvGrpSpPr/>
+        <p:nvPr/>
+      </p:nvGrpSpPr>
+      <p:grpSpPr>
+        <a:xfrm>
+          <a:off x="0" y="0"/>
+          <a:ext cx="0" cy="0"/>
+          <a:chOff x="0" y="0"/>
+          <a:chExt cx="0" cy="0"/>
+        </a:xfrm>
+      </p:grpSpPr>
+      <p:sp>
+        <p:nvSpPr>
+          <p:cNvPr id="2" name="Slide Image Placeholder 1"/>
+          <p:cNvSpPr>
+            <a:spLocks noGrp="1" noRot="1" noChangeAspect="1"/>
+          </p:cNvSpPr>
+          <p:nvPr>
+            <p:ph type="sldImg"/>
+          </p:nvPr>
+        </p:nvSpPr>
+        <p:spPr/>
+      </p:sp>
+      <p:sp>
+        <p:nvSpPr>
+          <p:cNvPr id="3" name="Notes Placeholder 2"/>
+          <p:cNvSpPr>
+            <a:spLocks noGrp="1"/>
+          </p:cNvSpPr>
+          <p:nvPr>
+            <p:ph type="body" idx="1"/>
+          </p:nvPr>
+        </p:nvSpPr>
+        <p:spPr/>
+        <p:txBody>
+          <a:bodyPr/>
+          <a:lstStyle/>
+          <a:p>
+            <a:r>
+              <a:rPr lang="en-US" dirty="0"/>
+              <a:t>Weakness</a:t>
+            </a:r>
+          </a:p>
+          <a:p>
+            <a:r>
+              <a:rPr lang="en-US" dirty="0"/>
+              <a:t>Lowest transaction</a:t>
+            </a:r>
+          </a:p>
+          <a:p>
+            <a:r>
+              <a:rPr lang="en-US" dirty="0"/>
+              <a:t>No focus around tequila market</a:t>
+            </a:r>
+          </a:p>
+          <a:p>
+            <a:endParaRPr lang="en-US" dirty="0"/>
+          </a:p>
+          <a:p>
+            <a:r>
+              <a:rPr lang="en-US" dirty="0"/>
+              <a:t>Maybe expensive, or a potential market</a:t>
+            </a:r>
+          </a:p>
+          <a:p>
+            <a:r>
+              <a:rPr lang="en-US" dirty="0"/>
+              <a:t>Regardless, still risky but worth a look into because</a:t>
+            </a:r>
+          </a:p>
+          <a:p>
+            <a:endParaRPr lang="en-US" dirty="0"/>
+          </a:p>
+          <a:p>
+            <a:r>
+              <a:rPr lang="en-US" dirty="0"/>
+              <a:t>THINGS CAN CHANGE</a:t>
+            </a:r>
+          </a:p>
+        </p:txBody>
+      </p:sp>
+      <p:sp>
+        <p:nvSpPr>
+          <p:cNvPr id="4" name="Slide Number Placeholder 3"/>
+          <p:cNvSpPr>
+            <a:spLocks noGrp="1"/>
+          </p:cNvSpPr>
+          <p:nvPr>
+            <p:ph type="sldNum" sz="quarter" idx="5"/>
+          </p:nvPr>
+        </p:nvSpPr>
+        <p:spPr/>
+        <p:txBody>
+          <a:bodyPr/>
+          <a:lstStyle/>
+          <a:p>
+            <a:fld id="{9A18230D-6974-4A26-8365-62E356C4785F}" type="slidenum">
+              <a:rPr lang="en-US" smtClean="0"/>
+              <a:t>12</a:t>
+            </a:fld>
+            <a:endParaRPr lang="en-US"/>
+          </a:p>
+        </p:txBody>
+      </p:sp>
+    </p:spTree>
+    <p:extLst>
+      <p:ext uri="{BB962C8B-B14F-4D97-AF65-F5344CB8AC3E}">
+        <p14:creationId xmlns:p14="http://schemas.microsoft.com/office/powerpoint/2010/main" val="363336380"/>
+      </p:ext>
+    </p:extLst>
+  </p:cSld>
+  <p:clrMapOvr>
+    <a:masterClrMapping/>
+  </p:clrMapOvr>
+</p:notes>
+</file>
+
+<file path=ppt/notesSlides/notesSlide13.xml><?xml version="1.0" encoding="utf-8"?>
+<p:notes xmlns:a="http://schemas.openxmlformats.org/drawingml/2006/main" xmlns:r="http://schemas.openxmlformats.org/officeDocument/2006/relationships" xmlns:p="http://schemas.openxmlformats.org/presentationml/2006/main">
+  <p:cSld>
+    <p:spTree>
+      <p:nvGrpSpPr>
+        <p:cNvPr id="1" name=""/>
+        <p:cNvGrpSpPr/>
+        <p:nvPr/>
+      </p:nvGrpSpPr>
+      <p:grpSpPr>
+        <a:xfrm>
+          <a:off x="0" y="0"/>
+          <a:ext cx="0" cy="0"/>
+          <a:chOff x="0" y="0"/>
+          <a:chExt cx="0" cy="0"/>
+        </a:xfrm>
+      </p:grpSpPr>
+      <p:sp>
+        <p:nvSpPr>
+          <p:cNvPr id="2" name="Slide Image Placeholder 1"/>
+          <p:cNvSpPr>
+            <a:spLocks noGrp="1" noRot="1" noChangeAspect="1"/>
+          </p:cNvSpPr>
+          <p:nvPr>
+            <p:ph type="sldImg"/>
+          </p:nvPr>
+        </p:nvSpPr>
+        <p:spPr/>
+      </p:sp>
+      <p:sp>
+        <p:nvSpPr>
+          <p:cNvPr id="3" name="Notes Placeholder 2"/>
+          <p:cNvSpPr>
+            <a:spLocks noGrp="1"/>
+          </p:cNvSpPr>
+          <p:nvPr>
+            <p:ph type="body" idx="1"/>
+          </p:nvPr>
+        </p:nvSpPr>
+        <p:spPr/>
+        <p:txBody>
+          <a:bodyPr/>
+          <a:lstStyle/>
+          <a:p>
+            <a:r>
+              <a:rPr lang="en-US" dirty="0"/>
+              <a:t>2</a:t>
+            </a:r>
+            <a:r>
+              <a:rPr lang="en-US" baseline="30000" dirty="0"/>
+              <a:t>nd</a:t>
+            </a:r>
+            <a:r>
+              <a:rPr lang="en-US" dirty="0"/>
+              <a:t> strongest market: Vodka</a:t>
+            </a:r>
+          </a:p>
+          <a:p>
+            <a:r>
+              <a:rPr lang="en-US" dirty="0"/>
+              <a:t>Within top 10</a:t>
+            </a:r>
+          </a:p>
+          <a:p>
+            <a:r>
+              <a:rPr lang="en-US" dirty="0"/>
+              <a:t>Less than 3% of the market</a:t>
+            </a:r>
+          </a:p>
+          <a:p>
+            <a:r>
+              <a:rPr lang="en-US" dirty="0"/>
+              <a:t>$2.3M in a market over $75M</a:t>
+            </a:r>
+          </a:p>
+        </p:txBody>
+      </p:sp>
+      <p:sp>
+        <p:nvSpPr>
+          <p:cNvPr id="4" name="Slide Number Placeholder 3"/>
+          <p:cNvSpPr>
+            <a:spLocks noGrp="1"/>
+          </p:cNvSpPr>
+          <p:nvPr>
+            <p:ph type="sldNum" sz="quarter" idx="5"/>
+          </p:nvPr>
+        </p:nvSpPr>
+        <p:spPr/>
+        <p:txBody>
+          <a:bodyPr/>
+          <a:lstStyle/>
+          <a:p>
+            <a:fld id="{9A18230D-6974-4A26-8365-62E356C4785F}" type="slidenum">
+              <a:rPr lang="en-US" smtClean="0"/>
+              <a:t>13</a:t>
+            </a:fld>
+            <a:endParaRPr lang="en-US"/>
+          </a:p>
+        </p:txBody>
+      </p:sp>
+    </p:spTree>
+    <p:extLst>
+      <p:ext uri="{BB962C8B-B14F-4D97-AF65-F5344CB8AC3E}">
+        <p14:creationId xmlns:p14="http://schemas.microsoft.com/office/powerpoint/2010/main" val="2309977788"/>
+      </p:ext>
+    </p:extLst>
+  </p:cSld>
+  <p:clrMapOvr>
+    <a:masterClrMapping/>
+  </p:clrMapOvr>
+</p:notes>
+</file>
+
+<file path=ppt/notesSlides/notesSlide14.xml><?xml version="1.0" encoding="utf-8"?>
+<p:notes xmlns:a="http://schemas.openxmlformats.org/drawingml/2006/main" xmlns:r="http://schemas.openxmlformats.org/officeDocument/2006/relationships" xmlns:p="http://schemas.openxmlformats.org/presentationml/2006/main">
+  <p:cSld>
+    <p:spTree>
+      <p:nvGrpSpPr>
+        <p:cNvPr id="1" name=""/>
+        <p:cNvGrpSpPr/>
+        <p:nvPr/>
+      </p:nvGrpSpPr>
+      <p:grpSpPr>
+        <a:xfrm>
+          <a:off x="0" y="0"/>
+          <a:ext cx="0" cy="0"/>
+          <a:chOff x="0" y="0"/>
+          <a:chExt cx="0" cy="0"/>
+        </a:xfrm>
+      </p:grpSpPr>
+      <p:sp>
+        <p:nvSpPr>
+          <p:cNvPr id="2" name="Slide Image Placeholder 1"/>
+          <p:cNvSpPr>
+            <a:spLocks noGrp="1" noRot="1" noChangeAspect="1"/>
+          </p:cNvSpPr>
+          <p:nvPr>
+            <p:ph type="sldImg"/>
+          </p:nvPr>
+        </p:nvSpPr>
+        <p:spPr/>
+      </p:sp>
+      <p:sp>
+        <p:nvSpPr>
+          <p:cNvPr id="3" name="Notes Placeholder 2"/>
+          <p:cNvSpPr>
+            <a:spLocks noGrp="1"/>
+          </p:cNvSpPr>
+          <p:nvPr>
+            <p:ph type="body" idx="1"/>
+          </p:nvPr>
+        </p:nvSpPr>
+        <p:spPr/>
+        <p:txBody>
+          <a:bodyPr/>
+          <a:lstStyle/>
+          <a:p>
+            <a:r>
+              <a:rPr lang="en-US" dirty="0"/>
+              <a:t>Brandy, Top 5 in market</a:t>
+            </a:r>
+          </a:p>
+          <a:p>
+            <a:r>
+              <a:rPr lang="en-US" dirty="0"/>
+              <a:t>10%, $1.39M out of $13M</a:t>
+            </a:r>
+          </a:p>
+          <a:p>
+            <a:r>
+              <a:rPr lang="en-US" dirty="0"/>
+              <a:t>Doing better in terms of market share, but still least driving in revenue.</a:t>
+            </a:r>
+          </a:p>
+          <a:p>
+            <a:r>
+              <a:rPr lang="en-US" dirty="0"/>
+              <a:t>We can see our influence, yet it does not have a big impact as Whiskey does.</a:t>
+            </a:r>
+          </a:p>
+        </p:txBody>
+      </p:sp>
+      <p:sp>
+        <p:nvSpPr>
+          <p:cNvPr id="4" name="Slide Number Placeholder 3"/>
+          <p:cNvSpPr>
+            <a:spLocks noGrp="1"/>
+          </p:cNvSpPr>
+          <p:nvPr>
+            <p:ph type="sldNum" sz="quarter" idx="5"/>
+          </p:nvPr>
+        </p:nvSpPr>
+        <p:spPr/>
+        <p:txBody>
+          <a:bodyPr/>
+          <a:lstStyle/>
+          <a:p>
+            <a:fld id="{9A18230D-6974-4A26-8365-62E356C4785F}" type="slidenum">
+              <a:rPr lang="en-US" smtClean="0"/>
+              <a:t>14</a:t>
+            </a:fld>
+            <a:endParaRPr lang="en-US"/>
+          </a:p>
+        </p:txBody>
+      </p:sp>
+    </p:spTree>
+    <p:extLst>
+      <p:ext uri="{BB962C8B-B14F-4D97-AF65-F5344CB8AC3E}">
+        <p14:creationId xmlns:p14="http://schemas.microsoft.com/office/powerpoint/2010/main" val="1507671491"/>
+      </p:ext>
+    </p:extLst>
+  </p:cSld>
+  <p:clrMapOvr>
+    <a:masterClrMapping/>
+  </p:clrMapOvr>
+</p:notes>
+</file>
+
+<file path=ppt/notesSlides/notesSlide15.xml><?xml version="1.0" encoding="utf-8"?>
+<p:notes xmlns:a="http://schemas.openxmlformats.org/drawingml/2006/main" xmlns:r="http://schemas.openxmlformats.org/officeDocument/2006/relationships" xmlns:p="http://schemas.openxmlformats.org/presentationml/2006/main">
+  <p:cSld>
+    <p:spTree>
+      <p:nvGrpSpPr>
+        <p:cNvPr id="1" name=""/>
+        <p:cNvGrpSpPr/>
+        <p:nvPr/>
+      </p:nvGrpSpPr>
+      <p:grpSpPr>
+        <a:xfrm>
+          <a:off x="0" y="0"/>
+          <a:ext cx="0" cy="0"/>
+          <a:chOff x="0" y="0"/>
+          <a:chExt cx="0" cy="0"/>
+        </a:xfrm>
+      </p:grpSpPr>
+      <p:sp>
+        <p:nvSpPr>
+          <p:cNvPr id="2" name="Slide Image Placeholder 1"/>
+          <p:cNvSpPr>
+            <a:spLocks noGrp="1" noRot="1" noChangeAspect="1"/>
+          </p:cNvSpPr>
+          <p:nvPr>
+            <p:ph type="sldImg"/>
+          </p:nvPr>
+        </p:nvSpPr>
+        <p:spPr/>
+      </p:sp>
+      <p:sp>
+        <p:nvSpPr>
+          <p:cNvPr id="3" name="Notes Placeholder 2"/>
+          <p:cNvSpPr>
+            <a:spLocks noGrp="1"/>
+          </p:cNvSpPr>
+          <p:nvPr>
+            <p:ph type="body" idx="1"/>
+          </p:nvPr>
+        </p:nvSpPr>
+        <p:spPr/>
+        <p:txBody>
+          <a:bodyPr/>
+          <a:lstStyle/>
+          <a:p>
+            <a:r>
+              <a:rPr lang="en-US" dirty="0"/>
+              <a:t>Explore the Beer market and Wine market to see improvement</a:t>
+            </a:r>
+          </a:p>
+          <a:p>
+            <a:r>
+              <a:rPr lang="en-US" dirty="0"/>
+              <a:t>	Acquisition of Modelo to enter the beer market in 2013</a:t>
+            </a:r>
+          </a:p>
+          <a:p>
+            <a:endParaRPr lang="en-US" dirty="0"/>
+          </a:p>
+          <a:p>
+            <a:r>
+              <a:rPr lang="en-US" dirty="0"/>
+              <a:t>Focus on depth rather than breadth; we already captured Iowa.</a:t>
+            </a:r>
+          </a:p>
+          <a:p>
+            <a:endParaRPr lang="en-US" dirty="0"/>
+          </a:p>
+          <a:p>
+            <a:r>
+              <a:rPr lang="en-US" dirty="0"/>
+              <a:t>Maximize spending with spenders to achieve higher spending</a:t>
+            </a:r>
+          </a:p>
+          <a:p>
+            <a:pPr lvl="1"/>
+            <a:r>
+              <a:rPr lang="en-US" dirty="0"/>
+              <a:t>Potential global revenue growth </a:t>
+            </a:r>
+            <a:r>
+              <a:rPr lang="en-US" b="1" u="sng" dirty="0">
+                <a:solidFill>
+                  <a:srgbClr val="00B050"/>
+                </a:solidFill>
+              </a:rPr>
+              <a:t>over 100%</a:t>
+            </a:r>
+          </a:p>
+          <a:p>
+            <a:endParaRPr lang="en-US" dirty="0"/>
+          </a:p>
+          <a:p>
+            <a:r>
+              <a:rPr lang="en-US" dirty="0"/>
+              <a:t>More budget towards researching and marketing Black Velvet and its variants; whisky industry</a:t>
+            </a:r>
+          </a:p>
+          <a:p>
+            <a:pPr lvl="1"/>
+            <a:r>
+              <a:rPr lang="en-US" dirty="0"/>
+              <a:t>Replicate its success among </a:t>
+            </a:r>
+            <a:r>
+              <a:rPr lang="en-US" dirty="0" err="1"/>
+              <a:t>Svedka</a:t>
+            </a:r>
+            <a:endParaRPr lang="en-US" dirty="0"/>
+          </a:p>
+          <a:p>
+            <a:pPr lvl="1"/>
+            <a:r>
+              <a:rPr lang="en-US" dirty="0"/>
+              <a:t>Make our products a staple in everyone’s home</a:t>
+            </a:r>
+          </a:p>
+          <a:p>
+            <a:pPr lvl="1"/>
+            <a:r>
+              <a:rPr lang="en-US" dirty="0"/>
+              <a:t>Enough so that young adults can enjoy it too once they’re legal</a:t>
+            </a:r>
+          </a:p>
+          <a:p>
+            <a:pPr lvl="1"/>
+            <a:r>
+              <a:rPr lang="en-US" dirty="0"/>
+              <a:t>May be expensive</a:t>
+            </a:r>
+          </a:p>
+          <a:p>
+            <a:endParaRPr lang="en-US" dirty="0"/>
+          </a:p>
+          <a:p>
+            <a:r>
+              <a:rPr lang="en-US" dirty="0"/>
+              <a:t>Reconsider Tequila pilot marketing or drop completely</a:t>
+            </a:r>
+          </a:p>
+          <a:p>
+            <a:endParaRPr lang="en-US" dirty="0"/>
+          </a:p>
+          <a:p>
+            <a:r>
+              <a:rPr lang="en-US" dirty="0"/>
+              <a:t>As with customer loyalty, make our brands </a:t>
+            </a:r>
+            <a:r>
+              <a:rPr lang="en-US" b="1" u="sng" dirty="0"/>
+              <a:t>worth reaching for</a:t>
+            </a:r>
+            <a:endParaRPr lang="en-US" dirty="0"/>
+          </a:p>
+        </p:txBody>
+      </p:sp>
+      <p:sp>
+        <p:nvSpPr>
+          <p:cNvPr id="4" name="Slide Number Placeholder 3"/>
+          <p:cNvSpPr>
+            <a:spLocks noGrp="1"/>
+          </p:cNvSpPr>
+          <p:nvPr>
+            <p:ph type="sldNum" sz="quarter" idx="5"/>
+          </p:nvPr>
+        </p:nvSpPr>
+        <p:spPr/>
+        <p:txBody>
+          <a:bodyPr/>
+          <a:lstStyle/>
+          <a:p>
+            <a:fld id="{9A18230D-6974-4A26-8365-62E356C4785F}" type="slidenum">
+              <a:rPr lang="en-US" smtClean="0"/>
+              <a:t>15</a:t>
+            </a:fld>
+            <a:endParaRPr lang="en-US"/>
+          </a:p>
+        </p:txBody>
+      </p:sp>
+    </p:spTree>
+    <p:extLst>
+      <p:ext uri="{BB962C8B-B14F-4D97-AF65-F5344CB8AC3E}">
+        <p14:creationId xmlns:p14="http://schemas.microsoft.com/office/powerpoint/2010/main" val="2836736160"/>
+      </p:ext>
+    </p:extLst>
+  </p:cSld>
+  <p:clrMapOvr>
+    <a:masterClrMapping/>
+  </p:clrMapOvr>
+</p:notes>
+</file>
+
+<file path=ppt/notesSlides/notesSlide16.xml><?xml version="1.0" encoding="utf-8"?>
+<p:notes xmlns:a="http://schemas.openxmlformats.org/drawingml/2006/main" xmlns:r="http://schemas.openxmlformats.org/officeDocument/2006/relationships" xmlns:p="http://schemas.openxmlformats.org/presentationml/2006/main">
+  <p:cSld>
+    <p:spTree>
+      <p:nvGrpSpPr>
+        <p:cNvPr id="1" name=""/>
+        <p:cNvGrpSpPr/>
+        <p:nvPr/>
+      </p:nvGrpSpPr>
+      <p:grpSpPr>
+        <a:xfrm>
+          <a:off x="0" y="0"/>
+          <a:ext cx="0" cy="0"/>
+          <a:chOff x="0" y="0"/>
+          <a:chExt cx="0" cy="0"/>
+        </a:xfrm>
+      </p:grpSpPr>
+      <p:sp>
+        <p:nvSpPr>
+          <p:cNvPr id="2" name="Slide Image Placeholder 1"/>
+          <p:cNvSpPr>
+            <a:spLocks noGrp="1" noRot="1" noChangeAspect="1"/>
+          </p:cNvSpPr>
+          <p:nvPr>
+            <p:ph type="sldImg"/>
+          </p:nvPr>
+        </p:nvSpPr>
+        <p:spPr/>
+      </p:sp>
+      <p:sp>
+        <p:nvSpPr>
+          <p:cNvPr id="3" name="Notes Placeholder 2"/>
+          <p:cNvSpPr>
+            <a:spLocks noGrp="1"/>
+          </p:cNvSpPr>
+          <p:nvPr>
+            <p:ph type="body" idx="1"/>
+          </p:nvPr>
+        </p:nvSpPr>
+        <p:spPr/>
+        <p:txBody>
+          <a:bodyPr/>
+          <a:lstStyle/>
+          <a:p>
+            <a:r>
+              <a:rPr lang="en-US" dirty="0"/>
+              <a:t>The risky proposition</a:t>
+            </a:r>
+          </a:p>
+          <a:p>
+            <a:endParaRPr lang="en-US" dirty="0"/>
+          </a:p>
+          <a:p>
+            <a:r>
+              <a:rPr lang="en-US" dirty="0"/>
+              <a:t>We sell off Black Velvet to enter the beer market through Modelo.</a:t>
+            </a:r>
+          </a:p>
+          <a:p>
+            <a:endParaRPr lang="en-US" dirty="0"/>
+          </a:p>
+          <a:p>
+            <a:r>
+              <a:rPr lang="en-US" dirty="0"/>
+              <a:t>Research that in 2013, Constellation acquired U.S rights to Modelo.</a:t>
+            </a:r>
+          </a:p>
+          <a:p>
+            <a:endParaRPr lang="en-US" dirty="0"/>
+          </a:p>
+          <a:p>
+            <a:r>
+              <a:rPr lang="en-US" dirty="0"/>
+              <a:t>Spirits vs Beer</a:t>
+            </a:r>
+          </a:p>
+          <a:p>
+            <a:endParaRPr lang="en-US" dirty="0"/>
+          </a:p>
+          <a:p>
+            <a:r>
+              <a:rPr lang="en-US" dirty="0"/>
+              <a:t>Thank </a:t>
+            </a:r>
+            <a:r>
+              <a:rPr lang="en-US" dirty="0" err="1"/>
+              <a:t>yous</a:t>
+            </a:r>
+            <a:endParaRPr lang="en-US" dirty="0"/>
+          </a:p>
+        </p:txBody>
+      </p:sp>
+      <p:sp>
+        <p:nvSpPr>
+          <p:cNvPr id="4" name="Slide Number Placeholder 3"/>
+          <p:cNvSpPr>
+            <a:spLocks noGrp="1"/>
+          </p:cNvSpPr>
+          <p:nvPr>
+            <p:ph type="sldNum" sz="quarter" idx="5"/>
+          </p:nvPr>
+        </p:nvSpPr>
+        <p:spPr/>
+        <p:txBody>
+          <a:bodyPr/>
+          <a:lstStyle/>
+          <a:p>
+            <a:fld id="{9A18230D-6974-4A26-8365-62E356C4785F}" type="slidenum">
+              <a:rPr lang="en-US" smtClean="0"/>
+              <a:t>16</a:t>
+            </a:fld>
+            <a:endParaRPr lang="en-US"/>
+          </a:p>
+        </p:txBody>
+      </p:sp>
+    </p:spTree>
+    <p:extLst>
+      <p:ext uri="{BB962C8B-B14F-4D97-AF65-F5344CB8AC3E}">
+        <p14:creationId xmlns:p14="http://schemas.microsoft.com/office/powerpoint/2010/main" val="249884296"/>
+      </p:ext>
+    </p:extLst>
+  </p:cSld>
+  <p:clrMapOvr>
+    <a:masterClrMapping/>
+  </p:clrMapOvr>
+</p:notes>
+</file>
+
+<file path=ppt/notesSlides/notesSlide17.xml><?xml version="1.0" encoding="utf-8"?>
+<p:notes xmlns:a="http://schemas.openxmlformats.org/drawingml/2006/main" xmlns:r="http://schemas.openxmlformats.org/officeDocument/2006/relationships" xmlns:p="http://schemas.openxmlformats.org/presentationml/2006/main">
+  <p:cSld>
+    <p:spTree>
+      <p:nvGrpSpPr>
+        <p:cNvPr id="1" name=""/>
+        <p:cNvGrpSpPr/>
+        <p:nvPr/>
+      </p:nvGrpSpPr>
+      <p:grpSpPr>
+        <a:xfrm>
+          <a:off x="0" y="0"/>
+          <a:ext cx="0" cy="0"/>
+          <a:chOff x="0" y="0"/>
+          <a:chExt cx="0" cy="0"/>
+        </a:xfrm>
+      </p:grpSpPr>
+      <p:sp>
+        <p:nvSpPr>
+          <p:cNvPr id="2" name="Slide Image Placeholder 1"/>
+          <p:cNvSpPr>
+            <a:spLocks noGrp="1" noRot="1" noChangeAspect="1"/>
+          </p:cNvSpPr>
+          <p:nvPr>
+            <p:ph type="sldImg"/>
+          </p:nvPr>
+        </p:nvSpPr>
+        <p:spPr/>
+      </p:sp>
+      <p:sp>
+        <p:nvSpPr>
+          <p:cNvPr id="3" name="Notes Placeholder 2"/>
+          <p:cNvSpPr>
+            <a:spLocks noGrp="1"/>
+          </p:cNvSpPr>
+          <p:nvPr>
+            <p:ph type="body" idx="1"/>
+          </p:nvPr>
+        </p:nvSpPr>
+        <p:spPr/>
+        <p:txBody>
+          <a:bodyPr/>
+          <a:lstStyle/>
+          <a:p>
+            <a:r>
+              <a:rPr lang="en-US" dirty="0"/>
+              <a:t>Sources -&gt; Questions?</a:t>
+            </a:r>
+          </a:p>
+        </p:txBody>
+      </p:sp>
+      <p:sp>
+        <p:nvSpPr>
+          <p:cNvPr id="4" name="Slide Number Placeholder 3"/>
+          <p:cNvSpPr>
+            <a:spLocks noGrp="1"/>
+          </p:cNvSpPr>
+          <p:nvPr>
+            <p:ph type="sldNum" sz="quarter" idx="5"/>
+          </p:nvPr>
+        </p:nvSpPr>
+        <p:spPr/>
+        <p:txBody>
+          <a:bodyPr/>
+          <a:lstStyle/>
+          <a:p>
+            <a:fld id="{9A18230D-6974-4A26-8365-62E356C4785F}" type="slidenum">
+              <a:rPr lang="en-US" smtClean="0"/>
+              <a:t>17</a:t>
+            </a:fld>
+            <a:endParaRPr lang="en-US"/>
+          </a:p>
+        </p:txBody>
+      </p:sp>
+    </p:spTree>
+    <p:extLst>
+      <p:ext uri="{BB962C8B-B14F-4D97-AF65-F5344CB8AC3E}">
+        <p14:creationId xmlns:p14="http://schemas.microsoft.com/office/powerpoint/2010/main" val="3681778507"/>
       </p:ext>
     </p:extLst>
   </p:cSld>
@@ -607,6 +1593,56 @@
         <p:txBody>
           <a:bodyPr/>
           <a:lstStyle/>
+          <a:p>
+            <a:r>
+              <a:rPr lang="en-US" dirty="0"/>
+              <a:t>Brought in as a consultant to analyze and make sales recommendation to improve revenue and market outreach</a:t>
+            </a:r>
+          </a:p>
+          <a:p>
+            <a:endParaRPr lang="en-US" dirty="0"/>
+          </a:p>
+          <a:p>
+            <a:pPr marL="0" marR="0" lvl="0" indent="0" algn="l" defTabSz="914400" rtl="0" eaLnBrk="1" fontAlgn="auto" latinLnBrk="0" hangingPunct="1">
+              <a:lnSpc>
+                <a:spcPct val="100000"/>
+              </a:lnSpc>
+              <a:spcBef>
+                <a:spcPts val="0"/>
+              </a:spcBef>
+              <a:spcAft>
+                <a:spcPts val="0"/>
+              </a:spcAft>
+              <a:buClrTx/>
+              <a:buSzTx/>
+              <a:buFontTx/>
+              <a:buNone/>
+              <a:tabLst/>
+              <a:defRPr/>
+            </a:pPr>
+            <a:r>
+              <a:rPr lang="en-US" dirty="0"/>
+              <a:t>2014 Iowa Liquor Sales Data</a:t>
+            </a:r>
+          </a:p>
+          <a:p>
+            <a:endParaRPr lang="en-US" dirty="0"/>
+          </a:p>
+          <a:p>
+            <a:r>
+              <a:rPr lang="en-US" dirty="0"/>
+              <a:t>Products within the spirit market, strengths, weaknesses, and how to grow beyond what is offered.</a:t>
+            </a:r>
+          </a:p>
+          <a:p>
+            <a:endParaRPr lang="en-US" dirty="0"/>
+          </a:p>
+          <a:p>
+            <a:endParaRPr lang="en-US" dirty="0"/>
+          </a:p>
+          <a:p>
+            <a:endParaRPr lang="en-US" dirty="0"/>
+          </a:p>
           <a:p>
             <a:r>
               <a:rPr lang="en-US" dirty="0"/>
@@ -713,18 +1749,6 @@
           <a:bodyPr/>
           <a:lstStyle/>
           <a:p>
-            <a:r>
-              <a:rPr lang="en-US" dirty="0"/>
-              <a:t>Notes:</a:t>
-            </a:r>
-          </a:p>
-          <a:p>
-            <a:r>
-              <a:rPr lang="en-US" dirty="0"/>
-              <a:t>Year 2014</a:t>
-            </a:r>
-          </a:p>
-          <a:p>
             <a:endParaRPr lang="en-US" dirty="0"/>
           </a:p>
         </p:txBody>
@@ -746,7 +1770,7 @@
           <a:p>
             <a:fld id="{9A18230D-6974-4A26-8365-62E356C4785F}" type="slidenum">
               <a:rPr lang="en-US" smtClean="0"/>
-              <a:t>4</a:t>
+              <a:t>3</a:t>
             </a:fld>
             <a:endParaRPr lang="en-US"/>
           </a:p>
@@ -755,7 +1779,7 @@
     </p:spTree>
     <p:extLst>
       <p:ext uri="{BB962C8B-B14F-4D97-AF65-F5344CB8AC3E}">
-        <p14:creationId xmlns:p14="http://schemas.microsoft.com/office/powerpoint/2010/main" val="1028827278"/>
+        <p14:creationId xmlns:p14="http://schemas.microsoft.com/office/powerpoint/2010/main" val="1019861083"/>
       </p:ext>
     </p:extLst>
   </p:cSld>
@@ -770,13 +1794,7 @@
   <p:cSld>
     <p:spTree>
       <p:nvGrpSpPr>
-        <p:cNvPr id="1" name="">
-          <a:extLst>
-            <a:ext uri="{FF2B5EF4-FFF2-40B4-BE49-F238E27FC236}">
-              <a16:creationId xmlns:a16="http://schemas.microsoft.com/office/drawing/2014/main" id="{D26C9233-2773-E890-0A10-67E679A504D4}"/>
-            </a:ext>
-          </a:extLst>
-        </p:cNvPr>
+        <p:cNvPr id="1" name=""/>
         <p:cNvGrpSpPr/>
         <p:nvPr/>
       </p:nvGrpSpPr>
@@ -790,13 +1808,7 @@
       </p:grpSpPr>
       <p:sp>
         <p:nvSpPr>
-          <p:cNvPr id="2" name="Slide Image Placeholder 1">
-            <a:extLst>
-              <a:ext uri="{FF2B5EF4-FFF2-40B4-BE49-F238E27FC236}">
-                <a16:creationId xmlns:a16="http://schemas.microsoft.com/office/drawing/2014/main" id="{E9B7D78E-112E-92C3-B3BC-AE71E617BC7D}"/>
-              </a:ext>
-            </a:extLst>
-          </p:cNvPr>
+          <p:cNvPr id="2" name="Slide Image Placeholder 1"/>
           <p:cNvSpPr>
             <a:spLocks noGrp="1" noRot="1" noChangeAspect="1"/>
           </p:cNvSpPr>
@@ -808,13 +1820,7 @@
       </p:sp>
       <p:sp>
         <p:nvSpPr>
-          <p:cNvPr id="3" name="Notes Placeholder 2">
-            <a:extLst>
-              <a:ext uri="{FF2B5EF4-FFF2-40B4-BE49-F238E27FC236}">
-                <a16:creationId xmlns:a16="http://schemas.microsoft.com/office/drawing/2014/main" id="{068D2C95-B549-B3A1-59A3-53C8090F521D}"/>
-              </a:ext>
-            </a:extLst>
-          </p:cNvPr>
+          <p:cNvPr id="3" name="Notes Placeholder 2"/>
           <p:cNvSpPr>
             <a:spLocks noGrp="1"/>
           </p:cNvSpPr>
@@ -826,6 +1832,42 @@
         <p:txBody>
           <a:bodyPr/>
           <a:lstStyle/>
+          <a:p>
+            <a:r>
+              <a:rPr lang="en-US" dirty="0"/>
+              <a:t>Constellation known for premium brands marketed towards consumers</a:t>
+            </a:r>
+          </a:p>
+          <a:p>
+            <a:endParaRPr lang="en-US" dirty="0"/>
+          </a:p>
+          <a:p>
+            <a:r>
+              <a:rPr lang="en-US" dirty="0"/>
+              <a:t>Establish long-term relationship through trust and loyalty</a:t>
+            </a:r>
+          </a:p>
+          <a:p>
+            <a:endParaRPr lang="en-US" dirty="0"/>
+          </a:p>
+          <a:p>
+            <a:r>
+              <a:rPr lang="en-US" dirty="0"/>
+              <a:t>Data drawn from 2014 fiscal year</a:t>
+            </a:r>
+          </a:p>
+          <a:p>
+            <a:endParaRPr lang="en-US" dirty="0"/>
+          </a:p>
+          <a:p>
+            <a:r>
+              <a:rPr lang="en-US" dirty="0"/>
+              <a:t>Spirits and Liqueur</a:t>
+            </a:r>
+          </a:p>
+          <a:p>
+            <a:endParaRPr lang="en-US" dirty="0"/>
+          </a:p>
           <a:p>
             <a:r>
               <a:rPr lang="en-US" dirty="0"/>
@@ -835,40 +1877,7 @@
           <a:p>
             <a:r>
               <a:rPr lang="en-US" dirty="0"/>
-              <a:t>Revenue</a:t>
-            </a:r>
-          </a:p>
-          <a:p>
-            <a:pPr lvl="1"/>
-            <a:r>
-              <a:rPr lang="en-US" dirty="0"/>
-              <a:t>Average revenue generated per county: $235K</a:t>
-            </a:r>
-          </a:p>
-          <a:p>
-            <a:pPr lvl="1"/>
-            <a:r>
-              <a:rPr lang="en-US" dirty="0"/>
-              <a:t>Highest: Polk; lowest: Keokuk</a:t>
-            </a:r>
-          </a:p>
-          <a:p>
-            <a:r>
-              <a:rPr lang="en-US" dirty="0"/>
-              <a:t>Polk, Linn, and Black Hawk were our highest revenue generators</a:t>
-            </a:r>
-          </a:p>
-          <a:p>
-            <a:pPr lvl="1"/>
-            <a:r>
-              <a:rPr lang="en-US" dirty="0"/>
-              <a:t>Over $1M in sales</a:t>
-            </a:r>
-          </a:p>
-          <a:p>
-            <a:r>
-              <a:rPr lang="en-US" dirty="0"/>
-              <a:t>Keokuk, Hancock, Mills were our lowest revenue generator</a:t>
+              <a:t>Year 2014</a:t>
             </a:r>
           </a:p>
           <a:p>
@@ -878,13 +1887,7 @@
       </p:sp>
       <p:sp>
         <p:nvSpPr>
-          <p:cNvPr id="4" name="Slide Number Placeholder 3">
-            <a:extLst>
-              <a:ext uri="{FF2B5EF4-FFF2-40B4-BE49-F238E27FC236}">
-                <a16:creationId xmlns:a16="http://schemas.microsoft.com/office/drawing/2014/main" id="{0F2CD9AF-3347-30E8-2912-A03B3C20B178}"/>
-              </a:ext>
-            </a:extLst>
-          </p:cNvPr>
+          <p:cNvPr id="4" name="Slide Number Placeholder 3"/>
           <p:cNvSpPr>
             <a:spLocks noGrp="1"/>
           </p:cNvSpPr>
@@ -899,7 +1902,7 @@
           <a:p>
             <a:fld id="{9A18230D-6974-4A26-8365-62E356C4785F}" type="slidenum">
               <a:rPr lang="en-US" smtClean="0"/>
-              <a:t>6</a:t>
+              <a:t>4</a:t>
             </a:fld>
             <a:endParaRPr lang="en-US"/>
           </a:p>
@@ -908,7 +1911,7 @@
     </p:spTree>
     <p:extLst>
       <p:ext uri="{BB962C8B-B14F-4D97-AF65-F5344CB8AC3E}">
-        <p14:creationId xmlns:p14="http://schemas.microsoft.com/office/powerpoint/2010/main" val="451402915"/>
+        <p14:creationId xmlns:p14="http://schemas.microsoft.com/office/powerpoint/2010/main" val="1028827278"/>
       </p:ext>
     </p:extLst>
   </p:cSld>
@@ -964,7 +1967,43 @@
           <a:p>
             <a:r>
               <a:rPr lang="en-US" dirty="0"/>
-              <a:t>We can set the pace, we can widen the gap, but we will own the finish line</a:t>
+              <a:t>Context:</a:t>
+            </a:r>
+          </a:p>
+          <a:p>
+            <a:r>
+              <a:rPr lang="en-US" dirty="0"/>
+              <a:t>Fiscal Year 2014</a:t>
+            </a:r>
+          </a:p>
+          <a:p>
+            <a:r>
+              <a:rPr lang="en-US" dirty="0"/>
+              <a:t>Iowa Counties &gt; 10000</a:t>
+            </a:r>
+          </a:p>
+          <a:p>
+            <a:endParaRPr lang="en-US" dirty="0"/>
+          </a:p>
+          <a:p>
+            <a:r>
+              <a:rPr lang="en-US" dirty="0"/>
+              <a:t>Highest earners</a:t>
+            </a:r>
+          </a:p>
+          <a:p>
+            <a:r>
+              <a:rPr lang="en-US" dirty="0"/>
+              <a:t>Lowest earners</a:t>
+            </a:r>
+          </a:p>
+          <a:p>
+            <a:endParaRPr lang="en-US" dirty="0"/>
+          </a:p>
+          <a:p>
+            <a:r>
+              <a:rPr lang="en-US" dirty="0"/>
+              <a:t>As the county population increases, the more revenue they generate</a:t>
             </a:r>
           </a:p>
         </p:txBody>
@@ -986,7 +2025,7 @@
           <a:p>
             <a:fld id="{9A18230D-6974-4A26-8365-62E356C4785F}" type="slidenum">
               <a:rPr lang="en-US" smtClean="0"/>
-              <a:t>11</a:t>
+              <a:t>5</a:t>
             </a:fld>
             <a:endParaRPr lang="en-US"/>
           </a:p>
@@ -995,7 +2034,7 @@
     </p:spTree>
     <p:extLst>
       <p:ext uri="{BB962C8B-B14F-4D97-AF65-F5344CB8AC3E}">
-        <p14:creationId xmlns:p14="http://schemas.microsoft.com/office/powerpoint/2010/main" val="3511772830"/>
+        <p14:creationId xmlns:p14="http://schemas.microsoft.com/office/powerpoint/2010/main" val="243330445"/>
       </p:ext>
     </p:extLst>
   </p:cSld>
@@ -1006,6 +2045,183 @@
 </file>
 
 <file path=ppt/notesSlides/notesSlide6.xml><?xml version="1.0" encoding="utf-8"?>
+<p:notes xmlns:a="http://schemas.openxmlformats.org/drawingml/2006/main" xmlns:r="http://schemas.openxmlformats.org/officeDocument/2006/relationships" xmlns:p="http://schemas.openxmlformats.org/presentationml/2006/main">
+  <p:cSld>
+    <p:spTree>
+      <p:nvGrpSpPr>
+        <p:cNvPr id="1" name="">
+          <a:extLst>
+            <a:ext uri="{FF2B5EF4-FFF2-40B4-BE49-F238E27FC236}">
+              <a16:creationId xmlns:a16="http://schemas.microsoft.com/office/drawing/2014/main" id="{D26C9233-2773-E890-0A10-67E679A504D4}"/>
+            </a:ext>
+          </a:extLst>
+        </p:cNvPr>
+        <p:cNvGrpSpPr/>
+        <p:nvPr/>
+      </p:nvGrpSpPr>
+      <p:grpSpPr>
+        <a:xfrm>
+          <a:off x="0" y="0"/>
+          <a:ext cx="0" cy="0"/>
+          <a:chOff x="0" y="0"/>
+          <a:chExt cx="0" cy="0"/>
+        </a:xfrm>
+      </p:grpSpPr>
+      <p:sp>
+        <p:nvSpPr>
+          <p:cNvPr id="2" name="Slide Image Placeholder 1">
+            <a:extLst>
+              <a:ext uri="{FF2B5EF4-FFF2-40B4-BE49-F238E27FC236}">
+                <a16:creationId xmlns:a16="http://schemas.microsoft.com/office/drawing/2014/main" id="{E9B7D78E-112E-92C3-B3BC-AE71E617BC7D}"/>
+              </a:ext>
+            </a:extLst>
+          </p:cNvPr>
+          <p:cNvSpPr>
+            <a:spLocks noGrp="1" noRot="1" noChangeAspect="1"/>
+          </p:cNvSpPr>
+          <p:nvPr>
+            <p:ph type="sldImg"/>
+          </p:nvPr>
+        </p:nvSpPr>
+        <p:spPr/>
+      </p:sp>
+      <p:sp>
+        <p:nvSpPr>
+          <p:cNvPr id="3" name="Notes Placeholder 2">
+            <a:extLst>
+              <a:ext uri="{FF2B5EF4-FFF2-40B4-BE49-F238E27FC236}">
+                <a16:creationId xmlns:a16="http://schemas.microsoft.com/office/drawing/2014/main" id="{068D2C95-B549-B3A1-59A3-53C8090F521D}"/>
+              </a:ext>
+            </a:extLst>
+          </p:cNvPr>
+          <p:cNvSpPr>
+            <a:spLocks noGrp="1"/>
+          </p:cNvSpPr>
+          <p:nvPr>
+            <p:ph type="body" idx="1"/>
+          </p:nvPr>
+        </p:nvSpPr>
+        <p:spPr/>
+        <p:txBody>
+          <a:bodyPr/>
+          <a:lstStyle/>
+          <a:p>
+            <a:r>
+              <a:rPr lang="en-US" dirty="0"/>
+              <a:t>Notes:</a:t>
+            </a:r>
+          </a:p>
+          <a:p>
+            <a:r>
+              <a:rPr lang="en-US" dirty="0"/>
+              <a:t>Revenue</a:t>
+            </a:r>
+          </a:p>
+          <a:p>
+            <a:pPr lvl="1"/>
+            <a:r>
+              <a:rPr lang="en-US" dirty="0"/>
+              <a:t>Average revenue generated per county: $235K</a:t>
+            </a:r>
+          </a:p>
+          <a:p>
+            <a:pPr lvl="1"/>
+            <a:r>
+              <a:rPr lang="en-US" dirty="0"/>
+              <a:t>Highest: Polk; lowest: Keokuk</a:t>
+            </a:r>
+          </a:p>
+          <a:p>
+            <a:r>
+              <a:rPr lang="en-US" dirty="0"/>
+              <a:t>Polk, Linn, and Black Hawk were our highest revenue generators</a:t>
+            </a:r>
+          </a:p>
+          <a:p>
+            <a:pPr lvl="1"/>
+            <a:r>
+              <a:rPr lang="en-US" dirty="0"/>
+              <a:t>Over $1M in sales</a:t>
+            </a:r>
+          </a:p>
+          <a:p>
+            <a:r>
+              <a:rPr lang="en-US" dirty="0"/>
+              <a:t>Keokuk, Hancock, Mills were our lowest revenue generator</a:t>
+            </a:r>
+          </a:p>
+          <a:p>
+            <a:br>
+              <a:rPr lang="en-US" dirty="0"/>
+            </a:br>
+            <a:r>
+              <a:rPr lang="en-US" dirty="0"/>
+              <a:t>Dickinson, O’Brien, and Carroll had the biggest spending per person</a:t>
+            </a:r>
+          </a:p>
+          <a:p>
+            <a:endParaRPr lang="en-US" dirty="0"/>
+          </a:p>
+          <a:p>
+            <a:r>
+              <a:rPr lang="en-US" dirty="0"/>
+              <a:t>Dickinson – about $20 per person</a:t>
+            </a:r>
+          </a:p>
+          <a:p>
+            <a:endParaRPr lang="en-US" dirty="0"/>
+          </a:p>
+          <a:p>
+            <a:r>
+              <a:rPr lang="en-US" dirty="0"/>
+              <a:t>Dickinson’s population is only short of 17000 people. Over $320K in value</a:t>
+            </a:r>
+          </a:p>
+        </p:txBody>
+      </p:sp>
+      <p:sp>
+        <p:nvSpPr>
+          <p:cNvPr id="4" name="Slide Number Placeholder 3">
+            <a:extLst>
+              <a:ext uri="{FF2B5EF4-FFF2-40B4-BE49-F238E27FC236}">
+                <a16:creationId xmlns:a16="http://schemas.microsoft.com/office/drawing/2014/main" id="{0F2CD9AF-3347-30E8-2912-A03B3C20B178}"/>
+              </a:ext>
+            </a:extLst>
+          </p:cNvPr>
+          <p:cNvSpPr>
+            <a:spLocks noGrp="1"/>
+          </p:cNvSpPr>
+          <p:nvPr>
+            <p:ph type="sldNum" sz="quarter" idx="5"/>
+          </p:nvPr>
+        </p:nvSpPr>
+        <p:spPr/>
+        <p:txBody>
+          <a:bodyPr/>
+          <a:lstStyle/>
+          <a:p>
+            <a:fld id="{9A18230D-6974-4A26-8365-62E356C4785F}" type="slidenum">
+              <a:rPr lang="en-US" smtClean="0"/>
+              <a:t>6</a:t>
+            </a:fld>
+            <a:endParaRPr lang="en-US"/>
+          </a:p>
+        </p:txBody>
+      </p:sp>
+    </p:spTree>
+    <p:extLst>
+      <p:ext uri="{BB962C8B-B14F-4D97-AF65-F5344CB8AC3E}">
+        <p14:creationId xmlns:p14="http://schemas.microsoft.com/office/powerpoint/2010/main" val="451402915"/>
+      </p:ext>
+    </p:extLst>
+  </p:cSld>
+  <p:clrMapOvr>
+    <a:masterClrMapping/>
+  </p:clrMapOvr>
+</p:notes>
+</file>
+
+<file path=ppt/notesSlides/notesSlide7.xml><?xml version="1.0" encoding="utf-8"?>
 <p:notes xmlns:a="http://schemas.openxmlformats.org/drawingml/2006/main" xmlns:r="http://schemas.openxmlformats.org/officeDocument/2006/relationships" xmlns:p="http://schemas.openxmlformats.org/presentationml/2006/main">
   <p:cSld>
     <p:spTree>
@@ -1051,13 +2267,19 @@
           <a:p>
             <a:r>
               <a:rPr lang="en-US" dirty="0"/>
-              <a:t>Explore the Beer market and Wine market to see improvement</a:t>
+              <a:t>Larger market, average, sub-par spending</a:t>
             </a:r>
           </a:p>
           <a:p>
             <a:r>
               <a:rPr lang="en-US" dirty="0"/>
-              <a:t>	Acquisition of Modelo to enter the beer market in 2013</a:t>
+              <a:t>Vs</a:t>
+            </a:r>
+          </a:p>
+          <a:p>
+            <a:r>
+              <a:rPr lang="en-US" dirty="0"/>
+              <a:t>Smaller market, very high spending</a:t>
             </a:r>
           </a:p>
           <a:p>
@@ -1066,83 +2288,17 @@
           <a:p>
             <a:r>
               <a:rPr lang="en-US" dirty="0"/>
-              <a:t>We have influence in </a:t>
-            </a:r>
-            <a:r>
-              <a:rPr lang="en-US" b="1" u="sng" dirty="0">
-                <a:solidFill>
-                  <a:srgbClr val="00B050"/>
-                </a:solidFill>
-              </a:rPr>
-              <a:t>100%</a:t>
-            </a:r>
+              <a:t>Geographical differences</a:t>
+            </a:r>
+          </a:p>
+          <a:p>
+            <a:endParaRPr lang="en-US" dirty="0"/>
+          </a:p>
+          <a:p>
             <a:r>
               <a:rPr lang="en-US" dirty="0"/>
-              <a:t> of Iowa</a:t>
-            </a:r>
-          </a:p>
-          <a:p>
-            <a:r>
-              <a:rPr lang="en-US" dirty="0"/>
-              <a:t>Scale spender efficiency to larger markets through marketing recreational activities/promotions</a:t>
-            </a:r>
-          </a:p>
-          <a:p>
-            <a:pPr lvl="1"/>
-            <a:r>
-              <a:rPr lang="en-US" dirty="0"/>
-              <a:t>Potential global revenue growth </a:t>
-            </a:r>
-            <a:r>
-              <a:rPr lang="en-US" b="1" u="sng" dirty="0">
-                <a:solidFill>
-                  <a:srgbClr val="00B050"/>
-                </a:solidFill>
-              </a:rPr>
-              <a:t>over 100%</a:t>
-            </a:r>
-          </a:p>
-          <a:p>
-            <a:r>
-              <a:rPr lang="en-US" dirty="0"/>
-              <a:t>More budget towards researching and marketing Black Velvet and its variants; whisky industry</a:t>
-            </a:r>
-          </a:p>
-          <a:p>
-            <a:pPr lvl="1"/>
-            <a:r>
-              <a:rPr lang="en-US" dirty="0"/>
-              <a:t>Replicate its success among </a:t>
-            </a:r>
-            <a:r>
-              <a:rPr lang="en-US" dirty="0" err="1"/>
-              <a:t>Svedka</a:t>
-            </a:r>
-            <a:endParaRPr lang="en-US" dirty="0"/>
-          </a:p>
-          <a:p>
-            <a:pPr lvl="1"/>
-            <a:r>
-              <a:rPr lang="en-US" dirty="0"/>
-              <a:t>May be expensive</a:t>
-            </a:r>
-          </a:p>
-          <a:p>
-            <a:r>
-              <a:rPr lang="en-US" dirty="0"/>
-              <a:t>Reconsider Tequila pilot marketing or drop completely</a:t>
-            </a:r>
-          </a:p>
-          <a:p>
-            <a:r>
-              <a:rPr lang="en-US" dirty="0"/>
-              <a:t>As with customer loyalty, make our brands </a:t>
-            </a:r>
-            <a:r>
-              <a:rPr lang="en-US" b="1" u="sng" dirty="0"/>
-              <a:t>worth reaching for</a:t>
-            </a:r>
-            <a:endParaRPr lang="en-US" dirty="0"/>
+              <a:t>Overall, our efficiency relies on how to maximize a large market and high spending in one concentrated area.</a:t>
+            </a:r>
           </a:p>
         </p:txBody>
       </p:sp>
@@ -1163,7 +2319,7 @@
           <a:p>
             <a:fld id="{9A18230D-6974-4A26-8365-62E356C4785F}" type="slidenum">
               <a:rPr lang="en-US" smtClean="0"/>
-              <a:t>15</a:t>
+              <a:t>7</a:t>
             </a:fld>
             <a:endParaRPr lang="en-US"/>
           </a:p>
@@ -1172,7 +2328,190 @@
     </p:spTree>
     <p:extLst>
       <p:ext uri="{BB962C8B-B14F-4D97-AF65-F5344CB8AC3E}">
-        <p14:creationId xmlns:p14="http://schemas.microsoft.com/office/powerpoint/2010/main" val="2836736160"/>
+        <p14:creationId xmlns:p14="http://schemas.microsoft.com/office/powerpoint/2010/main" val="1212082405"/>
+      </p:ext>
+    </p:extLst>
+  </p:cSld>
+  <p:clrMapOvr>
+    <a:masterClrMapping/>
+  </p:clrMapOvr>
+</p:notes>
+</file>
+
+<file path=ppt/notesSlides/notesSlide8.xml><?xml version="1.0" encoding="utf-8"?>
+<p:notes xmlns:a="http://schemas.openxmlformats.org/drawingml/2006/main" xmlns:r="http://schemas.openxmlformats.org/officeDocument/2006/relationships" xmlns:p="http://schemas.openxmlformats.org/presentationml/2006/main">
+  <p:cSld>
+    <p:spTree>
+      <p:nvGrpSpPr>
+        <p:cNvPr id="1" name=""/>
+        <p:cNvGrpSpPr/>
+        <p:nvPr/>
+      </p:nvGrpSpPr>
+      <p:grpSpPr>
+        <a:xfrm>
+          <a:off x="0" y="0"/>
+          <a:ext cx="0" cy="0"/>
+          <a:chOff x="0" y="0"/>
+          <a:chExt cx="0" cy="0"/>
+        </a:xfrm>
+      </p:grpSpPr>
+      <p:sp>
+        <p:nvSpPr>
+          <p:cNvPr id="2" name="Slide Image Placeholder 1"/>
+          <p:cNvSpPr>
+            <a:spLocks noGrp="1" noRot="1" noChangeAspect="1"/>
+          </p:cNvSpPr>
+          <p:nvPr>
+            <p:ph type="sldImg"/>
+          </p:nvPr>
+        </p:nvSpPr>
+        <p:spPr/>
+      </p:sp>
+      <p:sp>
+        <p:nvSpPr>
+          <p:cNvPr id="3" name="Notes Placeholder 2"/>
+          <p:cNvSpPr>
+            <a:spLocks noGrp="1"/>
+          </p:cNvSpPr>
+          <p:nvPr>
+            <p:ph type="body" idx="1"/>
+          </p:nvPr>
+        </p:nvSpPr>
+        <p:spPr/>
+        <p:txBody>
+          <a:bodyPr/>
+          <a:lstStyle/>
+          <a:p>
+            <a:r>
+              <a:rPr lang="en-US" dirty="0"/>
+              <a:t>Weak positive to no correlation based off our trend line.</a:t>
+            </a:r>
+          </a:p>
+          <a:p>
+            <a:endParaRPr lang="en-US" dirty="0"/>
+          </a:p>
+          <a:p>
+            <a:r>
+              <a:rPr lang="en-US" dirty="0"/>
+              <a:t>Can’t say for sure that, however, we can look into how to push the bar a little higher and generate more value</a:t>
+            </a:r>
+          </a:p>
+        </p:txBody>
+      </p:sp>
+      <p:sp>
+        <p:nvSpPr>
+          <p:cNvPr id="4" name="Slide Number Placeholder 3"/>
+          <p:cNvSpPr>
+            <a:spLocks noGrp="1"/>
+          </p:cNvSpPr>
+          <p:nvPr>
+            <p:ph type="sldNum" sz="quarter" idx="5"/>
+          </p:nvPr>
+        </p:nvSpPr>
+        <p:spPr/>
+        <p:txBody>
+          <a:bodyPr/>
+          <a:lstStyle/>
+          <a:p>
+            <a:fld id="{9A18230D-6974-4A26-8365-62E356C4785F}" type="slidenum">
+              <a:rPr lang="en-US" smtClean="0"/>
+              <a:t>8</a:t>
+            </a:fld>
+            <a:endParaRPr lang="en-US"/>
+          </a:p>
+        </p:txBody>
+      </p:sp>
+    </p:spTree>
+    <p:extLst>
+      <p:ext uri="{BB962C8B-B14F-4D97-AF65-F5344CB8AC3E}">
+        <p14:creationId xmlns:p14="http://schemas.microsoft.com/office/powerpoint/2010/main" val="3152611904"/>
+      </p:ext>
+    </p:extLst>
+  </p:cSld>
+  <p:clrMapOvr>
+    <a:masterClrMapping/>
+  </p:clrMapOvr>
+</p:notes>
+</file>
+
+<file path=ppt/notesSlides/notesSlide9.xml><?xml version="1.0" encoding="utf-8"?>
+<p:notes xmlns:a="http://schemas.openxmlformats.org/drawingml/2006/main" xmlns:r="http://schemas.openxmlformats.org/officeDocument/2006/relationships" xmlns:p="http://schemas.openxmlformats.org/presentationml/2006/main">
+  <p:cSld>
+    <p:spTree>
+      <p:nvGrpSpPr>
+        <p:cNvPr id="1" name=""/>
+        <p:cNvGrpSpPr/>
+        <p:nvPr/>
+      </p:nvGrpSpPr>
+      <p:grpSpPr>
+        <a:xfrm>
+          <a:off x="0" y="0"/>
+          <a:ext cx="0" cy="0"/>
+          <a:chOff x="0" y="0"/>
+          <a:chExt cx="0" cy="0"/>
+        </a:xfrm>
+      </p:grpSpPr>
+      <p:sp>
+        <p:nvSpPr>
+          <p:cNvPr id="2" name="Slide Image Placeholder 1"/>
+          <p:cNvSpPr>
+            <a:spLocks noGrp="1" noRot="1" noChangeAspect="1"/>
+          </p:cNvSpPr>
+          <p:nvPr>
+            <p:ph type="sldImg"/>
+          </p:nvPr>
+        </p:nvSpPr>
+        <p:spPr/>
+      </p:sp>
+      <p:sp>
+        <p:nvSpPr>
+          <p:cNvPr id="3" name="Notes Placeholder 2"/>
+          <p:cNvSpPr>
+            <a:spLocks noGrp="1"/>
+          </p:cNvSpPr>
+          <p:nvPr>
+            <p:ph type="body" idx="1"/>
+          </p:nvPr>
+        </p:nvSpPr>
+        <p:spPr/>
+        <p:txBody>
+          <a:bodyPr/>
+          <a:lstStyle/>
+          <a:p>
+            <a:r>
+              <a:rPr lang="en-US" dirty="0"/>
+              <a:t>The best and the worst</a:t>
+            </a:r>
+          </a:p>
+        </p:txBody>
+      </p:sp>
+      <p:sp>
+        <p:nvSpPr>
+          <p:cNvPr id="4" name="Slide Number Placeholder 3"/>
+          <p:cNvSpPr>
+            <a:spLocks noGrp="1"/>
+          </p:cNvSpPr>
+          <p:nvPr>
+            <p:ph type="sldNum" sz="quarter" idx="5"/>
+          </p:nvPr>
+        </p:nvSpPr>
+        <p:spPr/>
+        <p:txBody>
+          <a:bodyPr/>
+          <a:lstStyle/>
+          <a:p>
+            <a:fld id="{9A18230D-6974-4A26-8365-62E356C4785F}" type="slidenum">
+              <a:rPr lang="en-US" smtClean="0"/>
+              <a:t>9</a:t>
+            </a:fld>
+            <a:endParaRPr lang="en-US"/>
+          </a:p>
+        </p:txBody>
+      </p:sp>
+    </p:spTree>
+    <p:extLst>
+      <p:ext uri="{BB962C8B-B14F-4D97-AF65-F5344CB8AC3E}">
+        <p14:creationId xmlns:p14="http://schemas.microsoft.com/office/powerpoint/2010/main" val="2088430823"/>
       </p:ext>
     </p:extLst>
   </p:cSld>
@@ -5010,7 +6349,7 @@
     <p:bg>
       <p:bgPr>
         <a:blipFill dpi="0" rotWithShape="1">
-          <a:blip r:embed="rId2">
+          <a:blip r:embed="rId3">
             <a:alphaModFix amt="15000"/>
             <a:lum/>
           </a:blip>
@@ -5081,7 +6420,7 @@
           </p:nvPr>
         </p:nvPicPr>
         <p:blipFill>
-          <a:blip r:embed="rId3">
+          <a:blip r:embed="rId4">
             <a:extLst>
               <a:ext uri="{28A0092B-C50C-407E-A947-70E740481C1C}">
                 <a14:useLocalDpi xmlns:a14="http://schemas.microsoft.com/office/drawing/2010/main" val="0"/>
@@ -5119,7 +6458,7 @@
           </p:nvPr>
         </p:nvPicPr>
         <p:blipFill>
-          <a:blip r:embed="rId4">
+          <a:blip r:embed="rId5">
             <a:extLst>
               <a:ext uri="{28A0092B-C50C-407E-A947-70E740481C1C}">
                 <a14:useLocalDpi xmlns:a14="http://schemas.microsoft.com/office/drawing/2010/main" val="0"/>
@@ -5818,7 +7157,7 @@
     <p:bg>
       <p:bgPr>
         <a:blipFill dpi="0" rotWithShape="1">
-          <a:blip r:embed="rId2">
+          <a:blip r:embed="rId3">
             <a:alphaModFix amt="35000"/>
             <a:lum/>
           </a:blip>
@@ -6508,7 +7847,7 @@
           </p:nvPr>
         </p:nvPicPr>
         <p:blipFill>
-          <a:blip r:embed="rId2">
+          <a:blip r:embed="rId3">
             <a:extLst>
               <a:ext uri="{28A0092B-C50C-407E-A947-70E740481C1C}">
                 <a14:useLocalDpi xmlns:a14="http://schemas.microsoft.com/office/drawing/2010/main" val="0"/>
@@ -7105,7 +8444,7 @@
           </p:nvPr>
         </p:nvPicPr>
         <p:blipFill>
-          <a:blip r:embed="rId2">
+          <a:blip r:embed="rId3">
             <a:extLst>
               <a:ext uri="{28A0092B-C50C-407E-A947-70E740481C1C}">
                 <a14:useLocalDpi xmlns:a14="http://schemas.microsoft.com/office/drawing/2010/main" val="0"/>
@@ -7293,7 +8632,7 @@
     <p:bg>
       <p:bgPr>
         <a:blipFill dpi="0" rotWithShape="1">
-          <a:blip r:embed="rId2">
+          <a:blip r:embed="rId3">
             <a:alphaModFix amt="35000"/>
             <a:lum/>
           </a:blip>
@@ -7372,7 +8711,7 @@
           <a:p>
             <a:r>
               <a:rPr lang="en-US" dirty="0"/>
-              <a:t>We acquired Modelo back in 2014</a:t>
+              <a:t>We acquired Modelo back in 2013</a:t>
             </a:r>
           </a:p>
           <a:p>
@@ -8179,7 +9518,7 @@
             </a:r>
             <a:r>
               <a:rPr lang="en-US" sz="2000">
-                <a:hlinkClick r:id="rId2"/>
+                <a:hlinkClick r:id="rId3"/>
               </a:rPr>
               <a:t>https://data.iowa.gov/Sales-Distribution/2014-Iowa-Liquor-Sales/3m8f-uw4f/about_data</a:t>
             </a:r>
@@ -8200,7 +9539,7 @@
             </a:r>
             <a:r>
               <a:rPr lang="fr-FR" sz="2000">
-                <a:hlinkClick r:id="rId3"/>
+                <a:hlinkClick r:id="rId4"/>
               </a:rPr>
               <a:t>https://chat.openai.com/</a:t>
             </a:r>
@@ -9289,7 +10628,7 @@
           </p:nvPr>
         </p:nvPicPr>
         <p:blipFill>
-          <a:blip r:embed="rId2">
+          <a:blip r:embed="rId3">
             <a:extLst>
               <a:ext uri="{28A0092B-C50C-407E-A947-70E740481C1C}">
                 <a14:useLocalDpi xmlns:a14="http://schemas.microsoft.com/office/drawing/2010/main" val="0"/>
@@ -10327,7 +11666,7 @@
             </p:nvPr>
           </p:nvPicPr>
           <p:blipFill>
-            <a:blip r:embed="rId2">
+            <a:blip r:embed="rId3">
               <a:extLst>
                 <a:ext uri="{28A0092B-C50C-407E-A947-70E740481C1C}">
                   <a14:useLocalDpi xmlns:a14="http://schemas.microsoft.com/office/drawing/2010/main" val="0"/>
@@ -10655,7 +11994,7 @@
     <p:bg>
       <p:bgPr>
         <a:blipFill dpi="0" rotWithShape="1">
-          <a:blip r:embed="rId2">
+          <a:blip r:embed="rId3">
             <a:alphaModFix amt="15000"/>
             <a:lum/>
           </a:blip>
@@ -11571,7 +12910,7 @@
           </p:nvPr>
         </p:nvPicPr>
         <p:blipFill>
-          <a:blip r:embed="rId2">
+          <a:blip r:embed="rId3">
             <a:extLst>
               <a:ext uri="{28A0092B-C50C-407E-A947-70E740481C1C}">
                 <a14:useLocalDpi xmlns:a14="http://schemas.microsoft.com/office/drawing/2010/main" val="0"/>
@@ -11611,7 +12950,7 @@
     <p:bg>
       <p:bgPr>
         <a:blipFill dpi="0" rotWithShape="1">
-          <a:blip r:embed="rId2">
+          <a:blip r:embed="rId3">
             <a:alphaModFix amt="15000"/>
             <a:lum/>
           </a:blip>
